--- a/sales_presentation_2b.pptx
+++ b/sales_presentation_2b.pptx
@@ -201,7 +201,7 @@
             </a:lvl1pPr>
           </a:lstStyle>
           <a:p>
-            <a:fld id="{BE390537-281A-4449-AB75-15E19A7CB263}" type="datetimeFigureOut">
+            <a:fld id="{0204756F-B4C2-48FB-947B-034FA4F82B0F}" type="datetimeFigureOut">
               <a:rPr lang="en-US" smtClean="0"/>
               <a:t>10/1/2026</a:t>
             </a:fld>
@@ -359,7 +359,7 @@
             </a:lvl1pPr>
           </a:lstStyle>
           <a:p>
-            <a:fld id="{882ED84D-F6D7-4988-86E3-4A5D8F53EA3D}" type="slidenum">
+            <a:fld id="{BF1E0DE7-A838-44D3-9086-16401B62A323}" type="slidenum">
               <a:rPr lang="en-US" smtClean="0"/>
               <a:t>‹#›</a:t>
             </a:fld>
@@ -370,7 +370,7 @@
     </p:spTree>
     <p:extLst>
       <p:ext uri="{BB962C8B-B14F-4D97-AF65-F5344CB8AC3E}">
-        <p14:creationId xmlns:p14="http://schemas.microsoft.com/office/powerpoint/2010/main" val="2366675082"/>
+        <p14:creationId xmlns:p14="http://schemas.microsoft.com/office/powerpoint/2010/main" val="3461989312"/>
       </p:ext>
     </p:extLst>
   </p:cSld>
@@ -537,7 +537,7 @@
           <a:bodyPr/>
           <a:lstStyle/>
           <a:p>
-            <a:fld id="{882ED84D-F6D7-4988-86E3-4A5D8F53EA3D}" type="slidenum">
+            <a:fld id="{BF1E0DE7-A838-44D3-9086-16401B62A323}" type="slidenum">
               <a:rPr lang="en-US" smtClean="0"/>
               <a:t>1</a:t>
             </a:fld>
@@ -548,7 +548,7 @@
     </p:spTree>
     <p:extLst>
       <p:ext uri="{BB962C8B-B14F-4D97-AF65-F5344CB8AC3E}">
-        <p14:creationId xmlns:p14="http://schemas.microsoft.com/office/powerpoint/2010/main" val="3814745413"/>
+        <p14:creationId xmlns:p14="http://schemas.microsoft.com/office/powerpoint/2010/main" val="511145908"/>
       </p:ext>
     </p:extLst>
   </p:cSld>
@@ -625,7 +625,7 @@
           <a:bodyPr/>
           <a:lstStyle/>
           <a:p>
-            <a:fld id="{882ED84D-F6D7-4988-86E3-4A5D8F53EA3D}" type="slidenum">
+            <a:fld id="{BF1E0DE7-A838-44D3-9086-16401B62A323}" type="slidenum">
               <a:rPr lang="en-US" smtClean="0"/>
               <a:t>10</a:t>
             </a:fld>
@@ -636,7 +636,7 @@
     </p:spTree>
     <p:extLst>
       <p:ext uri="{BB962C8B-B14F-4D97-AF65-F5344CB8AC3E}">
-        <p14:creationId xmlns:p14="http://schemas.microsoft.com/office/powerpoint/2010/main" val="4266521108"/>
+        <p14:creationId xmlns:p14="http://schemas.microsoft.com/office/powerpoint/2010/main" val="3825972907"/>
       </p:ext>
     </p:extLst>
   </p:cSld>
@@ -713,7 +713,7 @@
           <a:bodyPr/>
           <a:lstStyle/>
           <a:p>
-            <a:fld id="{882ED84D-F6D7-4988-86E3-4A5D8F53EA3D}" type="slidenum">
+            <a:fld id="{BF1E0DE7-A838-44D3-9086-16401B62A323}" type="slidenum">
               <a:rPr lang="en-US" smtClean="0"/>
               <a:t>11</a:t>
             </a:fld>
@@ -724,7 +724,7 @@
     </p:spTree>
     <p:extLst>
       <p:ext uri="{BB962C8B-B14F-4D97-AF65-F5344CB8AC3E}">
-        <p14:creationId xmlns:p14="http://schemas.microsoft.com/office/powerpoint/2010/main" val="2113161790"/>
+        <p14:creationId xmlns:p14="http://schemas.microsoft.com/office/powerpoint/2010/main" val="2503370267"/>
       </p:ext>
     </p:extLst>
   </p:cSld>
@@ -804,7 +804,7 @@
           <a:bodyPr/>
           <a:lstStyle/>
           <a:p>
-            <a:fld id="{882ED84D-F6D7-4988-86E3-4A5D8F53EA3D}" type="slidenum">
+            <a:fld id="{BF1E0DE7-A838-44D3-9086-16401B62A323}" type="slidenum">
               <a:rPr lang="en-US" smtClean="0"/>
               <a:t>12</a:t>
             </a:fld>
@@ -815,7 +815,7 @@
     </p:spTree>
     <p:extLst>
       <p:ext uri="{BB962C8B-B14F-4D97-AF65-F5344CB8AC3E}">
-        <p14:creationId xmlns:p14="http://schemas.microsoft.com/office/powerpoint/2010/main" val="941969930"/>
+        <p14:creationId xmlns:p14="http://schemas.microsoft.com/office/powerpoint/2010/main" val="1870320875"/>
       </p:ext>
     </p:extLst>
   </p:cSld>
@@ -892,7 +892,7 @@
           <a:bodyPr/>
           <a:lstStyle/>
           <a:p>
-            <a:fld id="{882ED84D-F6D7-4988-86E3-4A5D8F53EA3D}" type="slidenum">
+            <a:fld id="{BF1E0DE7-A838-44D3-9086-16401B62A323}" type="slidenum">
               <a:rPr lang="en-US" smtClean="0"/>
               <a:t>2</a:t>
             </a:fld>
@@ -903,7 +903,7 @@
     </p:spTree>
     <p:extLst>
       <p:ext uri="{BB962C8B-B14F-4D97-AF65-F5344CB8AC3E}">
-        <p14:creationId xmlns:p14="http://schemas.microsoft.com/office/powerpoint/2010/main" val="2045662393"/>
+        <p14:creationId xmlns:p14="http://schemas.microsoft.com/office/powerpoint/2010/main" val="1085832156"/>
       </p:ext>
     </p:extLst>
   </p:cSld>
@@ -980,7 +980,7 @@
           <a:bodyPr/>
           <a:lstStyle/>
           <a:p>
-            <a:fld id="{882ED84D-F6D7-4988-86E3-4A5D8F53EA3D}" type="slidenum">
+            <a:fld id="{BF1E0DE7-A838-44D3-9086-16401B62A323}" type="slidenum">
               <a:rPr lang="en-US" smtClean="0"/>
               <a:t>3</a:t>
             </a:fld>
@@ -991,7 +991,7 @@
     </p:spTree>
     <p:extLst>
       <p:ext uri="{BB962C8B-B14F-4D97-AF65-F5344CB8AC3E}">
-        <p14:creationId xmlns:p14="http://schemas.microsoft.com/office/powerpoint/2010/main" val="1095457342"/>
+        <p14:creationId xmlns:p14="http://schemas.microsoft.com/office/powerpoint/2010/main" val="2024237824"/>
       </p:ext>
     </p:extLst>
   </p:cSld>
@@ -1068,7 +1068,7 @@
           <a:bodyPr/>
           <a:lstStyle/>
           <a:p>
-            <a:fld id="{882ED84D-F6D7-4988-86E3-4A5D8F53EA3D}" type="slidenum">
+            <a:fld id="{BF1E0DE7-A838-44D3-9086-16401B62A323}" type="slidenum">
               <a:rPr lang="en-US" smtClean="0"/>
               <a:t>4</a:t>
             </a:fld>
@@ -1079,7 +1079,7 @@
     </p:spTree>
     <p:extLst>
       <p:ext uri="{BB962C8B-B14F-4D97-AF65-F5344CB8AC3E}">
-        <p14:creationId xmlns:p14="http://schemas.microsoft.com/office/powerpoint/2010/main" val="140754063"/>
+        <p14:creationId xmlns:p14="http://schemas.microsoft.com/office/powerpoint/2010/main" val="3579890531"/>
       </p:ext>
     </p:extLst>
   </p:cSld>
@@ -1156,7 +1156,7 @@
           <a:bodyPr/>
           <a:lstStyle/>
           <a:p>
-            <a:fld id="{882ED84D-F6D7-4988-86E3-4A5D8F53EA3D}" type="slidenum">
+            <a:fld id="{BF1E0DE7-A838-44D3-9086-16401B62A323}" type="slidenum">
               <a:rPr lang="en-US" smtClean="0"/>
               <a:t>5</a:t>
             </a:fld>
@@ -1167,7 +1167,7 @@
     </p:spTree>
     <p:extLst>
       <p:ext uri="{BB962C8B-B14F-4D97-AF65-F5344CB8AC3E}">
-        <p14:creationId xmlns:p14="http://schemas.microsoft.com/office/powerpoint/2010/main" val="3671877906"/>
+        <p14:creationId xmlns:p14="http://schemas.microsoft.com/office/powerpoint/2010/main" val="1224728650"/>
       </p:ext>
     </p:extLst>
   </p:cSld>
@@ -1244,7 +1244,7 @@
           <a:bodyPr/>
           <a:lstStyle/>
           <a:p>
-            <a:fld id="{882ED84D-F6D7-4988-86E3-4A5D8F53EA3D}" type="slidenum">
+            <a:fld id="{BF1E0DE7-A838-44D3-9086-16401B62A323}" type="slidenum">
               <a:rPr lang="en-US" smtClean="0"/>
               <a:t>6</a:t>
             </a:fld>
@@ -1255,7 +1255,7 @@
     </p:spTree>
     <p:extLst>
       <p:ext uri="{BB962C8B-B14F-4D97-AF65-F5344CB8AC3E}">
-        <p14:creationId xmlns:p14="http://schemas.microsoft.com/office/powerpoint/2010/main" val="169718200"/>
+        <p14:creationId xmlns:p14="http://schemas.microsoft.com/office/powerpoint/2010/main" val="3434409075"/>
       </p:ext>
     </p:extLst>
   </p:cSld>
@@ -1332,7 +1332,7 @@
           <a:bodyPr/>
           <a:lstStyle/>
           <a:p>
-            <a:fld id="{882ED84D-F6D7-4988-86E3-4A5D8F53EA3D}" type="slidenum">
+            <a:fld id="{BF1E0DE7-A838-44D3-9086-16401B62A323}" type="slidenum">
               <a:rPr lang="en-US" smtClean="0"/>
               <a:t>7</a:t>
             </a:fld>
@@ -1343,7 +1343,7 @@
     </p:spTree>
     <p:extLst>
       <p:ext uri="{BB962C8B-B14F-4D97-AF65-F5344CB8AC3E}">
-        <p14:creationId xmlns:p14="http://schemas.microsoft.com/office/powerpoint/2010/main" val="2791607362"/>
+        <p14:creationId xmlns:p14="http://schemas.microsoft.com/office/powerpoint/2010/main" val="3142671044"/>
       </p:ext>
     </p:extLst>
   </p:cSld>
@@ -1420,7 +1420,7 @@
           <a:bodyPr/>
           <a:lstStyle/>
           <a:p>
-            <a:fld id="{882ED84D-F6D7-4988-86E3-4A5D8F53EA3D}" type="slidenum">
+            <a:fld id="{BF1E0DE7-A838-44D3-9086-16401B62A323}" type="slidenum">
               <a:rPr lang="en-US" smtClean="0"/>
               <a:t>8</a:t>
             </a:fld>
@@ -1431,7 +1431,7 @@
     </p:spTree>
     <p:extLst>
       <p:ext uri="{BB962C8B-B14F-4D97-AF65-F5344CB8AC3E}">
-        <p14:creationId xmlns:p14="http://schemas.microsoft.com/office/powerpoint/2010/main" val="910352844"/>
+        <p14:creationId xmlns:p14="http://schemas.microsoft.com/office/powerpoint/2010/main" val="1701548821"/>
       </p:ext>
     </p:extLst>
   </p:cSld>
@@ -1508,7 +1508,7 @@
           <a:bodyPr/>
           <a:lstStyle/>
           <a:p>
-            <a:fld id="{882ED84D-F6D7-4988-86E3-4A5D8F53EA3D}" type="slidenum">
+            <a:fld id="{BF1E0DE7-A838-44D3-9086-16401B62A323}" type="slidenum">
               <a:rPr lang="en-US" smtClean="0"/>
               <a:t>9</a:t>
             </a:fld>
@@ -1519,7 +1519,7 @@
     </p:spTree>
     <p:extLst>
       <p:ext uri="{BB962C8B-B14F-4D97-AF65-F5344CB8AC3E}">
-        <p14:creationId xmlns:p14="http://schemas.microsoft.com/office/powerpoint/2010/main" val="3288857904"/>
+        <p14:creationId xmlns:p14="http://schemas.microsoft.com/office/powerpoint/2010/main" val="2995017024"/>
       </p:ext>
     </p:extLst>
   </p:cSld>
@@ -1551,7 +1551,7 @@
           <p:cNvPr id="2" name="Title 1">
             <a:extLst>
               <a:ext uri="{FF2B5EF4-FFF2-40B4-BE49-F238E27FC236}">
-                <a16:creationId xmlns:a16="http://schemas.microsoft.com/office/drawing/2014/main" id="{E5E9CC3A-80FC-2846-F265-FA33C2FA8AEC}"/>
+                <a16:creationId xmlns:a16="http://schemas.microsoft.com/office/drawing/2014/main" id="{E048BE11-5333-6A28-AD91-C8716EE15C8A}"/>
               </a:ext>
             </a:extLst>
           </p:cNvPr>
@@ -1588,7 +1588,7 @@
           <p:cNvPr id="3" name="Subtitle 2">
             <a:extLst>
               <a:ext uri="{FF2B5EF4-FFF2-40B4-BE49-F238E27FC236}">
-                <a16:creationId xmlns:a16="http://schemas.microsoft.com/office/drawing/2014/main" id="{78936765-1B17-441B-6053-5D8BB992CF28}"/>
+                <a16:creationId xmlns:a16="http://schemas.microsoft.com/office/drawing/2014/main" id="{31E151F4-DFA8-B476-B835-3C39235EBB3D}"/>
               </a:ext>
             </a:extLst>
           </p:cNvPr>
@@ -1658,7 +1658,7 @@
           <p:cNvPr id="4" name="Date Placeholder 3">
             <a:extLst>
               <a:ext uri="{FF2B5EF4-FFF2-40B4-BE49-F238E27FC236}">
-                <a16:creationId xmlns:a16="http://schemas.microsoft.com/office/drawing/2014/main" id="{482AD142-1CE1-961E-93EF-B91AE47E77F5}"/>
+                <a16:creationId xmlns:a16="http://schemas.microsoft.com/office/drawing/2014/main" id="{6114ADA1-B023-E7CB-0CAC-A8AFB39A63C3}"/>
               </a:ext>
             </a:extLst>
           </p:cNvPr>
@@ -1674,7 +1674,7 @@
           <a:bodyPr/>
           <a:lstStyle/>
           <a:p>
-            <a:fld id="{395A4AE7-3451-4A8F-875B-C3782B0A52A7}" type="datetimeFigureOut">
+            <a:fld id="{40FDD52B-EF56-4BB9-AE32-CBE6B0F3120F}" type="datetimeFigureOut">
               <a:rPr lang="en-US" smtClean="0"/>
               <a:t>10/1/2026</a:t>
             </a:fld>
@@ -1687,7 +1687,7 @@
           <p:cNvPr id="5" name="Footer Placeholder 4">
             <a:extLst>
               <a:ext uri="{FF2B5EF4-FFF2-40B4-BE49-F238E27FC236}">
-                <a16:creationId xmlns:a16="http://schemas.microsoft.com/office/drawing/2014/main" id="{1C9AFB0F-298A-1871-4919-78EAE4670702}"/>
+                <a16:creationId xmlns:a16="http://schemas.microsoft.com/office/drawing/2014/main" id="{9A6A72B8-7117-9FB3-FAD0-C45155AF9564}"/>
               </a:ext>
             </a:extLst>
           </p:cNvPr>
@@ -1712,7 +1712,7 @@
           <p:cNvPr id="6" name="Slide Number Placeholder 5">
             <a:extLst>
               <a:ext uri="{FF2B5EF4-FFF2-40B4-BE49-F238E27FC236}">
-                <a16:creationId xmlns:a16="http://schemas.microsoft.com/office/drawing/2014/main" id="{0581898A-5DCE-BB4B-2A2C-E1A7C918D9FD}"/>
+                <a16:creationId xmlns:a16="http://schemas.microsoft.com/office/drawing/2014/main" id="{3F021203-5591-90A6-2C67-266B5CAC03FA}"/>
               </a:ext>
             </a:extLst>
           </p:cNvPr>
@@ -1728,7 +1728,7 @@
           <a:bodyPr/>
           <a:lstStyle/>
           <a:p>
-            <a:fld id="{F4536191-D2F0-4211-9D2E-0A00F1F7E313}" type="slidenum">
+            <a:fld id="{071C626E-CE99-4A38-B122-F832429FE450}" type="slidenum">
               <a:rPr lang="en-US" smtClean="0"/>
               <a:t>‹#›</a:t>
             </a:fld>
@@ -1739,7 +1739,7 @@
     </p:spTree>
     <p:extLst>
       <p:ext uri="{BB962C8B-B14F-4D97-AF65-F5344CB8AC3E}">
-        <p14:creationId xmlns:p14="http://schemas.microsoft.com/office/powerpoint/2010/main" val="3449688069"/>
+        <p14:creationId xmlns:p14="http://schemas.microsoft.com/office/powerpoint/2010/main" val="2095824046"/>
       </p:ext>
     </p:extLst>
   </p:cSld>
@@ -1771,7 +1771,7 @@
           <p:cNvPr id="2" name="Title 1">
             <a:extLst>
               <a:ext uri="{FF2B5EF4-FFF2-40B4-BE49-F238E27FC236}">
-                <a16:creationId xmlns:a16="http://schemas.microsoft.com/office/drawing/2014/main" id="{B5118FC6-34C1-AE86-8E91-B90B2B6E20B2}"/>
+                <a16:creationId xmlns:a16="http://schemas.microsoft.com/office/drawing/2014/main" id="{7EE8B0E1-6FB4-BE9D-2C1D-7807F9741451}"/>
               </a:ext>
             </a:extLst>
           </p:cNvPr>
@@ -1799,7 +1799,7 @@
           <p:cNvPr id="3" name="Vertical Text Placeholder 2">
             <a:extLst>
               <a:ext uri="{FF2B5EF4-FFF2-40B4-BE49-F238E27FC236}">
-                <a16:creationId xmlns:a16="http://schemas.microsoft.com/office/drawing/2014/main" id="{3DF608B1-0458-8DB4-030F-8C18A4C114AB}"/>
+                <a16:creationId xmlns:a16="http://schemas.microsoft.com/office/drawing/2014/main" id="{0B5F4F66-B9F9-6432-2B66-509F9AB2BA14}"/>
               </a:ext>
             </a:extLst>
           </p:cNvPr>
@@ -1856,7 +1856,7 @@
           <p:cNvPr id="4" name="Date Placeholder 3">
             <a:extLst>
               <a:ext uri="{FF2B5EF4-FFF2-40B4-BE49-F238E27FC236}">
-                <a16:creationId xmlns:a16="http://schemas.microsoft.com/office/drawing/2014/main" id="{7C32D167-80B2-C738-4A43-D19DDABBF1D4}"/>
+                <a16:creationId xmlns:a16="http://schemas.microsoft.com/office/drawing/2014/main" id="{D11CCF44-6470-4E74-FF7E-969D76E434C3}"/>
               </a:ext>
             </a:extLst>
           </p:cNvPr>
@@ -1872,7 +1872,7 @@
           <a:bodyPr/>
           <a:lstStyle/>
           <a:p>
-            <a:fld id="{395A4AE7-3451-4A8F-875B-C3782B0A52A7}" type="datetimeFigureOut">
+            <a:fld id="{40FDD52B-EF56-4BB9-AE32-CBE6B0F3120F}" type="datetimeFigureOut">
               <a:rPr lang="en-US" smtClean="0"/>
               <a:t>10/1/2026</a:t>
             </a:fld>
@@ -1885,7 +1885,7 @@
           <p:cNvPr id="5" name="Footer Placeholder 4">
             <a:extLst>
               <a:ext uri="{FF2B5EF4-FFF2-40B4-BE49-F238E27FC236}">
-                <a16:creationId xmlns:a16="http://schemas.microsoft.com/office/drawing/2014/main" id="{B19DD895-66B3-784B-BE63-C983867C4B30}"/>
+                <a16:creationId xmlns:a16="http://schemas.microsoft.com/office/drawing/2014/main" id="{7C1CB355-B6E9-1AC3-B33D-B44DAF87D812}"/>
               </a:ext>
             </a:extLst>
           </p:cNvPr>
@@ -1910,7 +1910,7 @@
           <p:cNvPr id="6" name="Slide Number Placeholder 5">
             <a:extLst>
               <a:ext uri="{FF2B5EF4-FFF2-40B4-BE49-F238E27FC236}">
-                <a16:creationId xmlns:a16="http://schemas.microsoft.com/office/drawing/2014/main" id="{C8CA480B-4056-F7A1-0E23-C8511C58D5BD}"/>
+                <a16:creationId xmlns:a16="http://schemas.microsoft.com/office/drawing/2014/main" id="{1A98C8B7-E311-E405-51D6-8498EE758AA4}"/>
               </a:ext>
             </a:extLst>
           </p:cNvPr>
@@ -1926,7 +1926,7 @@
           <a:bodyPr/>
           <a:lstStyle/>
           <a:p>
-            <a:fld id="{F4536191-D2F0-4211-9D2E-0A00F1F7E313}" type="slidenum">
+            <a:fld id="{071C626E-CE99-4A38-B122-F832429FE450}" type="slidenum">
               <a:rPr lang="en-US" smtClean="0"/>
               <a:t>‹#›</a:t>
             </a:fld>
@@ -1937,7 +1937,7 @@
     </p:spTree>
     <p:extLst>
       <p:ext uri="{BB962C8B-B14F-4D97-AF65-F5344CB8AC3E}">
-        <p14:creationId xmlns:p14="http://schemas.microsoft.com/office/powerpoint/2010/main" val="2823649878"/>
+        <p14:creationId xmlns:p14="http://schemas.microsoft.com/office/powerpoint/2010/main" val="3899036658"/>
       </p:ext>
     </p:extLst>
   </p:cSld>
@@ -1969,7 +1969,7 @@
           <p:cNvPr id="2" name="Vertical Title 1">
             <a:extLst>
               <a:ext uri="{FF2B5EF4-FFF2-40B4-BE49-F238E27FC236}">
-                <a16:creationId xmlns:a16="http://schemas.microsoft.com/office/drawing/2014/main" id="{8663FD30-3846-5507-80F5-86624DE3430B}"/>
+                <a16:creationId xmlns:a16="http://schemas.microsoft.com/office/drawing/2014/main" id="{F7CB5595-407E-C79B-BBF0-E7E881B6E51E}"/>
               </a:ext>
             </a:extLst>
           </p:cNvPr>
@@ -2002,7 +2002,7 @@
           <p:cNvPr id="3" name="Vertical Text Placeholder 2">
             <a:extLst>
               <a:ext uri="{FF2B5EF4-FFF2-40B4-BE49-F238E27FC236}">
-                <a16:creationId xmlns:a16="http://schemas.microsoft.com/office/drawing/2014/main" id="{9BB5840E-8903-8770-E263-62A47F5611F7}"/>
+                <a16:creationId xmlns:a16="http://schemas.microsoft.com/office/drawing/2014/main" id="{81031424-3A85-B43E-B674-3137F2DF52B1}"/>
               </a:ext>
             </a:extLst>
           </p:cNvPr>
@@ -2064,7 +2064,7 @@
           <p:cNvPr id="4" name="Date Placeholder 3">
             <a:extLst>
               <a:ext uri="{FF2B5EF4-FFF2-40B4-BE49-F238E27FC236}">
-                <a16:creationId xmlns:a16="http://schemas.microsoft.com/office/drawing/2014/main" id="{F8E541B3-8219-C3C8-8F7A-38717035211B}"/>
+                <a16:creationId xmlns:a16="http://schemas.microsoft.com/office/drawing/2014/main" id="{8F6CC118-0149-B59D-3B5E-A6ED87EA80D0}"/>
               </a:ext>
             </a:extLst>
           </p:cNvPr>
@@ -2080,7 +2080,7 @@
           <a:bodyPr/>
           <a:lstStyle/>
           <a:p>
-            <a:fld id="{395A4AE7-3451-4A8F-875B-C3782B0A52A7}" type="datetimeFigureOut">
+            <a:fld id="{40FDD52B-EF56-4BB9-AE32-CBE6B0F3120F}" type="datetimeFigureOut">
               <a:rPr lang="en-US" smtClean="0"/>
               <a:t>10/1/2026</a:t>
             </a:fld>
@@ -2093,7 +2093,7 @@
           <p:cNvPr id="5" name="Footer Placeholder 4">
             <a:extLst>
               <a:ext uri="{FF2B5EF4-FFF2-40B4-BE49-F238E27FC236}">
-                <a16:creationId xmlns:a16="http://schemas.microsoft.com/office/drawing/2014/main" id="{1753FD38-A82E-CAB5-B659-98A6CF5997F5}"/>
+                <a16:creationId xmlns:a16="http://schemas.microsoft.com/office/drawing/2014/main" id="{FD405318-EC81-FF28-9948-AAEB4D1391BB}"/>
               </a:ext>
             </a:extLst>
           </p:cNvPr>
@@ -2118,7 +2118,7 @@
           <p:cNvPr id="6" name="Slide Number Placeholder 5">
             <a:extLst>
               <a:ext uri="{FF2B5EF4-FFF2-40B4-BE49-F238E27FC236}">
-                <a16:creationId xmlns:a16="http://schemas.microsoft.com/office/drawing/2014/main" id="{F8DE3E2B-2E56-5A9F-8873-5BB08DA017CA}"/>
+                <a16:creationId xmlns:a16="http://schemas.microsoft.com/office/drawing/2014/main" id="{09A2A13E-1506-DD19-4AC3-7AF16FF2ADDE}"/>
               </a:ext>
             </a:extLst>
           </p:cNvPr>
@@ -2134,7 +2134,7 @@
           <a:bodyPr/>
           <a:lstStyle/>
           <a:p>
-            <a:fld id="{F4536191-D2F0-4211-9D2E-0A00F1F7E313}" type="slidenum">
+            <a:fld id="{071C626E-CE99-4A38-B122-F832429FE450}" type="slidenum">
               <a:rPr lang="en-US" smtClean="0"/>
               <a:t>‹#›</a:t>
             </a:fld>
@@ -2145,7 +2145,7 @@
     </p:spTree>
     <p:extLst>
       <p:ext uri="{BB962C8B-B14F-4D97-AF65-F5344CB8AC3E}">
-        <p14:creationId xmlns:p14="http://schemas.microsoft.com/office/powerpoint/2010/main" val="1221317867"/>
+        <p14:creationId xmlns:p14="http://schemas.microsoft.com/office/powerpoint/2010/main" val="2407644640"/>
       </p:ext>
     </p:extLst>
   </p:cSld>
@@ -2177,7 +2177,7 @@
           <p:cNvPr id="2" name="Title 1">
             <a:extLst>
               <a:ext uri="{FF2B5EF4-FFF2-40B4-BE49-F238E27FC236}">
-                <a16:creationId xmlns:a16="http://schemas.microsoft.com/office/drawing/2014/main" id="{188C4D42-BE58-7748-A9E4-5C491328C3DB}"/>
+                <a16:creationId xmlns:a16="http://schemas.microsoft.com/office/drawing/2014/main" id="{58CEBBD8-FE28-C24F-CFC4-5D66D9E031B2}"/>
               </a:ext>
             </a:extLst>
           </p:cNvPr>
@@ -2205,7 +2205,7 @@
           <p:cNvPr id="3" name="Content Placeholder 2">
             <a:extLst>
               <a:ext uri="{FF2B5EF4-FFF2-40B4-BE49-F238E27FC236}">
-                <a16:creationId xmlns:a16="http://schemas.microsoft.com/office/drawing/2014/main" id="{AD2CF431-BD2C-AC4E-7053-033DBD6C1117}"/>
+                <a16:creationId xmlns:a16="http://schemas.microsoft.com/office/drawing/2014/main" id="{8E0389D2-7F18-B6F1-6352-7995FB4EB58F}"/>
               </a:ext>
             </a:extLst>
           </p:cNvPr>
@@ -2262,7 +2262,7 @@
           <p:cNvPr id="4" name="Date Placeholder 3">
             <a:extLst>
               <a:ext uri="{FF2B5EF4-FFF2-40B4-BE49-F238E27FC236}">
-                <a16:creationId xmlns:a16="http://schemas.microsoft.com/office/drawing/2014/main" id="{1567B699-C047-BCD4-3494-B79632623AA0}"/>
+                <a16:creationId xmlns:a16="http://schemas.microsoft.com/office/drawing/2014/main" id="{F577E4F6-28B5-BED7-3B05-1726CF353E1F}"/>
               </a:ext>
             </a:extLst>
           </p:cNvPr>
@@ -2278,7 +2278,7 @@
           <a:bodyPr/>
           <a:lstStyle/>
           <a:p>
-            <a:fld id="{395A4AE7-3451-4A8F-875B-C3782B0A52A7}" type="datetimeFigureOut">
+            <a:fld id="{40FDD52B-EF56-4BB9-AE32-CBE6B0F3120F}" type="datetimeFigureOut">
               <a:rPr lang="en-US" smtClean="0"/>
               <a:t>10/1/2026</a:t>
             </a:fld>
@@ -2291,7 +2291,7 @@
           <p:cNvPr id="5" name="Footer Placeholder 4">
             <a:extLst>
               <a:ext uri="{FF2B5EF4-FFF2-40B4-BE49-F238E27FC236}">
-                <a16:creationId xmlns:a16="http://schemas.microsoft.com/office/drawing/2014/main" id="{B0E4A260-86BE-BD4D-B2B7-633C49206832}"/>
+                <a16:creationId xmlns:a16="http://schemas.microsoft.com/office/drawing/2014/main" id="{606EABF6-97DA-E26B-0D48-A22E0F1B2A54}"/>
               </a:ext>
             </a:extLst>
           </p:cNvPr>
@@ -2316,7 +2316,7 @@
           <p:cNvPr id="6" name="Slide Number Placeholder 5">
             <a:extLst>
               <a:ext uri="{FF2B5EF4-FFF2-40B4-BE49-F238E27FC236}">
-                <a16:creationId xmlns:a16="http://schemas.microsoft.com/office/drawing/2014/main" id="{C760B33F-773E-25AD-4F08-124C4A8BEEBE}"/>
+                <a16:creationId xmlns:a16="http://schemas.microsoft.com/office/drawing/2014/main" id="{7F83059E-478F-035F-465D-FAAB920EA95E}"/>
               </a:ext>
             </a:extLst>
           </p:cNvPr>
@@ -2332,7 +2332,7 @@
           <a:bodyPr/>
           <a:lstStyle/>
           <a:p>
-            <a:fld id="{F4536191-D2F0-4211-9D2E-0A00F1F7E313}" type="slidenum">
+            <a:fld id="{071C626E-CE99-4A38-B122-F832429FE450}" type="slidenum">
               <a:rPr lang="en-US" smtClean="0"/>
               <a:t>‹#›</a:t>
             </a:fld>
@@ -2343,7 +2343,7 @@
     </p:spTree>
     <p:extLst>
       <p:ext uri="{BB962C8B-B14F-4D97-AF65-F5344CB8AC3E}">
-        <p14:creationId xmlns:p14="http://schemas.microsoft.com/office/powerpoint/2010/main" val="3086457270"/>
+        <p14:creationId xmlns:p14="http://schemas.microsoft.com/office/powerpoint/2010/main" val="1845346816"/>
       </p:ext>
     </p:extLst>
   </p:cSld>
@@ -2375,7 +2375,7 @@
           <p:cNvPr id="2" name="Title 1">
             <a:extLst>
               <a:ext uri="{FF2B5EF4-FFF2-40B4-BE49-F238E27FC236}">
-                <a16:creationId xmlns:a16="http://schemas.microsoft.com/office/drawing/2014/main" id="{AF4887A6-2B2F-0B13-3D4A-1F337C2F615C}"/>
+                <a16:creationId xmlns:a16="http://schemas.microsoft.com/office/drawing/2014/main" id="{F2CDF2C2-79D2-FFFD-57D8-297C47EC7970}"/>
               </a:ext>
             </a:extLst>
           </p:cNvPr>
@@ -2412,7 +2412,7 @@
           <p:cNvPr id="3" name="Text Placeholder 2">
             <a:extLst>
               <a:ext uri="{FF2B5EF4-FFF2-40B4-BE49-F238E27FC236}">
-                <a16:creationId xmlns:a16="http://schemas.microsoft.com/office/drawing/2014/main" id="{D3DC5AD8-8755-04E1-097B-E8613790AA50}"/>
+                <a16:creationId xmlns:a16="http://schemas.microsoft.com/office/drawing/2014/main" id="{0304D6C0-72F6-6CAC-2D91-61E5625E6AA9}"/>
               </a:ext>
             </a:extLst>
           </p:cNvPr>
@@ -2537,7 +2537,7 @@
           <p:cNvPr id="4" name="Date Placeholder 3">
             <a:extLst>
               <a:ext uri="{FF2B5EF4-FFF2-40B4-BE49-F238E27FC236}">
-                <a16:creationId xmlns:a16="http://schemas.microsoft.com/office/drawing/2014/main" id="{AD0736CC-636C-33D2-1AB7-CD85B2225A45}"/>
+                <a16:creationId xmlns:a16="http://schemas.microsoft.com/office/drawing/2014/main" id="{579F7243-B3CE-B514-8F36-E27421F758B7}"/>
               </a:ext>
             </a:extLst>
           </p:cNvPr>
@@ -2553,7 +2553,7 @@
           <a:bodyPr/>
           <a:lstStyle/>
           <a:p>
-            <a:fld id="{395A4AE7-3451-4A8F-875B-C3782B0A52A7}" type="datetimeFigureOut">
+            <a:fld id="{40FDD52B-EF56-4BB9-AE32-CBE6B0F3120F}" type="datetimeFigureOut">
               <a:rPr lang="en-US" smtClean="0"/>
               <a:t>10/1/2026</a:t>
             </a:fld>
@@ -2566,7 +2566,7 @@
           <p:cNvPr id="5" name="Footer Placeholder 4">
             <a:extLst>
               <a:ext uri="{FF2B5EF4-FFF2-40B4-BE49-F238E27FC236}">
-                <a16:creationId xmlns:a16="http://schemas.microsoft.com/office/drawing/2014/main" id="{FD667713-51BF-0CC8-D8E8-87EC421D900C}"/>
+                <a16:creationId xmlns:a16="http://schemas.microsoft.com/office/drawing/2014/main" id="{9BBCA5F1-1831-676B-E979-943CE4E40134}"/>
               </a:ext>
             </a:extLst>
           </p:cNvPr>
@@ -2591,7 +2591,7 @@
           <p:cNvPr id="6" name="Slide Number Placeholder 5">
             <a:extLst>
               <a:ext uri="{FF2B5EF4-FFF2-40B4-BE49-F238E27FC236}">
-                <a16:creationId xmlns:a16="http://schemas.microsoft.com/office/drawing/2014/main" id="{789963D3-EE64-9037-1F34-AEC3C52AE62A}"/>
+                <a16:creationId xmlns:a16="http://schemas.microsoft.com/office/drawing/2014/main" id="{F6980157-505F-69ED-ACFB-A3BBA45BB8DB}"/>
               </a:ext>
             </a:extLst>
           </p:cNvPr>
@@ -2607,7 +2607,7 @@
           <a:bodyPr/>
           <a:lstStyle/>
           <a:p>
-            <a:fld id="{F4536191-D2F0-4211-9D2E-0A00F1F7E313}" type="slidenum">
+            <a:fld id="{071C626E-CE99-4A38-B122-F832429FE450}" type="slidenum">
               <a:rPr lang="en-US" smtClean="0"/>
               <a:t>‹#›</a:t>
             </a:fld>
@@ -2618,7 +2618,7 @@
     </p:spTree>
     <p:extLst>
       <p:ext uri="{BB962C8B-B14F-4D97-AF65-F5344CB8AC3E}">
-        <p14:creationId xmlns:p14="http://schemas.microsoft.com/office/powerpoint/2010/main" val="3437477543"/>
+        <p14:creationId xmlns:p14="http://schemas.microsoft.com/office/powerpoint/2010/main" val="126104556"/>
       </p:ext>
     </p:extLst>
   </p:cSld>
@@ -2650,7 +2650,7 @@
           <p:cNvPr id="2" name="Title 1">
             <a:extLst>
               <a:ext uri="{FF2B5EF4-FFF2-40B4-BE49-F238E27FC236}">
-                <a16:creationId xmlns:a16="http://schemas.microsoft.com/office/drawing/2014/main" id="{90786682-9D54-F46E-8AE3-D64AEC2F3FDB}"/>
+                <a16:creationId xmlns:a16="http://schemas.microsoft.com/office/drawing/2014/main" id="{F34D10F8-5D47-8837-8171-CEB65098D2C1}"/>
               </a:ext>
             </a:extLst>
           </p:cNvPr>
@@ -2678,7 +2678,7 @@
           <p:cNvPr id="3" name="Content Placeholder 2">
             <a:extLst>
               <a:ext uri="{FF2B5EF4-FFF2-40B4-BE49-F238E27FC236}">
-                <a16:creationId xmlns:a16="http://schemas.microsoft.com/office/drawing/2014/main" id="{1B0682EC-5196-1344-7710-00ACAC48DD0C}"/>
+                <a16:creationId xmlns:a16="http://schemas.microsoft.com/office/drawing/2014/main" id="{10C51958-C840-6212-2B40-74240F7D69AD}"/>
               </a:ext>
             </a:extLst>
           </p:cNvPr>
@@ -2740,7 +2740,7 @@
           <p:cNvPr id="4" name="Content Placeholder 3">
             <a:extLst>
               <a:ext uri="{FF2B5EF4-FFF2-40B4-BE49-F238E27FC236}">
-                <a16:creationId xmlns:a16="http://schemas.microsoft.com/office/drawing/2014/main" id="{B777980E-D1DF-EC54-63CC-8E192DA6D72D}"/>
+                <a16:creationId xmlns:a16="http://schemas.microsoft.com/office/drawing/2014/main" id="{6C8CDFC7-DBE5-DC4D-C71C-624F69FB38D2}"/>
               </a:ext>
             </a:extLst>
           </p:cNvPr>
@@ -2802,7 +2802,7 @@
           <p:cNvPr id="5" name="Date Placeholder 4">
             <a:extLst>
               <a:ext uri="{FF2B5EF4-FFF2-40B4-BE49-F238E27FC236}">
-                <a16:creationId xmlns:a16="http://schemas.microsoft.com/office/drawing/2014/main" id="{70AC6391-ABEC-7680-E37F-AAE2447A754C}"/>
+                <a16:creationId xmlns:a16="http://schemas.microsoft.com/office/drawing/2014/main" id="{C318780F-6557-1903-ED3D-A2FB66E1B4E1}"/>
               </a:ext>
             </a:extLst>
           </p:cNvPr>
@@ -2818,7 +2818,7 @@
           <a:bodyPr/>
           <a:lstStyle/>
           <a:p>
-            <a:fld id="{395A4AE7-3451-4A8F-875B-C3782B0A52A7}" type="datetimeFigureOut">
+            <a:fld id="{40FDD52B-EF56-4BB9-AE32-CBE6B0F3120F}" type="datetimeFigureOut">
               <a:rPr lang="en-US" smtClean="0"/>
               <a:t>10/1/2026</a:t>
             </a:fld>
@@ -2831,7 +2831,7 @@
           <p:cNvPr id="6" name="Footer Placeholder 5">
             <a:extLst>
               <a:ext uri="{FF2B5EF4-FFF2-40B4-BE49-F238E27FC236}">
-                <a16:creationId xmlns:a16="http://schemas.microsoft.com/office/drawing/2014/main" id="{533FF904-6FB8-9872-011B-5BAEFDC94330}"/>
+                <a16:creationId xmlns:a16="http://schemas.microsoft.com/office/drawing/2014/main" id="{A67F5FF6-99C0-804C-7520-654129E3F31E}"/>
               </a:ext>
             </a:extLst>
           </p:cNvPr>
@@ -2856,7 +2856,7 @@
           <p:cNvPr id="7" name="Slide Number Placeholder 6">
             <a:extLst>
               <a:ext uri="{FF2B5EF4-FFF2-40B4-BE49-F238E27FC236}">
-                <a16:creationId xmlns:a16="http://schemas.microsoft.com/office/drawing/2014/main" id="{5C232558-1642-552B-7D6E-DFBF7E69CA57}"/>
+                <a16:creationId xmlns:a16="http://schemas.microsoft.com/office/drawing/2014/main" id="{173007C6-4F13-52E3-7A8A-C1CF736E2733}"/>
               </a:ext>
             </a:extLst>
           </p:cNvPr>
@@ -2872,7 +2872,7 @@
           <a:bodyPr/>
           <a:lstStyle/>
           <a:p>
-            <a:fld id="{F4536191-D2F0-4211-9D2E-0A00F1F7E313}" type="slidenum">
+            <a:fld id="{071C626E-CE99-4A38-B122-F832429FE450}" type="slidenum">
               <a:rPr lang="en-US" smtClean="0"/>
               <a:t>‹#›</a:t>
             </a:fld>
@@ -2883,7 +2883,7 @@
     </p:spTree>
     <p:extLst>
       <p:ext uri="{BB962C8B-B14F-4D97-AF65-F5344CB8AC3E}">
-        <p14:creationId xmlns:p14="http://schemas.microsoft.com/office/powerpoint/2010/main" val="3938588509"/>
+        <p14:creationId xmlns:p14="http://schemas.microsoft.com/office/powerpoint/2010/main" val="1578383029"/>
       </p:ext>
     </p:extLst>
   </p:cSld>
@@ -2915,7 +2915,7 @@
           <p:cNvPr id="2" name="Title 1">
             <a:extLst>
               <a:ext uri="{FF2B5EF4-FFF2-40B4-BE49-F238E27FC236}">
-                <a16:creationId xmlns:a16="http://schemas.microsoft.com/office/drawing/2014/main" id="{C60C6A75-5234-4D25-05D8-7AA254026DCC}"/>
+                <a16:creationId xmlns:a16="http://schemas.microsoft.com/office/drawing/2014/main" id="{B24B34B0-1818-9D9C-F34C-17CC3B8AD5BB}"/>
               </a:ext>
             </a:extLst>
           </p:cNvPr>
@@ -2948,7 +2948,7 @@
           <p:cNvPr id="3" name="Text Placeholder 2">
             <a:extLst>
               <a:ext uri="{FF2B5EF4-FFF2-40B4-BE49-F238E27FC236}">
-                <a16:creationId xmlns:a16="http://schemas.microsoft.com/office/drawing/2014/main" id="{B77F9D73-60D0-3A38-B953-21A0B0540540}"/>
+                <a16:creationId xmlns:a16="http://schemas.microsoft.com/office/drawing/2014/main" id="{204CDDBF-F7AD-A8BC-F535-D084697F37F5}"/>
               </a:ext>
             </a:extLst>
           </p:cNvPr>
@@ -3019,7 +3019,7 @@
           <p:cNvPr id="4" name="Content Placeholder 3">
             <a:extLst>
               <a:ext uri="{FF2B5EF4-FFF2-40B4-BE49-F238E27FC236}">
-                <a16:creationId xmlns:a16="http://schemas.microsoft.com/office/drawing/2014/main" id="{1BBAFC41-1F4A-E108-5A80-E0217BC3A084}"/>
+                <a16:creationId xmlns:a16="http://schemas.microsoft.com/office/drawing/2014/main" id="{42657225-CDFE-2B42-E4F8-06DDE2EB188B}"/>
               </a:ext>
             </a:extLst>
           </p:cNvPr>
@@ -3081,7 +3081,7 @@
           <p:cNvPr id="5" name="Text Placeholder 4">
             <a:extLst>
               <a:ext uri="{FF2B5EF4-FFF2-40B4-BE49-F238E27FC236}">
-                <a16:creationId xmlns:a16="http://schemas.microsoft.com/office/drawing/2014/main" id="{875E0254-77FD-6705-2277-EE7F10B299C3}"/>
+                <a16:creationId xmlns:a16="http://schemas.microsoft.com/office/drawing/2014/main" id="{C12C40E5-BAA9-C5DA-EF29-B063D9080CE5}"/>
               </a:ext>
             </a:extLst>
           </p:cNvPr>
@@ -3152,7 +3152,7 @@
           <p:cNvPr id="6" name="Content Placeholder 5">
             <a:extLst>
               <a:ext uri="{FF2B5EF4-FFF2-40B4-BE49-F238E27FC236}">
-                <a16:creationId xmlns:a16="http://schemas.microsoft.com/office/drawing/2014/main" id="{3CEDBB75-3CEA-6DB9-4961-2E9E35D54AC0}"/>
+                <a16:creationId xmlns:a16="http://schemas.microsoft.com/office/drawing/2014/main" id="{EB9E515A-6B96-8591-7545-E1D0C13E870D}"/>
               </a:ext>
             </a:extLst>
           </p:cNvPr>
@@ -3214,7 +3214,7 @@
           <p:cNvPr id="7" name="Date Placeholder 6">
             <a:extLst>
               <a:ext uri="{FF2B5EF4-FFF2-40B4-BE49-F238E27FC236}">
-                <a16:creationId xmlns:a16="http://schemas.microsoft.com/office/drawing/2014/main" id="{F82F5D8C-A5AB-9C29-F2BE-211B5BBA56B9}"/>
+                <a16:creationId xmlns:a16="http://schemas.microsoft.com/office/drawing/2014/main" id="{5719AC98-2301-7576-A04B-98CD5AAE2EC5}"/>
               </a:ext>
             </a:extLst>
           </p:cNvPr>
@@ -3230,7 +3230,7 @@
           <a:bodyPr/>
           <a:lstStyle/>
           <a:p>
-            <a:fld id="{395A4AE7-3451-4A8F-875B-C3782B0A52A7}" type="datetimeFigureOut">
+            <a:fld id="{40FDD52B-EF56-4BB9-AE32-CBE6B0F3120F}" type="datetimeFigureOut">
               <a:rPr lang="en-US" smtClean="0"/>
               <a:t>10/1/2026</a:t>
             </a:fld>
@@ -3243,7 +3243,7 @@
           <p:cNvPr id="8" name="Footer Placeholder 7">
             <a:extLst>
               <a:ext uri="{FF2B5EF4-FFF2-40B4-BE49-F238E27FC236}">
-                <a16:creationId xmlns:a16="http://schemas.microsoft.com/office/drawing/2014/main" id="{F8963CB3-3685-7C67-EA03-D1DD60FA878B}"/>
+                <a16:creationId xmlns:a16="http://schemas.microsoft.com/office/drawing/2014/main" id="{B5966B85-B403-03B6-B519-917F62BFC800}"/>
               </a:ext>
             </a:extLst>
           </p:cNvPr>
@@ -3268,7 +3268,7 @@
           <p:cNvPr id="9" name="Slide Number Placeholder 8">
             <a:extLst>
               <a:ext uri="{FF2B5EF4-FFF2-40B4-BE49-F238E27FC236}">
-                <a16:creationId xmlns:a16="http://schemas.microsoft.com/office/drawing/2014/main" id="{D66D0C3C-2CC7-B4D0-BAA1-2E6271E99F9B}"/>
+                <a16:creationId xmlns:a16="http://schemas.microsoft.com/office/drawing/2014/main" id="{9BE8C983-69A3-3D65-7956-E50D1A8D3943}"/>
               </a:ext>
             </a:extLst>
           </p:cNvPr>
@@ -3284,7 +3284,7 @@
           <a:bodyPr/>
           <a:lstStyle/>
           <a:p>
-            <a:fld id="{F4536191-D2F0-4211-9D2E-0A00F1F7E313}" type="slidenum">
+            <a:fld id="{071C626E-CE99-4A38-B122-F832429FE450}" type="slidenum">
               <a:rPr lang="en-US" smtClean="0"/>
               <a:t>‹#›</a:t>
             </a:fld>
@@ -3295,7 +3295,7 @@
     </p:spTree>
     <p:extLst>
       <p:ext uri="{BB962C8B-B14F-4D97-AF65-F5344CB8AC3E}">
-        <p14:creationId xmlns:p14="http://schemas.microsoft.com/office/powerpoint/2010/main" val="506031716"/>
+        <p14:creationId xmlns:p14="http://schemas.microsoft.com/office/powerpoint/2010/main" val="316794708"/>
       </p:ext>
     </p:extLst>
   </p:cSld>
@@ -3327,7 +3327,7 @@
           <p:cNvPr id="2" name="Title 1">
             <a:extLst>
               <a:ext uri="{FF2B5EF4-FFF2-40B4-BE49-F238E27FC236}">
-                <a16:creationId xmlns:a16="http://schemas.microsoft.com/office/drawing/2014/main" id="{016F56B6-C3F2-BCFE-3ADD-29D168F7BC38}"/>
+                <a16:creationId xmlns:a16="http://schemas.microsoft.com/office/drawing/2014/main" id="{E97B25FB-BDBA-9B32-EC3D-4A9E5B6D3801}"/>
               </a:ext>
             </a:extLst>
           </p:cNvPr>
@@ -3355,7 +3355,7 @@
           <p:cNvPr id="3" name="Date Placeholder 2">
             <a:extLst>
               <a:ext uri="{FF2B5EF4-FFF2-40B4-BE49-F238E27FC236}">
-                <a16:creationId xmlns:a16="http://schemas.microsoft.com/office/drawing/2014/main" id="{AC9F6CDE-4466-44C7-335B-C43039FFA759}"/>
+                <a16:creationId xmlns:a16="http://schemas.microsoft.com/office/drawing/2014/main" id="{AC7E1AC7-DCBF-93F9-1ECE-883AA441AF69}"/>
               </a:ext>
             </a:extLst>
           </p:cNvPr>
@@ -3371,7 +3371,7 @@
           <a:bodyPr/>
           <a:lstStyle/>
           <a:p>
-            <a:fld id="{395A4AE7-3451-4A8F-875B-C3782B0A52A7}" type="datetimeFigureOut">
+            <a:fld id="{40FDD52B-EF56-4BB9-AE32-CBE6B0F3120F}" type="datetimeFigureOut">
               <a:rPr lang="en-US" smtClean="0"/>
               <a:t>10/1/2026</a:t>
             </a:fld>
@@ -3384,7 +3384,7 @@
           <p:cNvPr id="4" name="Footer Placeholder 3">
             <a:extLst>
               <a:ext uri="{FF2B5EF4-FFF2-40B4-BE49-F238E27FC236}">
-                <a16:creationId xmlns:a16="http://schemas.microsoft.com/office/drawing/2014/main" id="{B7DED776-1029-78D0-865D-EE4D1BF2667E}"/>
+                <a16:creationId xmlns:a16="http://schemas.microsoft.com/office/drawing/2014/main" id="{C112E9B1-42E8-5D05-4BA0-8BF380DAE3A7}"/>
               </a:ext>
             </a:extLst>
           </p:cNvPr>
@@ -3409,7 +3409,7 @@
           <p:cNvPr id="5" name="Slide Number Placeholder 4">
             <a:extLst>
               <a:ext uri="{FF2B5EF4-FFF2-40B4-BE49-F238E27FC236}">
-                <a16:creationId xmlns:a16="http://schemas.microsoft.com/office/drawing/2014/main" id="{E1B37AB4-0418-2B58-789E-AD1CA9A3A22A}"/>
+                <a16:creationId xmlns:a16="http://schemas.microsoft.com/office/drawing/2014/main" id="{F441597A-1062-298F-3B52-CD8F24000228}"/>
               </a:ext>
             </a:extLst>
           </p:cNvPr>
@@ -3425,7 +3425,7 @@
           <a:bodyPr/>
           <a:lstStyle/>
           <a:p>
-            <a:fld id="{F4536191-D2F0-4211-9D2E-0A00F1F7E313}" type="slidenum">
+            <a:fld id="{071C626E-CE99-4A38-B122-F832429FE450}" type="slidenum">
               <a:rPr lang="en-US" smtClean="0"/>
               <a:t>‹#›</a:t>
             </a:fld>
@@ -3436,7 +3436,7 @@
     </p:spTree>
     <p:extLst>
       <p:ext uri="{BB962C8B-B14F-4D97-AF65-F5344CB8AC3E}">
-        <p14:creationId xmlns:p14="http://schemas.microsoft.com/office/powerpoint/2010/main" val="1070947993"/>
+        <p14:creationId xmlns:p14="http://schemas.microsoft.com/office/powerpoint/2010/main" val="2091304017"/>
       </p:ext>
     </p:extLst>
   </p:cSld>
@@ -3468,7 +3468,7 @@
           <p:cNvPr id="2" name="Date Placeholder 1">
             <a:extLst>
               <a:ext uri="{FF2B5EF4-FFF2-40B4-BE49-F238E27FC236}">
-                <a16:creationId xmlns:a16="http://schemas.microsoft.com/office/drawing/2014/main" id="{CB691651-935C-9A4D-3E0A-973B6F6527A8}"/>
+                <a16:creationId xmlns:a16="http://schemas.microsoft.com/office/drawing/2014/main" id="{C56E8F79-823E-E26B-EBD4-552EC2EB588E}"/>
               </a:ext>
             </a:extLst>
           </p:cNvPr>
@@ -3484,7 +3484,7 @@
           <a:bodyPr/>
           <a:lstStyle/>
           <a:p>
-            <a:fld id="{395A4AE7-3451-4A8F-875B-C3782B0A52A7}" type="datetimeFigureOut">
+            <a:fld id="{40FDD52B-EF56-4BB9-AE32-CBE6B0F3120F}" type="datetimeFigureOut">
               <a:rPr lang="en-US" smtClean="0"/>
               <a:t>10/1/2026</a:t>
             </a:fld>
@@ -3497,7 +3497,7 @@
           <p:cNvPr id="3" name="Footer Placeholder 2">
             <a:extLst>
               <a:ext uri="{FF2B5EF4-FFF2-40B4-BE49-F238E27FC236}">
-                <a16:creationId xmlns:a16="http://schemas.microsoft.com/office/drawing/2014/main" id="{6C4AF077-2AD2-95DC-F2D9-FCAC7C59D7C8}"/>
+                <a16:creationId xmlns:a16="http://schemas.microsoft.com/office/drawing/2014/main" id="{AB4829A9-334D-586A-CF5E-8827B3C4CC4E}"/>
               </a:ext>
             </a:extLst>
           </p:cNvPr>
@@ -3522,7 +3522,7 @@
           <p:cNvPr id="4" name="Slide Number Placeholder 3">
             <a:extLst>
               <a:ext uri="{FF2B5EF4-FFF2-40B4-BE49-F238E27FC236}">
-                <a16:creationId xmlns:a16="http://schemas.microsoft.com/office/drawing/2014/main" id="{A6B7222E-8FA8-CCA5-1507-A536FA6489F3}"/>
+                <a16:creationId xmlns:a16="http://schemas.microsoft.com/office/drawing/2014/main" id="{59335FA4-9BC7-8A76-5973-1FAC5826EC10}"/>
               </a:ext>
             </a:extLst>
           </p:cNvPr>
@@ -3538,7 +3538,7 @@
           <a:bodyPr/>
           <a:lstStyle/>
           <a:p>
-            <a:fld id="{F4536191-D2F0-4211-9D2E-0A00F1F7E313}" type="slidenum">
+            <a:fld id="{071C626E-CE99-4A38-B122-F832429FE450}" type="slidenum">
               <a:rPr lang="en-US" smtClean="0"/>
               <a:t>‹#›</a:t>
             </a:fld>
@@ -3549,7 +3549,7 @@
     </p:spTree>
     <p:extLst>
       <p:ext uri="{BB962C8B-B14F-4D97-AF65-F5344CB8AC3E}">
-        <p14:creationId xmlns:p14="http://schemas.microsoft.com/office/powerpoint/2010/main" val="960541668"/>
+        <p14:creationId xmlns:p14="http://schemas.microsoft.com/office/powerpoint/2010/main" val="1158616035"/>
       </p:ext>
     </p:extLst>
   </p:cSld>
@@ -3581,7 +3581,7 @@
           <p:cNvPr id="2" name="Title 1">
             <a:extLst>
               <a:ext uri="{FF2B5EF4-FFF2-40B4-BE49-F238E27FC236}">
-                <a16:creationId xmlns:a16="http://schemas.microsoft.com/office/drawing/2014/main" id="{1ECCA890-64D4-EBA8-35A8-766188B222F3}"/>
+                <a16:creationId xmlns:a16="http://schemas.microsoft.com/office/drawing/2014/main" id="{BFD3FD00-4636-9536-B2EC-D0A5AA0D1151}"/>
               </a:ext>
             </a:extLst>
           </p:cNvPr>
@@ -3618,7 +3618,7 @@
           <p:cNvPr id="3" name="Content Placeholder 2">
             <a:extLst>
               <a:ext uri="{FF2B5EF4-FFF2-40B4-BE49-F238E27FC236}">
-                <a16:creationId xmlns:a16="http://schemas.microsoft.com/office/drawing/2014/main" id="{C645D138-24D2-6A50-4ACD-F73128617654}"/>
+                <a16:creationId xmlns:a16="http://schemas.microsoft.com/office/drawing/2014/main" id="{BB1DA060-3AA9-8009-606D-92C2EBB9C0A6}"/>
               </a:ext>
             </a:extLst>
           </p:cNvPr>
@@ -3708,7 +3708,7 @@
           <p:cNvPr id="4" name="Text Placeholder 3">
             <a:extLst>
               <a:ext uri="{FF2B5EF4-FFF2-40B4-BE49-F238E27FC236}">
-                <a16:creationId xmlns:a16="http://schemas.microsoft.com/office/drawing/2014/main" id="{632E664A-566E-17D8-D4DE-5DA8ECAE92F1}"/>
+                <a16:creationId xmlns:a16="http://schemas.microsoft.com/office/drawing/2014/main" id="{36378030-12C9-E018-5A89-E2995160D74D}"/>
               </a:ext>
             </a:extLst>
           </p:cNvPr>
@@ -3779,7 +3779,7 @@
           <p:cNvPr id="5" name="Date Placeholder 4">
             <a:extLst>
               <a:ext uri="{FF2B5EF4-FFF2-40B4-BE49-F238E27FC236}">
-                <a16:creationId xmlns:a16="http://schemas.microsoft.com/office/drawing/2014/main" id="{782A60AB-C702-48D0-B06E-867830C99DA5}"/>
+                <a16:creationId xmlns:a16="http://schemas.microsoft.com/office/drawing/2014/main" id="{810C94AD-9BF8-E5C5-F5E3-20C5701BF1EA}"/>
               </a:ext>
             </a:extLst>
           </p:cNvPr>
@@ -3795,7 +3795,7 @@
           <a:bodyPr/>
           <a:lstStyle/>
           <a:p>
-            <a:fld id="{395A4AE7-3451-4A8F-875B-C3782B0A52A7}" type="datetimeFigureOut">
+            <a:fld id="{40FDD52B-EF56-4BB9-AE32-CBE6B0F3120F}" type="datetimeFigureOut">
               <a:rPr lang="en-US" smtClean="0"/>
               <a:t>10/1/2026</a:t>
             </a:fld>
@@ -3808,7 +3808,7 @@
           <p:cNvPr id="6" name="Footer Placeholder 5">
             <a:extLst>
               <a:ext uri="{FF2B5EF4-FFF2-40B4-BE49-F238E27FC236}">
-                <a16:creationId xmlns:a16="http://schemas.microsoft.com/office/drawing/2014/main" id="{0352AB15-FA84-5CBA-04B6-89FBB259C905}"/>
+                <a16:creationId xmlns:a16="http://schemas.microsoft.com/office/drawing/2014/main" id="{C57C24F1-68FA-3AFB-36DC-65953C588EA4}"/>
               </a:ext>
             </a:extLst>
           </p:cNvPr>
@@ -3833,7 +3833,7 @@
           <p:cNvPr id="7" name="Slide Number Placeholder 6">
             <a:extLst>
               <a:ext uri="{FF2B5EF4-FFF2-40B4-BE49-F238E27FC236}">
-                <a16:creationId xmlns:a16="http://schemas.microsoft.com/office/drawing/2014/main" id="{07F2EE5C-9584-F1FC-7315-EDC487E52E87}"/>
+                <a16:creationId xmlns:a16="http://schemas.microsoft.com/office/drawing/2014/main" id="{10D8DD79-A460-7C8E-AE52-C1AC3FC1DEAE}"/>
               </a:ext>
             </a:extLst>
           </p:cNvPr>
@@ -3849,7 +3849,7 @@
           <a:bodyPr/>
           <a:lstStyle/>
           <a:p>
-            <a:fld id="{F4536191-D2F0-4211-9D2E-0A00F1F7E313}" type="slidenum">
+            <a:fld id="{071C626E-CE99-4A38-B122-F832429FE450}" type="slidenum">
               <a:rPr lang="en-US" smtClean="0"/>
               <a:t>‹#›</a:t>
             </a:fld>
@@ -3860,7 +3860,7 @@
     </p:spTree>
     <p:extLst>
       <p:ext uri="{BB962C8B-B14F-4D97-AF65-F5344CB8AC3E}">
-        <p14:creationId xmlns:p14="http://schemas.microsoft.com/office/powerpoint/2010/main" val="888248127"/>
+        <p14:creationId xmlns:p14="http://schemas.microsoft.com/office/powerpoint/2010/main" val="1463744899"/>
       </p:ext>
     </p:extLst>
   </p:cSld>
@@ -3892,7 +3892,7 @@
           <p:cNvPr id="2" name="Title 1">
             <a:extLst>
               <a:ext uri="{FF2B5EF4-FFF2-40B4-BE49-F238E27FC236}">
-                <a16:creationId xmlns:a16="http://schemas.microsoft.com/office/drawing/2014/main" id="{BC371D28-ECF0-444A-0FE2-2FB9F11E0734}"/>
+                <a16:creationId xmlns:a16="http://schemas.microsoft.com/office/drawing/2014/main" id="{2A64B45A-0C98-5A3D-F3A5-6EBB28308C04}"/>
               </a:ext>
             </a:extLst>
           </p:cNvPr>
@@ -3929,7 +3929,7 @@
           <p:cNvPr id="3" name="Picture Placeholder 2">
             <a:extLst>
               <a:ext uri="{FF2B5EF4-FFF2-40B4-BE49-F238E27FC236}">
-                <a16:creationId xmlns:a16="http://schemas.microsoft.com/office/drawing/2014/main" id="{C4EADA07-46A6-4E4E-DB49-485F86EFBC21}"/>
+                <a16:creationId xmlns:a16="http://schemas.microsoft.com/office/drawing/2014/main" id="{C6FC84CC-B153-30F3-3E0D-5AC57F367D01}"/>
               </a:ext>
             </a:extLst>
           </p:cNvPr>
@@ -3996,7 +3996,7 @@
           <p:cNvPr id="4" name="Text Placeholder 3">
             <a:extLst>
               <a:ext uri="{FF2B5EF4-FFF2-40B4-BE49-F238E27FC236}">
-                <a16:creationId xmlns:a16="http://schemas.microsoft.com/office/drawing/2014/main" id="{262373DF-A5D1-2A06-B82D-0D1EC40F7CD8}"/>
+                <a16:creationId xmlns:a16="http://schemas.microsoft.com/office/drawing/2014/main" id="{414C229A-5F28-9E19-6213-47E08E5E0072}"/>
               </a:ext>
             </a:extLst>
           </p:cNvPr>
@@ -4067,7 +4067,7 @@
           <p:cNvPr id="5" name="Date Placeholder 4">
             <a:extLst>
               <a:ext uri="{FF2B5EF4-FFF2-40B4-BE49-F238E27FC236}">
-                <a16:creationId xmlns:a16="http://schemas.microsoft.com/office/drawing/2014/main" id="{0CC16F67-C08B-B84D-6B9E-A2F5E8CC6EC7}"/>
+                <a16:creationId xmlns:a16="http://schemas.microsoft.com/office/drawing/2014/main" id="{03B31EEE-C29E-DCEE-50C7-E6A899265DC4}"/>
               </a:ext>
             </a:extLst>
           </p:cNvPr>
@@ -4083,7 +4083,7 @@
           <a:bodyPr/>
           <a:lstStyle/>
           <a:p>
-            <a:fld id="{395A4AE7-3451-4A8F-875B-C3782B0A52A7}" type="datetimeFigureOut">
+            <a:fld id="{40FDD52B-EF56-4BB9-AE32-CBE6B0F3120F}" type="datetimeFigureOut">
               <a:rPr lang="en-US" smtClean="0"/>
               <a:t>10/1/2026</a:t>
             </a:fld>
@@ -4096,7 +4096,7 @@
           <p:cNvPr id="6" name="Footer Placeholder 5">
             <a:extLst>
               <a:ext uri="{FF2B5EF4-FFF2-40B4-BE49-F238E27FC236}">
-                <a16:creationId xmlns:a16="http://schemas.microsoft.com/office/drawing/2014/main" id="{89773F99-1530-F215-1BE3-7562BD74E67E}"/>
+                <a16:creationId xmlns:a16="http://schemas.microsoft.com/office/drawing/2014/main" id="{9B095FD4-6BE0-8194-1178-D760D26DAF4F}"/>
               </a:ext>
             </a:extLst>
           </p:cNvPr>
@@ -4121,7 +4121,7 @@
           <p:cNvPr id="7" name="Slide Number Placeholder 6">
             <a:extLst>
               <a:ext uri="{FF2B5EF4-FFF2-40B4-BE49-F238E27FC236}">
-                <a16:creationId xmlns:a16="http://schemas.microsoft.com/office/drawing/2014/main" id="{B82DA260-2C5C-2308-E080-E4B9F43DA99D}"/>
+                <a16:creationId xmlns:a16="http://schemas.microsoft.com/office/drawing/2014/main" id="{E91EF188-050E-BD91-24F4-80B95A670990}"/>
               </a:ext>
             </a:extLst>
           </p:cNvPr>
@@ -4137,7 +4137,7 @@
           <a:bodyPr/>
           <a:lstStyle/>
           <a:p>
-            <a:fld id="{F4536191-D2F0-4211-9D2E-0A00F1F7E313}" type="slidenum">
+            <a:fld id="{071C626E-CE99-4A38-B122-F832429FE450}" type="slidenum">
               <a:rPr lang="en-US" smtClean="0"/>
               <a:t>‹#›</a:t>
             </a:fld>
@@ -4148,7 +4148,7 @@
     </p:spTree>
     <p:extLst>
       <p:ext uri="{BB962C8B-B14F-4D97-AF65-F5344CB8AC3E}">
-        <p14:creationId xmlns:p14="http://schemas.microsoft.com/office/powerpoint/2010/main" val="1711018512"/>
+        <p14:creationId xmlns:p14="http://schemas.microsoft.com/office/powerpoint/2010/main" val="4085787594"/>
       </p:ext>
     </p:extLst>
   </p:cSld>
@@ -4185,7 +4185,7 @@
           <p:cNvPr id="2" name="Title Placeholder 1">
             <a:extLst>
               <a:ext uri="{FF2B5EF4-FFF2-40B4-BE49-F238E27FC236}">
-                <a16:creationId xmlns:a16="http://schemas.microsoft.com/office/drawing/2014/main" id="{721364AE-66BD-B208-0273-AD6ED2044539}"/>
+                <a16:creationId xmlns:a16="http://schemas.microsoft.com/office/drawing/2014/main" id="{C07B5455-94E0-61A4-CD52-228A8DA3CD4D}"/>
               </a:ext>
             </a:extLst>
           </p:cNvPr>
@@ -4223,7 +4223,7 @@
           <p:cNvPr id="3" name="Text Placeholder 2">
             <a:extLst>
               <a:ext uri="{FF2B5EF4-FFF2-40B4-BE49-F238E27FC236}">
-                <a16:creationId xmlns:a16="http://schemas.microsoft.com/office/drawing/2014/main" id="{48C6EE77-DD74-0635-9AEA-BD29DA6B866C}"/>
+                <a16:creationId xmlns:a16="http://schemas.microsoft.com/office/drawing/2014/main" id="{2F14C237-B534-8552-5592-2DA2614AD311}"/>
               </a:ext>
             </a:extLst>
           </p:cNvPr>
@@ -4290,7 +4290,7 @@
           <p:cNvPr id="4" name="Date Placeholder 3">
             <a:extLst>
               <a:ext uri="{FF2B5EF4-FFF2-40B4-BE49-F238E27FC236}">
-                <a16:creationId xmlns:a16="http://schemas.microsoft.com/office/drawing/2014/main" id="{988C5071-748D-EEFC-E61C-70C99432FFE3}"/>
+                <a16:creationId xmlns:a16="http://schemas.microsoft.com/office/drawing/2014/main" id="{0D43DDEF-9B98-5310-3D3C-1B18B9E7CD64}"/>
               </a:ext>
             </a:extLst>
           </p:cNvPr>
@@ -4324,7 +4324,7 @@
             </a:lvl1pPr>
           </a:lstStyle>
           <a:p>
-            <a:fld id="{395A4AE7-3451-4A8F-875B-C3782B0A52A7}" type="datetimeFigureOut">
+            <a:fld id="{40FDD52B-EF56-4BB9-AE32-CBE6B0F3120F}" type="datetimeFigureOut">
               <a:rPr lang="en-US" smtClean="0"/>
               <a:t>10/1/2026</a:t>
             </a:fld>
@@ -4337,7 +4337,7 @@
           <p:cNvPr id="5" name="Footer Placeholder 4">
             <a:extLst>
               <a:ext uri="{FF2B5EF4-FFF2-40B4-BE49-F238E27FC236}">
-                <a16:creationId xmlns:a16="http://schemas.microsoft.com/office/drawing/2014/main" id="{1A872707-C35E-4A0E-1DEB-AA32D8073252}"/>
+                <a16:creationId xmlns:a16="http://schemas.microsoft.com/office/drawing/2014/main" id="{97A88907-99B9-4EC5-B906-AA657037F0BA}"/>
               </a:ext>
             </a:extLst>
           </p:cNvPr>
@@ -4380,7 +4380,7 @@
           <p:cNvPr id="6" name="Slide Number Placeholder 5">
             <a:extLst>
               <a:ext uri="{FF2B5EF4-FFF2-40B4-BE49-F238E27FC236}">
-                <a16:creationId xmlns:a16="http://schemas.microsoft.com/office/drawing/2014/main" id="{0626AAF8-7787-BB54-2B80-CC50BBC4E15D}"/>
+                <a16:creationId xmlns:a16="http://schemas.microsoft.com/office/drawing/2014/main" id="{98CA262E-6FA5-E039-185B-532A29A63D94}"/>
               </a:ext>
             </a:extLst>
           </p:cNvPr>
@@ -4414,7 +4414,7 @@
             </a:lvl1pPr>
           </a:lstStyle>
           <a:p>
-            <a:fld id="{F4536191-D2F0-4211-9D2E-0A00F1F7E313}" type="slidenum">
+            <a:fld id="{071C626E-CE99-4A38-B122-F832429FE450}" type="slidenum">
               <a:rPr lang="en-US" smtClean="0"/>
               <a:t>‹#›</a:t>
             </a:fld>
@@ -4425,7 +4425,7 @@
     </p:spTree>
     <p:extLst>
       <p:ext uri="{BB962C8B-B14F-4D97-AF65-F5344CB8AC3E}">
-        <p14:creationId xmlns:p14="http://schemas.microsoft.com/office/powerpoint/2010/main" val="3846737490"/>
+        <p14:creationId xmlns:p14="http://schemas.microsoft.com/office/powerpoint/2010/main" val="1738204650"/>
       </p:ext>
     </p:extLst>
   </p:cSld>
@@ -4748,7 +4748,7 @@
           <p:cNvPr id="2" name="Rectangle 1">
             <a:extLst>
               <a:ext uri="{FF2B5EF4-FFF2-40B4-BE49-F238E27FC236}">
-                <a16:creationId xmlns:a16="http://schemas.microsoft.com/office/drawing/2014/main" id="{406849EB-0282-D28F-AE63-1C8710B21493}"/>
+                <a16:creationId xmlns:a16="http://schemas.microsoft.com/office/drawing/2014/main" id="{99AD4373-A7FD-8A9E-1359-6907F793B6B7}"/>
               </a:ext>
             </a:extLst>
           </p:cNvPr>
@@ -4816,7 +4816,7 @@
           <p:cNvPr id="3" name="Rectangle 2">
             <a:extLst>
               <a:ext uri="{FF2B5EF4-FFF2-40B4-BE49-F238E27FC236}">
-                <a16:creationId xmlns:a16="http://schemas.microsoft.com/office/drawing/2014/main" id="{D68714D2-3DFB-0AD2-1B34-75A5B4D7B392}"/>
+                <a16:creationId xmlns:a16="http://schemas.microsoft.com/office/drawing/2014/main" id="{FAE390E4-4560-D1F1-2612-7AC9B8492908}"/>
               </a:ext>
             </a:extLst>
           </p:cNvPr>
@@ -4884,7 +4884,7 @@
           <p:cNvPr id="4" name="TextBox 3">
             <a:extLst>
               <a:ext uri="{FF2B5EF4-FFF2-40B4-BE49-F238E27FC236}">
-                <a16:creationId xmlns:a16="http://schemas.microsoft.com/office/drawing/2014/main" id="{BFD0D914-7EB2-A7F9-9159-D59729C22DA5}"/>
+                <a16:creationId xmlns:a16="http://schemas.microsoft.com/office/drawing/2014/main" id="{6332B4BB-18BF-B2B7-082C-A92B17008C4B}"/>
               </a:ext>
             </a:extLst>
           </p:cNvPr>
@@ -4935,7 +4935,7 @@
           <p:cNvPr id="5" name="TextBox 4">
             <a:extLst>
               <a:ext uri="{FF2B5EF4-FFF2-40B4-BE49-F238E27FC236}">
-                <a16:creationId xmlns:a16="http://schemas.microsoft.com/office/drawing/2014/main" id="{03FCFDA3-1266-CB4C-D40A-D34AAEC31739}"/>
+                <a16:creationId xmlns:a16="http://schemas.microsoft.com/office/drawing/2014/main" id="{D2572A4C-1FF8-C508-88DA-1EA29162DD76}"/>
               </a:ext>
             </a:extLst>
           </p:cNvPr>
@@ -5000,7 +5000,7 @@
           <p:cNvPr id="6" name="TextBox 5">
             <a:extLst>
               <a:ext uri="{FF2B5EF4-FFF2-40B4-BE49-F238E27FC236}">
-                <a16:creationId xmlns:a16="http://schemas.microsoft.com/office/drawing/2014/main" id="{4BE27E42-1FA4-32BA-64A0-E5952C149BD6}"/>
+                <a16:creationId xmlns:a16="http://schemas.microsoft.com/office/drawing/2014/main" id="{A8257E9B-2887-C0BA-B88B-B9C861EB037F}"/>
               </a:ext>
             </a:extLst>
           </p:cNvPr>
@@ -5068,7 +5068,7 @@
                 <a:latin typeface="Segoe UI" panose="020B0502040204020203" pitchFamily="34" charset="0"/>
               </a:rPr>
               <a:t>شهرياً (36.8 مليون ج.م سنوياً لعام 2027)
-إعداد: مدير المنطقة البيعية (</a:t>
+إعداد: عبدالله أحمد إبراهيم — مدير المنطقة البيعية (</a:t>
             </a:r>
             <a:r>
               <a:rPr lang="en-US" sz="1400">
@@ -5085,7 +5085,7 @@
     </p:spTree>
     <p:extLst>
       <p:ext uri="{BB962C8B-B14F-4D97-AF65-F5344CB8AC3E}">
-        <p14:creationId xmlns:p14="http://schemas.microsoft.com/office/powerpoint/2010/main" val="2211928406"/>
+        <p14:creationId xmlns:p14="http://schemas.microsoft.com/office/powerpoint/2010/main" val="3732550319"/>
       </p:ext>
     </p:extLst>
   </p:cSld>
@@ -5117,7 +5117,7 @@
           <p:cNvPr id="2" name="Rectangle 1">
             <a:extLst>
               <a:ext uri="{FF2B5EF4-FFF2-40B4-BE49-F238E27FC236}">
-                <a16:creationId xmlns:a16="http://schemas.microsoft.com/office/drawing/2014/main" id="{A6918E26-CA1D-3DC2-F577-2CD2CB2DB212}"/>
+                <a16:creationId xmlns:a16="http://schemas.microsoft.com/office/drawing/2014/main" id="{6EC41341-72C9-ECAB-B97D-F4D2FF22B88F}"/>
               </a:ext>
             </a:extLst>
           </p:cNvPr>
@@ -5185,7 +5185,7 @@
           <p:cNvPr id="3" name="Rectangle 2">
             <a:extLst>
               <a:ext uri="{FF2B5EF4-FFF2-40B4-BE49-F238E27FC236}">
-                <a16:creationId xmlns:a16="http://schemas.microsoft.com/office/drawing/2014/main" id="{7D3CD786-02F6-0FEA-69CA-58D4F85F96F6}"/>
+                <a16:creationId xmlns:a16="http://schemas.microsoft.com/office/drawing/2014/main" id="{8662BE85-A257-3062-3451-044BCC8C0A86}"/>
               </a:ext>
             </a:extLst>
           </p:cNvPr>
@@ -5253,7 +5253,7 @@
           <p:cNvPr id="4" name="TextBox 3">
             <a:extLst>
               <a:ext uri="{FF2B5EF4-FFF2-40B4-BE49-F238E27FC236}">
-                <a16:creationId xmlns:a16="http://schemas.microsoft.com/office/drawing/2014/main" id="{EFE659F1-87FC-BDC3-077E-B5D02F0C6509}"/>
+                <a16:creationId xmlns:a16="http://schemas.microsoft.com/office/drawing/2014/main" id="{C0D74C91-BE86-6CFD-8564-43314E642030}"/>
               </a:ext>
             </a:extLst>
           </p:cNvPr>
@@ -5321,7 +5321,7 @@
           <p:cNvPr id="5" name="TextBox 4">
             <a:extLst>
               <a:ext uri="{FF2B5EF4-FFF2-40B4-BE49-F238E27FC236}">
-                <a16:creationId xmlns:a16="http://schemas.microsoft.com/office/drawing/2014/main" id="{BFDBA28E-D837-F781-FEBF-90194BF0C446}"/>
+                <a16:creationId xmlns:a16="http://schemas.microsoft.com/office/drawing/2014/main" id="{89B73F45-D917-BF17-BBE1-CA02163BD41C}"/>
               </a:ext>
             </a:extLst>
           </p:cNvPr>
@@ -5368,7 +5368,7 @@
           <p:cNvPr id="6" name="TextBox 5">
             <a:extLst>
               <a:ext uri="{FF2B5EF4-FFF2-40B4-BE49-F238E27FC236}">
-                <a16:creationId xmlns:a16="http://schemas.microsoft.com/office/drawing/2014/main" id="{293E83BF-9D8C-E625-79E3-19FAAF75371A}"/>
+                <a16:creationId xmlns:a16="http://schemas.microsoft.com/office/drawing/2014/main" id="{C9DE7EF1-6F61-B8CE-9F86-F09A67DA4D13}"/>
               </a:ext>
             </a:extLst>
           </p:cNvPr>
@@ -5408,7 +5408,7 @@
           <p:cNvPr id="7" name="Rectangle: Rounded Corners 6">
             <a:extLst>
               <a:ext uri="{FF2B5EF4-FFF2-40B4-BE49-F238E27FC236}">
-                <a16:creationId xmlns:a16="http://schemas.microsoft.com/office/drawing/2014/main" id="{68B5250C-0AC4-B37D-D01D-8F42D54FB863}"/>
+                <a16:creationId xmlns:a16="http://schemas.microsoft.com/office/drawing/2014/main" id="{B3F41EC4-CA24-30E8-85AB-168217832E30}"/>
               </a:ext>
             </a:extLst>
           </p:cNvPr>
@@ -5462,7 +5462,7 @@
           <p:cNvPr id="8" name="TextBox 7">
             <a:extLst>
               <a:ext uri="{FF2B5EF4-FFF2-40B4-BE49-F238E27FC236}">
-                <a16:creationId xmlns:a16="http://schemas.microsoft.com/office/drawing/2014/main" id="{1EAAD570-6DA3-C222-6CB0-8065745D9DE9}"/>
+                <a16:creationId xmlns:a16="http://schemas.microsoft.com/office/drawing/2014/main" id="{1DD89531-7EAC-3CBF-93AB-41561C6ECAE7}"/>
               </a:ext>
             </a:extLst>
           </p:cNvPr>
@@ -5512,7 +5512,7 @@
           <p:cNvPr id="9" name="TextBox 8">
             <a:extLst>
               <a:ext uri="{FF2B5EF4-FFF2-40B4-BE49-F238E27FC236}">
-                <a16:creationId xmlns:a16="http://schemas.microsoft.com/office/drawing/2014/main" id="{050A437C-2B8E-34A0-7DD1-6CB17CC90175}"/>
+                <a16:creationId xmlns:a16="http://schemas.microsoft.com/office/drawing/2014/main" id="{9B9B8517-0276-2EBD-B24D-354357DF4282}"/>
               </a:ext>
             </a:extLst>
           </p:cNvPr>
@@ -5601,7 +5601,7 @@
           <p:cNvPr id="10" name="Rectangle: Rounded Corners 9">
             <a:extLst>
               <a:ext uri="{FF2B5EF4-FFF2-40B4-BE49-F238E27FC236}">
-                <a16:creationId xmlns:a16="http://schemas.microsoft.com/office/drawing/2014/main" id="{0A61BAAC-37DD-C34E-82E6-6FF513696948}"/>
+                <a16:creationId xmlns:a16="http://schemas.microsoft.com/office/drawing/2014/main" id="{133313C9-6251-9B14-EAD7-0D8C3AF903CB}"/>
               </a:ext>
             </a:extLst>
           </p:cNvPr>
@@ -5655,7 +5655,7 @@
           <p:cNvPr id="11" name="TextBox 10">
             <a:extLst>
               <a:ext uri="{FF2B5EF4-FFF2-40B4-BE49-F238E27FC236}">
-                <a16:creationId xmlns:a16="http://schemas.microsoft.com/office/drawing/2014/main" id="{229AF6C5-77F1-6508-3BCD-7E7358E29120}"/>
+                <a16:creationId xmlns:a16="http://schemas.microsoft.com/office/drawing/2014/main" id="{8CD6B6AB-2B7B-3931-5A5A-7A0259B54750}"/>
               </a:ext>
             </a:extLst>
           </p:cNvPr>
@@ -5705,7 +5705,7 @@
           <p:cNvPr id="12" name="TextBox 11">
             <a:extLst>
               <a:ext uri="{FF2B5EF4-FFF2-40B4-BE49-F238E27FC236}">
-                <a16:creationId xmlns:a16="http://schemas.microsoft.com/office/drawing/2014/main" id="{EBF4E13B-C4DA-A9AF-5968-57A14A6E154C}"/>
+                <a16:creationId xmlns:a16="http://schemas.microsoft.com/office/drawing/2014/main" id="{CA36A8EE-9265-54A3-7625-C76F33D727FD}"/>
               </a:ext>
             </a:extLst>
           </p:cNvPr>
@@ -5776,7 +5776,7 @@
           <p:cNvPr id="13" name="Rectangle: Rounded Corners 12">
             <a:extLst>
               <a:ext uri="{FF2B5EF4-FFF2-40B4-BE49-F238E27FC236}">
-                <a16:creationId xmlns:a16="http://schemas.microsoft.com/office/drawing/2014/main" id="{BB2BE14D-04C6-32A5-F482-B0EA21EF12FE}"/>
+                <a16:creationId xmlns:a16="http://schemas.microsoft.com/office/drawing/2014/main" id="{F5386795-5B04-8E97-F7FF-9F036BB6FABB}"/>
               </a:ext>
             </a:extLst>
           </p:cNvPr>
@@ -5830,7 +5830,7 @@
           <p:cNvPr id="14" name="TextBox 13">
             <a:extLst>
               <a:ext uri="{FF2B5EF4-FFF2-40B4-BE49-F238E27FC236}">
-                <a16:creationId xmlns:a16="http://schemas.microsoft.com/office/drawing/2014/main" id="{CC165F43-F785-5506-F885-7D1A027D5999}"/>
+                <a16:creationId xmlns:a16="http://schemas.microsoft.com/office/drawing/2014/main" id="{BBEEBAF9-70BE-3640-7A51-8011E240F9BE}"/>
               </a:ext>
             </a:extLst>
           </p:cNvPr>
@@ -5880,7 +5880,7 @@
           <p:cNvPr id="15" name="TextBox 14">
             <a:extLst>
               <a:ext uri="{FF2B5EF4-FFF2-40B4-BE49-F238E27FC236}">
-                <a16:creationId xmlns:a16="http://schemas.microsoft.com/office/drawing/2014/main" id="{48DC9195-BD57-679E-A5C9-B5240417E86F}"/>
+                <a16:creationId xmlns:a16="http://schemas.microsoft.com/office/drawing/2014/main" id="{39F9CB0F-12EE-B80A-07CF-79E4308885F3}"/>
               </a:ext>
             </a:extLst>
           </p:cNvPr>
@@ -5985,7 +5985,7 @@
     </p:spTree>
     <p:extLst>
       <p:ext uri="{BB962C8B-B14F-4D97-AF65-F5344CB8AC3E}">
-        <p14:creationId xmlns:p14="http://schemas.microsoft.com/office/powerpoint/2010/main" val="1878602207"/>
+        <p14:creationId xmlns:p14="http://schemas.microsoft.com/office/powerpoint/2010/main" val="1983146838"/>
       </p:ext>
     </p:extLst>
   </p:cSld>
@@ -6017,7 +6017,7 @@
           <p:cNvPr id="2" name="Rectangle 1">
             <a:extLst>
               <a:ext uri="{FF2B5EF4-FFF2-40B4-BE49-F238E27FC236}">
-                <a16:creationId xmlns:a16="http://schemas.microsoft.com/office/drawing/2014/main" id="{C7040EF1-5557-C7B6-D468-66645E3434B6}"/>
+                <a16:creationId xmlns:a16="http://schemas.microsoft.com/office/drawing/2014/main" id="{5D425EDB-4FAA-436F-71DD-42F803CDF2B9}"/>
               </a:ext>
             </a:extLst>
           </p:cNvPr>
@@ -6085,7 +6085,7 @@
           <p:cNvPr id="3" name="Rectangle 2">
             <a:extLst>
               <a:ext uri="{FF2B5EF4-FFF2-40B4-BE49-F238E27FC236}">
-                <a16:creationId xmlns:a16="http://schemas.microsoft.com/office/drawing/2014/main" id="{9FF2F667-876F-87AE-6868-B4EAF43C33C6}"/>
+                <a16:creationId xmlns:a16="http://schemas.microsoft.com/office/drawing/2014/main" id="{2597E468-D355-F1C1-2866-BE439D304160}"/>
               </a:ext>
             </a:extLst>
           </p:cNvPr>
@@ -6153,7 +6153,7 @@
           <p:cNvPr id="4" name="TextBox 3">
             <a:extLst>
               <a:ext uri="{FF2B5EF4-FFF2-40B4-BE49-F238E27FC236}">
-                <a16:creationId xmlns:a16="http://schemas.microsoft.com/office/drawing/2014/main" id="{6143A31F-3610-354E-262E-F71B55E7B83A}"/>
+                <a16:creationId xmlns:a16="http://schemas.microsoft.com/office/drawing/2014/main" id="{BD520D86-34B8-61C8-3BD5-7BF8463364BB}"/>
               </a:ext>
             </a:extLst>
           </p:cNvPr>
@@ -6221,7 +6221,7 @@
           <p:cNvPr id="5" name="TextBox 4">
             <a:extLst>
               <a:ext uri="{FF2B5EF4-FFF2-40B4-BE49-F238E27FC236}">
-                <a16:creationId xmlns:a16="http://schemas.microsoft.com/office/drawing/2014/main" id="{872AF5FA-2312-B271-FDF6-C56A04CA8CB5}"/>
+                <a16:creationId xmlns:a16="http://schemas.microsoft.com/office/drawing/2014/main" id="{8DB0EE62-7FFD-A70C-1BE3-06B989455F26}"/>
               </a:ext>
             </a:extLst>
           </p:cNvPr>
@@ -6286,7 +6286,7 @@
           <p:cNvPr id="6" name="TextBox 5">
             <a:extLst>
               <a:ext uri="{FF2B5EF4-FFF2-40B4-BE49-F238E27FC236}">
-                <a16:creationId xmlns:a16="http://schemas.microsoft.com/office/drawing/2014/main" id="{A978D38A-977C-9933-62E5-D3F0E8FED243}"/>
+                <a16:creationId xmlns:a16="http://schemas.microsoft.com/office/drawing/2014/main" id="{C6C601AD-9398-F4AC-EB40-9E45A64824EB}"/>
               </a:ext>
             </a:extLst>
           </p:cNvPr>
@@ -6326,7 +6326,7 @@
           <p:cNvPr id="7" name="Rectangle: Rounded Corners 6">
             <a:extLst>
               <a:ext uri="{FF2B5EF4-FFF2-40B4-BE49-F238E27FC236}">
-                <a16:creationId xmlns:a16="http://schemas.microsoft.com/office/drawing/2014/main" id="{ED3595E4-15CB-4995-0BB6-97557A0B910F}"/>
+                <a16:creationId xmlns:a16="http://schemas.microsoft.com/office/drawing/2014/main" id="{18B3A820-03C1-70B1-7BF9-000AC6F1805E}"/>
               </a:ext>
             </a:extLst>
           </p:cNvPr>
@@ -6380,7 +6380,7 @@
           <p:cNvPr id="8" name="TextBox 7">
             <a:extLst>
               <a:ext uri="{FF2B5EF4-FFF2-40B4-BE49-F238E27FC236}">
-                <a16:creationId xmlns:a16="http://schemas.microsoft.com/office/drawing/2014/main" id="{C1A9298D-B851-8997-9CBB-48A9E5B34BA2}"/>
+                <a16:creationId xmlns:a16="http://schemas.microsoft.com/office/drawing/2014/main" id="{D9D7201A-92E5-734F-AF82-B7F2D2DCBD1A}"/>
               </a:ext>
             </a:extLst>
           </p:cNvPr>
@@ -6430,7 +6430,7 @@
           <p:cNvPr id="9" name="TextBox 8">
             <a:extLst>
               <a:ext uri="{FF2B5EF4-FFF2-40B4-BE49-F238E27FC236}">
-                <a16:creationId xmlns:a16="http://schemas.microsoft.com/office/drawing/2014/main" id="{D9168323-74F7-7C43-A180-8B4A250D56AC}"/>
+                <a16:creationId xmlns:a16="http://schemas.microsoft.com/office/drawing/2014/main" id="{4D62D02B-D88D-55D7-11E9-80D366C07E13}"/>
               </a:ext>
             </a:extLst>
           </p:cNvPr>
@@ -6483,7 +6483,7 @@
           <p:cNvPr id="10" name="Rectangle: Rounded Corners 9">
             <a:extLst>
               <a:ext uri="{FF2B5EF4-FFF2-40B4-BE49-F238E27FC236}">
-                <a16:creationId xmlns:a16="http://schemas.microsoft.com/office/drawing/2014/main" id="{3FB72638-877B-416E-46FC-30B20A57B11E}"/>
+                <a16:creationId xmlns:a16="http://schemas.microsoft.com/office/drawing/2014/main" id="{4ECBDE1A-2DBA-E62B-A1FF-9EAC245C729B}"/>
               </a:ext>
             </a:extLst>
           </p:cNvPr>
@@ -6537,7 +6537,7 @@
           <p:cNvPr id="11" name="TextBox 10">
             <a:extLst>
               <a:ext uri="{FF2B5EF4-FFF2-40B4-BE49-F238E27FC236}">
-                <a16:creationId xmlns:a16="http://schemas.microsoft.com/office/drawing/2014/main" id="{A38CF16A-7402-D894-E4CA-EEE10CBF2C65}"/>
+                <a16:creationId xmlns:a16="http://schemas.microsoft.com/office/drawing/2014/main" id="{2D6278D0-6850-02B1-B801-BE2DD285A070}"/>
               </a:ext>
             </a:extLst>
           </p:cNvPr>
@@ -6587,7 +6587,7 @@
           <p:cNvPr id="12" name="TextBox 11">
             <a:extLst>
               <a:ext uri="{FF2B5EF4-FFF2-40B4-BE49-F238E27FC236}">
-                <a16:creationId xmlns:a16="http://schemas.microsoft.com/office/drawing/2014/main" id="{9DC8557F-7F23-1148-B8CB-BF088FB0D825}"/>
+                <a16:creationId xmlns:a16="http://schemas.microsoft.com/office/drawing/2014/main" id="{9D2D59D7-F498-6528-91A2-14BE820431DB}"/>
               </a:ext>
             </a:extLst>
           </p:cNvPr>
@@ -6692,7 +6692,7 @@
     </p:spTree>
     <p:extLst>
       <p:ext uri="{BB962C8B-B14F-4D97-AF65-F5344CB8AC3E}">
-        <p14:creationId xmlns:p14="http://schemas.microsoft.com/office/powerpoint/2010/main" val="2273652575"/>
+        <p14:creationId xmlns:p14="http://schemas.microsoft.com/office/powerpoint/2010/main" val="243491674"/>
       </p:ext>
     </p:extLst>
   </p:cSld>
@@ -6724,7 +6724,7 @@
           <p:cNvPr id="2" name="Rectangle 1">
             <a:extLst>
               <a:ext uri="{FF2B5EF4-FFF2-40B4-BE49-F238E27FC236}">
-                <a16:creationId xmlns:a16="http://schemas.microsoft.com/office/drawing/2014/main" id="{7F083444-70A6-6130-051A-8EB7B8CCEF13}"/>
+                <a16:creationId xmlns:a16="http://schemas.microsoft.com/office/drawing/2014/main" id="{A364716E-4376-0D53-0813-8E735E8B90A1}"/>
               </a:ext>
             </a:extLst>
           </p:cNvPr>
@@ -6792,7 +6792,7 @@
           <p:cNvPr id="3" name="Rectangle 2">
             <a:extLst>
               <a:ext uri="{FF2B5EF4-FFF2-40B4-BE49-F238E27FC236}">
-                <a16:creationId xmlns:a16="http://schemas.microsoft.com/office/drawing/2014/main" id="{FC92774D-7A71-DE23-E8EB-1D24DDA8A7DA}"/>
+                <a16:creationId xmlns:a16="http://schemas.microsoft.com/office/drawing/2014/main" id="{DFD3DF20-3BE2-1DCA-B27D-409607C0489D}"/>
               </a:ext>
             </a:extLst>
           </p:cNvPr>
@@ -6860,7 +6860,7 @@
           <p:cNvPr id="4" name="TextBox 3">
             <a:extLst>
               <a:ext uri="{FF2B5EF4-FFF2-40B4-BE49-F238E27FC236}">
-                <a16:creationId xmlns:a16="http://schemas.microsoft.com/office/drawing/2014/main" id="{7194073C-8F63-E4A6-2D05-31044D14B1C8}"/>
+                <a16:creationId xmlns:a16="http://schemas.microsoft.com/office/drawing/2014/main" id="{1F2ABB06-AE3D-3B1A-63CF-5A1CA51325CE}"/>
               </a:ext>
             </a:extLst>
           </p:cNvPr>
@@ -6928,7 +6928,7 @@
           <p:cNvPr id="5" name="TextBox 4">
             <a:extLst>
               <a:ext uri="{FF2B5EF4-FFF2-40B4-BE49-F238E27FC236}">
-                <a16:creationId xmlns:a16="http://schemas.microsoft.com/office/drawing/2014/main" id="{12270770-6917-E99D-D212-DB158385706A}"/>
+                <a16:creationId xmlns:a16="http://schemas.microsoft.com/office/drawing/2014/main" id="{B6014D2F-AD07-6CE2-2F70-FEB37E1FE648}"/>
               </a:ext>
             </a:extLst>
           </p:cNvPr>
@@ -6975,7 +6975,7 @@
           <p:cNvPr id="6" name="TextBox 5">
             <a:extLst>
               <a:ext uri="{FF2B5EF4-FFF2-40B4-BE49-F238E27FC236}">
-                <a16:creationId xmlns:a16="http://schemas.microsoft.com/office/drawing/2014/main" id="{5D0E175F-4C7D-9BC2-05B5-CD47D8C48D4A}"/>
+                <a16:creationId xmlns:a16="http://schemas.microsoft.com/office/drawing/2014/main" id="{F04E40F0-2D69-3C47-9138-9522E4454689}"/>
               </a:ext>
             </a:extLst>
           </p:cNvPr>
@@ -7015,7 +7015,7 @@
           <p:cNvPr id="7" name="Rectangle: Rounded Corners 6">
             <a:extLst>
               <a:ext uri="{FF2B5EF4-FFF2-40B4-BE49-F238E27FC236}">
-                <a16:creationId xmlns:a16="http://schemas.microsoft.com/office/drawing/2014/main" id="{DAA0EF33-B7C0-BD46-9095-C7C4D51EFD85}"/>
+                <a16:creationId xmlns:a16="http://schemas.microsoft.com/office/drawing/2014/main" id="{F6280556-2AAB-E8D7-78CD-77113A8D0D82}"/>
               </a:ext>
             </a:extLst>
           </p:cNvPr>
@@ -7069,7 +7069,7 @@
           <p:cNvPr id="8" name="TextBox 7">
             <a:extLst>
               <a:ext uri="{FF2B5EF4-FFF2-40B4-BE49-F238E27FC236}">
-                <a16:creationId xmlns:a16="http://schemas.microsoft.com/office/drawing/2014/main" id="{F093EE8B-985A-EE1A-13C3-72D5F824D48D}"/>
+                <a16:creationId xmlns:a16="http://schemas.microsoft.com/office/drawing/2014/main" id="{72A21439-607A-5DF9-D5C2-10CE8F4BAA5C}"/>
               </a:ext>
             </a:extLst>
           </p:cNvPr>
@@ -7116,7 +7116,7 @@
           <p:cNvPr id="9" name="TextBox 8">
             <a:extLst>
               <a:ext uri="{FF2B5EF4-FFF2-40B4-BE49-F238E27FC236}">
-                <a16:creationId xmlns:a16="http://schemas.microsoft.com/office/drawing/2014/main" id="{043A6FE6-5FDD-4835-F46F-AFA784436209}"/>
+                <a16:creationId xmlns:a16="http://schemas.microsoft.com/office/drawing/2014/main" id="{DC4450D8-B7B5-09C6-8CDE-095769425393}"/>
               </a:ext>
             </a:extLst>
           </p:cNvPr>
@@ -7172,7 +7172,7 @@
           <p:cNvPr id="10" name="Rectangle: Rounded Corners 9">
             <a:extLst>
               <a:ext uri="{FF2B5EF4-FFF2-40B4-BE49-F238E27FC236}">
-                <a16:creationId xmlns:a16="http://schemas.microsoft.com/office/drawing/2014/main" id="{140A7383-50B7-A840-85CC-1759FA3B9DD2}"/>
+                <a16:creationId xmlns:a16="http://schemas.microsoft.com/office/drawing/2014/main" id="{1BC0EDA4-E6F4-E54B-AEF6-954F8499C6FD}"/>
               </a:ext>
             </a:extLst>
           </p:cNvPr>
@@ -7226,7 +7226,7 @@
           <p:cNvPr id="11" name="TextBox 10">
             <a:extLst>
               <a:ext uri="{FF2B5EF4-FFF2-40B4-BE49-F238E27FC236}">
-                <a16:creationId xmlns:a16="http://schemas.microsoft.com/office/drawing/2014/main" id="{334679FA-83AA-24BB-03A1-F6178571B905}"/>
+                <a16:creationId xmlns:a16="http://schemas.microsoft.com/office/drawing/2014/main" id="{D0882FA7-0D91-D287-8000-CBD6C6D19FA5}"/>
               </a:ext>
             </a:extLst>
           </p:cNvPr>
@@ -7273,7 +7273,7 @@
           <p:cNvPr id="12" name="TextBox 11">
             <a:extLst>
               <a:ext uri="{FF2B5EF4-FFF2-40B4-BE49-F238E27FC236}">
-                <a16:creationId xmlns:a16="http://schemas.microsoft.com/office/drawing/2014/main" id="{312E89EB-3B86-39D6-0E0B-BE53B3305CFB}"/>
+                <a16:creationId xmlns:a16="http://schemas.microsoft.com/office/drawing/2014/main" id="{D1C1B49B-B013-8BE0-C93A-08A4CD6F503D}"/>
               </a:ext>
             </a:extLst>
           </p:cNvPr>
@@ -7344,7 +7344,7 @@
           <p:cNvPr id="13" name="Rectangle: Rounded Corners 12">
             <a:extLst>
               <a:ext uri="{FF2B5EF4-FFF2-40B4-BE49-F238E27FC236}">
-                <a16:creationId xmlns:a16="http://schemas.microsoft.com/office/drawing/2014/main" id="{DFC0AB95-8D8C-9D4E-77EF-5F1773C2CDDB}"/>
+                <a16:creationId xmlns:a16="http://schemas.microsoft.com/office/drawing/2014/main" id="{A2522FA7-B51F-59D9-ED38-DE09233DB7D4}"/>
               </a:ext>
             </a:extLst>
           </p:cNvPr>
@@ -7398,7 +7398,7 @@
           <p:cNvPr id="14" name="TextBox 13">
             <a:extLst>
               <a:ext uri="{FF2B5EF4-FFF2-40B4-BE49-F238E27FC236}">
-                <a16:creationId xmlns:a16="http://schemas.microsoft.com/office/drawing/2014/main" id="{A5AD8FF4-6B82-28A8-8A78-DE731403B013}"/>
+                <a16:creationId xmlns:a16="http://schemas.microsoft.com/office/drawing/2014/main" id="{909D01A1-B837-45C6-CBDF-818752A78AAE}"/>
               </a:ext>
             </a:extLst>
           </p:cNvPr>
@@ -7445,7 +7445,7 @@
           <p:cNvPr id="15" name="TextBox 14">
             <a:extLst>
               <a:ext uri="{FF2B5EF4-FFF2-40B4-BE49-F238E27FC236}">
-                <a16:creationId xmlns:a16="http://schemas.microsoft.com/office/drawing/2014/main" id="{D264EA1A-2CDF-B4FD-EA83-CA0E9238B9B8}"/>
+                <a16:creationId xmlns:a16="http://schemas.microsoft.com/office/drawing/2014/main" id="{B4848FB8-89A0-7068-83B4-4095087946C7}"/>
               </a:ext>
             </a:extLst>
           </p:cNvPr>
@@ -7499,7 +7499,7 @@
     </p:spTree>
     <p:extLst>
       <p:ext uri="{BB962C8B-B14F-4D97-AF65-F5344CB8AC3E}">
-        <p14:creationId xmlns:p14="http://schemas.microsoft.com/office/powerpoint/2010/main" val="2175133513"/>
+        <p14:creationId xmlns:p14="http://schemas.microsoft.com/office/powerpoint/2010/main" val="2969305958"/>
       </p:ext>
     </p:extLst>
   </p:cSld>
@@ -7531,7 +7531,7 @@
           <p:cNvPr id="2" name="Rectangle 1">
             <a:extLst>
               <a:ext uri="{FF2B5EF4-FFF2-40B4-BE49-F238E27FC236}">
-                <a16:creationId xmlns:a16="http://schemas.microsoft.com/office/drawing/2014/main" id="{E72DDE10-E1D8-264A-885D-EA0296C0060D}"/>
+                <a16:creationId xmlns:a16="http://schemas.microsoft.com/office/drawing/2014/main" id="{05D7DFD5-54CC-0888-C08B-DA098CF921A6}"/>
               </a:ext>
             </a:extLst>
           </p:cNvPr>
@@ -7599,7 +7599,7 @@
           <p:cNvPr id="3" name="Rectangle 2">
             <a:extLst>
               <a:ext uri="{FF2B5EF4-FFF2-40B4-BE49-F238E27FC236}">
-                <a16:creationId xmlns:a16="http://schemas.microsoft.com/office/drawing/2014/main" id="{0E429A41-DC67-C64C-37A1-654B2C3E92EE}"/>
+                <a16:creationId xmlns:a16="http://schemas.microsoft.com/office/drawing/2014/main" id="{F2ECFD47-593D-6667-6B74-A03685E1C14D}"/>
               </a:ext>
             </a:extLst>
           </p:cNvPr>
@@ -7667,7 +7667,7 @@
           <p:cNvPr id="4" name="TextBox 3">
             <a:extLst>
               <a:ext uri="{FF2B5EF4-FFF2-40B4-BE49-F238E27FC236}">
-                <a16:creationId xmlns:a16="http://schemas.microsoft.com/office/drawing/2014/main" id="{DE9A6BF1-E579-F34C-BC88-DDE420D8E894}"/>
+                <a16:creationId xmlns:a16="http://schemas.microsoft.com/office/drawing/2014/main" id="{5B2E2791-27C0-55D2-23E5-88F5B75C9261}"/>
               </a:ext>
             </a:extLst>
           </p:cNvPr>
@@ -7735,7 +7735,7 @@
           <p:cNvPr id="5" name="TextBox 4">
             <a:extLst>
               <a:ext uri="{FF2B5EF4-FFF2-40B4-BE49-F238E27FC236}">
-                <a16:creationId xmlns:a16="http://schemas.microsoft.com/office/drawing/2014/main" id="{CBA68CFE-76E1-6ABC-41BE-233B162D9BEC}"/>
+                <a16:creationId xmlns:a16="http://schemas.microsoft.com/office/drawing/2014/main" id="{A805EC48-85C2-DE30-1868-F90E9391021E}"/>
               </a:ext>
             </a:extLst>
           </p:cNvPr>
@@ -7782,7 +7782,7 @@
           <p:cNvPr id="6" name="TextBox 5">
             <a:extLst>
               <a:ext uri="{FF2B5EF4-FFF2-40B4-BE49-F238E27FC236}">
-                <a16:creationId xmlns:a16="http://schemas.microsoft.com/office/drawing/2014/main" id="{79FD5676-78B7-28C4-B8A0-8543247C81FD}"/>
+                <a16:creationId xmlns:a16="http://schemas.microsoft.com/office/drawing/2014/main" id="{90D650FA-ECD1-DA91-924A-7C1166D0FC33}"/>
               </a:ext>
             </a:extLst>
           </p:cNvPr>
@@ -7822,7 +7822,7 @@
           <p:cNvPr id="7" name="Rectangle: Rounded Corners 6">
             <a:extLst>
               <a:ext uri="{FF2B5EF4-FFF2-40B4-BE49-F238E27FC236}">
-                <a16:creationId xmlns:a16="http://schemas.microsoft.com/office/drawing/2014/main" id="{9E9950B1-BAAF-7713-0D02-980C542DD375}"/>
+                <a16:creationId xmlns:a16="http://schemas.microsoft.com/office/drawing/2014/main" id="{DAC0259C-0476-2AF4-2FD2-753C3AFC9812}"/>
               </a:ext>
             </a:extLst>
           </p:cNvPr>
@@ -7876,7 +7876,7 @@
           <p:cNvPr id="8" name="TextBox 7">
             <a:extLst>
               <a:ext uri="{FF2B5EF4-FFF2-40B4-BE49-F238E27FC236}">
-                <a16:creationId xmlns:a16="http://schemas.microsoft.com/office/drawing/2014/main" id="{FC3AB9D2-2AA2-1EC5-7DBF-6CC414AE7F1B}"/>
+                <a16:creationId xmlns:a16="http://schemas.microsoft.com/office/drawing/2014/main" id="{40322D4A-E734-8306-782E-EB0DCC8CA955}"/>
               </a:ext>
             </a:extLst>
           </p:cNvPr>
@@ -7923,7 +7923,7 @@
           <p:cNvPr id="9" name="TextBox 8">
             <a:extLst>
               <a:ext uri="{FF2B5EF4-FFF2-40B4-BE49-F238E27FC236}">
-                <a16:creationId xmlns:a16="http://schemas.microsoft.com/office/drawing/2014/main" id="{2EF74220-A84F-7A21-C8B2-260EDE72140D}"/>
+                <a16:creationId xmlns:a16="http://schemas.microsoft.com/office/drawing/2014/main" id="{EAA39776-D15F-E104-7C9C-99FD4C7C56E4}"/>
               </a:ext>
             </a:extLst>
           </p:cNvPr>
@@ -8012,7 +8012,7 @@
           <p:cNvPr id="10" name="Rectangle: Rounded Corners 9">
             <a:extLst>
               <a:ext uri="{FF2B5EF4-FFF2-40B4-BE49-F238E27FC236}">
-                <a16:creationId xmlns:a16="http://schemas.microsoft.com/office/drawing/2014/main" id="{2E5CA94E-7597-9F8A-2DE3-A0425EDF2DFA}"/>
+                <a16:creationId xmlns:a16="http://schemas.microsoft.com/office/drawing/2014/main" id="{D7D6DB29-E0B2-1F42-51E2-03215825E3C0}"/>
               </a:ext>
             </a:extLst>
           </p:cNvPr>
@@ -8066,7 +8066,7 @@
           <p:cNvPr id="11" name="TextBox 10">
             <a:extLst>
               <a:ext uri="{FF2B5EF4-FFF2-40B4-BE49-F238E27FC236}">
-                <a16:creationId xmlns:a16="http://schemas.microsoft.com/office/drawing/2014/main" id="{45DF5182-40DF-0979-56F2-53EBEBA8997D}"/>
+                <a16:creationId xmlns:a16="http://schemas.microsoft.com/office/drawing/2014/main" id="{F22F0A57-44EB-2D49-15A4-B8A55B42B5FC}"/>
               </a:ext>
             </a:extLst>
           </p:cNvPr>
@@ -8113,7 +8113,7 @@
           <p:cNvPr id="12" name="TextBox 11">
             <a:extLst>
               <a:ext uri="{FF2B5EF4-FFF2-40B4-BE49-F238E27FC236}">
-                <a16:creationId xmlns:a16="http://schemas.microsoft.com/office/drawing/2014/main" id="{20386E49-E6EC-424F-8A5D-8E4A12882575}"/>
+                <a16:creationId xmlns:a16="http://schemas.microsoft.com/office/drawing/2014/main" id="{1472361F-6BC5-E71C-91C2-2AC36533D03E}"/>
               </a:ext>
             </a:extLst>
           </p:cNvPr>
@@ -8166,7 +8166,7 @@
           <p:cNvPr id="13" name="Rectangle: Rounded Corners 12">
             <a:extLst>
               <a:ext uri="{FF2B5EF4-FFF2-40B4-BE49-F238E27FC236}">
-                <a16:creationId xmlns:a16="http://schemas.microsoft.com/office/drawing/2014/main" id="{125A915D-EC01-5A53-BA67-284554FBB2F7}"/>
+                <a16:creationId xmlns:a16="http://schemas.microsoft.com/office/drawing/2014/main" id="{F6180D0E-D9B5-5CE9-F526-D54A9F9216CD}"/>
               </a:ext>
             </a:extLst>
           </p:cNvPr>
@@ -8220,7 +8220,7 @@
           <p:cNvPr id="14" name="TextBox 13">
             <a:extLst>
               <a:ext uri="{FF2B5EF4-FFF2-40B4-BE49-F238E27FC236}">
-                <a16:creationId xmlns:a16="http://schemas.microsoft.com/office/drawing/2014/main" id="{9D7DDCD0-CA47-9A70-FCB8-445A85C9E240}"/>
+                <a16:creationId xmlns:a16="http://schemas.microsoft.com/office/drawing/2014/main" id="{D91A1DBD-ACF5-67D3-5D25-AA09D0A2EF39}"/>
               </a:ext>
             </a:extLst>
           </p:cNvPr>
@@ -8267,7 +8267,7 @@
           <p:cNvPr id="15" name="TextBox 14">
             <a:extLst>
               <a:ext uri="{FF2B5EF4-FFF2-40B4-BE49-F238E27FC236}">
-                <a16:creationId xmlns:a16="http://schemas.microsoft.com/office/drawing/2014/main" id="{E4281742-80D6-EFC1-1769-192E54E3ADB2}"/>
+                <a16:creationId xmlns:a16="http://schemas.microsoft.com/office/drawing/2014/main" id="{F4DEF545-2537-9882-E72B-C08A3749C600}"/>
               </a:ext>
             </a:extLst>
           </p:cNvPr>
@@ -8338,7 +8338,7 @@
           <p:cNvPr id="16" name="Rectangle: Rounded Corners 15">
             <a:extLst>
               <a:ext uri="{FF2B5EF4-FFF2-40B4-BE49-F238E27FC236}">
-                <a16:creationId xmlns:a16="http://schemas.microsoft.com/office/drawing/2014/main" id="{FCF65493-8549-6E3A-0555-8C438579F25D}"/>
+                <a16:creationId xmlns:a16="http://schemas.microsoft.com/office/drawing/2014/main" id="{4DF8C98A-AA93-051C-81FB-97548605B45A}"/>
               </a:ext>
             </a:extLst>
           </p:cNvPr>
@@ -8392,7 +8392,7 @@
           <p:cNvPr id="17" name="TextBox 16">
             <a:extLst>
               <a:ext uri="{FF2B5EF4-FFF2-40B4-BE49-F238E27FC236}">
-                <a16:creationId xmlns:a16="http://schemas.microsoft.com/office/drawing/2014/main" id="{23341E83-6438-3684-9F93-7AACBBFDB2F5}"/>
+                <a16:creationId xmlns:a16="http://schemas.microsoft.com/office/drawing/2014/main" id="{B8873DC9-CA3F-20F2-AE88-C22AFC1FF969}"/>
               </a:ext>
             </a:extLst>
           </p:cNvPr>
@@ -8433,7 +8433,7 @@
           <p:cNvPr id="18" name="TextBox 17">
             <a:extLst>
               <a:ext uri="{FF2B5EF4-FFF2-40B4-BE49-F238E27FC236}">
-                <a16:creationId xmlns:a16="http://schemas.microsoft.com/office/drawing/2014/main" id="{6662CD8F-0FB4-1835-D869-09831FA65143}"/>
+                <a16:creationId xmlns:a16="http://schemas.microsoft.com/office/drawing/2014/main" id="{8EECDDE0-E7C7-4DC6-5A3E-B6163FF1BF3D}"/>
               </a:ext>
             </a:extLst>
           </p:cNvPr>
@@ -8484,7 +8484,7 @@
     </p:spTree>
     <p:extLst>
       <p:ext uri="{BB962C8B-B14F-4D97-AF65-F5344CB8AC3E}">
-        <p14:creationId xmlns:p14="http://schemas.microsoft.com/office/powerpoint/2010/main" val="159712778"/>
+        <p14:creationId xmlns:p14="http://schemas.microsoft.com/office/powerpoint/2010/main" val="624431039"/>
       </p:ext>
     </p:extLst>
   </p:cSld>
@@ -8516,7 +8516,7 @@
           <p:cNvPr id="2" name="Rectangle 1">
             <a:extLst>
               <a:ext uri="{FF2B5EF4-FFF2-40B4-BE49-F238E27FC236}">
-                <a16:creationId xmlns:a16="http://schemas.microsoft.com/office/drawing/2014/main" id="{BAE199E5-43B4-F307-4658-19BCDD3976DA}"/>
+                <a16:creationId xmlns:a16="http://schemas.microsoft.com/office/drawing/2014/main" id="{F0C57B8E-B1F1-7990-EFDA-BE06F35C8B2A}"/>
               </a:ext>
             </a:extLst>
           </p:cNvPr>
@@ -8584,7 +8584,7 @@
           <p:cNvPr id="3" name="Rectangle 2">
             <a:extLst>
               <a:ext uri="{FF2B5EF4-FFF2-40B4-BE49-F238E27FC236}">
-                <a16:creationId xmlns:a16="http://schemas.microsoft.com/office/drawing/2014/main" id="{1403555D-27CE-05A1-B22B-AAE095CACF7F}"/>
+                <a16:creationId xmlns:a16="http://schemas.microsoft.com/office/drawing/2014/main" id="{EC656F08-F9D5-CD7E-1434-74FC77026CB6}"/>
               </a:ext>
             </a:extLst>
           </p:cNvPr>
@@ -8652,7 +8652,7 @@
           <p:cNvPr id="4" name="TextBox 3">
             <a:extLst>
               <a:ext uri="{FF2B5EF4-FFF2-40B4-BE49-F238E27FC236}">
-                <a16:creationId xmlns:a16="http://schemas.microsoft.com/office/drawing/2014/main" id="{65BAC43A-0260-F78F-F437-C1665EC2C754}"/>
+                <a16:creationId xmlns:a16="http://schemas.microsoft.com/office/drawing/2014/main" id="{2E522827-74EB-73ED-66D8-7B006AA7364F}"/>
               </a:ext>
             </a:extLst>
           </p:cNvPr>
@@ -8720,7 +8720,7 @@
           <p:cNvPr id="5" name="TextBox 4">
             <a:extLst>
               <a:ext uri="{FF2B5EF4-FFF2-40B4-BE49-F238E27FC236}">
-                <a16:creationId xmlns:a16="http://schemas.microsoft.com/office/drawing/2014/main" id="{D3EEE71D-79EC-E152-FA22-0FB96D337AFA}"/>
+                <a16:creationId xmlns:a16="http://schemas.microsoft.com/office/drawing/2014/main" id="{3B574171-3619-12AD-98C2-DFE7B7CFCB4E}"/>
               </a:ext>
             </a:extLst>
           </p:cNvPr>
@@ -8785,7 +8785,7 @@
           <p:cNvPr id="6" name="TextBox 5">
             <a:extLst>
               <a:ext uri="{FF2B5EF4-FFF2-40B4-BE49-F238E27FC236}">
-                <a16:creationId xmlns:a16="http://schemas.microsoft.com/office/drawing/2014/main" id="{A51B3291-B6BA-3472-3235-596916832D6F}"/>
+                <a16:creationId xmlns:a16="http://schemas.microsoft.com/office/drawing/2014/main" id="{C5BF1C44-788E-59F4-379C-889C490A4C73}"/>
               </a:ext>
             </a:extLst>
           </p:cNvPr>
@@ -8825,7 +8825,7 @@
           <p:cNvPr id="7" name="Rectangle: Rounded Corners 6">
             <a:extLst>
               <a:ext uri="{FF2B5EF4-FFF2-40B4-BE49-F238E27FC236}">
-                <a16:creationId xmlns:a16="http://schemas.microsoft.com/office/drawing/2014/main" id="{DF33D420-40CA-47BB-1851-C0F5AB71FC67}"/>
+                <a16:creationId xmlns:a16="http://schemas.microsoft.com/office/drawing/2014/main" id="{B8FB6365-3E66-BB20-58EA-D30BA7BC41BC}"/>
               </a:ext>
             </a:extLst>
           </p:cNvPr>
@@ -8879,7 +8879,7 @@
           <p:cNvPr id="8" name="TextBox 7">
             <a:extLst>
               <a:ext uri="{FF2B5EF4-FFF2-40B4-BE49-F238E27FC236}">
-                <a16:creationId xmlns:a16="http://schemas.microsoft.com/office/drawing/2014/main" id="{0B9C3F4E-CA67-3B1B-89E6-EFAD5008B706}"/>
+                <a16:creationId xmlns:a16="http://schemas.microsoft.com/office/drawing/2014/main" id="{E48BA100-0B9E-5180-501C-18FABF63FA9F}"/>
               </a:ext>
             </a:extLst>
           </p:cNvPr>
@@ -8926,7 +8926,7 @@
           <p:cNvPr id="9" name="TextBox 8">
             <a:extLst>
               <a:ext uri="{FF2B5EF4-FFF2-40B4-BE49-F238E27FC236}">
-                <a16:creationId xmlns:a16="http://schemas.microsoft.com/office/drawing/2014/main" id="{702ED77E-60B3-E7B7-EE4C-0AC63150CB4C}"/>
+                <a16:creationId xmlns:a16="http://schemas.microsoft.com/office/drawing/2014/main" id="{9328ADDB-BECE-C3F6-48EA-E72332F114EB}"/>
               </a:ext>
             </a:extLst>
           </p:cNvPr>
@@ -9001,7 +9001,7 @@
           <p:cNvPr id="10" name="Rectangle: Rounded Corners 9">
             <a:extLst>
               <a:ext uri="{FF2B5EF4-FFF2-40B4-BE49-F238E27FC236}">
-                <a16:creationId xmlns:a16="http://schemas.microsoft.com/office/drawing/2014/main" id="{9EE4764C-20E6-8DD5-47B0-0897DE9408E9}"/>
+                <a16:creationId xmlns:a16="http://schemas.microsoft.com/office/drawing/2014/main" id="{D73FD644-6C80-1A4E-9B01-B4596A43D043}"/>
               </a:ext>
             </a:extLst>
           </p:cNvPr>
@@ -9055,7 +9055,7 @@
           <p:cNvPr id="11" name="TextBox 10">
             <a:extLst>
               <a:ext uri="{FF2B5EF4-FFF2-40B4-BE49-F238E27FC236}">
-                <a16:creationId xmlns:a16="http://schemas.microsoft.com/office/drawing/2014/main" id="{E67E2A5A-6AD4-A6CF-BB86-D85458F5B9C8}"/>
+                <a16:creationId xmlns:a16="http://schemas.microsoft.com/office/drawing/2014/main" id="{E34E8AA9-B251-EAF2-2AAA-A2472719F5B2}"/>
               </a:ext>
             </a:extLst>
           </p:cNvPr>
@@ -9120,7 +9120,7 @@
           <p:cNvPr id="12" name="TextBox 11">
             <a:extLst>
               <a:ext uri="{FF2B5EF4-FFF2-40B4-BE49-F238E27FC236}">
-                <a16:creationId xmlns:a16="http://schemas.microsoft.com/office/drawing/2014/main" id="{1054C88B-E04E-F473-8EC5-34CCE923DB19}"/>
+                <a16:creationId xmlns:a16="http://schemas.microsoft.com/office/drawing/2014/main" id="{C100E462-6E86-4D70-A32F-69AE167FF80F}"/>
               </a:ext>
             </a:extLst>
           </p:cNvPr>
@@ -9174,7 +9174,7 @@
           <p:cNvPr id="13" name="Rectangle: Rounded Corners 12">
             <a:extLst>
               <a:ext uri="{FF2B5EF4-FFF2-40B4-BE49-F238E27FC236}">
-                <a16:creationId xmlns:a16="http://schemas.microsoft.com/office/drawing/2014/main" id="{8B602AE0-15FC-0FAB-4861-7085A43E56FA}"/>
+                <a16:creationId xmlns:a16="http://schemas.microsoft.com/office/drawing/2014/main" id="{943C5DD8-3C6C-5132-9069-73DBCC75F013}"/>
               </a:ext>
             </a:extLst>
           </p:cNvPr>
@@ -9228,7 +9228,7 @@
           <p:cNvPr id="14" name="TextBox 13">
             <a:extLst>
               <a:ext uri="{FF2B5EF4-FFF2-40B4-BE49-F238E27FC236}">
-                <a16:creationId xmlns:a16="http://schemas.microsoft.com/office/drawing/2014/main" id="{646D1E09-9C2B-4B09-5DE1-3D5089E36F09}"/>
+                <a16:creationId xmlns:a16="http://schemas.microsoft.com/office/drawing/2014/main" id="{0A3928A8-00AB-03C5-9167-0DB1E54A7446}"/>
               </a:ext>
             </a:extLst>
           </p:cNvPr>
@@ -9293,7 +9293,7 @@
           <p:cNvPr id="15" name="TextBox 14">
             <a:extLst>
               <a:ext uri="{FF2B5EF4-FFF2-40B4-BE49-F238E27FC236}">
-                <a16:creationId xmlns:a16="http://schemas.microsoft.com/office/drawing/2014/main" id="{34442847-C8E3-D83F-3E9A-E50B1052755D}"/>
+                <a16:creationId xmlns:a16="http://schemas.microsoft.com/office/drawing/2014/main" id="{261134C3-86B7-3548-9256-635D9147E780}"/>
               </a:ext>
             </a:extLst>
           </p:cNvPr>
@@ -9345,7 +9345,7 @@
     </p:spTree>
     <p:extLst>
       <p:ext uri="{BB962C8B-B14F-4D97-AF65-F5344CB8AC3E}">
-        <p14:creationId xmlns:p14="http://schemas.microsoft.com/office/powerpoint/2010/main" val="3216487002"/>
+        <p14:creationId xmlns:p14="http://schemas.microsoft.com/office/powerpoint/2010/main" val="3566509467"/>
       </p:ext>
     </p:extLst>
   </p:cSld>
@@ -9377,7 +9377,7 @@
           <p:cNvPr id="2" name="Rectangle 1">
             <a:extLst>
               <a:ext uri="{FF2B5EF4-FFF2-40B4-BE49-F238E27FC236}">
-                <a16:creationId xmlns:a16="http://schemas.microsoft.com/office/drawing/2014/main" id="{68792742-321B-2B9E-FCA3-660515550CAA}"/>
+                <a16:creationId xmlns:a16="http://schemas.microsoft.com/office/drawing/2014/main" id="{AD17BE1C-BD91-DC26-A77F-580AD40C4A51}"/>
               </a:ext>
             </a:extLst>
           </p:cNvPr>
@@ -9445,7 +9445,7 @@
           <p:cNvPr id="3" name="Rectangle 2">
             <a:extLst>
               <a:ext uri="{FF2B5EF4-FFF2-40B4-BE49-F238E27FC236}">
-                <a16:creationId xmlns:a16="http://schemas.microsoft.com/office/drawing/2014/main" id="{5F6C882F-8028-470A-5405-B4867BD137E1}"/>
+                <a16:creationId xmlns:a16="http://schemas.microsoft.com/office/drawing/2014/main" id="{7A3151D0-5ED1-1EA6-964E-60B297B3D157}"/>
               </a:ext>
             </a:extLst>
           </p:cNvPr>
@@ -9513,7 +9513,7 @@
           <p:cNvPr id="4" name="TextBox 3">
             <a:extLst>
               <a:ext uri="{FF2B5EF4-FFF2-40B4-BE49-F238E27FC236}">
-                <a16:creationId xmlns:a16="http://schemas.microsoft.com/office/drawing/2014/main" id="{64BB5F08-D21D-ED14-98BA-5614BC136B07}"/>
+                <a16:creationId xmlns:a16="http://schemas.microsoft.com/office/drawing/2014/main" id="{B56C2391-4C40-54AE-5AA7-3B0BA4FC6EED}"/>
               </a:ext>
             </a:extLst>
           </p:cNvPr>
@@ -9581,7 +9581,7 @@
           <p:cNvPr id="5" name="TextBox 4">
             <a:extLst>
               <a:ext uri="{FF2B5EF4-FFF2-40B4-BE49-F238E27FC236}">
-                <a16:creationId xmlns:a16="http://schemas.microsoft.com/office/drawing/2014/main" id="{1F9B1CF9-9819-E351-EDE9-8CFC89CC76A8}"/>
+                <a16:creationId xmlns:a16="http://schemas.microsoft.com/office/drawing/2014/main" id="{E39C5A10-FF9D-793B-EF2B-9CF2B429A28B}"/>
               </a:ext>
             </a:extLst>
           </p:cNvPr>
@@ -9646,7 +9646,7 @@
           <p:cNvPr id="6" name="TextBox 5">
             <a:extLst>
               <a:ext uri="{FF2B5EF4-FFF2-40B4-BE49-F238E27FC236}">
-                <a16:creationId xmlns:a16="http://schemas.microsoft.com/office/drawing/2014/main" id="{13E15186-D0D2-4C19-5068-BDFEEFD1BC10}"/>
+                <a16:creationId xmlns:a16="http://schemas.microsoft.com/office/drawing/2014/main" id="{F957D00B-FB1C-5759-1BA0-C152A5A2EB3A}"/>
               </a:ext>
             </a:extLst>
           </p:cNvPr>
@@ -9686,7 +9686,7 @@
           <p:cNvPr id="7" name="Rectangle: Rounded Corners 6">
             <a:extLst>
               <a:ext uri="{FF2B5EF4-FFF2-40B4-BE49-F238E27FC236}">
-                <a16:creationId xmlns:a16="http://schemas.microsoft.com/office/drawing/2014/main" id="{C8BDC9E8-A126-7061-31F9-5055DA3B5E18}"/>
+                <a16:creationId xmlns:a16="http://schemas.microsoft.com/office/drawing/2014/main" id="{B772E0B7-4C1D-BD45-5130-85DAA483D50A}"/>
               </a:ext>
             </a:extLst>
           </p:cNvPr>
@@ -9740,7 +9740,7 @@
           <p:cNvPr id="8" name="TextBox 7">
             <a:extLst>
               <a:ext uri="{FF2B5EF4-FFF2-40B4-BE49-F238E27FC236}">
-                <a16:creationId xmlns:a16="http://schemas.microsoft.com/office/drawing/2014/main" id="{C0C8A66D-101D-AF7E-0671-EECE91BEFEF2}"/>
+                <a16:creationId xmlns:a16="http://schemas.microsoft.com/office/drawing/2014/main" id="{333708DC-DC59-FD6F-4D27-20C9F2D42A64}"/>
               </a:ext>
             </a:extLst>
           </p:cNvPr>
@@ -9796,7 +9796,7 @@
           <p:cNvPr id="9" name="TextBox 8">
             <a:extLst>
               <a:ext uri="{FF2B5EF4-FFF2-40B4-BE49-F238E27FC236}">
-                <a16:creationId xmlns:a16="http://schemas.microsoft.com/office/drawing/2014/main" id="{FF880B09-6D53-11B8-B099-5197321437FC}"/>
+                <a16:creationId xmlns:a16="http://schemas.microsoft.com/office/drawing/2014/main" id="{A112AE02-E666-258E-763B-8CF9422E4C60}"/>
               </a:ext>
             </a:extLst>
           </p:cNvPr>
@@ -9849,7 +9849,7 @@
           <p:cNvPr id="10" name="Rectangle: Rounded Corners 9">
             <a:extLst>
               <a:ext uri="{FF2B5EF4-FFF2-40B4-BE49-F238E27FC236}">
-                <a16:creationId xmlns:a16="http://schemas.microsoft.com/office/drawing/2014/main" id="{F21E3D25-4FE7-C1F0-E004-5B2DF4B00EC0}"/>
+                <a16:creationId xmlns:a16="http://schemas.microsoft.com/office/drawing/2014/main" id="{E911313E-B509-9F3C-6647-C6C9EFDC7883}"/>
               </a:ext>
             </a:extLst>
           </p:cNvPr>
@@ -9903,7 +9903,7 @@
           <p:cNvPr id="11" name="TextBox 10">
             <a:extLst>
               <a:ext uri="{FF2B5EF4-FFF2-40B4-BE49-F238E27FC236}">
-                <a16:creationId xmlns:a16="http://schemas.microsoft.com/office/drawing/2014/main" id="{94062667-F286-E3FC-74BC-1E044C094DFC}"/>
+                <a16:creationId xmlns:a16="http://schemas.microsoft.com/office/drawing/2014/main" id="{61922F95-0336-65A1-2A69-7882D4F20D8C}"/>
               </a:ext>
             </a:extLst>
           </p:cNvPr>
@@ -9959,7 +9959,7 @@
           <p:cNvPr id="12" name="TextBox 11">
             <a:extLst>
               <a:ext uri="{FF2B5EF4-FFF2-40B4-BE49-F238E27FC236}">
-                <a16:creationId xmlns:a16="http://schemas.microsoft.com/office/drawing/2014/main" id="{54A5A0C1-6D94-E828-49F9-1D435DC78791}"/>
+                <a16:creationId xmlns:a16="http://schemas.microsoft.com/office/drawing/2014/main" id="{CC0E78FF-6E13-50D6-E6B9-0E1293863EE5}"/>
               </a:ext>
             </a:extLst>
           </p:cNvPr>
@@ -10012,7 +10012,7 @@
           <p:cNvPr id="13" name="Rectangle: Rounded Corners 12">
             <a:extLst>
               <a:ext uri="{FF2B5EF4-FFF2-40B4-BE49-F238E27FC236}">
-                <a16:creationId xmlns:a16="http://schemas.microsoft.com/office/drawing/2014/main" id="{0F0DE131-9544-CFC5-7F5D-02B9467FB944}"/>
+                <a16:creationId xmlns:a16="http://schemas.microsoft.com/office/drawing/2014/main" id="{ED34E429-EAB0-E7D4-812C-6CA1237A0270}"/>
               </a:ext>
             </a:extLst>
           </p:cNvPr>
@@ -10066,7 +10066,7 @@
           <p:cNvPr id="14" name="TextBox 13">
             <a:extLst>
               <a:ext uri="{FF2B5EF4-FFF2-40B4-BE49-F238E27FC236}">
-                <a16:creationId xmlns:a16="http://schemas.microsoft.com/office/drawing/2014/main" id="{27BB52D1-F8EC-6F81-D017-73A0281C5CB2}"/>
+                <a16:creationId xmlns:a16="http://schemas.microsoft.com/office/drawing/2014/main" id="{66A6B625-B885-C871-B69B-B576A04E0E27}"/>
               </a:ext>
             </a:extLst>
           </p:cNvPr>
@@ -10122,7 +10122,7 @@
           <p:cNvPr id="15" name="TextBox 14">
             <a:extLst>
               <a:ext uri="{FF2B5EF4-FFF2-40B4-BE49-F238E27FC236}">
-                <a16:creationId xmlns:a16="http://schemas.microsoft.com/office/drawing/2014/main" id="{F9702F8D-D0CB-88A5-0129-4193AB5AF965}"/>
+                <a16:creationId xmlns:a16="http://schemas.microsoft.com/office/drawing/2014/main" id="{DE073064-C545-B3C7-4AAC-1E0813880529}"/>
               </a:ext>
             </a:extLst>
           </p:cNvPr>
@@ -10193,7 +10193,7 @@
           <p:cNvPr id="16" name="Rectangle: Rounded Corners 15">
             <a:extLst>
               <a:ext uri="{FF2B5EF4-FFF2-40B4-BE49-F238E27FC236}">
-                <a16:creationId xmlns:a16="http://schemas.microsoft.com/office/drawing/2014/main" id="{C333009C-884A-9156-5E87-BA6A0A6CAE30}"/>
+                <a16:creationId xmlns:a16="http://schemas.microsoft.com/office/drawing/2014/main" id="{4122410C-BEAF-93C4-DCB6-F8259452A1B9}"/>
               </a:ext>
             </a:extLst>
           </p:cNvPr>
@@ -10247,7 +10247,7 @@
           <p:cNvPr id="17" name="TextBox 16">
             <a:extLst>
               <a:ext uri="{FF2B5EF4-FFF2-40B4-BE49-F238E27FC236}">
-                <a16:creationId xmlns:a16="http://schemas.microsoft.com/office/drawing/2014/main" id="{2276AAFB-2AF1-35DE-00CD-101A15D277AB}"/>
+                <a16:creationId xmlns:a16="http://schemas.microsoft.com/office/drawing/2014/main" id="{2806C247-CCBD-1B14-A7E4-582B575602D2}"/>
               </a:ext>
             </a:extLst>
           </p:cNvPr>
@@ -10303,7 +10303,7 @@
           <p:cNvPr id="18" name="TextBox 17">
             <a:extLst>
               <a:ext uri="{FF2B5EF4-FFF2-40B4-BE49-F238E27FC236}">
-                <a16:creationId xmlns:a16="http://schemas.microsoft.com/office/drawing/2014/main" id="{771CF477-76B4-BD22-2BBA-788081A3A57C}"/>
+                <a16:creationId xmlns:a16="http://schemas.microsoft.com/office/drawing/2014/main" id="{79CD78E7-00BA-1EF8-066F-7B0682C5327B}"/>
               </a:ext>
             </a:extLst>
           </p:cNvPr>
@@ -10390,7 +10390,7 @@
     </p:spTree>
     <p:extLst>
       <p:ext uri="{BB962C8B-B14F-4D97-AF65-F5344CB8AC3E}">
-        <p14:creationId xmlns:p14="http://schemas.microsoft.com/office/powerpoint/2010/main" val="2761988931"/>
+        <p14:creationId xmlns:p14="http://schemas.microsoft.com/office/powerpoint/2010/main" val="4040478343"/>
       </p:ext>
     </p:extLst>
   </p:cSld>
@@ -10422,7 +10422,7 @@
           <p:cNvPr id="2" name="Rectangle 1">
             <a:extLst>
               <a:ext uri="{FF2B5EF4-FFF2-40B4-BE49-F238E27FC236}">
-                <a16:creationId xmlns:a16="http://schemas.microsoft.com/office/drawing/2014/main" id="{82BEDEB9-5D9D-3E8C-F6A5-3AB26CE45A5A}"/>
+                <a16:creationId xmlns:a16="http://schemas.microsoft.com/office/drawing/2014/main" id="{DB8F4BF9-FF76-5BA4-4DED-3CEB5F074663}"/>
               </a:ext>
             </a:extLst>
           </p:cNvPr>
@@ -10490,7 +10490,7 @@
           <p:cNvPr id="3" name="Rectangle 2">
             <a:extLst>
               <a:ext uri="{FF2B5EF4-FFF2-40B4-BE49-F238E27FC236}">
-                <a16:creationId xmlns:a16="http://schemas.microsoft.com/office/drawing/2014/main" id="{D454A13B-B4D1-C784-E800-494CEB287EFD}"/>
+                <a16:creationId xmlns:a16="http://schemas.microsoft.com/office/drawing/2014/main" id="{881C9684-19D8-FE53-AF70-D5B3F6B59AE4}"/>
               </a:ext>
             </a:extLst>
           </p:cNvPr>
@@ -10558,7 +10558,7 @@
           <p:cNvPr id="4" name="TextBox 3">
             <a:extLst>
               <a:ext uri="{FF2B5EF4-FFF2-40B4-BE49-F238E27FC236}">
-                <a16:creationId xmlns:a16="http://schemas.microsoft.com/office/drawing/2014/main" id="{91A6F448-82B7-9EA4-B817-E85DDB47C0D0}"/>
+                <a16:creationId xmlns:a16="http://schemas.microsoft.com/office/drawing/2014/main" id="{B5063BC1-8864-1360-052A-ADC4C84A81CA}"/>
               </a:ext>
             </a:extLst>
           </p:cNvPr>
@@ -10626,7 +10626,7 @@
           <p:cNvPr id="5" name="TextBox 4">
             <a:extLst>
               <a:ext uri="{FF2B5EF4-FFF2-40B4-BE49-F238E27FC236}">
-                <a16:creationId xmlns:a16="http://schemas.microsoft.com/office/drawing/2014/main" id="{04AFBFB4-2F37-49A7-CA1F-012A45786690}"/>
+                <a16:creationId xmlns:a16="http://schemas.microsoft.com/office/drawing/2014/main" id="{AF3389DF-429E-7CF5-D559-594B076DA652}"/>
               </a:ext>
             </a:extLst>
           </p:cNvPr>
@@ -10673,7 +10673,7 @@
           <p:cNvPr id="6" name="TextBox 5">
             <a:extLst>
               <a:ext uri="{FF2B5EF4-FFF2-40B4-BE49-F238E27FC236}">
-                <a16:creationId xmlns:a16="http://schemas.microsoft.com/office/drawing/2014/main" id="{76A58756-0368-E546-94B2-C4026B446113}"/>
+                <a16:creationId xmlns:a16="http://schemas.microsoft.com/office/drawing/2014/main" id="{F66C7B6B-9CE2-9983-8DD1-9281D46024D2}"/>
               </a:ext>
             </a:extLst>
           </p:cNvPr>
@@ -10713,7 +10713,7 @@
           <p:cNvPr id="7" name="Rectangle: Rounded Corners 6">
             <a:extLst>
               <a:ext uri="{FF2B5EF4-FFF2-40B4-BE49-F238E27FC236}">
-                <a16:creationId xmlns:a16="http://schemas.microsoft.com/office/drawing/2014/main" id="{BFC01B10-0AC2-D5BA-D2C9-94431A37432B}"/>
+                <a16:creationId xmlns:a16="http://schemas.microsoft.com/office/drawing/2014/main" id="{38EB1FCE-B692-E80B-09ED-F9DC6046D04A}"/>
               </a:ext>
             </a:extLst>
           </p:cNvPr>
@@ -10767,7 +10767,7 @@
           <p:cNvPr id="8" name="TextBox 7">
             <a:extLst>
               <a:ext uri="{FF2B5EF4-FFF2-40B4-BE49-F238E27FC236}">
-                <a16:creationId xmlns:a16="http://schemas.microsoft.com/office/drawing/2014/main" id="{A8EF6873-4E41-1A53-3F86-EB3F784E9EEB}"/>
+                <a16:creationId xmlns:a16="http://schemas.microsoft.com/office/drawing/2014/main" id="{2B893CA2-318A-E84F-8DA2-DFC9C1EBAF25}"/>
               </a:ext>
             </a:extLst>
           </p:cNvPr>
@@ -10814,7 +10814,7 @@
           <p:cNvPr id="9" name="TextBox 8">
             <a:extLst>
               <a:ext uri="{FF2B5EF4-FFF2-40B4-BE49-F238E27FC236}">
-                <a16:creationId xmlns:a16="http://schemas.microsoft.com/office/drawing/2014/main" id="{329C07E0-7C8D-813A-E29A-F28D44E32BD6}"/>
+                <a16:creationId xmlns:a16="http://schemas.microsoft.com/office/drawing/2014/main" id="{02256E6E-50C4-8E91-EBAD-C11E22B8DA0B}"/>
               </a:ext>
             </a:extLst>
           </p:cNvPr>
@@ -10868,7 +10868,7 @@
           <p:cNvPr id="10" name="Rectangle: Rounded Corners 9">
             <a:extLst>
               <a:ext uri="{FF2B5EF4-FFF2-40B4-BE49-F238E27FC236}">
-                <a16:creationId xmlns:a16="http://schemas.microsoft.com/office/drawing/2014/main" id="{BDE88B44-1F72-0A9B-AE8C-F752A1C4E184}"/>
+                <a16:creationId xmlns:a16="http://schemas.microsoft.com/office/drawing/2014/main" id="{353B8CE3-9211-02C1-2D5E-4A977B17C1A7}"/>
               </a:ext>
             </a:extLst>
           </p:cNvPr>
@@ -10922,7 +10922,7 @@
           <p:cNvPr id="11" name="TextBox 10">
             <a:extLst>
               <a:ext uri="{FF2B5EF4-FFF2-40B4-BE49-F238E27FC236}">
-                <a16:creationId xmlns:a16="http://schemas.microsoft.com/office/drawing/2014/main" id="{8ED85064-C6D5-C868-B51B-F1EB02772626}"/>
+                <a16:creationId xmlns:a16="http://schemas.microsoft.com/office/drawing/2014/main" id="{4D2325BC-316E-7D91-483D-3A2BB2124129}"/>
               </a:ext>
             </a:extLst>
           </p:cNvPr>
@@ -10969,7 +10969,7 @@
           <p:cNvPr id="12" name="TextBox 11">
             <a:extLst>
               <a:ext uri="{FF2B5EF4-FFF2-40B4-BE49-F238E27FC236}">
-                <a16:creationId xmlns:a16="http://schemas.microsoft.com/office/drawing/2014/main" id="{24144263-EACD-41F2-B62A-A338AA328BAA}"/>
+                <a16:creationId xmlns:a16="http://schemas.microsoft.com/office/drawing/2014/main" id="{0531F871-01B6-DAF3-18C1-ABAF42762A47}"/>
               </a:ext>
             </a:extLst>
           </p:cNvPr>
@@ -11041,7 +11041,7 @@
           <p:cNvPr id="13" name="Rectangle: Rounded Corners 12">
             <a:extLst>
               <a:ext uri="{FF2B5EF4-FFF2-40B4-BE49-F238E27FC236}">
-                <a16:creationId xmlns:a16="http://schemas.microsoft.com/office/drawing/2014/main" id="{B7393FE2-7599-1351-70BC-04CF790AC1F9}"/>
+                <a16:creationId xmlns:a16="http://schemas.microsoft.com/office/drawing/2014/main" id="{1E889988-24BE-0870-8D52-5328A542C6F3}"/>
               </a:ext>
             </a:extLst>
           </p:cNvPr>
@@ -11095,7 +11095,7 @@
           <p:cNvPr id="14" name="TextBox 13">
             <a:extLst>
               <a:ext uri="{FF2B5EF4-FFF2-40B4-BE49-F238E27FC236}">
-                <a16:creationId xmlns:a16="http://schemas.microsoft.com/office/drawing/2014/main" id="{69EE754F-977C-0913-92A6-90DC3558D305}"/>
+                <a16:creationId xmlns:a16="http://schemas.microsoft.com/office/drawing/2014/main" id="{9877EEA8-51C3-F7FD-D82F-B4D64ED20BD6}"/>
               </a:ext>
             </a:extLst>
           </p:cNvPr>
@@ -11142,7 +11142,7 @@
           <p:cNvPr id="15" name="TextBox 14">
             <a:extLst>
               <a:ext uri="{FF2B5EF4-FFF2-40B4-BE49-F238E27FC236}">
-                <a16:creationId xmlns:a16="http://schemas.microsoft.com/office/drawing/2014/main" id="{18EE5C73-9E03-FCDE-6EE4-67F9D86ACFD4}"/>
+                <a16:creationId xmlns:a16="http://schemas.microsoft.com/office/drawing/2014/main" id="{1E4A710C-686F-43C7-8F0F-665D008F4218}"/>
               </a:ext>
             </a:extLst>
           </p:cNvPr>
@@ -11230,7 +11230,7 @@
     </p:spTree>
     <p:extLst>
       <p:ext uri="{BB962C8B-B14F-4D97-AF65-F5344CB8AC3E}">
-        <p14:creationId xmlns:p14="http://schemas.microsoft.com/office/powerpoint/2010/main" val="2670099941"/>
+        <p14:creationId xmlns:p14="http://schemas.microsoft.com/office/powerpoint/2010/main" val="2501673859"/>
       </p:ext>
     </p:extLst>
   </p:cSld>
@@ -11262,7 +11262,7 @@
           <p:cNvPr id="2" name="Rectangle 1">
             <a:extLst>
               <a:ext uri="{FF2B5EF4-FFF2-40B4-BE49-F238E27FC236}">
-                <a16:creationId xmlns:a16="http://schemas.microsoft.com/office/drawing/2014/main" id="{BF18A8B0-8C34-BDEB-71CF-451B80EE45C5}"/>
+                <a16:creationId xmlns:a16="http://schemas.microsoft.com/office/drawing/2014/main" id="{ECCCF9B2-9E5B-4C90-C6E0-11243D295089}"/>
               </a:ext>
             </a:extLst>
           </p:cNvPr>
@@ -11330,7 +11330,7 @@
           <p:cNvPr id="3" name="Rectangle 2">
             <a:extLst>
               <a:ext uri="{FF2B5EF4-FFF2-40B4-BE49-F238E27FC236}">
-                <a16:creationId xmlns:a16="http://schemas.microsoft.com/office/drawing/2014/main" id="{D6806119-5628-16E6-0318-EAB3D4E12914}"/>
+                <a16:creationId xmlns:a16="http://schemas.microsoft.com/office/drawing/2014/main" id="{4917099C-EA68-5886-4C06-56F18A2CF3B3}"/>
               </a:ext>
             </a:extLst>
           </p:cNvPr>
@@ -11398,7 +11398,7 @@
           <p:cNvPr id="4" name="TextBox 3">
             <a:extLst>
               <a:ext uri="{FF2B5EF4-FFF2-40B4-BE49-F238E27FC236}">
-                <a16:creationId xmlns:a16="http://schemas.microsoft.com/office/drawing/2014/main" id="{F441CF46-51E5-DB94-909E-3EE354EF34B5}"/>
+                <a16:creationId xmlns:a16="http://schemas.microsoft.com/office/drawing/2014/main" id="{05F60B43-FC17-447F-3EBF-230B729C03B5}"/>
               </a:ext>
             </a:extLst>
           </p:cNvPr>
@@ -11466,7 +11466,7 @@
           <p:cNvPr id="5" name="TextBox 4">
             <a:extLst>
               <a:ext uri="{FF2B5EF4-FFF2-40B4-BE49-F238E27FC236}">
-                <a16:creationId xmlns:a16="http://schemas.microsoft.com/office/drawing/2014/main" id="{CB0D2A34-1F46-1EDB-0B6A-AAA054293168}"/>
+                <a16:creationId xmlns:a16="http://schemas.microsoft.com/office/drawing/2014/main" id="{DB38E216-CFA4-8507-428A-B6F277304B91}"/>
               </a:ext>
             </a:extLst>
           </p:cNvPr>
@@ -11513,7 +11513,7 @@
           <p:cNvPr id="6" name="TextBox 5">
             <a:extLst>
               <a:ext uri="{FF2B5EF4-FFF2-40B4-BE49-F238E27FC236}">
-                <a16:creationId xmlns:a16="http://schemas.microsoft.com/office/drawing/2014/main" id="{90913C27-3EC4-F7F9-9288-1B2C0A7EB0DF}"/>
+                <a16:creationId xmlns:a16="http://schemas.microsoft.com/office/drawing/2014/main" id="{A7CB8EE2-95E4-0CAC-8218-1C83EBF0439F}"/>
               </a:ext>
             </a:extLst>
           </p:cNvPr>
@@ -11553,7 +11553,7 @@
           <p:cNvPr id="7" name="Rectangle: Rounded Corners 6">
             <a:extLst>
               <a:ext uri="{FF2B5EF4-FFF2-40B4-BE49-F238E27FC236}">
-                <a16:creationId xmlns:a16="http://schemas.microsoft.com/office/drawing/2014/main" id="{8F30B055-A503-34E5-38C8-ED795EE41AA9}"/>
+                <a16:creationId xmlns:a16="http://schemas.microsoft.com/office/drawing/2014/main" id="{7216E8E6-4885-9073-E302-EFDAB38C5557}"/>
               </a:ext>
             </a:extLst>
           </p:cNvPr>
@@ -11607,7 +11607,7 @@
           <p:cNvPr id="8" name="TextBox 7">
             <a:extLst>
               <a:ext uri="{FF2B5EF4-FFF2-40B4-BE49-F238E27FC236}">
-                <a16:creationId xmlns:a16="http://schemas.microsoft.com/office/drawing/2014/main" id="{61FC1D1C-D8A5-FFD8-D231-35DBFEE7D3C2}"/>
+                <a16:creationId xmlns:a16="http://schemas.microsoft.com/office/drawing/2014/main" id="{12C4DFAD-BF31-8852-9FB5-2B751F3C714B}"/>
               </a:ext>
             </a:extLst>
           </p:cNvPr>
@@ -11663,7 +11663,7 @@
           <p:cNvPr id="9" name="TextBox 8">
             <a:extLst>
               <a:ext uri="{FF2B5EF4-FFF2-40B4-BE49-F238E27FC236}">
-                <a16:creationId xmlns:a16="http://schemas.microsoft.com/office/drawing/2014/main" id="{0B9B29FA-6775-1F46-6B5D-B822BE955FF6}"/>
+                <a16:creationId xmlns:a16="http://schemas.microsoft.com/office/drawing/2014/main" id="{9E4E1015-D4A6-C9EF-7CB9-7CCB8CF112D1}"/>
               </a:ext>
             </a:extLst>
           </p:cNvPr>
@@ -11734,7 +11734,7 @@
           <p:cNvPr id="10" name="Rectangle: Rounded Corners 9">
             <a:extLst>
               <a:ext uri="{FF2B5EF4-FFF2-40B4-BE49-F238E27FC236}">
-                <a16:creationId xmlns:a16="http://schemas.microsoft.com/office/drawing/2014/main" id="{300FD58F-42F5-6C4B-8C00-C59F2105B244}"/>
+                <a16:creationId xmlns:a16="http://schemas.microsoft.com/office/drawing/2014/main" id="{4BF06D4C-A1E5-86DD-DF94-983C9B4B665B}"/>
               </a:ext>
             </a:extLst>
           </p:cNvPr>
@@ -11788,7 +11788,7 @@
           <p:cNvPr id="11" name="TextBox 10">
             <a:extLst>
               <a:ext uri="{FF2B5EF4-FFF2-40B4-BE49-F238E27FC236}">
-                <a16:creationId xmlns:a16="http://schemas.microsoft.com/office/drawing/2014/main" id="{1666BC15-A216-3868-DEE2-393547A0A9BC}"/>
+                <a16:creationId xmlns:a16="http://schemas.microsoft.com/office/drawing/2014/main" id="{7965F68D-1C3D-1114-270F-D31CB2DB876E}"/>
               </a:ext>
             </a:extLst>
           </p:cNvPr>
@@ -11844,7 +11844,7 @@
           <p:cNvPr id="12" name="TextBox 11">
             <a:extLst>
               <a:ext uri="{FF2B5EF4-FFF2-40B4-BE49-F238E27FC236}">
-                <a16:creationId xmlns:a16="http://schemas.microsoft.com/office/drawing/2014/main" id="{0EF3CFFF-F674-CDE0-0C51-7E4799BB59CA}"/>
+                <a16:creationId xmlns:a16="http://schemas.microsoft.com/office/drawing/2014/main" id="{CE13DB87-5B4A-1B9D-747B-97B9CD237051}"/>
               </a:ext>
             </a:extLst>
           </p:cNvPr>
@@ -11915,7 +11915,7 @@
           <p:cNvPr id="13" name="Rectangle: Rounded Corners 12">
             <a:extLst>
               <a:ext uri="{FF2B5EF4-FFF2-40B4-BE49-F238E27FC236}">
-                <a16:creationId xmlns:a16="http://schemas.microsoft.com/office/drawing/2014/main" id="{A6E683EC-E3A9-C5B7-0B3B-991CB7617030}"/>
+                <a16:creationId xmlns:a16="http://schemas.microsoft.com/office/drawing/2014/main" id="{849089F4-1DAB-2B1B-18B6-1F471C9B386D}"/>
               </a:ext>
             </a:extLst>
           </p:cNvPr>
@@ -11969,7 +11969,7 @@
           <p:cNvPr id="14" name="TextBox 13">
             <a:extLst>
               <a:ext uri="{FF2B5EF4-FFF2-40B4-BE49-F238E27FC236}">
-                <a16:creationId xmlns:a16="http://schemas.microsoft.com/office/drawing/2014/main" id="{FDD7BAA7-D1D7-F1D6-EF54-76D00C1C2F8F}"/>
+                <a16:creationId xmlns:a16="http://schemas.microsoft.com/office/drawing/2014/main" id="{2822FB20-19E6-12EF-504B-385964C1809B}"/>
               </a:ext>
             </a:extLst>
           </p:cNvPr>
@@ -12025,7 +12025,7 @@
           <p:cNvPr id="15" name="TextBox 14">
             <a:extLst>
               <a:ext uri="{FF2B5EF4-FFF2-40B4-BE49-F238E27FC236}">
-                <a16:creationId xmlns:a16="http://schemas.microsoft.com/office/drawing/2014/main" id="{3B2D748F-FB03-50C4-0756-95A3B299C849}"/>
+                <a16:creationId xmlns:a16="http://schemas.microsoft.com/office/drawing/2014/main" id="{7E04E41A-2A3C-332A-B05E-09107698D9AB}"/>
               </a:ext>
             </a:extLst>
           </p:cNvPr>
@@ -12114,7 +12114,7 @@
           <p:cNvPr id="16" name="Rectangle: Rounded Corners 15">
             <a:extLst>
               <a:ext uri="{FF2B5EF4-FFF2-40B4-BE49-F238E27FC236}">
-                <a16:creationId xmlns:a16="http://schemas.microsoft.com/office/drawing/2014/main" id="{AD8E354B-3EC6-1030-7904-697C6A29EE3D}"/>
+                <a16:creationId xmlns:a16="http://schemas.microsoft.com/office/drawing/2014/main" id="{ECED7740-6AEF-6C9D-8B63-760BE376AD7D}"/>
               </a:ext>
             </a:extLst>
           </p:cNvPr>
@@ -12168,7 +12168,7 @@
           <p:cNvPr id="17" name="TextBox 16">
             <a:extLst>
               <a:ext uri="{FF2B5EF4-FFF2-40B4-BE49-F238E27FC236}">
-                <a16:creationId xmlns:a16="http://schemas.microsoft.com/office/drawing/2014/main" id="{1CFBBF19-18CA-3E8C-1A41-B2F43BDEA8D2}"/>
+                <a16:creationId xmlns:a16="http://schemas.microsoft.com/office/drawing/2014/main" id="{B663E22B-20FC-B412-5966-86E15FD2A999}"/>
               </a:ext>
             </a:extLst>
           </p:cNvPr>
@@ -12224,7 +12224,7 @@
           <p:cNvPr id="18" name="TextBox 17">
             <a:extLst>
               <a:ext uri="{FF2B5EF4-FFF2-40B4-BE49-F238E27FC236}">
-                <a16:creationId xmlns:a16="http://schemas.microsoft.com/office/drawing/2014/main" id="{9D6D14A6-6488-2AF3-BE2B-E64C48C0BD6C}"/>
+                <a16:creationId xmlns:a16="http://schemas.microsoft.com/office/drawing/2014/main" id="{D19EFC27-08EE-DCA8-EA31-41998C5B34C7}"/>
               </a:ext>
             </a:extLst>
           </p:cNvPr>
@@ -12293,7 +12293,7 @@
     </p:spTree>
     <p:extLst>
       <p:ext uri="{BB962C8B-B14F-4D97-AF65-F5344CB8AC3E}">
-        <p14:creationId xmlns:p14="http://schemas.microsoft.com/office/powerpoint/2010/main" val="2251537511"/>
+        <p14:creationId xmlns:p14="http://schemas.microsoft.com/office/powerpoint/2010/main" val="1753512280"/>
       </p:ext>
     </p:extLst>
   </p:cSld>
@@ -12325,7 +12325,7 @@
           <p:cNvPr id="2" name="Rectangle 1">
             <a:extLst>
               <a:ext uri="{FF2B5EF4-FFF2-40B4-BE49-F238E27FC236}">
-                <a16:creationId xmlns:a16="http://schemas.microsoft.com/office/drawing/2014/main" id="{7FB92225-04E2-A190-32D8-42A45414BE2E}"/>
+                <a16:creationId xmlns:a16="http://schemas.microsoft.com/office/drawing/2014/main" id="{FAE6A7DD-3A3C-CA26-7727-8A8CE5FA2AFD}"/>
               </a:ext>
             </a:extLst>
           </p:cNvPr>
@@ -12393,7 +12393,7 @@
           <p:cNvPr id="3" name="Rectangle 2">
             <a:extLst>
               <a:ext uri="{FF2B5EF4-FFF2-40B4-BE49-F238E27FC236}">
-                <a16:creationId xmlns:a16="http://schemas.microsoft.com/office/drawing/2014/main" id="{E72018FD-B6B4-633A-AD68-2BF4A061C688}"/>
+                <a16:creationId xmlns:a16="http://schemas.microsoft.com/office/drawing/2014/main" id="{D4F6DEF0-25D1-C775-5B50-7BE0AE12F407}"/>
               </a:ext>
             </a:extLst>
           </p:cNvPr>
@@ -12461,7 +12461,7 @@
           <p:cNvPr id="4" name="TextBox 3">
             <a:extLst>
               <a:ext uri="{FF2B5EF4-FFF2-40B4-BE49-F238E27FC236}">
-                <a16:creationId xmlns:a16="http://schemas.microsoft.com/office/drawing/2014/main" id="{37142E46-41BE-8BE9-ABDF-CB71F5368AF8}"/>
+                <a16:creationId xmlns:a16="http://schemas.microsoft.com/office/drawing/2014/main" id="{0A35FE54-3AED-B4E7-CCB7-C9AAAC86E070}"/>
               </a:ext>
             </a:extLst>
           </p:cNvPr>
@@ -12529,7 +12529,7 @@
           <p:cNvPr id="5" name="TextBox 4">
             <a:extLst>
               <a:ext uri="{FF2B5EF4-FFF2-40B4-BE49-F238E27FC236}">
-                <a16:creationId xmlns:a16="http://schemas.microsoft.com/office/drawing/2014/main" id="{C33F1269-0440-5058-6704-0B38B7F23EBB}"/>
+                <a16:creationId xmlns:a16="http://schemas.microsoft.com/office/drawing/2014/main" id="{48EA24ED-0A70-1625-3196-A55F0ED2E065}"/>
               </a:ext>
             </a:extLst>
           </p:cNvPr>
@@ -12576,7 +12576,7 @@
           <p:cNvPr id="6" name="TextBox 5">
             <a:extLst>
               <a:ext uri="{FF2B5EF4-FFF2-40B4-BE49-F238E27FC236}">
-                <a16:creationId xmlns:a16="http://schemas.microsoft.com/office/drawing/2014/main" id="{83934541-19B9-183C-D1A5-E2C707A6AB26}"/>
+                <a16:creationId xmlns:a16="http://schemas.microsoft.com/office/drawing/2014/main" id="{1FB884B7-51B1-2251-46F1-2047EBFBDBD5}"/>
               </a:ext>
             </a:extLst>
           </p:cNvPr>
@@ -12616,7 +12616,7 @@
           <p:cNvPr id="7" name="Rectangle: Rounded Corners 6">
             <a:extLst>
               <a:ext uri="{FF2B5EF4-FFF2-40B4-BE49-F238E27FC236}">
-                <a16:creationId xmlns:a16="http://schemas.microsoft.com/office/drawing/2014/main" id="{E8795BB9-4FBB-CFF9-0FDD-E9065F348242}"/>
+                <a16:creationId xmlns:a16="http://schemas.microsoft.com/office/drawing/2014/main" id="{5E5F611A-3755-5063-E266-0DC3C698CA61}"/>
               </a:ext>
             </a:extLst>
           </p:cNvPr>
@@ -12670,7 +12670,7 @@
           <p:cNvPr id="8" name="TextBox 7">
             <a:extLst>
               <a:ext uri="{FF2B5EF4-FFF2-40B4-BE49-F238E27FC236}">
-                <a16:creationId xmlns:a16="http://schemas.microsoft.com/office/drawing/2014/main" id="{31FB6840-ECE5-B027-F3F3-3496842D4DBF}"/>
+                <a16:creationId xmlns:a16="http://schemas.microsoft.com/office/drawing/2014/main" id="{27A9045A-E69E-FC1F-7A57-AB34FFB5E4B1}"/>
               </a:ext>
             </a:extLst>
           </p:cNvPr>
@@ -12717,7 +12717,7 @@
           <p:cNvPr id="9" name="TextBox 8">
             <a:extLst>
               <a:ext uri="{FF2B5EF4-FFF2-40B4-BE49-F238E27FC236}">
-                <a16:creationId xmlns:a16="http://schemas.microsoft.com/office/drawing/2014/main" id="{FF718639-78E2-BCBB-2F5B-28D729D92166}"/>
+                <a16:creationId xmlns:a16="http://schemas.microsoft.com/office/drawing/2014/main" id="{30FF2A1C-8AC3-555D-3C81-C0B11A34BEB5}"/>
               </a:ext>
             </a:extLst>
           </p:cNvPr>
@@ -12844,7 +12844,7 @@
           <p:cNvPr id="10" name="Rectangle: Rounded Corners 9">
             <a:extLst>
               <a:ext uri="{FF2B5EF4-FFF2-40B4-BE49-F238E27FC236}">
-                <a16:creationId xmlns:a16="http://schemas.microsoft.com/office/drawing/2014/main" id="{CE482817-7E51-C33D-2320-2D96AD989174}"/>
+                <a16:creationId xmlns:a16="http://schemas.microsoft.com/office/drawing/2014/main" id="{38471160-663D-ED1F-AB5B-BAAC343BF586}"/>
               </a:ext>
             </a:extLst>
           </p:cNvPr>
@@ -12898,7 +12898,7 @@
           <p:cNvPr id="11" name="TextBox 10">
             <a:extLst>
               <a:ext uri="{FF2B5EF4-FFF2-40B4-BE49-F238E27FC236}">
-                <a16:creationId xmlns:a16="http://schemas.microsoft.com/office/drawing/2014/main" id="{D977BE5F-41BC-5428-C5C0-68B7D2A0A98D}"/>
+                <a16:creationId xmlns:a16="http://schemas.microsoft.com/office/drawing/2014/main" id="{0A89FBEA-539B-81E0-AA5A-8C8CE52FC6FB}"/>
               </a:ext>
             </a:extLst>
           </p:cNvPr>
@@ -12945,7 +12945,7 @@
           <p:cNvPr id="12" name="TextBox 11">
             <a:extLst>
               <a:ext uri="{FF2B5EF4-FFF2-40B4-BE49-F238E27FC236}">
-                <a16:creationId xmlns:a16="http://schemas.microsoft.com/office/drawing/2014/main" id="{E581ED40-77E2-4138-B80A-EDD50F803B72}"/>
+                <a16:creationId xmlns:a16="http://schemas.microsoft.com/office/drawing/2014/main" id="{CC281E21-43CC-A491-B7C2-B9168DEAF5B0}"/>
               </a:ext>
             </a:extLst>
           </p:cNvPr>
@@ -13034,7 +13034,7 @@
     </p:spTree>
     <p:extLst>
       <p:ext uri="{BB962C8B-B14F-4D97-AF65-F5344CB8AC3E}">
-        <p14:creationId xmlns:p14="http://schemas.microsoft.com/office/powerpoint/2010/main" val="3881958663"/>
+        <p14:creationId xmlns:p14="http://schemas.microsoft.com/office/powerpoint/2010/main" val="1905162716"/>
       </p:ext>
     </p:extLst>
   </p:cSld>
@@ -13066,7 +13066,7 @@
           <p:cNvPr id="2" name="Rectangle 1">
             <a:extLst>
               <a:ext uri="{FF2B5EF4-FFF2-40B4-BE49-F238E27FC236}">
-                <a16:creationId xmlns:a16="http://schemas.microsoft.com/office/drawing/2014/main" id="{C4CFCFA6-1BDC-AEDB-085A-C6CA32A31A6A}"/>
+                <a16:creationId xmlns:a16="http://schemas.microsoft.com/office/drawing/2014/main" id="{70731A61-278C-DEFE-6918-DD3CB56453F4}"/>
               </a:ext>
             </a:extLst>
           </p:cNvPr>
@@ -13134,7 +13134,7 @@
           <p:cNvPr id="3" name="Rectangle 2">
             <a:extLst>
               <a:ext uri="{FF2B5EF4-FFF2-40B4-BE49-F238E27FC236}">
-                <a16:creationId xmlns:a16="http://schemas.microsoft.com/office/drawing/2014/main" id="{C5308CC2-E243-9BD6-2AED-43209B04152D}"/>
+                <a16:creationId xmlns:a16="http://schemas.microsoft.com/office/drawing/2014/main" id="{0C256333-2AAF-16D4-0FC6-EB91DC1C0CCF}"/>
               </a:ext>
             </a:extLst>
           </p:cNvPr>
@@ -13202,7 +13202,7 @@
           <p:cNvPr id="4" name="TextBox 3">
             <a:extLst>
               <a:ext uri="{FF2B5EF4-FFF2-40B4-BE49-F238E27FC236}">
-                <a16:creationId xmlns:a16="http://schemas.microsoft.com/office/drawing/2014/main" id="{0102B691-C5AC-B46E-05FC-F16797E1CBE1}"/>
+                <a16:creationId xmlns:a16="http://schemas.microsoft.com/office/drawing/2014/main" id="{82CE01A4-CAC8-F935-C760-30DF9E4BD73F}"/>
               </a:ext>
             </a:extLst>
           </p:cNvPr>
@@ -13270,7 +13270,7 @@
           <p:cNvPr id="5" name="TextBox 4">
             <a:extLst>
               <a:ext uri="{FF2B5EF4-FFF2-40B4-BE49-F238E27FC236}">
-                <a16:creationId xmlns:a16="http://schemas.microsoft.com/office/drawing/2014/main" id="{6C8349A0-5976-35F7-FF5F-CA08CEDAD36B}"/>
+                <a16:creationId xmlns:a16="http://schemas.microsoft.com/office/drawing/2014/main" id="{E4746ED7-4127-039F-26DB-1BA34586BEC4}"/>
               </a:ext>
             </a:extLst>
           </p:cNvPr>
@@ -13320,7 +13320,7 @@
           <p:cNvPr id="6" name="TextBox 5">
             <a:extLst>
               <a:ext uri="{FF2B5EF4-FFF2-40B4-BE49-F238E27FC236}">
-                <a16:creationId xmlns:a16="http://schemas.microsoft.com/office/drawing/2014/main" id="{E8BDA30B-DFA3-EFA7-7F35-D4AF3EE451D4}"/>
+                <a16:creationId xmlns:a16="http://schemas.microsoft.com/office/drawing/2014/main" id="{C75AB2A4-1287-A90E-B318-AFF1D0DD1FDD}"/>
               </a:ext>
             </a:extLst>
           </p:cNvPr>
@@ -13360,7 +13360,7 @@
           <p:cNvPr id="7" name="Rectangle: Rounded Corners 6">
             <a:extLst>
               <a:ext uri="{FF2B5EF4-FFF2-40B4-BE49-F238E27FC236}">
-                <a16:creationId xmlns:a16="http://schemas.microsoft.com/office/drawing/2014/main" id="{C0C844B6-BE9E-58EB-6984-8BAFBD32442B}"/>
+                <a16:creationId xmlns:a16="http://schemas.microsoft.com/office/drawing/2014/main" id="{A876CC31-9D21-7CBC-C677-E388878D2A21}"/>
               </a:ext>
             </a:extLst>
           </p:cNvPr>
@@ -13414,7 +13414,7 @@
           <p:cNvPr id="8" name="TextBox 7">
             <a:extLst>
               <a:ext uri="{FF2B5EF4-FFF2-40B4-BE49-F238E27FC236}">
-                <a16:creationId xmlns:a16="http://schemas.microsoft.com/office/drawing/2014/main" id="{CC2BD739-82A9-29DC-4192-9CCEC4925C68}"/>
+                <a16:creationId xmlns:a16="http://schemas.microsoft.com/office/drawing/2014/main" id="{F35C4C92-FFD4-D4F7-ED44-03A42E180191}"/>
               </a:ext>
             </a:extLst>
           </p:cNvPr>
@@ -13461,7 +13461,7 @@
           <p:cNvPr id="9" name="TextBox 8">
             <a:extLst>
               <a:ext uri="{FF2B5EF4-FFF2-40B4-BE49-F238E27FC236}">
-                <a16:creationId xmlns:a16="http://schemas.microsoft.com/office/drawing/2014/main" id="{96D1193D-F2A1-D783-52E1-FED411DA523B}"/>
+                <a16:creationId xmlns:a16="http://schemas.microsoft.com/office/drawing/2014/main" id="{3383A05B-12B4-E9B9-217A-13B24D284630}"/>
               </a:ext>
             </a:extLst>
           </p:cNvPr>
@@ -13514,7 +13514,7 @@
           <p:cNvPr id="10" name="Rectangle: Rounded Corners 9">
             <a:extLst>
               <a:ext uri="{FF2B5EF4-FFF2-40B4-BE49-F238E27FC236}">
-                <a16:creationId xmlns:a16="http://schemas.microsoft.com/office/drawing/2014/main" id="{9C96AFE0-BEC3-E847-3D3D-3757EFC766A2}"/>
+                <a16:creationId xmlns:a16="http://schemas.microsoft.com/office/drawing/2014/main" id="{22319DE5-1E71-237F-BCCA-CA2675C574AA}"/>
               </a:ext>
             </a:extLst>
           </p:cNvPr>
@@ -13568,7 +13568,7 @@
           <p:cNvPr id="11" name="TextBox 10">
             <a:extLst>
               <a:ext uri="{FF2B5EF4-FFF2-40B4-BE49-F238E27FC236}">
-                <a16:creationId xmlns:a16="http://schemas.microsoft.com/office/drawing/2014/main" id="{3B9C7D1C-DDC3-F03C-C36B-2338501B922F}"/>
+                <a16:creationId xmlns:a16="http://schemas.microsoft.com/office/drawing/2014/main" id="{48CE5F8C-17A9-9FC1-C32A-6D601A66AE5B}"/>
               </a:ext>
             </a:extLst>
           </p:cNvPr>
@@ -13615,7 +13615,7 @@
           <p:cNvPr id="12" name="TextBox 11">
             <a:extLst>
               <a:ext uri="{FF2B5EF4-FFF2-40B4-BE49-F238E27FC236}">
-                <a16:creationId xmlns:a16="http://schemas.microsoft.com/office/drawing/2014/main" id="{45D2E644-16F8-F907-DE85-59286C174677}"/>
+                <a16:creationId xmlns:a16="http://schemas.microsoft.com/office/drawing/2014/main" id="{D64E54A6-9977-DFA7-9686-76AE10FA8BEA}"/>
               </a:ext>
             </a:extLst>
           </p:cNvPr>
@@ -13668,7 +13668,7 @@
           <p:cNvPr id="13" name="Rectangle: Rounded Corners 12">
             <a:extLst>
               <a:ext uri="{FF2B5EF4-FFF2-40B4-BE49-F238E27FC236}">
-                <a16:creationId xmlns:a16="http://schemas.microsoft.com/office/drawing/2014/main" id="{8FAD82E7-0EEC-F4DA-A042-D430FEC40718}"/>
+                <a16:creationId xmlns:a16="http://schemas.microsoft.com/office/drawing/2014/main" id="{CB969BBE-A263-6132-459C-84C21BC4E210}"/>
               </a:ext>
             </a:extLst>
           </p:cNvPr>
@@ -13722,7 +13722,7 @@
           <p:cNvPr id="14" name="TextBox 13">
             <a:extLst>
               <a:ext uri="{FF2B5EF4-FFF2-40B4-BE49-F238E27FC236}">
-                <a16:creationId xmlns:a16="http://schemas.microsoft.com/office/drawing/2014/main" id="{0D670843-0507-4750-D250-39710727578F}"/>
+                <a16:creationId xmlns:a16="http://schemas.microsoft.com/office/drawing/2014/main" id="{D30B2BEE-3958-B28A-ABE2-8C7556BF238B}"/>
               </a:ext>
             </a:extLst>
           </p:cNvPr>
@@ -13772,7 +13772,7 @@
           <p:cNvPr id="15" name="TextBox 14">
             <a:extLst>
               <a:ext uri="{FF2B5EF4-FFF2-40B4-BE49-F238E27FC236}">
-                <a16:creationId xmlns:a16="http://schemas.microsoft.com/office/drawing/2014/main" id="{EB8AE801-3BAD-8AEE-48C8-C7642C592C30}"/>
+                <a16:creationId xmlns:a16="http://schemas.microsoft.com/office/drawing/2014/main" id="{C092F5AF-8382-2AFA-3593-036415B80BAE}"/>
               </a:ext>
             </a:extLst>
           </p:cNvPr>
@@ -13823,7 +13823,7 @@
     </p:spTree>
     <p:extLst>
       <p:ext uri="{BB962C8B-B14F-4D97-AF65-F5344CB8AC3E}">
-        <p14:creationId xmlns:p14="http://schemas.microsoft.com/office/powerpoint/2010/main" val="3403912455"/>
+        <p14:creationId xmlns:p14="http://schemas.microsoft.com/office/powerpoint/2010/main" val="2363002382"/>
       </p:ext>
     </p:extLst>
   </p:cSld>
@@ -13855,7 +13855,7 @@
           <p:cNvPr id="2" name="Rectangle 1">
             <a:extLst>
               <a:ext uri="{FF2B5EF4-FFF2-40B4-BE49-F238E27FC236}">
-                <a16:creationId xmlns:a16="http://schemas.microsoft.com/office/drawing/2014/main" id="{D2859569-777D-7CF0-1770-7E1B6A9D3F13}"/>
+                <a16:creationId xmlns:a16="http://schemas.microsoft.com/office/drawing/2014/main" id="{C48DE051-923B-A101-FF62-D66062F20C03}"/>
               </a:ext>
             </a:extLst>
           </p:cNvPr>
@@ -13923,7 +13923,7 @@
           <p:cNvPr id="3" name="Rectangle 2">
             <a:extLst>
               <a:ext uri="{FF2B5EF4-FFF2-40B4-BE49-F238E27FC236}">
-                <a16:creationId xmlns:a16="http://schemas.microsoft.com/office/drawing/2014/main" id="{BE15FB87-0347-A796-D958-939A79E852BD}"/>
+                <a16:creationId xmlns:a16="http://schemas.microsoft.com/office/drawing/2014/main" id="{590F94E2-53D9-0161-1D43-9FB49412DE71}"/>
               </a:ext>
             </a:extLst>
           </p:cNvPr>
@@ -13991,7 +13991,7 @@
           <p:cNvPr id="4" name="TextBox 3">
             <a:extLst>
               <a:ext uri="{FF2B5EF4-FFF2-40B4-BE49-F238E27FC236}">
-                <a16:creationId xmlns:a16="http://schemas.microsoft.com/office/drawing/2014/main" id="{6F6E7D29-2B3D-21D8-5095-97AB9E0F275E}"/>
+                <a16:creationId xmlns:a16="http://schemas.microsoft.com/office/drawing/2014/main" id="{79105F8E-EFE2-B382-AEE2-E992CF49B526}"/>
               </a:ext>
             </a:extLst>
           </p:cNvPr>
@@ -14059,7 +14059,7 @@
           <p:cNvPr id="5" name="TextBox 4">
             <a:extLst>
               <a:ext uri="{FF2B5EF4-FFF2-40B4-BE49-F238E27FC236}">
-                <a16:creationId xmlns:a16="http://schemas.microsoft.com/office/drawing/2014/main" id="{678D443A-CE0F-97DC-97A9-339119762BB7}"/>
+                <a16:creationId xmlns:a16="http://schemas.microsoft.com/office/drawing/2014/main" id="{61937E48-2A3E-5DB9-CDCB-DFC9588FB877}"/>
               </a:ext>
             </a:extLst>
           </p:cNvPr>
@@ -14106,7 +14106,7 @@
           <p:cNvPr id="6" name="TextBox 5">
             <a:extLst>
               <a:ext uri="{FF2B5EF4-FFF2-40B4-BE49-F238E27FC236}">
-                <a16:creationId xmlns:a16="http://schemas.microsoft.com/office/drawing/2014/main" id="{C6813DB9-796B-A095-3A13-BAEEBCD12C7E}"/>
+                <a16:creationId xmlns:a16="http://schemas.microsoft.com/office/drawing/2014/main" id="{49AB129B-E10B-BB19-AF93-E3F85964E1A8}"/>
               </a:ext>
             </a:extLst>
           </p:cNvPr>
@@ -14146,7 +14146,7 @@
           <p:cNvPr id="7" name="Rectangle: Rounded Corners 6">
             <a:extLst>
               <a:ext uri="{FF2B5EF4-FFF2-40B4-BE49-F238E27FC236}">
-                <a16:creationId xmlns:a16="http://schemas.microsoft.com/office/drawing/2014/main" id="{952B41B3-44D5-6C6F-ED00-8328B28E7543}"/>
+                <a16:creationId xmlns:a16="http://schemas.microsoft.com/office/drawing/2014/main" id="{A918F413-142B-D363-3E87-CD904FA582B6}"/>
               </a:ext>
             </a:extLst>
           </p:cNvPr>
@@ -14200,7 +14200,7 @@
           <p:cNvPr id="8" name="TextBox 7">
             <a:extLst>
               <a:ext uri="{FF2B5EF4-FFF2-40B4-BE49-F238E27FC236}">
-                <a16:creationId xmlns:a16="http://schemas.microsoft.com/office/drawing/2014/main" id="{F88CC011-0AFB-8595-F7D5-43719A7F1040}"/>
+                <a16:creationId xmlns:a16="http://schemas.microsoft.com/office/drawing/2014/main" id="{F8CC62FA-96AA-5FE5-8B78-681159CDA6B1}"/>
               </a:ext>
             </a:extLst>
           </p:cNvPr>
@@ -14250,7 +14250,7 @@
           <p:cNvPr id="9" name="TextBox 8">
             <a:extLst>
               <a:ext uri="{FF2B5EF4-FFF2-40B4-BE49-F238E27FC236}">
-                <a16:creationId xmlns:a16="http://schemas.microsoft.com/office/drawing/2014/main" id="{88885BBE-A915-846C-85C6-1C08C18C6039}"/>
+                <a16:creationId xmlns:a16="http://schemas.microsoft.com/office/drawing/2014/main" id="{7A1ABA4B-EC8D-A3D1-CB0D-8D3B0F7B9668}"/>
               </a:ext>
             </a:extLst>
           </p:cNvPr>
@@ -14339,7 +14339,7 @@
           <p:cNvPr id="10" name="Rectangle: Rounded Corners 9">
             <a:extLst>
               <a:ext uri="{FF2B5EF4-FFF2-40B4-BE49-F238E27FC236}">
-                <a16:creationId xmlns:a16="http://schemas.microsoft.com/office/drawing/2014/main" id="{CE396661-3648-BBDC-1C2F-A67E53477D24}"/>
+                <a16:creationId xmlns:a16="http://schemas.microsoft.com/office/drawing/2014/main" id="{98DDD303-0118-F688-3B27-7A24A38F740B}"/>
               </a:ext>
             </a:extLst>
           </p:cNvPr>
@@ -14393,7 +14393,7 @@
           <p:cNvPr id="11" name="TextBox 10">
             <a:extLst>
               <a:ext uri="{FF2B5EF4-FFF2-40B4-BE49-F238E27FC236}">
-                <a16:creationId xmlns:a16="http://schemas.microsoft.com/office/drawing/2014/main" id="{43AEDEB3-6E2D-C37D-2CE7-E1FD23D70672}"/>
+                <a16:creationId xmlns:a16="http://schemas.microsoft.com/office/drawing/2014/main" id="{8F242319-80A5-193E-AF8B-17DD93A17C12}"/>
               </a:ext>
             </a:extLst>
           </p:cNvPr>
@@ -14440,7 +14440,7 @@
           <p:cNvPr id="12" name="TextBox 11">
             <a:extLst>
               <a:ext uri="{FF2B5EF4-FFF2-40B4-BE49-F238E27FC236}">
-                <a16:creationId xmlns:a16="http://schemas.microsoft.com/office/drawing/2014/main" id="{B146B3C8-3F2D-996B-6C65-1D4D77269502}"/>
+                <a16:creationId xmlns:a16="http://schemas.microsoft.com/office/drawing/2014/main" id="{0BFF9E34-2909-17BD-C45B-9006131B383E}"/>
               </a:ext>
             </a:extLst>
           </p:cNvPr>
@@ -14547,7 +14547,7 @@
           <p:cNvPr id="13" name="Rectangle: Rounded Corners 12">
             <a:extLst>
               <a:ext uri="{FF2B5EF4-FFF2-40B4-BE49-F238E27FC236}">
-                <a16:creationId xmlns:a16="http://schemas.microsoft.com/office/drawing/2014/main" id="{4BB4881A-AFCA-F41F-5377-733FD4B207B8}"/>
+                <a16:creationId xmlns:a16="http://schemas.microsoft.com/office/drawing/2014/main" id="{13B75BE3-96C2-0C30-38C3-5B1967E76C66}"/>
               </a:ext>
             </a:extLst>
           </p:cNvPr>
@@ -14601,7 +14601,7 @@
           <p:cNvPr id="14" name="TextBox 13">
             <a:extLst>
               <a:ext uri="{FF2B5EF4-FFF2-40B4-BE49-F238E27FC236}">
-                <a16:creationId xmlns:a16="http://schemas.microsoft.com/office/drawing/2014/main" id="{F21DF50D-7D9A-B396-3C7B-10CFBAA9359E}"/>
+                <a16:creationId xmlns:a16="http://schemas.microsoft.com/office/drawing/2014/main" id="{EC559001-E026-AB26-313F-6C2A93084609}"/>
               </a:ext>
             </a:extLst>
           </p:cNvPr>
@@ -14648,7 +14648,7 @@
           <p:cNvPr id="15" name="TextBox 14">
             <a:extLst>
               <a:ext uri="{FF2B5EF4-FFF2-40B4-BE49-F238E27FC236}">
-                <a16:creationId xmlns:a16="http://schemas.microsoft.com/office/drawing/2014/main" id="{749EE70B-D21B-A803-7CD1-8707821FC30C}"/>
+                <a16:creationId xmlns:a16="http://schemas.microsoft.com/office/drawing/2014/main" id="{1EBF64DE-2549-04FB-FE33-E301FB9D41E9}"/>
               </a:ext>
             </a:extLst>
           </p:cNvPr>
@@ -14717,7 +14717,7 @@
     </p:spTree>
     <p:extLst>
       <p:ext uri="{BB962C8B-B14F-4D97-AF65-F5344CB8AC3E}">
-        <p14:creationId xmlns:p14="http://schemas.microsoft.com/office/powerpoint/2010/main" val="419005747"/>
+        <p14:creationId xmlns:p14="http://schemas.microsoft.com/office/powerpoint/2010/main" val="1204520773"/>
       </p:ext>
     </p:extLst>
   </p:cSld>

--- a/sales_presentation_2b.pptx
+++ b/sales_presentation_2b.pptx
@@ -201,7 +201,7 @@
             </a:lvl1pPr>
           </a:lstStyle>
           <a:p>
-            <a:fld id="{0204756F-B4C2-48FB-947B-034FA4F82B0F}" type="datetimeFigureOut">
+            <a:fld id="{04AEFEF8-D55B-478F-8C2D-D52386FE7F1C}" type="datetimeFigureOut">
               <a:rPr lang="en-US" smtClean="0"/>
               <a:t>10/1/2026</a:t>
             </a:fld>
@@ -359,7 +359,7 @@
             </a:lvl1pPr>
           </a:lstStyle>
           <a:p>
-            <a:fld id="{BF1E0DE7-A838-44D3-9086-16401B62A323}" type="slidenum">
+            <a:fld id="{584BA930-0EC2-4381-8CB1-EBB93E48B324}" type="slidenum">
               <a:rPr lang="en-US" smtClean="0"/>
               <a:t>‹#›</a:t>
             </a:fld>
@@ -370,7 +370,7 @@
     </p:spTree>
     <p:extLst>
       <p:ext uri="{BB962C8B-B14F-4D97-AF65-F5344CB8AC3E}">
-        <p14:creationId xmlns:p14="http://schemas.microsoft.com/office/powerpoint/2010/main" val="3461989312"/>
+        <p14:creationId xmlns:p14="http://schemas.microsoft.com/office/powerpoint/2010/main" val="629901806"/>
       </p:ext>
     </p:extLst>
   </p:cSld>
@@ -516,7 +516,7 @@
           <a:p>
             <a:r>
               <a:rPr lang="ar-SA"/>
-              <a:t>مساء الخير جميعاً. نعرض اليوم خطة التوسع الميدانية الشاملة لقطاع الجيزة الكبرى لعام 2027، وكيف سنصل بالمبيعات من 2.2 مليون إلى 3.7 مليون ج.م شهرياً بمعدل سنوي واقعي يصل إلى 36.8 مليون جنيه، مع تطبيق الأسلحة الميدانية السبعة للسيطرة على السوق.</a:t>
+              <a:t>مساء الخير جميعاً. نعرض اليوم خطة التوسع الميدانية الشاملة لقطاع الجيزة الكبرى لعام 2027 وفق نظام التقييم الربع سنوي (الكوارتر)، حيث نستهدف 3.7 مليون ج.م لكل 3 شهور (بواقع 14.8 مليون سنوياً)، مع حماية تامة للسيولة وتوزيع متوازن للجهد الميداني.</a:t>
             </a:r>
             <a:endParaRPr lang="en-US"/>
           </a:p>
@@ -537,7 +537,7 @@
           <a:bodyPr/>
           <a:lstStyle/>
           <a:p>
-            <a:fld id="{BF1E0DE7-A838-44D3-9086-16401B62A323}" type="slidenum">
+            <a:fld id="{584BA930-0EC2-4381-8CB1-EBB93E48B324}" type="slidenum">
               <a:rPr lang="en-US" smtClean="0"/>
               <a:t>1</a:t>
             </a:fld>
@@ -548,7 +548,7 @@
     </p:spTree>
     <p:extLst>
       <p:ext uri="{BB962C8B-B14F-4D97-AF65-F5344CB8AC3E}">
-        <p14:creationId xmlns:p14="http://schemas.microsoft.com/office/powerpoint/2010/main" val="511145908"/>
+        <p14:creationId xmlns:p14="http://schemas.microsoft.com/office/powerpoint/2010/main" val="3773294964"/>
       </p:ext>
     </p:extLst>
   </p:cSld>
@@ -625,7 +625,7 @@
           <a:bodyPr/>
           <a:lstStyle/>
           <a:p>
-            <a:fld id="{BF1E0DE7-A838-44D3-9086-16401B62A323}" type="slidenum">
+            <a:fld id="{584BA930-0EC2-4381-8CB1-EBB93E48B324}" type="slidenum">
               <a:rPr lang="en-US" smtClean="0"/>
               <a:t>10</a:t>
             </a:fld>
@@ -636,7 +636,7 @@
     </p:spTree>
     <p:extLst>
       <p:ext uri="{BB962C8B-B14F-4D97-AF65-F5344CB8AC3E}">
-        <p14:creationId xmlns:p14="http://schemas.microsoft.com/office/powerpoint/2010/main" val="3825972907"/>
+        <p14:creationId xmlns:p14="http://schemas.microsoft.com/office/powerpoint/2010/main" val="1135700107"/>
       </p:ext>
     </p:extLst>
   </p:cSld>
@@ -713,7 +713,7 @@
           <a:bodyPr/>
           <a:lstStyle/>
           <a:p>
-            <a:fld id="{BF1E0DE7-A838-44D3-9086-16401B62A323}" type="slidenum">
+            <a:fld id="{584BA930-0EC2-4381-8CB1-EBB93E48B324}" type="slidenum">
               <a:rPr lang="en-US" smtClean="0"/>
               <a:t>11</a:t>
             </a:fld>
@@ -724,7 +724,7 @@
     </p:spTree>
     <p:extLst>
       <p:ext uri="{BB962C8B-B14F-4D97-AF65-F5344CB8AC3E}">
-        <p14:creationId xmlns:p14="http://schemas.microsoft.com/office/powerpoint/2010/main" val="2503370267"/>
+        <p14:creationId xmlns:p14="http://schemas.microsoft.com/office/powerpoint/2010/main" val="2957317669"/>
       </p:ext>
     </p:extLst>
   </p:cSld>
@@ -804,7 +804,7 @@
           <a:bodyPr/>
           <a:lstStyle/>
           <a:p>
-            <a:fld id="{BF1E0DE7-A838-44D3-9086-16401B62A323}" type="slidenum">
+            <a:fld id="{584BA930-0EC2-4381-8CB1-EBB93E48B324}" type="slidenum">
               <a:rPr lang="en-US" smtClean="0"/>
               <a:t>12</a:t>
             </a:fld>
@@ -815,7 +815,7 @@
     </p:spTree>
     <p:extLst>
       <p:ext uri="{BB962C8B-B14F-4D97-AF65-F5344CB8AC3E}">
-        <p14:creationId xmlns:p14="http://schemas.microsoft.com/office/powerpoint/2010/main" val="1870320875"/>
+        <p14:creationId xmlns:p14="http://schemas.microsoft.com/office/powerpoint/2010/main" val="2958203091"/>
       </p:ext>
     </p:extLst>
   </p:cSld>
@@ -871,7 +871,7 @@
           <a:p>
             <a:r>
               <a:rPr lang="ar-SA"/>
-              <a:t>هذه الأرقام تعكس واقع السوق الفعلي: نمو متوازن في المبيعات الشهرية لتصل إلى 3.7 مليون، مع تحقيق 36.8 مليون في 2027 وحماية كاملة لسيولة الشركة.</a:t>
+              <a:t>هذه الأرقام تعكس واقع السوق الفعلي ونظام التقييم الربع سنوي: تارجت الكوارتر 3.7 مليون، المعادل السنوي 14.8 مليون، مع ضبط تام لنسبة الكاش 50% وتدرج واقعي للمناديب 200 ألف شهرياً.</a:t>
             </a:r>
             <a:endParaRPr lang="en-US"/>
           </a:p>
@@ -892,7 +892,7 @@
           <a:bodyPr/>
           <a:lstStyle/>
           <a:p>
-            <a:fld id="{BF1E0DE7-A838-44D3-9086-16401B62A323}" type="slidenum">
+            <a:fld id="{584BA930-0EC2-4381-8CB1-EBB93E48B324}" type="slidenum">
               <a:rPr lang="en-US" smtClean="0"/>
               <a:t>2</a:t>
             </a:fld>
@@ -903,7 +903,7 @@
     </p:spTree>
     <p:extLst>
       <p:ext uri="{BB962C8B-B14F-4D97-AF65-F5344CB8AC3E}">
-        <p14:creationId xmlns:p14="http://schemas.microsoft.com/office/powerpoint/2010/main" val="1085832156"/>
+        <p14:creationId xmlns:p14="http://schemas.microsoft.com/office/powerpoint/2010/main" val="3534450070"/>
       </p:ext>
     </p:extLst>
   </p:cSld>
@@ -980,7 +980,7 @@
           <a:bodyPr/>
           <a:lstStyle/>
           <a:p>
-            <a:fld id="{BF1E0DE7-A838-44D3-9086-16401B62A323}" type="slidenum">
+            <a:fld id="{584BA930-0EC2-4381-8CB1-EBB93E48B324}" type="slidenum">
               <a:rPr lang="en-US" smtClean="0"/>
               <a:t>3</a:t>
             </a:fld>
@@ -991,7 +991,7 @@
     </p:spTree>
     <p:extLst>
       <p:ext uri="{BB962C8B-B14F-4D97-AF65-F5344CB8AC3E}">
-        <p14:creationId xmlns:p14="http://schemas.microsoft.com/office/powerpoint/2010/main" val="2024237824"/>
+        <p14:creationId xmlns:p14="http://schemas.microsoft.com/office/powerpoint/2010/main" val="2438111359"/>
       </p:ext>
     </p:extLst>
   </p:cSld>
@@ -1047,7 +1047,7 @@
           <a:p>
             <a:r>
               <a:rPr lang="ar-SA"/>
-              <a:t>الزيادة التوسعية مبنية على 4 محركات واقعية قابلة للقياس والتحقيق الفعلي في السوق.</a:t>
+              <a:t>الـ 1.5 مليون الإضافية في الكوارتر تأتي من 4 محركات نمو قابلة للقياس الميداني اليومي.</a:t>
             </a:r>
             <a:endParaRPr lang="en-US"/>
           </a:p>
@@ -1068,7 +1068,7 @@
           <a:bodyPr/>
           <a:lstStyle/>
           <a:p>
-            <a:fld id="{BF1E0DE7-A838-44D3-9086-16401B62A323}" type="slidenum">
+            <a:fld id="{584BA930-0EC2-4381-8CB1-EBB93E48B324}" type="slidenum">
               <a:rPr lang="en-US" smtClean="0"/>
               <a:t>4</a:t>
             </a:fld>
@@ -1079,7 +1079,7 @@
     </p:spTree>
     <p:extLst>
       <p:ext uri="{BB962C8B-B14F-4D97-AF65-F5344CB8AC3E}">
-        <p14:creationId xmlns:p14="http://schemas.microsoft.com/office/powerpoint/2010/main" val="3579890531"/>
+        <p14:creationId xmlns:p14="http://schemas.microsoft.com/office/powerpoint/2010/main" val="3656816192"/>
       </p:ext>
     </p:extLst>
   </p:cSld>
@@ -1135,7 +1135,15 @@
           <a:p>
             <a:r>
               <a:rPr lang="ar-SA"/>
-              <a:t>الخطة تضمن تدرجاً تشغيلياً يحمي المندوبين الجدد ويبني علاقات ثقة مستقرة مع تجار التجزئة.</a:t>
+              <a:t>تتوزع شهور الكوارتر الثلاثة بتدرج مدروس لضمان اكتمال التارجت 3.7</a:t>
+            </a:r>
+            <a:r>
+              <a:rPr lang="en-US"/>
+              <a:t>M </a:t>
+            </a:r>
+            <a:r>
+              <a:rPr lang="ar-SA"/>
+              <a:t>بسلاسة تامة.</a:t>
             </a:r>
             <a:endParaRPr lang="en-US"/>
           </a:p>
@@ -1156,7 +1164,7 @@
           <a:bodyPr/>
           <a:lstStyle/>
           <a:p>
-            <a:fld id="{BF1E0DE7-A838-44D3-9086-16401B62A323}" type="slidenum">
+            <a:fld id="{584BA930-0EC2-4381-8CB1-EBB93E48B324}" type="slidenum">
               <a:rPr lang="en-US" smtClean="0"/>
               <a:t>5</a:t>
             </a:fld>
@@ -1167,7 +1175,7 @@
     </p:spTree>
     <p:extLst>
       <p:ext uri="{BB962C8B-B14F-4D97-AF65-F5344CB8AC3E}">
-        <p14:creationId xmlns:p14="http://schemas.microsoft.com/office/powerpoint/2010/main" val="1224728650"/>
+        <p14:creationId xmlns:p14="http://schemas.microsoft.com/office/powerpoint/2010/main" val="1827611744"/>
       </p:ext>
     </p:extLst>
   </p:cSld>
@@ -1223,7 +1231,7 @@
           <a:p>
             <a:r>
               <a:rPr lang="ar-SA"/>
-              <a:t>الخطة السنوية توزع الـ 36.8 مليوناً على الفصول الأربعة وفقاً لمواسم الشراء الفعلية في مصر.</a:t>
+              <a:t>المبيعات السنوية موزعة بدقة على فصول السنة الأربعة وفق مواسم التكنولوجيا في مصر.</a:t>
             </a:r>
             <a:endParaRPr lang="en-US"/>
           </a:p>
@@ -1244,7 +1252,7 @@
           <a:bodyPr/>
           <a:lstStyle/>
           <a:p>
-            <a:fld id="{BF1E0DE7-A838-44D3-9086-16401B62A323}" type="slidenum">
+            <a:fld id="{584BA930-0EC2-4381-8CB1-EBB93E48B324}" type="slidenum">
               <a:rPr lang="en-US" smtClean="0"/>
               <a:t>6</a:t>
             </a:fld>
@@ -1255,7 +1263,7 @@
     </p:spTree>
     <p:extLst>
       <p:ext uri="{BB962C8B-B14F-4D97-AF65-F5344CB8AC3E}">
-        <p14:creationId xmlns:p14="http://schemas.microsoft.com/office/powerpoint/2010/main" val="3434409075"/>
+        <p14:creationId xmlns:p14="http://schemas.microsoft.com/office/powerpoint/2010/main" val="1573668094"/>
       </p:ext>
     </p:extLst>
   </p:cSld>
@@ -1332,7 +1340,7 @@
           <a:bodyPr/>
           <a:lstStyle/>
           <a:p>
-            <a:fld id="{BF1E0DE7-A838-44D3-9086-16401B62A323}" type="slidenum">
+            <a:fld id="{584BA930-0EC2-4381-8CB1-EBB93E48B324}" type="slidenum">
               <a:rPr lang="en-US" smtClean="0"/>
               <a:t>7</a:t>
             </a:fld>
@@ -1343,7 +1351,7 @@
     </p:spTree>
     <p:extLst>
       <p:ext uri="{BB962C8B-B14F-4D97-AF65-F5344CB8AC3E}">
-        <p14:creationId xmlns:p14="http://schemas.microsoft.com/office/powerpoint/2010/main" val="3142671044"/>
+        <p14:creationId xmlns:p14="http://schemas.microsoft.com/office/powerpoint/2010/main" val="3420668339"/>
       </p:ext>
     </p:extLst>
   </p:cSld>
@@ -1420,7 +1428,7 @@
           <a:bodyPr/>
           <a:lstStyle/>
           <a:p>
-            <a:fld id="{BF1E0DE7-A838-44D3-9086-16401B62A323}" type="slidenum">
+            <a:fld id="{584BA930-0EC2-4381-8CB1-EBB93E48B324}" type="slidenum">
               <a:rPr lang="en-US" smtClean="0"/>
               <a:t>8</a:t>
             </a:fld>
@@ -1431,7 +1439,7 @@
     </p:spTree>
     <p:extLst>
       <p:ext uri="{BB962C8B-B14F-4D97-AF65-F5344CB8AC3E}">
-        <p14:creationId xmlns:p14="http://schemas.microsoft.com/office/powerpoint/2010/main" val="1701548821"/>
+        <p14:creationId xmlns:p14="http://schemas.microsoft.com/office/powerpoint/2010/main" val="3373530436"/>
       </p:ext>
     </p:extLst>
   </p:cSld>
@@ -1508,7 +1516,7 @@
           <a:bodyPr/>
           <a:lstStyle/>
           <a:p>
-            <a:fld id="{BF1E0DE7-A838-44D3-9086-16401B62A323}" type="slidenum">
+            <a:fld id="{584BA930-0EC2-4381-8CB1-EBB93E48B324}" type="slidenum">
               <a:rPr lang="en-US" smtClean="0"/>
               <a:t>9</a:t>
             </a:fld>
@@ -1519,7 +1527,7 @@
     </p:spTree>
     <p:extLst>
       <p:ext uri="{BB962C8B-B14F-4D97-AF65-F5344CB8AC3E}">
-        <p14:creationId xmlns:p14="http://schemas.microsoft.com/office/powerpoint/2010/main" val="2995017024"/>
+        <p14:creationId xmlns:p14="http://schemas.microsoft.com/office/powerpoint/2010/main" val="1150615323"/>
       </p:ext>
     </p:extLst>
   </p:cSld>
@@ -1551,7 +1559,7 @@
           <p:cNvPr id="2" name="Title 1">
             <a:extLst>
               <a:ext uri="{FF2B5EF4-FFF2-40B4-BE49-F238E27FC236}">
-                <a16:creationId xmlns:a16="http://schemas.microsoft.com/office/drawing/2014/main" id="{E048BE11-5333-6A28-AD91-C8716EE15C8A}"/>
+                <a16:creationId xmlns:a16="http://schemas.microsoft.com/office/drawing/2014/main" id="{71C8D6CC-E538-79E3-0940-3D6693E98000}"/>
               </a:ext>
             </a:extLst>
           </p:cNvPr>
@@ -1588,7 +1596,7 @@
           <p:cNvPr id="3" name="Subtitle 2">
             <a:extLst>
               <a:ext uri="{FF2B5EF4-FFF2-40B4-BE49-F238E27FC236}">
-                <a16:creationId xmlns:a16="http://schemas.microsoft.com/office/drawing/2014/main" id="{31E151F4-DFA8-B476-B835-3C39235EBB3D}"/>
+                <a16:creationId xmlns:a16="http://schemas.microsoft.com/office/drawing/2014/main" id="{672551A1-7C5D-567C-AACC-D8641D48BFBE}"/>
               </a:ext>
             </a:extLst>
           </p:cNvPr>
@@ -1658,7 +1666,7 @@
           <p:cNvPr id="4" name="Date Placeholder 3">
             <a:extLst>
               <a:ext uri="{FF2B5EF4-FFF2-40B4-BE49-F238E27FC236}">
-                <a16:creationId xmlns:a16="http://schemas.microsoft.com/office/drawing/2014/main" id="{6114ADA1-B023-E7CB-0CAC-A8AFB39A63C3}"/>
+                <a16:creationId xmlns:a16="http://schemas.microsoft.com/office/drawing/2014/main" id="{A2F9E60B-7E5E-7994-6DAC-EC8424933B23}"/>
               </a:ext>
             </a:extLst>
           </p:cNvPr>
@@ -1674,7 +1682,7 @@
           <a:bodyPr/>
           <a:lstStyle/>
           <a:p>
-            <a:fld id="{40FDD52B-EF56-4BB9-AE32-CBE6B0F3120F}" type="datetimeFigureOut">
+            <a:fld id="{DBD87ED8-9780-4134-9083-E9A93434B21F}" type="datetimeFigureOut">
               <a:rPr lang="en-US" smtClean="0"/>
               <a:t>10/1/2026</a:t>
             </a:fld>
@@ -1687,7 +1695,7 @@
           <p:cNvPr id="5" name="Footer Placeholder 4">
             <a:extLst>
               <a:ext uri="{FF2B5EF4-FFF2-40B4-BE49-F238E27FC236}">
-                <a16:creationId xmlns:a16="http://schemas.microsoft.com/office/drawing/2014/main" id="{9A6A72B8-7117-9FB3-FAD0-C45155AF9564}"/>
+                <a16:creationId xmlns:a16="http://schemas.microsoft.com/office/drawing/2014/main" id="{FDDC1FA7-FB4D-5C3A-FA42-370899E5F9A2}"/>
               </a:ext>
             </a:extLst>
           </p:cNvPr>
@@ -1712,7 +1720,7 @@
           <p:cNvPr id="6" name="Slide Number Placeholder 5">
             <a:extLst>
               <a:ext uri="{FF2B5EF4-FFF2-40B4-BE49-F238E27FC236}">
-                <a16:creationId xmlns:a16="http://schemas.microsoft.com/office/drawing/2014/main" id="{3F021203-5591-90A6-2C67-266B5CAC03FA}"/>
+                <a16:creationId xmlns:a16="http://schemas.microsoft.com/office/drawing/2014/main" id="{32EAD2DE-05D6-0CE9-8CC3-36612A2018E3}"/>
               </a:ext>
             </a:extLst>
           </p:cNvPr>
@@ -1728,7 +1736,7 @@
           <a:bodyPr/>
           <a:lstStyle/>
           <a:p>
-            <a:fld id="{071C626E-CE99-4A38-B122-F832429FE450}" type="slidenum">
+            <a:fld id="{55B7DA6C-FD43-4993-B8B1-CD02C792D97B}" type="slidenum">
               <a:rPr lang="en-US" smtClean="0"/>
               <a:t>‹#›</a:t>
             </a:fld>
@@ -1739,7 +1747,7 @@
     </p:spTree>
     <p:extLst>
       <p:ext uri="{BB962C8B-B14F-4D97-AF65-F5344CB8AC3E}">
-        <p14:creationId xmlns:p14="http://schemas.microsoft.com/office/powerpoint/2010/main" val="2095824046"/>
+        <p14:creationId xmlns:p14="http://schemas.microsoft.com/office/powerpoint/2010/main" val="2143434549"/>
       </p:ext>
     </p:extLst>
   </p:cSld>
@@ -1771,7 +1779,7 @@
           <p:cNvPr id="2" name="Title 1">
             <a:extLst>
               <a:ext uri="{FF2B5EF4-FFF2-40B4-BE49-F238E27FC236}">
-                <a16:creationId xmlns:a16="http://schemas.microsoft.com/office/drawing/2014/main" id="{7EE8B0E1-6FB4-BE9D-2C1D-7807F9741451}"/>
+                <a16:creationId xmlns:a16="http://schemas.microsoft.com/office/drawing/2014/main" id="{283CC2DF-6D16-B7FA-664C-AF59514A3EA7}"/>
               </a:ext>
             </a:extLst>
           </p:cNvPr>
@@ -1799,7 +1807,7 @@
           <p:cNvPr id="3" name="Vertical Text Placeholder 2">
             <a:extLst>
               <a:ext uri="{FF2B5EF4-FFF2-40B4-BE49-F238E27FC236}">
-                <a16:creationId xmlns:a16="http://schemas.microsoft.com/office/drawing/2014/main" id="{0B5F4F66-B9F9-6432-2B66-509F9AB2BA14}"/>
+                <a16:creationId xmlns:a16="http://schemas.microsoft.com/office/drawing/2014/main" id="{F393D754-DC8B-81E4-399D-86728C6EAA3F}"/>
               </a:ext>
             </a:extLst>
           </p:cNvPr>
@@ -1856,7 +1864,7 @@
           <p:cNvPr id="4" name="Date Placeholder 3">
             <a:extLst>
               <a:ext uri="{FF2B5EF4-FFF2-40B4-BE49-F238E27FC236}">
-                <a16:creationId xmlns:a16="http://schemas.microsoft.com/office/drawing/2014/main" id="{D11CCF44-6470-4E74-FF7E-969D76E434C3}"/>
+                <a16:creationId xmlns:a16="http://schemas.microsoft.com/office/drawing/2014/main" id="{F094FF3A-9DEB-05AA-DC61-373FA1A3DE11}"/>
               </a:ext>
             </a:extLst>
           </p:cNvPr>
@@ -1872,7 +1880,7 @@
           <a:bodyPr/>
           <a:lstStyle/>
           <a:p>
-            <a:fld id="{40FDD52B-EF56-4BB9-AE32-CBE6B0F3120F}" type="datetimeFigureOut">
+            <a:fld id="{DBD87ED8-9780-4134-9083-E9A93434B21F}" type="datetimeFigureOut">
               <a:rPr lang="en-US" smtClean="0"/>
               <a:t>10/1/2026</a:t>
             </a:fld>
@@ -1885,7 +1893,7 @@
           <p:cNvPr id="5" name="Footer Placeholder 4">
             <a:extLst>
               <a:ext uri="{FF2B5EF4-FFF2-40B4-BE49-F238E27FC236}">
-                <a16:creationId xmlns:a16="http://schemas.microsoft.com/office/drawing/2014/main" id="{7C1CB355-B6E9-1AC3-B33D-B44DAF87D812}"/>
+                <a16:creationId xmlns:a16="http://schemas.microsoft.com/office/drawing/2014/main" id="{F393231A-966C-89D7-9303-72C3281EA255}"/>
               </a:ext>
             </a:extLst>
           </p:cNvPr>
@@ -1910,7 +1918,7 @@
           <p:cNvPr id="6" name="Slide Number Placeholder 5">
             <a:extLst>
               <a:ext uri="{FF2B5EF4-FFF2-40B4-BE49-F238E27FC236}">
-                <a16:creationId xmlns:a16="http://schemas.microsoft.com/office/drawing/2014/main" id="{1A98C8B7-E311-E405-51D6-8498EE758AA4}"/>
+                <a16:creationId xmlns:a16="http://schemas.microsoft.com/office/drawing/2014/main" id="{1836D101-4BCF-85DE-649F-6DF7EE48B8B3}"/>
               </a:ext>
             </a:extLst>
           </p:cNvPr>
@@ -1926,7 +1934,7 @@
           <a:bodyPr/>
           <a:lstStyle/>
           <a:p>
-            <a:fld id="{071C626E-CE99-4A38-B122-F832429FE450}" type="slidenum">
+            <a:fld id="{55B7DA6C-FD43-4993-B8B1-CD02C792D97B}" type="slidenum">
               <a:rPr lang="en-US" smtClean="0"/>
               <a:t>‹#›</a:t>
             </a:fld>
@@ -1937,7 +1945,7 @@
     </p:spTree>
     <p:extLst>
       <p:ext uri="{BB962C8B-B14F-4D97-AF65-F5344CB8AC3E}">
-        <p14:creationId xmlns:p14="http://schemas.microsoft.com/office/powerpoint/2010/main" val="3899036658"/>
+        <p14:creationId xmlns:p14="http://schemas.microsoft.com/office/powerpoint/2010/main" val="2568198537"/>
       </p:ext>
     </p:extLst>
   </p:cSld>
@@ -1969,7 +1977,7 @@
           <p:cNvPr id="2" name="Vertical Title 1">
             <a:extLst>
               <a:ext uri="{FF2B5EF4-FFF2-40B4-BE49-F238E27FC236}">
-                <a16:creationId xmlns:a16="http://schemas.microsoft.com/office/drawing/2014/main" id="{F7CB5595-407E-C79B-BBF0-E7E881B6E51E}"/>
+                <a16:creationId xmlns:a16="http://schemas.microsoft.com/office/drawing/2014/main" id="{79FDD038-E4D5-F394-40BC-E1ECE79D4247}"/>
               </a:ext>
             </a:extLst>
           </p:cNvPr>
@@ -2002,7 +2010,7 @@
           <p:cNvPr id="3" name="Vertical Text Placeholder 2">
             <a:extLst>
               <a:ext uri="{FF2B5EF4-FFF2-40B4-BE49-F238E27FC236}">
-                <a16:creationId xmlns:a16="http://schemas.microsoft.com/office/drawing/2014/main" id="{81031424-3A85-B43E-B674-3137F2DF52B1}"/>
+                <a16:creationId xmlns:a16="http://schemas.microsoft.com/office/drawing/2014/main" id="{E2159211-955A-DCF5-1F5F-BDA3D47DE839}"/>
               </a:ext>
             </a:extLst>
           </p:cNvPr>
@@ -2064,7 +2072,7 @@
           <p:cNvPr id="4" name="Date Placeholder 3">
             <a:extLst>
               <a:ext uri="{FF2B5EF4-FFF2-40B4-BE49-F238E27FC236}">
-                <a16:creationId xmlns:a16="http://schemas.microsoft.com/office/drawing/2014/main" id="{8F6CC118-0149-B59D-3B5E-A6ED87EA80D0}"/>
+                <a16:creationId xmlns:a16="http://schemas.microsoft.com/office/drawing/2014/main" id="{B7FEA508-00D4-4305-BC6E-54F7A375B9A7}"/>
               </a:ext>
             </a:extLst>
           </p:cNvPr>
@@ -2080,7 +2088,7 @@
           <a:bodyPr/>
           <a:lstStyle/>
           <a:p>
-            <a:fld id="{40FDD52B-EF56-4BB9-AE32-CBE6B0F3120F}" type="datetimeFigureOut">
+            <a:fld id="{DBD87ED8-9780-4134-9083-E9A93434B21F}" type="datetimeFigureOut">
               <a:rPr lang="en-US" smtClean="0"/>
               <a:t>10/1/2026</a:t>
             </a:fld>
@@ -2093,7 +2101,7 @@
           <p:cNvPr id="5" name="Footer Placeholder 4">
             <a:extLst>
               <a:ext uri="{FF2B5EF4-FFF2-40B4-BE49-F238E27FC236}">
-                <a16:creationId xmlns:a16="http://schemas.microsoft.com/office/drawing/2014/main" id="{FD405318-EC81-FF28-9948-AAEB4D1391BB}"/>
+                <a16:creationId xmlns:a16="http://schemas.microsoft.com/office/drawing/2014/main" id="{317E0BFC-F339-FD0A-347B-6CB5519B9AA5}"/>
               </a:ext>
             </a:extLst>
           </p:cNvPr>
@@ -2118,7 +2126,7 @@
           <p:cNvPr id="6" name="Slide Number Placeholder 5">
             <a:extLst>
               <a:ext uri="{FF2B5EF4-FFF2-40B4-BE49-F238E27FC236}">
-                <a16:creationId xmlns:a16="http://schemas.microsoft.com/office/drawing/2014/main" id="{09A2A13E-1506-DD19-4AC3-7AF16FF2ADDE}"/>
+                <a16:creationId xmlns:a16="http://schemas.microsoft.com/office/drawing/2014/main" id="{1F6C0A0D-8D2B-BD66-67CC-0AE0C0DC13DA}"/>
               </a:ext>
             </a:extLst>
           </p:cNvPr>
@@ -2134,7 +2142,7 @@
           <a:bodyPr/>
           <a:lstStyle/>
           <a:p>
-            <a:fld id="{071C626E-CE99-4A38-B122-F832429FE450}" type="slidenum">
+            <a:fld id="{55B7DA6C-FD43-4993-B8B1-CD02C792D97B}" type="slidenum">
               <a:rPr lang="en-US" smtClean="0"/>
               <a:t>‹#›</a:t>
             </a:fld>
@@ -2145,7 +2153,7 @@
     </p:spTree>
     <p:extLst>
       <p:ext uri="{BB962C8B-B14F-4D97-AF65-F5344CB8AC3E}">
-        <p14:creationId xmlns:p14="http://schemas.microsoft.com/office/powerpoint/2010/main" val="2407644640"/>
+        <p14:creationId xmlns:p14="http://schemas.microsoft.com/office/powerpoint/2010/main" val="187626075"/>
       </p:ext>
     </p:extLst>
   </p:cSld>
@@ -2177,7 +2185,7 @@
           <p:cNvPr id="2" name="Title 1">
             <a:extLst>
               <a:ext uri="{FF2B5EF4-FFF2-40B4-BE49-F238E27FC236}">
-                <a16:creationId xmlns:a16="http://schemas.microsoft.com/office/drawing/2014/main" id="{58CEBBD8-FE28-C24F-CFC4-5D66D9E031B2}"/>
+                <a16:creationId xmlns:a16="http://schemas.microsoft.com/office/drawing/2014/main" id="{A6A8A2A6-6802-23AC-E5B3-49F781A54B4D}"/>
               </a:ext>
             </a:extLst>
           </p:cNvPr>
@@ -2205,7 +2213,7 @@
           <p:cNvPr id="3" name="Content Placeholder 2">
             <a:extLst>
               <a:ext uri="{FF2B5EF4-FFF2-40B4-BE49-F238E27FC236}">
-                <a16:creationId xmlns:a16="http://schemas.microsoft.com/office/drawing/2014/main" id="{8E0389D2-7F18-B6F1-6352-7995FB4EB58F}"/>
+                <a16:creationId xmlns:a16="http://schemas.microsoft.com/office/drawing/2014/main" id="{6BBA9B6A-165D-E65C-33C4-99037DC470E9}"/>
               </a:ext>
             </a:extLst>
           </p:cNvPr>
@@ -2262,7 +2270,7 @@
           <p:cNvPr id="4" name="Date Placeholder 3">
             <a:extLst>
               <a:ext uri="{FF2B5EF4-FFF2-40B4-BE49-F238E27FC236}">
-                <a16:creationId xmlns:a16="http://schemas.microsoft.com/office/drawing/2014/main" id="{F577E4F6-28B5-BED7-3B05-1726CF353E1F}"/>
+                <a16:creationId xmlns:a16="http://schemas.microsoft.com/office/drawing/2014/main" id="{7CFD5DF5-9C09-B95B-8C86-F870B82685D9}"/>
               </a:ext>
             </a:extLst>
           </p:cNvPr>
@@ -2278,7 +2286,7 @@
           <a:bodyPr/>
           <a:lstStyle/>
           <a:p>
-            <a:fld id="{40FDD52B-EF56-4BB9-AE32-CBE6B0F3120F}" type="datetimeFigureOut">
+            <a:fld id="{DBD87ED8-9780-4134-9083-E9A93434B21F}" type="datetimeFigureOut">
               <a:rPr lang="en-US" smtClean="0"/>
               <a:t>10/1/2026</a:t>
             </a:fld>
@@ -2291,7 +2299,7 @@
           <p:cNvPr id="5" name="Footer Placeholder 4">
             <a:extLst>
               <a:ext uri="{FF2B5EF4-FFF2-40B4-BE49-F238E27FC236}">
-                <a16:creationId xmlns:a16="http://schemas.microsoft.com/office/drawing/2014/main" id="{606EABF6-97DA-E26B-0D48-A22E0F1B2A54}"/>
+                <a16:creationId xmlns:a16="http://schemas.microsoft.com/office/drawing/2014/main" id="{E5B004D7-F443-6BC1-0BDE-06925487BE99}"/>
               </a:ext>
             </a:extLst>
           </p:cNvPr>
@@ -2316,7 +2324,7 @@
           <p:cNvPr id="6" name="Slide Number Placeholder 5">
             <a:extLst>
               <a:ext uri="{FF2B5EF4-FFF2-40B4-BE49-F238E27FC236}">
-                <a16:creationId xmlns:a16="http://schemas.microsoft.com/office/drawing/2014/main" id="{7F83059E-478F-035F-465D-FAAB920EA95E}"/>
+                <a16:creationId xmlns:a16="http://schemas.microsoft.com/office/drawing/2014/main" id="{E7E65C0D-DD94-9649-6D0A-AF793467A9BD}"/>
               </a:ext>
             </a:extLst>
           </p:cNvPr>
@@ -2332,7 +2340,7 @@
           <a:bodyPr/>
           <a:lstStyle/>
           <a:p>
-            <a:fld id="{071C626E-CE99-4A38-B122-F832429FE450}" type="slidenum">
+            <a:fld id="{55B7DA6C-FD43-4993-B8B1-CD02C792D97B}" type="slidenum">
               <a:rPr lang="en-US" smtClean="0"/>
               <a:t>‹#›</a:t>
             </a:fld>
@@ -2343,7 +2351,7 @@
     </p:spTree>
     <p:extLst>
       <p:ext uri="{BB962C8B-B14F-4D97-AF65-F5344CB8AC3E}">
-        <p14:creationId xmlns:p14="http://schemas.microsoft.com/office/powerpoint/2010/main" val="1845346816"/>
+        <p14:creationId xmlns:p14="http://schemas.microsoft.com/office/powerpoint/2010/main" val="2083760585"/>
       </p:ext>
     </p:extLst>
   </p:cSld>
@@ -2375,7 +2383,7 @@
           <p:cNvPr id="2" name="Title 1">
             <a:extLst>
               <a:ext uri="{FF2B5EF4-FFF2-40B4-BE49-F238E27FC236}">
-                <a16:creationId xmlns:a16="http://schemas.microsoft.com/office/drawing/2014/main" id="{F2CDF2C2-79D2-FFFD-57D8-297C47EC7970}"/>
+                <a16:creationId xmlns:a16="http://schemas.microsoft.com/office/drawing/2014/main" id="{079491F9-34A5-E711-97BE-5E47E52B9C0E}"/>
               </a:ext>
             </a:extLst>
           </p:cNvPr>
@@ -2412,7 +2420,7 @@
           <p:cNvPr id="3" name="Text Placeholder 2">
             <a:extLst>
               <a:ext uri="{FF2B5EF4-FFF2-40B4-BE49-F238E27FC236}">
-                <a16:creationId xmlns:a16="http://schemas.microsoft.com/office/drawing/2014/main" id="{0304D6C0-72F6-6CAC-2D91-61E5625E6AA9}"/>
+                <a16:creationId xmlns:a16="http://schemas.microsoft.com/office/drawing/2014/main" id="{7E08445A-7F98-51D9-80C0-94BB751CF698}"/>
               </a:ext>
             </a:extLst>
           </p:cNvPr>
@@ -2537,7 +2545,7 @@
           <p:cNvPr id="4" name="Date Placeholder 3">
             <a:extLst>
               <a:ext uri="{FF2B5EF4-FFF2-40B4-BE49-F238E27FC236}">
-                <a16:creationId xmlns:a16="http://schemas.microsoft.com/office/drawing/2014/main" id="{579F7243-B3CE-B514-8F36-E27421F758B7}"/>
+                <a16:creationId xmlns:a16="http://schemas.microsoft.com/office/drawing/2014/main" id="{2FEFD458-FC40-293B-A019-7FA90234091B}"/>
               </a:ext>
             </a:extLst>
           </p:cNvPr>
@@ -2553,7 +2561,7 @@
           <a:bodyPr/>
           <a:lstStyle/>
           <a:p>
-            <a:fld id="{40FDD52B-EF56-4BB9-AE32-CBE6B0F3120F}" type="datetimeFigureOut">
+            <a:fld id="{DBD87ED8-9780-4134-9083-E9A93434B21F}" type="datetimeFigureOut">
               <a:rPr lang="en-US" smtClean="0"/>
               <a:t>10/1/2026</a:t>
             </a:fld>
@@ -2566,7 +2574,7 @@
           <p:cNvPr id="5" name="Footer Placeholder 4">
             <a:extLst>
               <a:ext uri="{FF2B5EF4-FFF2-40B4-BE49-F238E27FC236}">
-                <a16:creationId xmlns:a16="http://schemas.microsoft.com/office/drawing/2014/main" id="{9BBCA5F1-1831-676B-E979-943CE4E40134}"/>
+                <a16:creationId xmlns:a16="http://schemas.microsoft.com/office/drawing/2014/main" id="{F5938511-6628-9CCE-260D-843CCCF093F7}"/>
               </a:ext>
             </a:extLst>
           </p:cNvPr>
@@ -2591,7 +2599,7 @@
           <p:cNvPr id="6" name="Slide Number Placeholder 5">
             <a:extLst>
               <a:ext uri="{FF2B5EF4-FFF2-40B4-BE49-F238E27FC236}">
-                <a16:creationId xmlns:a16="http://schemas.microsoft.com/office/drawing/2014/main" id="{F6980157-505F-69ED-ACFB-A3BBA45BB8DB}"/>
+                <a16:creationId xmlns:a16="http://schemas.microsoft.com/office/drawing/2014/main" id="{CCB68FAE-1EA0-18C8-928D-EC8B4B9FCB01}"/>
               </a:ext>
             </a:extLst>
           </p:cNvPr>
@@ -2607,7 +2615,7 @@
           <a:bodyPr/>
           <a:lstStyle/>
           <a:p>
-            <a:fld id="{071C626E-CE99-4A38-B122-F832429FE450}" type="slidenum">
+            <a:fld id="{55B7DA6C-FD43-4993-B8B1-CD02C792D97B}" type="slidenum">
               <a:rPr lang="en-US" smtClean="0"/>
               <a:t>‹#›</a:t>
             </a:fld>
@@ -2618,7 +2626,7 @@
     </p:spTree>
     <p:extLst>
       <p:ext uri="{BB962C8B-B14F-4D97-AF65-F5344CB8AC3E}">
-        <p14:creationId xmlns:p14="http://schemas.microsoft.com/office/powerpoint/2010/main" val="126104556"/>
+        <p14:creationId xmlns:p14="http://schemas.microsoft.com/office/powerpoint/2010/main" val="2450910982"/>
       </p:ext>
     </p:extLst>
   </p:cSld>
@@ -2650,7 +2658,7 @@
           <p:cNvPr id="2" name="Title 1">
             <a:extLst>
               <a:ext uri="{FF2B5EF4-FFF2-40B4-BE49-F238E27FC236}">
-                <a16:creationId xmlns:a16="http://schemas.microsoft.com/office/drawing/2014/main" id="{F34D10F8-5D47-8837-8171-CEB65098D2C1}"/>
+                <a16:creationId xmlns:a16="http://schemas.microsoft.com/office/drawing/2014/main" id="{8668C333-B467-0829-A6CC-C0DF62C8512C}"/>
               </a:ext>
             </a:extLst>
           </p:cNvPr>
@@ -2678,7 +2686,7 @@
           <p:cNvPr id="3" name="Content Placeholder 2">
             <a:extLst>
               <a:ext uri="{FF2B5EF4-FFF2-40B4-BE49-F238E27FC236}">
-                <a16:creationId xmlns:a16="http://schemas.microsoft.com/office/drawing/2014/main" id="{10C51958-C840-6212-2B40-74240F7D69AD}"/>
+                <a16:creationId xmlns:a16="http://schemas.microsoft.com/office/drawing/2014/main" id="{E3C90857-8D8F-B924-167F-135412F7631F}"/>
               </a:ext>
             </a:extLst>
           </p:cNvPr>
@@ -2740,7 +2748,7 @@
           <p:cNvPr id="4" name="Content Placeholder 3">
             <a:extLst>
               <a:ext uri="{FF2B5EF4-FFF2-40B4-BE49-F238E27FC236}">
-                <a16:creationId xmlns:a16="http://schemas.microsoft.com/office/drawing/2014/main" id="{6C8CDFC7-DBE5-DC4D-C71C-624F69FB38D2}"/>
+                <a16:creationId xmlns:a16="http://schemas.microsoft.com/office/drawing/2014/main" id="{E173984D-9CB0-0434-09A5-819FF3878374}"/>
               </a:ext>
             </a:extLst>
           </p:cNvPr>
@@ -2802,7 +2810,7 @@
           <p:cNvPr id="5" name="Date Placeholder 4">
             <a:extLst>
               <a:ext uri="{FF2B5EF4-FFF2-40B4-BE49-F238E27FC236}">
-                <a16:creationId xmlns:a16="http://schemas.microsoft.com/office/drawing/2014/main" id="{C318780F-6557-1903-ED3D-A2FB66E1B4E1}"/>
+                <a16:creationId xmlns:a16="http://schemas.microsoft.com/office/drawing/2014/main" id="{33A36C90-92ED-99E1-3D88-CEB6E7317D51}"/>
               </a:ext>
             </a:extLst>
           </p:cNvPr>
@@ -2818,7 +2826,7 @@
           <a:bodyPr/>
           <a:lstStyle/>
           <a:p>
-            <a:fld id="{40FDD52B-EF56-4BB9-AE32-CBE6B0F3120F}" type="datetimeFigureOut">
+            <a:fld id="{DBD87ED8-9780-4134-9083-E9A93434B21F}" type="datetimeFigureOut">
               <a:rPr lang="en-US" smtClean="0"/>
               <a:t>10/1/2026</a:t>
             </a:fld>
@@ -2831,7 +2839,7 @@
           <p:cNvPr id="6" name="Footer Placeholder 5">
             <a:extLst>
               <a:ext uri="{FF2B5EF4-FFF2-40B4-BE49-F238E27FC236}">
-                <a16:creationId xmlns:a16="http://schemas.microsoft.com/office/drawing/2014/main" id="{A67F5FF6-99C0-804C-7520-654129E3F31E}"/>
+                <a16:creationId xmlns:a16="http://schemas.microsoft.com/office/drawing/2014/main" id="{9610E271-A1AD-CF21-D2D2-74EB1AB5F965}"/>
               </a:ext>
             </a:extLst>
           </p:cNvPr>
@@ -2856,7 +2864,7 @@
           <p:cNvPr id="7" name="Slide Number Placeholder 6">
             <a:extLst>
               <a:ext uri="{FF2B5EF4-FFF2-40B4-BE49-F238E27FC236}">
-                <a16:creationId xmlns:a16="http://schemas.microsoft.com/office/drawing/2014/main" id="{173007C6-4F13-52E3-7A8A-C1CF736E2733}"/>
+                <a16:creationId xmlns:a16="http://schemas.microsoft.com/office/drawing/2014/main" id="{C04D157A-322A-DA30-4D73-BD212833B582}"/>
               </a:ext>
             </a:extLst>
           </p:cNvPr>
@@ -2872,7 +2880,7 @@
           <a:bodyPr/>
           <a:lstStyle/>
           <a:p>
-            <a:fld id="{071C626E-CE99-4A38-B122-F832429FE450}" type="slidenum">
+            <a:fld id="{55B7DA6C-FD43-4993-B8B1-CD02C792D97B}" type="slidenum">
               <a:rPr lang="en-US" smtClean="0"/>
               <a:t>‹#›</a:t>
             </a:fld>
@@ -2883,7 +2891,7 @@
     </p:spTree>
     <p:extLst>
       <p:ext uri="{BB962C8B-B14F-4D97-AF65-F5344CB8AC3E}">
-        <p14:creationId xmlns:p14="http://schemas.microsoft.com/office/powerpoint/2010/main" val="1578383029"/>
+        <p14:creationId xmlns:p14="http://schemas.microsoft.com/office/powerpoint/2010/main" val="1706025507"/>
       </p:ext>
     </p:extLst>
   </p:cSld>
@@ -2915,7 +2923,7 @@
           <p:cNvPr id="2" name="Title 1">
             <a:extLst>
               <a:ext uri="{FF2B5EF4-FFF2-40B4-BE49-F238E27FC236}">
-                <a16:creationId xmlns:a16="http://schemas.microsoft.com/office/drawing/2014/main" id="{B24B34B0-1818-9D9C-F34C-17CC3B8AD5BB}"/>
+                <a16:creationId xmlns:a16="http://schemas.microsoft.com/office/drawing/2014/main" id="{B0BCB9E6-2E7C-C126-7E34-17C9C8853EDF}"/>
               </a:ext>
             </a:extLst>
           </p:cNvPr>
@@ -2948,7 +2956,7 @@
           <p:cNvPr id="3" name="Text Placeholder 2">
             <a:extLst>
               <a:ext uri="{FF2B5EF4-FFF2-40B4-BE49-F238E27FC236}">
-                <a16:creationId xmlns:a16="http://schemas.microsoft.com/office/drawing/2014/main" id="{204CDDBF-F7AD-A8BC-F535-D084697F37F5}"/>
+                <a16:creationId xmlns:a16="http://schemas.microsoft.com/office/drawing/2014/main" id="{157C852C-88F0-8431-A746-283DF57B0005}"/>
               </a:ext>
             </a:extLst>
           </p:cNvPr>
@@ -3019,7 +3027,7 @@
           <p:cNvPr id="4" name="Content Placeholder 3">
             <a:extLst>
               <a:ext uri="{FF2B5EF4-FFF2-40B4-BE49-F238E27FC236}">
-                <a16:creationId xmlns:a16="http://schemas.microsoft.com/office/drawing/2014/main" id="{42657225-CDFE-2B42-E4F8-06DDE2EB188B}"/>
+                <a16:creationId xmlns:a16="http://schemas.microsoft.com/office/drawing/2014/main" id="{D25EB242-7F56-836B-0655-B83E452945C0}"/>
               </a:ext>
             </a:extLst>
           </p:cNvPr>
@@ -3081,7 +3089,7 @@
           <p:cNvPr id="5" name="Text Placeholder 4">
             <a:extLst>
               <a:ext uri="{FF2B5EF4-FFF2-40B4-BE49-F238E27FC236}">
-                <a16:creationId xmlns:a16="http://schemas.microsoft.com/office/drawing/2014/main" id="{C12C40E5-BAA9-C5DA-EF29-B063D9080CE5}"/>
+                <a16:creationId xmlns:a16="http://schemas.microsoft.com/office/drawing/2014/main" id="{D5807004-09F2-B65F-8AAA-A61C82C54302}"/>
               </a:ext>
             </a:extLst>
           </p:cNvPr>
@@ -3152,7 +3160,7 @@
           <p:cNvPr id="6" name="Content Placeholder 5">
             <a:extLst>
               <a:ext uri="{FF2B5EF4-FFF2-40B4-BE49-F238E27FC236}">
-                <a16:creationId xmlns:a16="http://schemas.microsoft.com/office/drawing/2014/main" id="{EB9E515A-6B96-8591-7545-E1D0C13E870D}"/>
+                <a16:creationId xmlns:a16="http://schemas.microsoft.com/office/drawing/2014/main" id="{942DC366-9C99-78B0-ACF8-DA82847ED9BC}"/>
               </a:ext>
             </a:extLst>
           </p:cNvPr>
@@ -3214,7 +3222,7 @@
           <p:cNvPr id="7" name="Date Placeholder 6">
             <a:extLst>
               <a:ext uri="{FF2B5EF4-FFF2-40B4-BE49-F238E27FC236}">
-                <a16:creationId xmlns:a16="http://schemas.microsoft.com/office/drawing/2014/main" id="{5719AC98-2301-7576-A04B-98CD5AAE2EC5}"/>
+                <a16:creationId xmlns:a16="http://schemas.microsoft.com/office/drawing/2014/main" id="{179C3201-6E6B-045E-EF1C-6B8522B26E5B}"/>
               </a:ext>
             </a:extLst>
           </p:cNvPr>
@@ -3230,7 +3238,7 @@
           <a:bodyPr/>
           <a:lstStyle/>
           <a:p>
-            <a:fld id="{40FDD52B-EF56-4BB9-AE32-CBE6B0F3120F}" type="datetimeFigureOut">
+            <a:fld id="{DBD87ED8-9780-4134-9083-E9A93434B21F}" type="datetimeFigureOut">
               <a:rPr lang="en-US" smtClean="0"/>
               <a:t>10/1/2026</a:t>
             </a:fld>
@@ -3243,7 +3251,7 @@
           <p:cNvPr id="8" name="Footer Placeholder 7">
             <a:extLst>
               <a:ext uri="{FF2B5EF4-FFF2-40B4-BE49-F238E27FC236}">
-                <a16:creationId xmlns:a16="http://schemas.microsoft.com/office/drawing/2014/main" id="{B5966B85-B403-03B6-B519-917F62BFC800}"/>
+                <a16:creationId xmlns:a16="http://schemas.microsoft.com/office/drawing/2014/main" id="{7A904007-666B-4C7E-F1FB-05F87937E672}"/>
               </a:ext>
             </a:extLst>
           </p:cNvPr>
@@ -3268,7 +3276,7 @@
           <p:cNvPr id="9" name="Slide Number Placeholder 8">
             <a:extLst>
               <a:ext uri="{FF2B5EF4-FFF2-40B4-BE49-F238E27FC236}">
-                <a16:creationId xmlns:a16="http://schemas.microsoft.com/office/drawing/2014/main" id="{9BE8C983-69A3-3D65-7956-E50D1A8D3943}"/>
+                <a16:creationId xmlns:a16="http://schemas.microsoft.com/office/drawing/2014/main" id="{F5502BF5-5231-CF57-9B3A-ABE99F794626}"/>
               </a:ext>
             </a:extLst>
           </p:cNvPr>
@@ -3284,7 +3292,7 @@
           <a:bodyPr/>
           <a:lstStyle/>
           <a:p>
-            <a:fld id="{071C626E-CE99-4A38-B122-F832429FE450}" type="slidenum">
+            <a:fld id="{55B7DA6C-FD43-4993-B8B1-CD02C792D97B}" type="slidenum">
               <a:rPr lang="en-US" smtClean="0"/>
               <a:t>‹#›</a:t>
             </a:fld>
@@ -3295,7 +3303,7 @@
     </p:spTree>
     <p:extLst>
       <p:ext uri="{BB962C8B-B14F-4D97-AF65-F5344CB8AC3E}">
-        <p14:creationId xmlns:p14="http://schemas.microsoft.com/office/powerpoint/2010/main" val="316794708"/>
+        <p14:creationId xmlns:p14="http://schemas.microsoft.com/office/powerpoint/2010/main" val="2363325934"/>
       </p:ext>
     </p:extLst>
   </p:cSld>
@@ -3327,7 +3335,7 @@
           <p:cNvPr id="2" name="Title 1">
             <a:extLst>
               <a:ext uri="{FF2B5EF4-FFF2-40B4-BE49-F238E27FC236}">
-                <a16:creationId xmlns:a16="http://schemas.microsoft.com/office/drawing/2014/main" id="{E97B25FB-BDBA-9B32-EC3D-4A9E5B6D3801}"/>
+                <a16:creationId xmlns:a16="http://schemas.microsoft.com/office/drawing/2014/main" id="{0FA6DC3F-E5B1-F660-64C6-3486220B037B}"/>
               </a:ext>
             </a:extLst>
           </p:cNvPr>
@@ -3355,7 +3363,7 @@
           <p:cNvPr id="3" name="Date Placeholder 2">
             <a:extLst>
               <a:ext uri="{FF2B5EF4-FFF2-40B4-BE49-F238E27FC236}">
-                <a16:creationId xmlns:a16="http://schemas.microsoft.com/office/drawing/2014/main" id="{AC7E1AC7-DCBF-93F9-1ECE-883AA441AF69}"/>
+                <a16:creationId xmlns:a16="http://schemas.microsoft.com/office/drawing/2014/main" id="{8893851E-5E3B-110F-AC73-66A2347C763D}"/>
               </a:ext>
             </a:extLst>
           </p:cNvPr>
@@ -3371,7 +3379,7 @@
           <a:bodyPr/>
           <a:lstStyle/>
           <a:p>
-            <a:fld id="{40FDD52B-EF56-4BB9-AE32-CBE6B0F3120F}" type="datetimeFigureOut">
+            <a:fld id="{DBD87ED8-9780-4134-9083-E9A93434B21F}" type="datetimeFigureOut">
               <a:rPr lang="en-US" smtClean="0"/>
               <a:t>10/1/2026</a:t>
             </a:fld>
@@ -3384,7 +3392,7 @@
           <p:cNvPr id="4" name="Footer Placeholder 3">
             <a:extLst>
               <a:ext uri="{FF2B5EF4-FFF2-40B4-BE49-F238E27FC236}">
-                <a16:creationId xmlns:a16="http://schemas.microsoft.com/office/drawing/2014/main" id="{C112E9B1-42E8-5D05-4BA0-8BF380DAE3A7}"/>
+                <a16:creationId xmlns:a16="http://schemas.microsoft.com/office/drawing/2014/main" id="{8643DB21-2CFB-9B04-0233-E8FCFF3CF2F4}"/>
               </a:ext>
             </a:extLst>
           </p:cNvPr>
@@ -3409,7 +3417,7 @@
           <p:cNvPr id="5" name="Slide Number Placeholder 4">
             <a:extLst>
               <a:ext uri="{FF2B5EF4-FFF2-40B4-BE49-F238E27FC236}">
-                <a16:creationId xmlns:a16="http://schemas.microsoft.com/office/drawing/2014/main" id="{F441597A-1062-298F-3B52-CD8F24000228}"/>
+                <a16:creationId xmlns:a16="http://schemas.microsoft.com/office/drawing/2014/main" id="{9009BC12-F229-9033-150A-27E9C4585289}"/>
               </a:ext>
             </a:extLst>
           </p:cNvPr>
@@ -3425,7 +3433,7 @@
           <a:bodyPr/>
           <a:lstStyle/>
           <a:p>
-            <a:fld id="{071C626E-CE99-4A38-B122-F832429FE450}" type="slidenum">
+            <a:fld id="{55B7DA6C-FD43-4993-B8B1-CD02C792D97B}" type="slidenum">
               <a:rPr lang="en-US" smtClean="0"/>
               <a:t>‹#›</a:t>
             </a:fld>
@@ -3436,7 +3444,7 @@
     </p:spTree>
     <p:extLst>
       <p:ext uri="{BB962C8B-B14F-4D97-AF65-F5344CB8AC3E}">
-        <p14:creationId xmlns:p14="http://schemas.microsoft.com/office/powerpoint/2010/main" val="2091304017"/>
+        <p14:creationId xmlns:p14="http://schemas.microsoft.com/office/powerpoint/2010/main" val="3257892098"/>
       </p:ext>
     </p:extLst>
   </p:cSld>
@@ -3468,7 +3476,7 @@
           <p:cNvPr id="2" name="Date Placeholder 1">
             <a:extLst>
               <a:ext uri="{FF2B5EF4-FFF2-40B4-BE49-F238E27FC236}">
-                <a16:creationId xmlns:a16="http://schemas.microsoft.com/office/drawing/2014/main" id="{C56E8F79-823E-E26B-EBD4-552EC2EB588E}"/>
+                <a16:creationId xmlns:a16="http://schemas.microsoft.com/office/drawing/2014/main" id="{4CED8A75-F5BA-BE03-17F4-0D5C7B4D9688}"/>
               </a:ext>
             </a:extLst>
           </p:cNvPr>
@@ -3484,7 +3492,7 @@
           <a:bodyPr/>
           <a:lstStyle/>
           <a:p>
-            <a:fld id="{40FDD52B-EF56-4BB9-AE32-CBE6B0F3120F}" type="datetimeFigureOut">
+            <a:fld id="{DBD87ED8-9780-4134-9083-E9A93434B21F}" type="datetimeFigureOut">
               <a:rPr lang="en-US" smtClean="0"/>
               <a:t>10/1/2026</a:t>
             </a:fld>
@@ -3497,7 +3505,7 @@
           <p:cNvPr id="3" name="Footer Placeholder 2">
             <a:extLst>
               <a:ext uri="{FF2B5EF4-FFF2-40B4-BE49-F238E27FC236}">
-                <a16:creationId xmlns:a16="http://schemas.microsoft.com/office/drawing/2014/main" id="{AB4829A9-334D-586A-CF5E-8827B3C4CC4E}"/>
+                <a16:creationId xmlns:a16="http://schemas.microsoft.com/office/drawing/2014/main" id="{091FE671-90FA-A925-1547-08CD54B80C05}"/>
               </a:ext>
             </a:extLst>
           </p:cNvPr>
@@ -3522,7 +3530,7 @@
           <p:cNvPr id="4" name="Slide Number Placeholder 3">
             <a:extLst>
               <a:ext uri="{FF2B5EF4-FFF2-40B4-BE49-F238E27FC236}">
-                <a16:creationId xmlns:a16="http://schemas.microsoft.com/office/drawing/2014/main" id="{59335FA4-9BC7-8A76-5973-1FAC5826EC10}"/>
+                <a16:creationId xmlns:a16="http://schemas.microsoft.com/office/drawing/2014/main" id="{8F244330-EDB9-95D5-0BF6-19C02D6E53C1}"/>
               </a:ext>
             </a:extLst>
           </p:cNvPr>
@@ -3538,7 +3546,7 @@
           <a:bodyPr/>
           <a:lstStyle/>
           <a:p>
-            <a:fld id="{071C626E-CE99-4A38-B122-F832429FE450}" type="slidenum">
+            <a:fld id="{55B7DA6C-FD43-4993-B8B1-CD02C792D97B}" type="slidenum">
               <a:rPr lang="en-US" smtClean="0"/>
               <a:t>‹#›</a:t>
             </a:fld>
@@ -3549,7 +3557,7 @@
     </p:spTree>
     <p:extLst>
       <p:ext uri="{BB962C8B-B14F-4D97-AF65-F5344CB8AC3E}">
-        <p14:creationId xmlns:p14="http://schemas.microsoft.com/office/powerpoint/2010/main" val="1158616035"/>
+        <p14:creationId xmlns:p14="http://schemas.microsoft.com/office/powerpoint/2010/main" val="253323886"/>
       </p:ext>
     </p:extLst>
   </p:cSld>
@@ -3581,7 +3589,7 @@
           <p:cNvPr id="2" name="Title 1">
             <a:extLst>
               <a:ext uri="{FF2B5EF4-FFF2-40B4-BE49-F238E27FC236}">
-                <a16:creationId xmlns:a16="http://schemas.microsoft.com/office/drawing/2014/main" id="{BFD3FD00-4636-9536-B2EC-D0A5AA0D1151}"/>
+                <a16:creationId xmlns:a16="http://schemas.microsoft.com/office/drawing/2014/main" id="{A06B1143-EA55-F4D7-10A8-435CF4F84CB8}"/>
               </a:ext>
             </a:extLst>
           </p:cNvPr>
@@ -3618,7 +3626,7 @@
           <p:cNvPr id="3" name="Content Placeholder 2">
             <a:extLst>
               <a:ext uri="{FF2B5EF4-FFF2-40B4-BE49-F238E27FC236}">
-                <a16:creationId xmlns:a16="http://schemas.microsoft.com/office/drawing/2014/main" id="{BB1DA060-3AA9-8009-606D-92C2EBB9C0A6}"/>
+                <a16:creationId xmlns:a16="http://schemas.microsoft.com/office/drawing/2014/main" id="{5EACB39D-EEEE-3FC3-0CB1-288F7B056924}"/>
               </a:ext>
             </a:extLst>
           </p:cNvPr>
@@ -3708,7 +3716,7 @@
           <p:cNvPr id="4" name="Text Placeholder 3">
             <a:extLst>
               <a:ext uri="{FF2B5EF4-FFF2-40B4-BE49-F238E27FC236}">
-                <a16:creationId xmlns:a16="http://schemas.microsoft.com/office/drawing/2014/main" id="{36378030-12C9-E018-5A89-E2995160D74D}"/>
+                <a16:creationId xmlns:a16="http://schemas.microsoft.com/office/drawing/2014/main" id="{B67431F5-EA20-FEF2-04A7-FB8D887E999E}"/>
               </a:ext>
             </a:extLst>
           </p:cNvPr>
@@ -3779,7 +3787,7 @@
           <p:cNvPr id="5" name="Date Placeholder 4">
             <a:extLst>
               <a:ext uri="{FF2B5EF4-FFF2-40B4-BE49-F238E27FC236}">
-                <a16:creationId xmlns:a16="http://schemas.microsoft.com/office/drawing/2014/main" id="{810C94AD-9BF8-E5C5-F5E3-20C5701BF1EA}"/>
+                <a16:creationId xmlns:a16="http://schemas.microsoft.com/office/drawing/2014/main" id="{AD5C61CB-B8A2-0ABA-6A81-E80AE22D98E7}"/>
               </a:ext>
             </a:extLst>
           </p:cNvPr>
@@ -3795,7 +3803,7 @@
           <a:bodyPr/>
           <a:lstStyle/>
           <a:p>
-            <a:fld id="{40FDD52B-EF56-4BB9-AE32-CBE6B0F3120F}" type="datetimeFigureOut">
+            <a:fld id="{DBD87ED8-9780-4134-9083-E9A93434B21F}" type="datetimeFigureOut">
               <a:rPr lang="en-US" smtClean="0"/>
               <a:t>10/1/2026</a:t>
             </a:fld>
@@ -3808,7 +3816,7 @@
           <p:cNvPr id="6" name="Footer Placeholder 5">
             <a:extLst>
               <a:ext uri="{FF2B5EF4-FFF2-40B4-BE49-F238E27FC236}">
-                <a16:creationId xmlns:a16="http://schemas.microsoft.com/office/drawing/2014/main" id="{C57C24F1-68FA-3AFB-36DC-65953C588EA4}"/>
+                <a16:creationId xmlns:a16="http://schemas.microsoft.com/office/drawing/2014/main" id="{EC695223-5B51-4772-4947-FC4E04E161BA}"/>
               </a:ext>
             </a:extLst>
           </p:cNvPr>
@@ -3833,7 +3841,7 @@
           <p:cNvPr id="7" name="Slide Number Placeholder 6">
             <a:extLst>
               <a:ext uri="{FF2B5EF4-FFF2-40B4-BE49-F238E27FC236}">
-                <a16:creationId xmlns:a16="http://schemas.microsoft.com/office/drawing/2014/main" id="{10D8DD79-A460-7C8E-AE52-C1AC3FC1DEAE}"/>
+                <a16:creationId xmlns:a16="http://schemas.microsoft.com/office/drawing/2014/main" id="{7A09E30C-D3D3-ECCC-1F01-DFA46E2DB58A}"/>
               </a:ext>
             </a:extLst>
           </p:cNvPr>
@@ -3849,7 +3857,7 @@
           <a:bodyPr/>
           <a:lstStyle/>
           <a:p>
-            <a:fld id="{071C626E-CE99-4A38-B122-F832429FE450}" type="slidenum">
+            <a:fld id="{55B7DA6C-FD43-4993-B8B1-CD02C792D97B}" type="slidenum">
               <a:rPr lang="en-US" smtClean="0"/>
               <a:t>‹#›</a:t>
             </a:fld>
@@ -3860,7 +3868,7 @@
     </p:spTree>
     <p:extLst>
       <p:ext uri="{BB962C8B-B14F-4D97-AF65-F5344CB8AC3E}">
-        <p14:creationId xmlns:p14="http://schemas.microsoft.com/office/powerpoint/2010/main" val="1463744899"/>
+        <p14:creationId xmlns:p14="http://schemas.microsoft.com/office/powerpoint/2010/main" val="1019586127"/>
       </p:ext>
     </p:extLst>
   </p:cSld>
@@ -3892,7 +3900,7 @@
           <p:cNvPr id="2" name="Title 1">
             <a:extLst>
               <a:ext uri="{FF2B5EF4-FFF2-40B4-BE49-F238E27FC236}">
-                <a16:creationId xmlns:a16="http://schemas.microsoft.com/office/drawing/2014/main" id="{2A64B45A-0C98-5A3D-F3A5-6EBB28308C04}"/>
+                <a16:creationId xmlns:a16="http://schemas.microsoft.com/office/drawing/2014/main" id="{F5CD097A-F9C5-D4DB-8D57-C0BAE9035582}"/>
               </a:ext>
             </a:extLst>
           </p:cNvPr>
@@ -3929,7 +3937,7 @@
           <p:cNvPr id="3" name="Picture Placeholder 2">
             <a:extLst>
               <a:ext uri="{FF2B5EF4-FFF2-40B4-BE49-F238E27FC236}">
-                <a16:creationId xmlns:a16="http://schemas.microsoft.com/office/drawing/2014/main" id="{C6FC84CC-B153-30F3-3E0D-5AC57F367D01}"/>
+                <a16:creationId xmlns:a16="http://schemas.microsoft.com/office/drawing/2014/main" id="{61EF5E2E-FD83-2D90-B689-4EA3E4AD8E76}"/>
               </a:ext>
             </a:extLst>
           </p:cNvPr>
@@ -3996,7 +4004,7 @@
           <p:cNvPr id="4" name="Text Placeholder 3">
             <a:extLst>
               <a:ext uri="{FF2B5EF4-FFF2-40B4-BE49-F238E27FC236}">
-                <a16:creationId xmlns:a16="http://schemas.microsoft.com/office/drawing/2014/main" id="{414C229A-5F28-9E19-6213-47E08E5E0072}"/>
+                <a16:creationId xmlns:a16="http://schemas.microsoft.com/office/drawing/2014/main" id="{830BBBA8-9E9F-45CF-AFFC-A21DA769DE4A}"/>
               </a:ext>
             </a:extLst>
           </p:cNvPr>
@@ -4067,7 +4075,7 @@
           <p:cNvPr id="5" name="Date Placeholder 4">
             <a:extLst>
               <a:ext uri="{FF2B5EF4-FFF2-40B4-BE49-F238E27FC236}">
-                <a16:creationId xmlns:a16="http://schemas.microsoft.com/office/drawing/2014/main" id="{03B31EEE-C29E-DCEE-50C7-E6A899265DC4}"/>
+                <a16:creationId xmlns:a16="http://schemas.microsoft.com/office/drawing/2014/main" id="{48676349-EE7B-7470-5849-1E3FF6689CE7}"/>
               </a:ext>
             </a:extLst>
           </p:cNvPr>
@@ -4083,7 +4091,7 @@
           <a:bodyPr/>
           <a:lstStyle/>
           <a:p>
-            <a:fld id="{40FDD52B-EF56-4BB9-AE32-CBE6B0F3120F}" type="datetimeFigureOut">
+            <a:fld id="{DBD87ED8-9780-4134-9083-E9A93434B21F}" type="datetimeFigureOut">
               <a:rPr lang="en-US" smtClean="0"/>
               <a:t>10/1/2026</a:t>
             </a:fld>
@@ -4096,7 +4104,7 @@
           <p:cNvPr id="6" name="Footer Placeholder 5">
             <a:extLst>
               <a:ext uri="{FF2B5EF4-FFF2-40B4-BE49-F238E27FC236}">
-                <a16:creationId xmlns:a16="http://schemas.microsoft.com/office/drawing/2014/main" id="{9B095FD4-6BE0-8194-1178-D760D26DAF4F}"/>
+                <a16:creationId xmlns:a16="http://schemas.microsoft.com/office/drawing/2014/main" id="{73F1510A-414E-182E-607C-4981258681A8}"/>
               </a:ext>
             </a:extLst>
           </p:cNvPr>
@@ -4121,7 +4129,7 @@
           <p:cNvPr id="7" name="Slide Number Placeholder 6">
             <a:extLst>
               <a:ext uri="{FF2B5EF4-FFF2-40B4-BE49-F238E27FC236}">
-                <a16:creationId xmlns:a16="http://schemas.microsoft.com/office/drawing/2014/main" id="{E91EF188-050E-BD91-24F4-80B95A670990}"/>
+                <a16:creationId xmlns:a16="http://schemas.microsoft.com/office/drawing/2014/main" id="{AA98D545-9C44-BED2-29BF-1E08A55F62D5}"/>
               </a:ext>
             </a:extLst>
           </p:cNvPr>
@@ -4137,7 +4145,7 @@
           <a:bodyPr/>
           <a:lstStyle/>
           <a:p>
-            <a:fld id="{071C626E-CE99-4A38-B122-F832429FE450}" type="slidenum">
+            <a:fld id="{55B7DA6C-FD43-4993-B8B1-CD02C792D97B}" type="slidenum">
               <a:rPr lang="en-US" smtClean="0"/>
               <a:t>‹#›</a:t>
             </a:fld>
@@ -4148,7 +4156,7 @@
     </p:spTree>
     <p:extLst>
       <p:ext uri="{BB962C8B-B14F-4D97-AF65-F5344CB8AC3E}">
-        <p14:creationId xmlns:p14="http://schemas.microsoft.com/office/powerpoint/2010/main" val="4085787594"/>
+        <p14:creationId xmlns:p14="http://schemas.microsoft.com/office/powerpoint/2010/main" val="4015365997"/>
       </p:ext>
     </p:extLst>
   </p:cSld>
@@ -4185,7 +4193,7 @@
           <p:cNvPr id="2" name="Title Placeholder 1">
             <a:extLst>
               <a:ext uri="{FF2B5EF4-FFF2-40B4-BE49-F238E27FC236}">
-                <a16:creationId xmlns:a16="http://schemas.microsoft.com/office/drawing/2014/main" id="{C07B5455-94E0-61A4-CD52-228A8DA3CD4D}"/>
+                <a16:creationId xmlns:a16="http://schemas.microsoft.com/office/drawing/2014/main" id="{F237F117-61D8-0DD9-8DC1-18BA93CD21BB}"/>
               </a:ext>
             </a:extLst>
           </p:cNvPr>
@@ -4223,7 +4231,7 @@
           <p:cNvPr id="3" name="Text Placeholder 2">
             <a:extLst>
               <a:ext uri="{FF2B5EF4-FFF2-40B4-BE49-F238E27FC236}">
-                <a16:creationId xmlns:a16="http://schemas.microsoft.com/office/drawing/2014/main" id="{2F14C237-B534-8552-5592-2DA2614AD311}"/>
+                <a16:creationId xmlns:a16="http://schemas.microsoft.com/office/drawing/2014/main" id="{1652976F-44E4-25D2-600F-35A1DF76B1D3}"/>
               </a:ext>
             </a:extLst>
           </p:cNvPr>
@@ -4290,7 +4298,7 @@
           <p:cNvPr id="4" name="Date Placeholder 3">
             <a:extLst>
               <a:ext uri="{FF2B5EF4-FFF2-40B4-BE49-F238E27FC236}">
-                <a16:creationId xmlns:a16="http://schemas.microsoft.com/office/drawing/2014/main" id="{0D43DDEF-9B98-5310-3D3C-1B18B9E7CD64}"/>
+                <a16:creationId xmlns:a16="http://schemas.microsoft.com/office/drawing/2014/main" id="{2EDAEF9F-B698-3A6C-1FF0-AEB68BD52F15}"/>
               </a:ext>
             </a:extLst>
           </p:cNvPr>
@@ -4324,7 +4332,7 @@
             </a:lvl1pPr>
           </a:lstStyle>
           <a:p>
-            <a:fld id="{40FDD52B-EF56-4BB9-AE32-CBE6B0F3120F}" type="datetimeFigureOut">
+            <a:fld id="{DBD87ED8-9780-4134-9083-E9A93434B21F}" type="datetimeFigureOut">
               <a:rPr lang="en-US" smtClean="0"/>
               <a:t>10/1/2026</a:t>
             </a:fld>
@@ -4337,7 +4345,7 @@
           <p:cNvPr id="5" name="Footer Placeholder 4">
             <a:extLst>
               <a:ext uri="{FF2B5EF4-FFF2-40B4-BE49-F238E27FC236}">
-                <a16:creationId xmlns:a16="http://schemas.microsoft.com/office/drawing/2014/main" id="{97A88907-99B9-4EC5-B906-AA657037F0BA}"/>
+                <a16:creationId xmlns:a16="http://schemas.microsoft.com/office/drawing/2014/main" id="{C944F971-5903-269D-3C87-A8B6ED6074DD}"/>
               </a:ext>
             </a:extLst>
           </p:cNvPr>
@@ -4380,7 +4388,7 @@
           <p:cNvPr id="6" name="Slide Number Placeholder 5">
             <a:extLst>
               <a:ext uri="{FF2B5EF4-FFF2-40B4-BE49-F238E27FC236}">
-                <a16:creationId xmlns:a16="http://schemas.microsoft.com/office/drawing/2014/main" id="{98CA262E-6FA5-E039-185B-532A29A63D94}"/>
+                <a16:creationId xmlns:a16="http://schemas.microsoft.com/office/drawing/2014/main" id="{0303E21A-866E-59D7-B225-08A739682144}"/>
               </a:ext>
             </a:extLst>
           </p:cNvPr>
@@ -4414,7 +4422,7 @@
             </a:lvl1pPr>
           </a:lstStyle>
           <a:p>
-            <a:fld id="{071C626E-CE99-4A38-B122-F832429FE450}" type="slidenum">
+            <a:fld id="{55B7DA6C-FD43-4993-B8B1-CD02C792D97B}" type="slidenum">
               <a:rPr lang="en-US" smtClean="0"/>
               <a:t>‹#›</a:t>
             </a:fld>
@@ -4425,7 +4433,7 @@
     </p:spTree>
     <p:extLst>
       <p:ext uri="{BB962C8B-B14F-4D97-AF65-F5344CB8AC3E}">
-        <p14:creationId xmlns:p14="http://schemas.microsoft.com/office/powerpoint/2010/main" val="1738204650"/>
+        <p14:creationId xmlns:p14="http://schemas.microsoft.com/office/powerpoint/2010/main" val="4255554965"/>
       </p:ext>
     </p:extLst>
   </p:cSld>
@@ -4748,7 +4756,7 @@
           <p:cNvPr id="2" name="Rectangle 1">
             <a:extLst>
               <a:ext uri="{FF2B5EF4-FFF2-40B4-BE49-F238E27FC236}">
-                <a16:creationId xmlns:a16="http://schemas.microsoft.com/office/drawing/2014/main" id="{99AD4373-A7FD-8A9E-1359-6907F793B6B7}"/>
+                <a16:creationId xmlns:a16="http://schemas.microsoft.com/office/drawing/2014/main" id="{7E8A3C26-486E-39F0-2CB9-5AA79BCEF50C}"/>
               </a:ext>
             </a:extLst>
           </p:cNvPr>
@@ -4816,7 +4824,7 @@
           <p:cNvPr id="3" name="Rectangle 2">
             <a:extLst>
               <a:ext uri="{FF2B5EF4-FFF2-40B4-BE49-F238E27FC236}">
-                <a16:creationId xmlns:a16="http://schemas.microsoft.com/office/drawing/2014/main" id="{FAE390E4-4560-D1F1-2612-7AC9B8492908}"/>
+                <a16:creationId xmlns:a16="http://schemas.microsoft.com/office/drawing/2014/main" id="{8519B1B1-F9E6-FC56-C192-EFCA9BD3495A}"/>
               </a:ext>
             </a:extLst>
           </p:cNvPr>
@@ -4884,7 +4892,7 @@
           <p:cNvPr id="4" name="TextBox 3">
             <a:extLst>
               <a:ext uri="{FF2B5EF4-FFF2-40B4-BE49-F238E27FC236}">
-                <a16:creationId xmlns:a16="http://schemas.microsoft.com/office/drawing/2014/main" id="{6332B4BB-18BF-B2B7-082C-A92B17008C4B}"/>
+                <a16:creationId xmlns:a16="http://schemas.microsoft.com/office/drawing/2014/main" id="{44E05E46-7122-A5A1-8BDD-23DCAA437A2F}"/>
               </a:ext>
             </a:extLst>
           </p:cNvPr>
@@ -4916,7 +4924,7 @@
                 <a:latin typeface="Segoe UI" panose="020B0502040204020203" pitchFamily="34" charset="0"/>
               </a:rPr>
               <a:t>استراتيجية مبيعات 2027 الكبرى
-وخطة قفزة الإيرادات لمنطقة الجيزة (3.7</a:t>
+وخطة التوسع التجاري لمنطقة الجيزة (3.7</a:t>
             </a:r>
             <a:r>
               <a:rPr lang="en-US" sz="3200" b="1">
@@ -4925,8 +4933,23 @@
                 </a:solidFill>
                 <a:latin typeface="Segoe UI" panose="020B0502040204020203" pitchFamily="34" charset="0"/>
               </a:rPr>
-              <a:t>M)</a:t>
-            </a:r>
+              <a:t>M </a:t>
+            </a:r>
+            <a:r>
+              <a:rPr lang="ar-SA" sz="3200" b="1">
+                <a:solidFill>
+                  <a:srgbClr val="FFFFFF"/>
+                </a:solidFill>
+                <a:latin typeface="Segoe UI" panose="020B0502040204020203" pitchFamily="34" charset="0"/>
+              </a:rPr>
+              <a:t>للكوارتر)</a:t>
+            </a:r>
+            <a:endParaRPr lang="en-US" sz="3200" b="1">
+              <a:solidFill>
+                <a:srgbClr val="FFFFFF"/>
+              </a:solidFill>
+              <a:latin typeface="Segoe UI" panose="020B0502040204020203" pitchFamily="34" charset="0"/>
+            </a:endParaRPr>
           </a:p>
         </p:txBody>
       </p:sp>
@@ -4935,7 +4958,7 @@
           <p:cNvPr id="5" name="TextBox 4">
             <a:extLst>
               <a:ext uri="{FF2B5EF4-FFF2-40B4-BE49-F238E27FC236}">
-                <a16:creationId xmlns:a16="http://schemas.microsoft.com/office/drawing/2014/main" id="{D2572A4C-1FF8-C508-88DA-1EA29162DD76}"/>
+                <a16:creationId xmlns:a16="http://schemas.microsoft.com/office/drawing/2014/main" id="{AADE4283-BE29-DBD6-BA1F-2C8365563229}"/>
               </a:ext>
             </a:extLst>
           </p:cNvPr>
@@ -5000,7 +5023,7 @@
           <p:cNvPr id="6" name="TextBox 5">
             <a:extLst>
               <a:ext uri="{FF2B5EF4-FFF2-40B4-BE49-F238E27FC236}">
-                <a16:creationId xmlns:a16="http://schemas.microsoft.com/office/drawing/2014/main" id="{A8257E9B-2887-C0BA-B88B-B9C861EB037F}"/>
+                <a16:creationId xmlns:a16="http://schemas.microsoft.com/office/drawing/2014/main" id="{4AD1AC1E-BC57-C7E7-3AD3-C102319215A3}"/>
               </a:ext>
             </a:extLst>
           </p:cNvPr>
@@ -5031,7 +5054,7 @@
                 </a:solidFill>
                 <a:latin typeface="Segoe UI" panose="020B0502040204020203" pitchFamily="34" charset="0"/>
               </a:rPr>
-              <a:t>من 2.2</a:t>
+              <a:t>التارجت: 3.7</a:t>
             </a:r>
             <a:r>
               <a:rPr lang="en-US" sz="1400">
@@ -5049,25 +5072,7 @@
                 </a:solidFill>
                 <a:latin typeface="Segoe UI" panose="020B0502040204020203" pitchFamily="34" charset="0"/>
               </a:rPr>
-              <a:t>إلى 3.7</a:t>
-            </a:r>
-            <a:r>
-              <a:rPr lang="en-US" sz="1400">
-                <a:solidFill>
-                  <a:srgbClr val="38BDF8"/>
-                </a:solidFill>
-                <a:latin typeface="Segoe UI" panose="020B0502040204020203" pitchFamily="34" charset="0"/>
-              </a:rPr>
-              <a:t>M </a:t>
-            </a:r>
-            <a:r>
-              <a:rPr lang="ar-SA" sz="1400">
-                <a:solidFill>
-                  <a:srgbClr val="38BDF8"/>
-                </a:solidFill>
-                <a:latin typeface="Segoe UI" panose="020B0502040204020203" pitchFamily="34" charset="0"/>
-              </a:rPr>
-              <a:t>شهرياً (36.8 مليون ج.م سنوياً لعام 2027)
+              <a:t>كل كوارتر (14.8 مليون ج.م سنوياً لعام 2027)
 إعداد: عبدالله أحمد إبراهيم — مدير المنطقة البيعية (</a:t>
             </a:r>
             <a:r>
@@ -5085,7 +5090,7 @@
     </p:spTree>
     <p:extLst>
       <p:ext uri="{BB962C8B-B14F-4D97-AF65-F5344CB8AC3E}">
-        <p14:creationId xmlns:p14="http://schemas.microsoft.com/office/powerpoint/2010/main" val="3732550319"/>
+        <p14:creationId xmlns:p14="http://schemas.microsoft.com/office/powerpoint/2010/main" val="1690525059"/>
       </p:ext>
     </p:extLst>
   </p:cSld>
@@ -5117,7 +5122,7 @@
           <p:cNvPr id="2" name="Rectangle 1">
             <a:extLst>
               <a:ext uri="{FF2B5EF4-FFF2-40B4-BE49-F238E27FC236}">
-                <a16:creationId xmlns:a16="http://schemas.microsoft.com/office/drawing/2014/main" id="{6EC41341-72C9-ECAB-B97D-F4D2FF22B88F}"/>
+                <a16:creationId xmlns:a16="http://schemas.microsoft.com/office/drawing/2014/main" id="{5D062D41-3F7A-5D04-DC6D-85B4912502D4}"/>
               </a:ext>
             </a:extLst>
           </p:cNvPr>
@@ -5185,7 +5190,7 @@
           <p:cNvPr id="3" name="Rectangle 2">
             <a:extLst>
               <a:ext uri="{FF2B5EF4-FFF2-40B4-BE49-F238E27FC236}">
-                <a16:creationId xmlns:a16="http://schemas.microsoft.com/office/drawing/2014/main" id="{8662BE85-A257-3062-3451-044BCC8C0A86}"/>
+                <a16:creationId xmlns:a16="http://schemas.microsoft.com/office/drawing/2014/main" id="{1959AEA5-39A0-68C5-24DA-4D83D68D5FA0}"/>
               </a:ext>
             </a:extLst>
           </p:cNvPr>
@@ -5253,7 +5258,7 @@
           <p:cNvPr id="4" name="TextBox 3">
             <a:extLst>
               <a:ext uri="{FF2B5EF4-FFF2-40B4-BE49-F238E27FC236}">
-                <a16:creationId xmlns:a16="http://schemas.microsoft.com/office/drawing/2014/main" id="{C0D74C91-BE86-6CFD-8564-43314E642030}"/>
+                <a16:creationId xmlns:a16="http://schemas.microsoft.com/office/drawing/2014/main" id="{3CD44014-700D-D447-779E-C511A7E276B3}"/>
               </a:ext>
             </a:extLst>
           </p:cNvPr>
@@ -5311,7 +5316,7 @@
                 </a:solidFill>
                 <a:latin typeface="Segoe UI" panose="020B0502040204020203" pitchFamily="34" charset="0"/>
               </a:rPr>
-              <a:t>Master Commercial Strategy 2027</a:t>
+              <a:t>Master Commercial Strategy 2027 (Quarterly Model)</a:t>
             </a:r>
           </a:p>
         </p:txBody>
@@ -5321,7 +5326,7 @@
           <p:cNvPr id="5" name="TextBox 4">
             <a:extLst>
               <a:ext uri="{FF2B5EF4-FFF2-40B4-BE49-F238E27FC236}">
-                <a16:creationId xmlns:a16="http://schemas.microsoft.com/office/drawing/2014/main" id="{89B73F45-D917-BF17-BBE1-CA02163BD41C}"/>
+                <a16:creationId xmlns:a16="http://schemas.microsoft.com/office/drawing/2014/main" id="{68C4AEAF-A896-9DA2-6766-F31E73B623E6}"/>
               </a:ext>
             </a:extLst>
           </p:cNvPr>
@@ -5368,7 +5373,7 @@
           <p:cNvPr id="6" name="TextBox 5">
             <a:extLst>
               <a:ext uri="{FF2B5EF4-FFF2-40B4-BE49-F238E27FC236}">
-                <a16:creationId xmlns:a16="http://schemas.microsoft.com/office/drawing/2014/main" id="{C9DE7EF1-6F61-B8CE-9F86-F09A67DA4D13}"/>
+                <a16:creationId xmlns:a16="http://schemas.microsoft.com/office/drawing/2014/main" id="{4CE3CA2C-3AFD-7607-EBAD-7B506A6B683C}"/>
               </a:ext>
             </a:extLst>
           </p:cNvPr>
@@ -5408,7 +5413,7 @@
           <p:cNvPr id="7" name="Rectangle: Rounded Corners 6">
             <a:extLst>
               <a:ext uri="{FF2B5EF4-FFF2-40B4-BE49-F238E27FC236}">
-                <a16:creationId xmlns:a16="http://schemas.microsoft.com/office/drawing/2014/main" id="{B3F41EC4-CA24-30E8-85AB-168217832E30}"/>
+                <a16:creationId xmlns:a16="http://schemas.microsoft.com/office/drawing/2014/main" id="{43230A6F-264E-2D78-2D45-868E35DC5577}"/>
               </a:ext>
             </a:extLst>
           </p:cNvPr>
@@ -5462,7 +5467,7 @@
           <p:cNvPr id="8" name="TextBox 7">
             <a:extLst>
               <a:ext uri="{FF2B5EF4-FFF2-40B4-BE49-F238E27FC236}">
-                <a16:creationId xmlns:a16="http://schemas.microsoft.com/office/drawing/2014/main" id="{1DD89531-7EAC-3CBF-93AB-41561C6ECAE7}"/>
+                <a16:creationId xmlns:a16="http://schemas.microsoft.com/office/drawing/2014/main" id="{ABCE8A9D-1D6F-97B1-E634-86D5AFAC3B05}"/>
               </a:ext>
             </a:extLst>
           </p:cNvPr>
@@ -5512,7 +5517,7 @@
           <p:cNvPr id="9" name="TextBox 8">
             <a:extLst>
               <a:ext uri="{FF2B5EF4-FFF2-40B4-BE49-F238E27FC236}">
-                <a16:creationId xmlns:a16="http://schemas.microsoft.com/office/drawing/2014/main" id="{9B9B8517-0276-2EBD-B24D-354357DF4282}"/>
+                <a16:creationId xmlns:a16="http://schemas.microsoft.com/office/drawing/2014/main" id="{D7F0201F-31F5-003A-93F0-3DA399840AFC}"/>
               </a:ext>
             </a:extLst>
           </p:cNvPr>
@@ -5601,7 +5606,7 @@
           <p:cNvPr id="10" name="Rectangle: Rounded Corners 9">
             <a:extLst>
               <a:ext uri="{FF2B5EF4-FFF2-40B4-BE49-F238E27FC236}">
-                <a16:creationId xmlns:a16="http://schemas.microsoft.com/office/drawing/2014/main" id="{133313C9-6251-9B14-EAD7-0D8C3AF903CB}"/>
+                <a16:creationId xmlns:a16="http://schemas.microsoft.com/office/drawing/2014/main" id="{670DF77E-144B-E816-C12F-639FDE571E25}"/>
               </a:ext>
             </a:extLst>
           </p:cNvPr>
@@ -5655,7 +5660,7 @@
           <p:cNvPr id="11" name="TextBox 10">
             <a:extLst>
               <a:ext uri="{FF2B5EF4-FFF2-40B4-BE49-F238E27FC236}">
-                <a16:creationId xmlns:a16="http://schemas.microsoft.com/office/drawing/2014/main" id="{8CD6B6AB-2B7B-3931-5A5A-7A0259B54750}"/>
+                <a16:creationId xmlns:a16="http://schemas.microsoft.com/office/drawing/2014/main" id="{8AC538F2-0EAE-774B-ED53-649E88977C70}"/>
               </a:ext>
             </a:extLst>
           </p:cNvPr>
@@ -5705,7 +5710,7 @@
           <p:cNvPr id="12" name="TextBox 11">
             <a:extLst>
               <a:ext uri="{FF2B5EF4-FFF2-40B4-BE49-F238E27FC236}">
-                <a16:creationId xmlns:a16="http://schemas.microsoft.com/office/drawing/2014/main" id="{CA36A8EE-9265-54A3-7625-C76F33D727FD}"/>
+                <a16:creationId xmlns:a16="http://schemas.microsoft.com/office/drawing/2014/main" id="{796AD9D6-26DB-53FA-0770-586993A30A9A}"/>
               </a:ext>
             </a:extLst>
           </p:cNvPr>
@@ -5776,7 +5781,7 @@
           <p:cNvPr id="13" name="Rectangle: Rounded Corners 12">
             <a:extLst>
               <a:ext uri="{FF2B5EF4-FFF2-40B4-BE49-F238E27FC236}">
-                <a16:creationId xmlns:a16="http://schemas.microsoft.com/office/drawing/2014/main" id="{F5386795-5B04-8E97-F7FF-9F036BB6FABB}"/>
+                <a16:creationId xmlns:a16="http://schemas.microsoft.com/office/drawing/2014/main" id="{47FD50EA-47D6-5678-9F04-CF25241E6D30}"/>
               </a:ext>
             </a:extLst>
           </p:cNvPr>
@@ -5830,7 +5835,7 @@
           <p:cNvPr id="14" name="TextBox 13">
             <a:extLst>
               <a:ext uri="{FF2B5EF4-FFF2-40B4-BE49-F238E27FC236}">
-                <a16:creationId xmlns:a16="http://schemas.microsoft.com/office/drawing/2014/main" id="{BBEEBAF9-70BE-3640-7A51-8011E240F9BE}"/>
+                <a16:creationId xmlns:a16="http://schemas.microsoft.com/office/drawing/2014/main" id="{2272532C-8783-5E16-3AED-98A46B041FD8}"/>
               </a:ext>
             </a:extLst>
           </p:cNvPr>
@@ -5880,7 +5885,7 @@
           <p:cNvPr id="15" name="TextBox 14">
             <a:extLst>
               <a:ext uri="{FF2B5EF4-FFF2-40B4-BE49-F238E27FC236}">
-                <a16:creationId xmlns:a16="http://schemas.microsoft.com/office/drawing/2014/main" id="{39F9CB0F-12EE-B80A-07CF-79E4308885F3}"/>
+                <a16:creationId xmlns:a16="http://schemas.microsoft.com/office/drawing/2014/main" id="{5378CF30-1255-3665-4237-CA43C10A037D}"/>
               </a:ext>
             </a:extLst>
           </p:cNvPr>
@@ -5985,7 +5990,7 @@
     </p:spTree>
     <p:extLst>
       <p:ext uri="{BB962C8B-B14F-4D97-AF65-F5344CB8AC3E}">
-        <p14:creationId xmlns:p14="http://schemas.microsoft.com/office/powerpoint/2010/main" val="1983146838"/>
+        <p14:creationId xmlns:p14="http://schemas.microsoft.com/office/powerpoint/2010/main" val="2810354748"/>
       </p:ext>
     </p:extLst>
   </p:cSld>
@@ -6017,7 +6022,7 @@
           <p:cNvPr id="2" name="Rectangle 1">
             <a:extLst>
               <a:ext uri="{FF2B5EF4-FFF2-40B4-BE49-F238E27FC236}">
-                <a16:creationId xmlns:a16="http://schemas.microsoft.com/office/drawing/2014/main" id="{5D425EDB-4FAA-436F-71DD-42F803CDF2B9}"/>
+                <a16:creationId xmlns:a16="http://schemas.microsoft.com/office/drawing/2014/main" id="{7247D922-7BAA-002A-C48C-DF8CC6FEB42B}"/>
               </a:ext>
             </a:extLst>
           </p:cNvPr>
@@ -6085,7 +6090,7 @@
           <p:cNvPr id="3" name="Rectangle 2">
             <a:extLst>
               <a:ext uri="{FF2B5EF4-FFF2-40B4-BE49-F238E27FC236}">
-                <a16:creationId xmlns:a16="http://schemas.microsoft.com/office/drawing/2014/main" id="{2597E468-D355-F1C1-2866-BE439D304160}"/>
+                <a16:creationId xmlns:a16="http://schemas.microsoft.com/office/drawing/2014/main" id="{6E72657D-F1CC-3BDC-0D96-407AB6493142}"/>
               </a:ext>
             </a:extLst>
           </p:cNvPr>
@@ -6153,7 +6158,7 @@
           <p:cNvPr id="4" name="TextBox 3">
             <a:extLst>
               <a:ext uri="{FF2B5EF4-FFF2-40B4-BE49-F238E27FC236}">
-                <a16:creationId xmlns:a16="http://schemas.microsoft.com/office/drawing/2014/main" id="{BD520D86-34B8-61C8-3BD5-7BF8463364BB}"/>
+                <a16:creationId xmlns:a16="http://schemas.microsoft.com/office/drawing/2014/main" id="{ED79004E-06F5-6D44-337D-754CEC53548D}"/>
               </a:ext>
             </a:extLst>
           </p:cNvPr>
@@ -6211,7 +6216,7 @@
                 </a:solidFill>
                 <a:latin typeface="Segoe UI" panose="020B0502040204020203" pitchFamily="34" charset="0"/>
               </a:rPr>
-              <a:t>Master Commercial Strategy 2027</a:t>
+              <a:t>Master Commercial Strategy 2027 (Quarterly Model)</a:t>
             </a:r>
           </a:p>
         </p:txBody>
@@ -6221,7 +6226,7 @@
           <p:cNvPr id="5" name="TextBox 4">
             <a:extLst>
               <a:ext uri="{FF2B5EF4-FFF2-40B4-BE49-F238E27FC236}">
-                <a16:creationId xmlns:a16="http://schemas.microsoft.com/office/drawing/2014/main" id="{8DB0EE62-7FFD-A70C-1BE3-06B989455F26}"/>
+                <a16:creationId xmlns:a16="http://schemas.microsoft.com/office/drawing/2014/main" id="{CAEF7917-997F-18CA-F27E-B87D5650BFD9}"/>
               </a:ext>
             </a:extLst>
           </p:cNvPr>
@@ -6286,7 +6291,7 @@
           <p:cNvPr id="6" name="TextBox 5">
             <a:extLst>
               <a:ext uri="{FF2B5EF4-FFF2-40B4-BE49-F238E27FC236}">
-                <a16:creationId xmlns:a16="http://schemas.microsoft.com/office/drawing/2014/main" id="{C6C601AD-9398-F4AC-EB40-9E45A64824EB}"/>
+                <a16:creationId xmlns:a16="http://schemas.microsoft.com/office/drawing/2014/main" id="{ADAC9ECC-6792-9C69-B80C-F601A9C7AB35}"/>
               </a:ext>
             </a:extLst>
           </p:cNvPr>
@@ -6326,7 +6331,7 @@
           <p:cNvPr id="7" name="Rectangle: Rounded Corners 6">
             <a:extLst>
               <a:ext uri="{FF2B5EF4-FFF2-40B4-BE49-F238E27FC236}">
-                <a16:creationId xmlns:a16="http://schemas.microsoft.com/office/drawing/2014/main" id="{18B3A820-03C1-70B1-7BF9-000AC6F1805E}"/>
+                <a16:creationId xmlns:a16="http://schemas.microsoft.com/office/drawing/2014/main" id="{70CDE495-32C7-079B-82EC-F6D0DD4767B6}"/>
               </a:ext>
             </a:extLst>
           </p:cNvPr>
@@ -6380,7 +6385,7 @@
           <p:cNvPr id="8" name="TextBox 7">
             <a:extLst>
               <a:ext uri="{FF2B5EF4-FFF2-40B4-BE49-F238E27FC236}">
-                <a16:creationId xmlns:a16="http://schemas.microsoft.com/office/drawing/2014/main" id="{D9D7201A-92E5-734F-AF82-B7F2D2DCBD1A}"/>
+                <a16:creationId xmlns:a16="http://schemas.microsoft.com/office/drawing/2014/main" id="{6E07431A-F4EE-99B1-F158-43D41F1D8B18}"/>
               </a:ext>
             </a:extLst>
           </p:cNvPr>
@@ -6430,7 +6435,7 @@
           <p:cNvPr id="9" name="TextBox 8">
             <a:extLst>
               <a:ext uri="{FF2B5EF4-FFF2-40B4-BE49-F238E27FC236}">
-                <a16:creationId xmlns:a16="http://schemas.microsoft.com/office/drawing/2014/main" id="{4D62D02B-D88D-55D7-11E9-80D366C07E13}"/>
+                <a16:creationId xmlns:a16="http://schemas.microsoft.com/office/drawing/2014/main" id="{BB15DCD0-DE00-7936-46D1-5B581C62B5ED}"/>
               </a:ext>
             </a:extLst>
           </p:cNvPr>
@@ -6483,7 +6488,7 @@
           <p:cNvPr id="10" name="Rectangle: Rounded Corners 9">
             <a:extLst>
               <a:ext uri="{FF2B5EF4-FFF2-40B4-BE49-F238E27FC236}">
-                <a16:creationId xmlns:a16="http://schemas.microsoft.com/office/drawing/2014/main" id="{4ECBDE1A-2DBA-E62B-A1FF-9EAC245C729B}"/>
+                <a16:creationId xmlns:a16="http://schemas.microsoft.com/office/drawing/2014/main" id="{1738A1FC-BE34-E89E-0AC0-FF8C2E900FD8}"/>
               </a:ext>
             </a:extLst>
           </p:cNvPr>
@@ -6537,7 +6542,7 @@
           <p:cNvPr id="11" name="TextBox 10">
             <a:extLst>
               <a:ext uri="{FF2B5EF4-FFF2-40B4-BE49-F238E27FC236}">
-                <a16:creationId xmlns:a16="http://schemas.microsoft.com/office/drawing/2014/main" id="{2D6278D0-6850-02B1-B801-BE2DD285A070}"/>
+                <a16:creationId xmlns:a16="http://schemas.microsoft.com/office/drawing/2014/main" id="{F91785FA-4379-03A8-6435-68DCD36C6601}"/>
               </a:ext>
             </a:extLst>
           </p:cNvPr>
@@ -6587,7 +6592,7 @@
           <p:cNvPr id="12" name="TextBox 11">
             <a:extLst>
               <a:ext uri="{FF2B5EF4-FFF2-40B4-BE49-F238E27FC236}">
-                <a16:creationId xmlns:a16="http://schemas.microsoft.com/office/drawing/2014/main" id="{9D2D59D7-F498-6528-91A2-14BE820431DB}"/>
+                <a16:creationId xmlns:a16="http://schemas.microsoft.com/office/drawing/2014/main" id="{335BC5D7-DB16-02E1-940B-C244A4884972}"/>
               </a:ext>
             </a:extLst>
           </p:cNvPr>
@@ -6692,7 +6697,7 @@
     </p:spTree>
     <p:extLst>
       <p:ext uri="{BB962C8B-B14F-4D97-AF65-F5344CB8AC3E}">
-        <p14:creationId xmlns:p14="http://schemas.microsoft.com/office/powerpoint/2010/main" val="243491674"/>
+        <p14:creationId xmlns:p14="http://schemas.microsoft.com/office/powerpoint/2010/main" val="2091918762"/>
       </p:ext>
     </p:extLst>
   </p:cSld>
@@ -6724,7 +6729,7 @@
           <p:cNvPr id="2" name="Rectangle 1">
             <a:extLst>
               <a:ext uri="{FF2B5EF4-FFF2-40B4-BE49-F238E27FC236}">
-                <a16:creationId xmlns:a16="http://schemas.microsoft.com/office/drawing/2014/main" id="{A364716E-4376-0D53-0813-8E735E8B90A1}"/>
+                <a16:creationId xmlns:a16="http://schemas.microsoft.com/office/drawing/2014/main" id="{4FB5FBED-2EC5-BE62-8BD2-9407E0590DDC}"/>
               </a:ext>
             </a:extLst>
           </p:cNvPr>
@@ -6792,7 +6797,7 @@
           <p:cNvPr id="3" name="Rectangle 2">
             <a:extLst>
               <a:ext uri="{FF2B5EF4-FFF2-40B4-BE49-F238E27FC236}">
-                <a16:creationId xmlns:a16="http://schemas.microsoft.com/office/drawing/2014/main" id="{DFD3DF20-3BE2-1DCA-B27D-409607C0489D}"/>
+                <a16:creationId xmlns:a16="http://schemas.microsoft.com/office/drawing/2014/main" id="{24ECEAEB-AEA4-8989-91EB-ED088691F2E1}"/>
               </a:ext>
             </a:extLst>
           </p:cNvPr>
@@ -6860,7 +6865,7 @@
           <p:cNvPr id="4" name="TextBox 3">
             <a:extLst>
               <a:ext uri="{FF2B5EF4-FFF2-40B4-BE49-F238E27FC236}">
-                <a16:creationId xmlns:a16="http://schemas.microsoft.com/office/drawing/2014/main" id="{1F2ABB06-AE3D-3B1A-63CF-5A1CA51325CE}"/>
+                <a16:creationId xmlns:a16="http://schemas.microsoft.com/office/drawing/2014/main" id="{C6FF97EE-7179-C77C-EA01-7624D4106B22}"/>
               </a:ext>
             </a:extLst>
           </p:cNvPr>
@@ -6918,7 +6923,7 @@
                 </a:solidFill>
                 <a:latin typeface="Segoe UI" panose="020B0502040204020203" pitchFamily="34" charset="0"/>
               </a:rPr>
-              <a:t>Master Commercial Strategy 2027</a:t>
+              <a:t>Master Commercial Strategy 2027 (Quarterly Model)</a:t>
             </a:r>
           </a:p>
         </p:txBody>
@@ -6928,7 +6933,7 @@
           <p:cNvPr id="5" name="TextBox 4">
             <a:extLst>
               <a:ext uri="{FF2B5EF4-FFF2-40B4-BE49-F238E27FC236}">
-                <a16:creationId xmlns:a16="http://schemas.microsoft.com/office/drawing/2014/main" id="{B6014D2F-AD07-6CE2-2F70-FEB37E1FE648}"/>
+                <a16:creationId xmlns:a16="http://schemas.microsoft.com/office/drawing/2014/main" id="{736DCA37-D2B7-98B2-9589-9C94B99B19D5}"/>
               </a:ext>
             </a:extLst>
           </p:cNvPr>
@@ -6975,7 +6980,7 @@
           <p:cNvPr id="6" name="TextBox 5">
             <a:extLst>
               <a:ext uri="{FF2B5EF4-FFF2-40B4-BE49-F238E27FC236}">
-                <a16:creationId xmlns:a16="http://schemas.microsoft.com/office/drawing/2014/main" id="{F04E40F0-2D69-3C47-9138-9522E4454689}"/>
+                <a16:creationId xmlns:a16="http://schemas.microsoft.com/office/drawing/2014/main" id="{2A6F2170-0506-3816-9381-F0DB6347FC5C}"/>
               </a:ext>
             </a:extLst>
           </p:cNvPr>
@@ -7015,7 +7020,7 @@
           <p:cNvPr id="7" name="Rectangle: Rounded Corners 6">
             <a:extLst>
               <a:ext uri="{FF2B5EF4-FFF2-40B4-BE49-F238E27FC236}">
-                <a16:creationId xmlns:a16="http://schemas.microsoft.com/office/drawing/2014/main" id="{F6280556-2AAB-E8D7-78CD-77113A8D0D82}"/>
+                <a16:creationId xmlns:a16="http://schemas.microsoft.com/office/drawing/2014/main" id="{CE597154-AAD3-1F6F-D4DF-994B285F163B}"/>
               </a:ext>
             </a:extLst>
           </p:cNvPr>
@@ -7069,7 +7074,7 @@
           <p:cNvPr id="8" name="TextBox 7">
             <a:extLst>
               <a:ext uri="{FF2B5EF4-FFF2-40B4-BE49-F238E27FC236}">
-                <a16:creationId xmlns:a16="http://schemas.microsoft.com/office/drawing/2014/main" id="{72A21439-607A-5DF9-D5C2-10CE8F4BAA5C}"/>
+                <a16:creationId xmlns:a16="http://schemas.microsoft.com/office/drawing/2014/main" id="{649928E0-5B0B-3AE5-3205-6AD0FAEA61C6}"/>
               </a:ext>
             </a:extLst>
           </p:cNvPr>
@@ -7116,7 +7121,7 @@
           <p:cNvPr id="9" name="TextBox 8">
             <a:extLst>
               <a:ext uri="{FF2B5EF4-FFF2-40B4-BE49-F238E27FC236}">
-                <a16:creationId xmlns:a16="http://schemas.microsoft.com/office/drawing/2014/main" id="{DC4450D8-B7B5-09C6-8CDE-095769425393}"/>
+                <a16:creationId xmlns:a16="http://schemas.microsoft.com/office/drawing/2014/main" id="{D427CEF5-ADF5-DDB2-9C6D-F766D3DC144D}"/>
               </a:ext>
             </a:extLst>
           </p:cNvPr>
@@ -7172,7 +7177,7 @@
           <p:cNvPr id="10" name="Rectangle: Rounded Corners 9">
             <a:extLst>
               <a:ext uri="{FF2B5EF4-FFF2-40B4-BE49-F238E27FC236}">
-                <a16:creationId xmlns:a16="http://schemas.microsoft.com/office/drawing/2014/main" id="{1BC0EDA4-E6F4-E54B-AEF6-954F8499C6FD}"/>
+                <a16:creationId xmlns:a16="http://schemas.microsoft.com/office/drawing/2014/main" id="{B7A93E0F-020F-95E8-C2DB-F485EAB03518}"/>
               </a:ext>
             </a:extLst>
           </p:cNvPr>
@@ -7226,7 +7231,7 @@
           <p:cNvPr id="11" name="TextBox 10">
             <a:extLst>
               <a:ext uri="{FF2B5EF4-FFF2-40B4-BE49-F238E27FC236}">
-                <a16:creationId xmlns:a16="http://schemas.microsoft.com/office/drawing/2014/main" id="{D0882FA7-0D91-D287-8000-CBD6C6D19FA5}"/>
+                <a16:creationId xmlns:a16="http://schemas.microsoft.com/office/drawing/2014/main" id="{BA34FD91-43F4-BFAA-F683-E37C6C8554DC}"/>
               </a:ext>
             </a:extLst>
           </p:cNvPr>
@@ -7273,7 +7278,7 @@
           <p:cNvPr id="12" name="TextBox 11">
             <a:extLst>
               <a:ext uri="{FF2B5EF4-FFF2-40B4-BE49-F238E27FC236}">
-                <a16:creationId xmlns:a16="http://schemas.microsoft.com/office/drawing/2014/main" id="{D1C1B49B-B013-8BE0-C93A-08A4CD6F503D}"/>
+                <a16:creationId xmlns:a16="http://schemas.microsoft.com/office/drawing/2014/main" id="{EE35E77F-3ED6-432A-C18C-DBCBEFA82F9B}"/>
               </a:ext>
             </a:extLst>
           </p:cNvPr>
@@ -7344,7 +7349,7 @@
           <p:cNvPr id="13" name="Rectangle: Rounded Corners 12">
             <a:extLst>
               <a:ext uri="{FF2B5EF4-FFF2-40B4-BE49-F238E27FC236}">
-                <a16:creationId xmlns:a16="http://schemas.microsoft.com/office/drawing/2014/main" id="{A2522FA7-B51F-59D9-ED38-DE09233DB7D4}"/>
+                <a16:creationId xmlns:a16="http://schemas.microsoft.com/office/drawing/2014/main" id="{06C7E4D7-F16D-894A-4B87-BECE021944F5}"/>
               </a:ext>
             </a:extLst>
           </p:cNvPr>
@@ -7398,7 +7403,7 @@
           <p:cNvPr id="14" name="TextBox 13">
             <a:extLst>
               <a:ext uri="{FF2B5EF4-FFF2-40B4-BE49-F238E27FC236}">
-                <a16:creationId xmlns:a16="http://schemas.microsoft.com/office/drawing/2014/main" id="{909D01A1-B837-45C6-CBDF-818752A78AAE}"/>
+                <a16:creationId xmlns:a16="http://schemas.microsoft.com/office/drawing/2014/main" id="{689BA9F5-C878-B3F7-DC66-A5591B8DF273}"/>
               </a:ext>
             </a:extLst>
           </p:cNvPr>
@@ -7445,7 +7450,7 @@
           <p:cNvPr id="15" name="TextBox 14">
             <a:extLst>
               <a:ext uri="{FF2B5EF4-FFF2-40B4-BE49-F238E27FC236}">
-                <a16:creationId xmlns:a16="http://schemas.microsoft.com/office/drawing/2014/main" id="{B4848FB8-89A0-7068-83B4-4095087946C7}"/>
+                <a16:creationId xmlns:a16="http://schemas.microsoft.com/office/drawing/2014/main" id="{0D69FB18-516D-965C-5AF6-B32BE3E90411}"/>
               </a:ext>
             </a:extLst>
           </p:cNvPr>
@@ -7499,7 +7504,7 @@
     </p:spTree>
     <p:extLst>
       <p:ext uri="{BB962C8B-B14F-4D97-AF65-F5344CB8AC3E}">
-        <p14:creationId xmlns:p14="http://schemas.microsoft.com/office/powerpoint/2010/main" val="2969305958"/>
+        <p14:creationId xmlns:p14="http://schemas.microsoft.com/office/powerpoint/2010/main" val="3868921690"/>
       </p:ext>
     </p:extLst>
   </p:cSld>
@@ -7531,7 +7536,7 @@
           <p:cNvPr id="2" name="Rectangle 1">
             <a:extLst>
               <a:ext uri="{FF2B5EF4-FFF2-40B4-BE49-F238E27FC236}">
-                <a16:creationId xmlns:a16="http://schemas.microsoft.com/office/drawing/2014/main" id="{05D7DFD5-54CC-0888-C08B-DA098CF921A6}"/>
+                <a16:creationId xmlns:a16="http://schemas.microsoft.com/office/drawing/2014/main" id="{7D181EA6-7454-96A7-0C09-21DF75FE4B56}"/>
               </a:ext>
             </a:extLst>
           </p:cNvPr>
@@ -7599,7 +7604,7 @@
           <p:cNvPr id="3" name="Rectangle 2">
             <a:extLst>
               <a:ext uri="{FF2B5EF4-FFF2-40B4-BE49-F238E27FC236}">
-                <a16:creationId xmlns:a16="http://schemas.microsoft.com/office/drawing/2014/main" id="{F2ECFD47-593D-6667-6B74-A03685E1C14D}"/>
+                <a16:creationId xmlns:a16="http://schemas.microsoft.com/office/drawing/2014/main" id="{B296AEE2-3F4D-4D25-B1B1-FD76FBE727B5}"/>
               </a:ext>
             </a:extLst>
           </p:cNvPr>
@@ -7667,7 +7672,7 @@
           <p:cNvPr id="4" name="TextBox 3">
             <a:extLst>
               <a:ext uri="{FF2B5EF4-FFF2-40B4-BE49-F238E27FC236}">
-                <a16:creationId xmlns:a16="http://schemas.microsoft.com/office/drawing/2014/main" id="{5B2E2791-27C0-55D2-23E5-88F5B75C9261}"/>
+                <a16:creationId xmlns:a16="http://schemas.microsoft.com/office/drawing/2014/main" id="{15DEFF7B-3EF3-1AF9-074B-A4DFCDE3F95A}"/>
               </a:ext>
             </a:extLst>
           </p:cNvPr>
@@ -7725,7 +7730,7 @@
                 </a:solidFill>
                 <a:latin typeface="Segoe UI" panose="020B0502040204020203" pitchFamily="34" charset="0"/>
               </a:rPr>
-              <a:t>Master Commercial Strategy 2027</a:t>
+              <a:t>Master Commercial Strategy 2027 (Quarterly Model)</a:t>
             </a:r>
           </a:p>
         </p:txBody>
@@ -7735,7 +7740,7 @@
           <p:cNvPr id="5" name="TextBox 4">
             <a:extLst>
               <a:ext uri="{FF2B5EF4-FFF2-40B4-BE49-F238E27FC236}">
-                <a16:creationId xmlns:a16="http://schemas.microsoft.com/office/drawing/2014/main" id="{A805EC48-85C2-DE30-1868-F90E9391021E}"/>
+                <a16:creationId xmlns:a16="http://schemas.microsoft.com/office/drawing/2014/main" id="{DE355B4E-DE68-131A-0FFB-EDF734FBFBF0}"/>
               </a:ext>
             </a:extLst>
           </p:cNvPr>
@@ -7766,7 +7771,7 @@
                 </a:solidFill>
                 <a:latin typeface="Segoe UI" panose="020B0502040204020203" pitchFamily="34" charset="0"/>
               </a:rPr>
-              <a:t>المؤشرات الرقمية الكبرى لاستراتيجية الجيزة 2027</a:t>
+              <a:t>المؤشرات الرقمية الكبرى لاستراتيجية الجيزة 2027 (نظام الكوارتر)</a:t>
             </a:r>
             <a:endParaRPr lang="en-US" sz="2200" b="1">
               <a:solidFill>
@@ -7782,7 +7787,7 @@
           <p:cNvPr id="6" name="TextBox 5">
             <a:extLst>
               <a:ext uri="{FF2B5EF4-FFF2-40B4-BE49-F238E27FC236}">
-                <a16:creationId xmlns:a16="http://schemas.microsoft.com/office/drawing/2014/main" id="{90D650FA-ECD1-DA91-924A-7C1166D0FC33}"/>
+                <a16:creationId xmlns:a16="http://schemas.microsoft.com/office/drawing/2014/main" id="{E6423D27-96CD-1772-42FE-32D296E7A344}"/>
               </a:ext>
             </a:extLst>
           </p:cNvPr>
@@ -7822,7 +7827,7 @@
           <p:cNvPr id="7" name="Rectangle: Rounded Corners 6">
             <a:extLst>
               <a:ext uri="{FF2B5EF4-FFF2-40B4-BE49-F238E27FC236}">
-                <a16:creationId xmlns:a16="http://schemas.microsoft.com/office/drawing/2014/main" id="{DAC0259C-0476-2AF4-2FD2-753C3AFC9812}"/>
+                <a16:creationId xmlns:a16="http://schemas.microsoft.com/office/drawing/2014/main" id="{CD8C3D02-391F-5964-4E4A-5FF1E40078E1}"/>
               </a:ext>
             </a:extLst>
           </p:cNvPr>
@@ -7876,7 +7881,7 @@
           <p:cNvPr id="8" name="TextBox 7">
             <a:extLst>
               <a:ext uri="{FF2B5EF4-FFF2-40B4-BE49-F238E27FC236}">
-                <a16:creationId xmlns:a16="http://schemas.microsoft.com/office/drawing/2014/main" id="{40322D4A-E734-8306-782E-EB0DCC8CA955}"/>
+                <a16:creationId xmlns:a16="http://schemas.microsoft.com/office/drawing/2014/main" id="{A5948D3D-BE8D-CD60-BAEC-DDE16E11023E}"/>
               </a:ext>
             </a:extLst>
           </p:cNvPr>
@@ -7923,7 +7928,7 @@
           <p:cNvPr id="9" name="TextBox 8">
             <a:extLst>
               <a:ext uri="{FF2B5EF4-FFF2-40B4-BE49-F238E27FC236}">
-                <a16:creationId xmlns:a16="http://schemas.microsoft.com/office/drawing/2014/main" id="{EAA39776-D15F-E104-7C9C-99FD4C7C56E4}"/>
+                <a16:creationId xmlns:a16="http://schemas.microsoft.com/office/drawing/2014/main" id="{018D7024-B941-FAB1-DC55-9E46B8AE09A9}"/>
               </a:ext>
             </a:extLst>
           </p:cNvPr>
@@ -7933,7 +7938,7 @@
         <p:spPr>
           <a:xfrm>
             <a:off x="787400" y="1993900"/>
-            <a:ext cx="2235200" cy="923714"/>
+            <a:ext cx="2235200" cy="1348446"/>
           </a:xfrm>
           <a:prstGeom prst="rect">
             <a:avLst/>
@@ -7958,7 +7963,7 @@
                 </a:solidFill>
                 <a:latin typeface="Segoe UI" panose="020B0502040204020203" pitchFamily="34" charset="0"/>
               </a:rPr>
-              <a:t>• المستهدف الشهري الإجمالي للأريا.
+              <a:t>• المستهدف الإجمالي للكوارتر (كل 3 شهور).
 • 2.2</a:t>
             </a:r>
             <a:r>
@@ -7996,7 +8001,25 @@
                 <a:latin typeface="Segoe UI" panose="020B0502040204020203" pitchFamily="34" charset="0"/>
               </a:rPr>
               <a:t>التوسع.
-• مزيج متوازن بين الجملة والتجزئة.</a:t>
+• المعادل الشهري الاسترشادي: ~1.23</a:t>
+            </a:r>
+            <a:r>
+              <a:rPr lang="en-US" sz="1200">
+                <a:solidFill>
+                  <a:srgbClr val="FFFFFF"/>
+                </a:solidFill>
+                <a:latin typeface="Segoe UI" panose="020B0502040204020203" pitchFamily="34" charset="0"/>
+              </a:rPr>
+              <a:t>M </a:t>
+            </a:r>
+            <a:r>
+              <a:rPr lang="ar-SA" sz="1200">
+                <a:solidFill>
+                  <a:srgbClr val="FFFFFF"/>
+                </a:solidFill>
+                <a:latin typeface="Segoe UI" panose="020B0502040204020203" pitchFamily="34" charset="0"/>
+              </a:rPr>
+              <a:t>ج.م.</a:t>
             </a:r>
             <a:endParaRPr lang="en-US" sz="1200">
               <a:solidFill>
@@ -8012,7 +8035,7 @@
           <p:cNvPr id="10" name="Rectangle: Rounded Corners 9">
             <a:extLst>
               <a:ext uri="{FF2B5EF4-FFF2-40B4-BE49-F238E27FC236}">
-                <a16:creationId xmlns:a16="http://schemas.microsoft.com/office/drawing/2014/main" id="{D7D6DB29-E0B2-1F42-51E2-03215825E3C0}"/>
+                <a16:creationId xmlns:a16="http://schemas.microsoft.com/office/drawing/2014/main" id="{8CF23576-60B2-86B7-BBD2-31D236629D09}"/>
               </a:ext>
             </a:extLst>
           </p:cNvPr>
@@ -8066,7 +8089,7 @@
           <p:cNvPr id="11" name="TextBox 10">
             <a:extLst>
               <a:ext uri="{FF2B5EF4-FFF2-40B4-BE49-F238E27FC236}">
-                <a16:creationId xmlns:a16="http://schemas.microsoft.com/office/drawing/2014/main" id="{F22F0A57-44EB-2D49-15A4-B8A55B42B5FC}"/>
+                <a16:creationId xmlns:a16="http://schemas.microsoft.com/office/drawing/2014/main" id="{E1FD274A-11F0-920B-B035-16F76D88C24B}"/>
               </a:ext>
             </a:extLst>
           </p:cNvPr>
@@ -8097,7 +8120,7 @@
                 </a:solidFill>
                 <a:latin typeface="Segoe UI" panose="020B0502040204020203" pitchFamily="34" charset="0"/>
               </a:rPr>
-              <a:t>36,800,000 ج.م</a:t>
+              <a:t>14,800,000 ج.م</a:t>
             </a:r>
             <a:endParaRPr lang="en-US" sz="1500" b="1">
               <a:solidFill>
@@ -8113,7 +8136,7 @@
           <p:cNvPr id="12" name="TextBox 11">
             <a:extLst>
               <a:ext uri="{FF2B5EF4-FFF2-40B4-BE49-F238E27FC236}">
-                <a16:creationId xmlns:a16="http://schemas.microsoft.com/office/drawing/2014/main" id="{1472361F-6BC5-E71C-91C2-2AC36533D03E}"/>
+                <a16:creationId xmlns:a16="http://schemas.microsoft.com/office/drawing/2014/main" id="{D55509DB-E547-7BCF-7E36-1D1FB77F24E3}"/>
               </a:ext>
             </a:extLst>
           </p:cNvPr>
@@ -8123,7 +8146,7 @@
         <p:spPr>
           <a:xfrm>
             <a:off x="3581400" y="1993900"/>
-            <a:ext cx="2235200" cy="1136080"/>
+            <a:ext cx="2235200" cy="1348446"/>
           </a:xfrm>
           <a:prstGeom prst="rect">
             <a:avLst/>
@@ -8148,7 +8171,7 @@
                 </a:solidFill>
                 <a:latin typeface="Segoe UI" panose="020B0502040204020203" pitchFamily="34" charset="0"/>
               </a:rPr>
-              <a:t>• المستهدف السنوي الواقعي لعام 2027.
+              <a:t>• المستهدف السنوي الواقعي لعام 2027 (4 كوارترات).
 • نمو مدروس بنسبة +28% فوق الأساس.
 • موزعة بدقة وفق مواسم السوق والجامعات.</a:t>
             </a:r>
@@ -8166,7 +8189,7 @@
           <p:cNvPr id="13" name="Rectangle: Rounded Corners 12">
             <a:extLst>
               <a:ext uri="{FF2B5EF4-FFF2-40B4-BE49-F238E27FC236}">
-                <a16:creationId xmlns:a16="http://schemas.microsoft.com/office/drawing/2014/main" id="{F6180D0E-D9B5-5CE9-F526-D54A9F9216CD}"/>
+                <a16:creationId xmlns:a16="http://schemas.microsoft.com/office/drawing/2014/main" id="{BA9FBBC6-D9BA-0B6E-1600-A6343EFACA5B}"/>
               </a:ext>
             </a:extLst>
           </p:cNvPr>
@@ -8220,7 +8243,7 @@
           <p:cNvPr id="14" name="TextBox 13">
             <a:extLst>
               <a:ext uri="{FF2B5EF4-FFF2-40B4-BE49-F238E27FC236}">
-                <a16:creationId xmlns:a16="http://schemas.microsoft.com/office/drawing/2014/main" id="{D91A1DBD-ACF5-67D3-5D25-AA09D0A2EF39}"/>
+                <a16:creationId xmlns:a16="http://schemas.microsoft.com/office/drawing/2014/main" id="{506FC52B-FB67-2595-1856-CF2284319FB2}"/>
               </a:ext>
             </a:extLst>
           </p:cNvPr>
@@ -8267,7 +8290,7 @@
           <p:cNvPr id="15" name="TextBox 14">
             <a:extLst>
               <a:ext uri="{FF2B5EF4-FFF2-40B4-BE49-F238E27FC236}">
-                <a16:creationId xmlns:a16="http://schemas.microsoft.com/office/drawing/2014/main" id="{F4DEF545-2537-9882-E72B-C08A3749C600}"/>
+                <a16:creationId xmlns:a16="http://schemas.microsoft.com/office/drawing/2014/main" id="{793DC0F8-0747-492C-359A-969C745744B1}"/>
               </a:ext>
             </a:extLst>
           </p:cNvPr>
@@ -8277,7 +8300,7 @@
         <p:spPr>
           <a:xfrm>
             <a:off x="6375400" y="1993900"/>
-            <a:ext cx="2235200" cy="1136080"/>
+            <a:ext cx="2235200" cy="1348446"/>
           </a:xfrm>
           <a:prstGeom prst="rect">
             <a:avLst/>
@@ -8302,9 +8325,9 @@
                 </a:solidFill>
                 <a:latin typeface="Segoe UI" panose="020B0502040204020203" pitchFamily="34" charset="0"/>
               </a:rPr>
-              <a:t>• مبيعات الكاش الفوري شهرياً (50%+).
+              <a:t>• مبيعات الكاش الفوري لكل كوارتر (50%+).
 • خصم تعجيل دفع 2%-3% للتاجر الملتزم.
-• متوسط فترة تحصيل الديون </a:t>
+• فترة تحصيل الديون </a:t>
             </a:r>
             <a:r>
               <a:rPr lang="en-US" sz="1200">
@@ -8322,7 +8345,7 @@
                 </a:solidFill>
                 <a:latin typeface="Segoe UI" panose="020B0502040204020203" pitchFamily="34" charset="0"/>
               </a:rPr>
-              <a:t>لا تتجاوز 20 يوماً.</a:t>
+              <a:t>لا تتجاوز 14-20 يوماً.</a:t>
             </a:r>
             <a:endParaRPr lang="en-US" sz="1200">
               <a:solidFill>
@@ -8338,7 +8361,7 @@
           <p:cNvPr id="16" name="Rectangle: Rounded Corners 15">
             <a:extLst>
               <a:ext uri="{FF2B5EF4-FFF2-40B4-BE49-F238E27FC236}">
-                <a16:creationId xmlns:a16="http://schemas.microsoft.com/office/drawing/2014/main" id="{4DF8C98A-AA93-051C-81FB-97548605B45A}"/>
+                <a16:creationId xmlns:a16="http://schemas.microsoft.com/office/drawing/2014/main" id="{79239DC4-8101-DF20-20DA-0A1AA10DF1A3}"/>
               </a:ext>
             </a:extLst>
           </p:cNvPr>
@@ -8392,7 +8415,7 @@
           <p:cNvPr id="17" name="TextBox 16">
             <a:extLst>
               <a:ext uri="{FF2B5EF4-FFF2-40B4-BE49-F238E27FC236}">
-                <a16:creationId xmlns:a16="http://schemas.microsoft.com/office/drawing/2014/main" id="{B8873DC9-CA3F-20F2-AE88-C22AFC1FF969}"/>
+                <a16:creationId xmlns:a16="http://schemas.microsoft.com/office/drawing/2014/main" id="{303299B8-4ACF-68C9-AB4E-9081B72C8E36}"/>
               </a:ext>
             </a:extLst>
           </p:cNvPr>
@@ -8417,14 +8440,20 @@
           <a:p>
             <a:pPr algn="r"/>
             <a:r>
-              <a:rPr lang="en-US" sz="1500" b="1">
+              <a:rPr lang="ar-SA" sz="1500" b="1">
                 <a:solidFill>
                   <a:srgbClr val="EA580C"/>
                 </a:solidFill>
                 <a:latin typeface="Segoe UI" panose="020B0502040204020203" pitchFamily="34" charset="0"/>
               </a:rPr>
-              <a:t>350K - 600K</a:t>
-            </a:r>
+              <a:t>600,000 ج.م</a:t>
+            </a:r>
+            <a:endParaRPr lang="en-US" sz="1500" b="1">
+              <a:solidFill>
+                <a:srgbClr val="EA580C"/>
+              </a:solidFill>
+              <a:latin typeface="Segoe UI" panose="020B0502040204020203" pitchFamily="34" charset="0"/>
+            </a:endParaRPr>
           </a:p>
         </p:txBody>
       </p:sp>
@@ -8433,7 +8462,7 @@
           <p:cNvPr id="18" name="TextBox 17">
             <a:extLst>
               <a:ext uri="{FF2B5EF4-FFF2-40B4-BE49-F238E27FC236}">
-                <a16:creationId xmlns:a16="http://schemas.microsoft.com/office/drawing/2014/main" id="{8EECDDE0-E7C7-4DC6-5A3E-B6163FF1BF3D}"/>
+                <a16:creationId xmlns:a16="http://schemas.microsoft.com/office/drawing/2014/main" id="{E849CA77-406C-86B8-CF3A-1A5B991887CB}"/>
               </a:ext>
             </a:extLst>
           </p:cNvPr>
@@ -8468,9 +8497,9 @@
                 </a:solidFill>
                 <a:latin typeface="Segoe UI" panose="020B0502040204020203" pitchFamily="34" charset="0"/>
               </a:rPr>
-              <a:t>• تدرج المندوب الجديد (معقول وميداني).
-• يبدأ بـ 350 ألف ويتدرج حتى 600 ألف.
-• حماية المندوبين من الإحباط وضمان استقرارهم.</a:t>
+              <a:t>• تارجت المندوب في الكوارتر (200 ألف شهرياً).
+• تدرج واقعي يحمي المندوب من الإحباط.
+• التركيز على عملاء التجزئة وفتح منافذ جديدة.</a:t>
             </a:r>
             <a:endParaRPr lang="en-US" sz="1200">
               <a:solidFill>
@@ -8484,7 +8513,7 @@
     </p:spTree>
     <p:extLst>
       <p:ext uri="{BB962C8B-B14F-4D97-AF65-F5344CB8AC3E}">
-        <p14:creationId xmlns:p14="http://schemas.microsoft.com/office/powerpoint/2010/main" val="624431039"/>
+        <p14:creationId xmlns:p14="http://schemas.microsoft.com/office/powerpoint/2010/main" val="3218438611"/>
       </p:ext>
     </p:extLst>
   </p:cSld>
@@ -8516,7 +8545,7 @@
           <p:cNvPr id="2" name="Rectangle 1">
             <a:extLst>
               <a:ext uri="{FF2B5EF4-FFF2-40B4-BE49-F238E27FC236}">
-                <a16:creationId xmlns:a16="http://schemas.microsoft.com/office/drawing/2014/main" id="{F0C57B8E-B1F1-7990-EFDA-BE06F35C8B2A}"/>
+                <a16:creationId xmlns:a16="http://schemas.microsoft.com/office/drawing/2014/main" id="{5A529FC5-79F6-04E4-52CE-E7E9461D5260}"/>
               </a:ext>
             </a:extLst>
           </p:cNvPr>
@@ -8584,7 +8613,7 @@
           <p:cNvPr id="3" name="Rectangle 2">
             <a:extLst>
               <a:ext uri="{FF2B5EF4-FFF2-40B4-BE49-F238E27FC236}">
-                <a16:creationId xmlns:a16="http://schemas.microsoft.com/office/drawing/2014/main" id="{EC656F08-F9D5-CD7E-1434-74FC77026CB6}"/>
+                <a16:creationId xmlns:a16="http://schemas.microsoft.com/office/drawing/2014/main" id="{6A8C033D-6806-6753-48E0-AAB15B5F93C8}"/>
               </a:ext>
             </a:extLst>
           </p:cNvPr>
@@ -8652,7 +8681,7 @@
           <p:cNvPr id="4" name="TextBox 3">
             <a:extLst>
               <a:ext uri="{FF2B5EF4-FFF2-40B4-BE49-F238E27FC236}">
-                <a16:creationId xmlns:a16="http://schemas.microsoft.com/office/drawing/2014/main" id="{2E522827-74EB-73ED-66D8-7B006AA7364F}"/>
+                <a16:creationId xmlns:a16="http://schemas.microsoft.com/office/drawing/2014/main" id="{3E0B1D8C-96F1-2EC8-E004-CCE212A8B7EC}"/>
               </a:ext>
             </a:extLst>
           </p:cNvPr>
@@ -8710,7 +8739,7 @@
                 </a:solidFill>
                 <a:latin typeface="Segoe UI" panose="020B0502040204020203" pitchFamily="34" charset="0"/>
               </a:rPr>
-              <a:t>Master Commercial Strategy 2027</a:t>
+              <a:t>Master Commercial Strategy 2027 (Quarterly Model)</a:t>
             </a:r>
           </a:p>
         </p:txBody>
@@ -8720,7 +8749,7 @@
           <p:cNvPr id="5" name="TextBox 4">
             <a:extLst>
               <a:ext uri="{FF2B5EF4-FFF2-40B4-BE49-F238E27FC236}">
-                <a16:creationId xmlns:a16="http://schemas.microsoft.com/office/drawing/2014/main" id="{3B574171-3619-12AD-98C2-DFE7B7CFCB4E}"/>
+                <a16:creationId xmlns:a16="http://schemas.microsoft.com/office/drawing/2014/main" id="{0803FB69-5E87-20A3-CF6A-CBAE6587B5C9}"/>
               </a:ext>
             </a:extLst>
           </p:cNvPr>
@@ -8751,7 +8780,7 @@
                 </a:solidFill>
                 <a:latin typeface="Segoe UI" panose="020B0502040204020203" pitchFamily="34" charset="0"/>
               </a:rPr>
-              <a:t>توزيع التارجت الشهري الجديد (3.7</a:t>
+              <a:t>توزيع تارجت الكوارتر (3.7</a:t>
             </a:r>
             <a:r>
               <a:rPr lang="en-US" sz="2200" b="1">
@@ -8785,7 +8814,7 @@
           <p:cNvPr id="6" name="TextBox 5">
             <a:extLst>
               <a:ext uri="{FF2B5EF4-FFF2-40B4-BE49-F238E27FC236}">
-                <a16:creationId xmlns:a16="http://schemas.microsoft.com/office/drawing/2014/main" id="{C5BF1C44-788E-59F4-379C-889C490A4C73}"/>
+                <a16:creationId xmlns:a16="http://schemas.microsoft.com/office/drawing/2014/main" id="{7763FC6C-F90D-736C-A156-A44B75B4485A}"/>
               </a:ext>
             </a:extLst>
           </p:cNvPr>
@@ -8825,7 +8854,7 @@
           <p:cNvPr id="7" name="Rectangle: Rounded Corners 6">
             <a:extLst>
               <a:ext uri="{FF2B5EF4-FFF2-40B4-BE49-F238E27FC236}">
-                <a16:creationId xmlns:a16="http://schemas.microsoft.com/office/drawing/2014/main" id="{B8FB6365-3E66-BB20-58EA-D30BA7BC41BC}"/>
+                <a16:creationId xmlns:a16="http://schemas.microsoft.com/office/drawing/2014/main" id="{1643D6B8-20B6-F3F9-56C9-9676BAE9BDE1}"/>
               </a:ext>
             </a:extLst>
           </p:cNvPr>
@@ -8879,7 +8908,7 @@
           <p:cNvPr id="8" name="TextBox 7">
             <a:extLst>
               <a:ext uri="{FF2B5EF4-FFF2-40B4-BE49-F238E27FC236}">
-                <a16:creationId xmlns:a16="http://schemas.microsoft.com/office/drawing/2014/main" id="{E48BA100-0B9E-5180-501C-18FABF63FA9F}"/>
+                <a16:creationId xmlns:a16="http://schemas.microsoft.com/office/drawing/2014/main" id="{E2C7D450-8AC7-1522-9ECB-A7D4D984EC5E}"/>
               </a:ext>
             </a:extLst>
           </p:cNvPr>
@@ -8910,14 +8939,17 @@
                 </a:solidFill>
                 <a:latin typeface="Segoe UI" panose="020B0502040204020203" pitchFamily="34" charset="0"/>
               </a:rPr>
-              <a:t>كبار الموزعين والجملة (2,500,000 ج.م)</a:t>
-            </a:r>
-            <a:endParaRPr lang="en-US" sz="1500" b="1">
-              <a:solidFill>
-                <a:srgbClr val="EA580C"/>
-              </a:solidFill>
-              <a:latin typeface="Segoe UI" panose="020B0502040204020203" pitchFamily="34" charset="0"/>
-            </a:endParaRPr>
+              <a:t>الاريا مانجر (</a:t>
+            </a:r>
+            <a:r>
+              <a:rPr lang="en-US" sz="1500" b="1">
+                <a:solidFill>
+                  <a:srgbClr val="EA580C"/>
+                </a:solidFill>
+                <a:latin typeface="Segoe UI" panose="020B0502040204020203" pitchFamily="34" charset="0"/>
+              </a:rPr>
+              <a:t>ASM)</a:t>
+            </a:r>
           </a:p>
         </p:txBody>
       </p:sp>
@@ -8926,7 +8958,7 @@
           <p:cNvPr id="9" name="TextBox 8">
             <a:extLst>
               <a:ext uri="{FF2B5EF4-FFF2-40B4-BE49-F238E27FC236}">
-                <a16:creationId xmlns:a16="http://schemas.microsoft.com/office/drawing/2014/main" id="{9328ADDB-BECE-C3F6-48EA-E72332F114EB}"/>
+                <a16:creationId xmlns:a16="http://schemas.microsoft.com/office/drawing/2014/main" id="{7AA74C5E-AA25-FA75-FEF9-1636F61EE571}"/>
               </a:ext>
             </a:extLst>
           </p:cNvPr>
@@ -8936,7 +8968,7 @@
         <p:spPr>
           <a:xfrm>
             <a:off x="787400" y="1993900"/>
-            <a:ext cx="3124200" cy="923714"/>
+            <a:ext cx="3124200" cy="711349"/>
           </a:xfrm>
           <a:prstGeom prst="rect">
             <a:avLst/>
@@ -8961,38 +8993,16 @@
                 </a:solidFill>
                 <a:latin typeface="Segoe UI" panose="020B0502040204020203" pitchFamily="34" charset="0"/>
               </a:rPr>
-              <a:t>• إشراف مباشر من الاريا مانجر (</a:t>
-            </a:r>
-            <a:r>
-              <a:rPr lang="en-US" sz="1200">
-                <a:solidFill>
-                  <a:srgbClr val="FFFFFF"/>
-                </a:solidFill>
-                <a:latin typeface="Segoe UI" panose="020B0502040204020203" pitchFamily="34" charset="0"/>
-              </a:rPr>
-              <a:t>ASM).
-• 67.5% </a:t>
-            </a:r>
-            <a:r>
-              <a:rPr lang="ar-SA" sz="1200">
-                <a:solidFill>
-                  <a:srgbClr val="FFFFFF"/>
-                </a:solidFill>
-                <a:latin typeface="Segoe UI" panose="020B0502040204020203" pitchFamily="34" charset="0"/>
-              </a:rPr>
-              <a:t>من إجمالي مبيعات المنطقة.
-• كبار تجار الجملة بالجيزة وفيصل وإمبابة وأكتوبر.
-• صفقات التوريد المؤسسي للجامعات والشركات (</a:t>
-            </a:r>
-            <a:r>
-              <a:rPr lang="en-US" sz="1200">
-                <a:solidFill>
-                  <a:srgbClr val="FFFFFF"/>
-                </a:solidFill>
-                <a:latin typeface="Segoe UI" panose="020B0502040204020203" pitchFamily="34" charset="0"/>
-              </a:rPr>
-              <a:t>B2B).</a:t>
-            </a:r>
+              <a:t>• المستهدف: 2,500,000 ج.م في الكوارتر (67.5%).
+• المعادل الشهري: ~833,000 ج.م شهرياً.
+• كبار موزعي الجملة الخمسة والصفقات المؤسسية.</a:t>
+            </a:r>
+            <a:endParaRPr lang="en-US" sz="1200">
+              <a:solidFill>
+                <a:srgbClr val="FFFFFF"/>
+              </a:solidFill>
+              <a:latin typeface="Segoe UI" panose="020B0502040204020203" pitchFamily="34" charset="0"/>
+            </a:endParaRPr>
           </a:p>
         </p:txBody>
       </p:sp>
@@ -9001,7 +9011,7 @@
           <p:cNvPr id="10" name="Rectangle: Rounded Corners 9">
             <a:extLst>
               <a:ext uri="{FF2B5EF4-FFF2-40B4-BE49-F238E27FC236}">
-                <a16:creationId xmlns:a16="http://schemas.microsoft.com/office/drawing/2014/main" id="{D73FD644-6C80-1A4E-9B01-B4596A43D043}"/>
+                <a16:creationId xmlns:a16="http://schemas.microsoft.com/office/drawing/2014/main" id="{D8BEF7E8-F306-505F-5BA4-CAE17E833F87}"/>
               </a:ext>
             </a:extLst>
           </p:cNvPr>
@@ -9055,7 +9065,7 @@
           <p:cNvPr id="11" name="TextBox 10">
             <a:extLst>
               <a:ext uri="{FF2B5EF4-FFF2-40B4-BE49-F238E27FC236}">
-                <a16:creationId xmlns:a16="http://schemas.microsoft.com/office/drawing/2014/main" id="{E34E8AA9-B251-EAF2-2AAA-A2472719F5B2}"/>
+                <a16:creationId xmlns:a16="http://schemas.microsoft.com/office/drawing/2014/main" id="{9E870B4D-C6A9-96D3-AA5C-17B531D7B8E8}"/>
               </a:ext>
             </a:extLst>
           </p:cNvPr>
@@ -9086,7 +9096,7 @@
                 </a:solidFill>
                 <a:latin typeface="Segoe UI" panose="020B0502040204020203" pitchFamily="34" charset="0"/>
               </a:rPr>
-              <a:t>مندوب 1: </a:t>
+              <a:t>مندوب 1 (</a:t>
             </a:r>
             <a:r>
               <a:rPr lang="en-US" sz="1500" b="1">
@@ -9095,7 +9105,7 @@
                 </a:solidFill>
                 <a:latin typeface="Segoe UI" panose="020B0502040204020203" pitchFamily="34" charset="0"/>
               </a:rPr>
-              <a:t>Zone 1 (600,000 </a:t>
+              <a:t>Zone 1 - </a:t>
             </a:r>
             <a:r>
               <a:rPr lang="ar-SA" sz="1500" b="1">
@@ -9104,7 +9114,7 @@
                 </a:solidFill>
                 <a:latin typeface="Segoe UI" panose="020B0502040204020203" pitchFamily="34" charset="0"/>
               </a:rPr>
-              <a:t>ج.م)</a:t>
+              <a:t>شمال الجيزة)</a:t>
             </a:r>
             <a:endParaRPr lang="en-US" sz="1500" b="1">
               <a:solidFill>
@@ -9120,7 +9130,7 @@
           <p:cNvPr id="12" name="TextBox 11">
             <a:extLst>
               <a:ext uri="{FF2B5EF4-FFF2-40B4-BE49-F238E27FC236}">
-                <a16:creationId xmlns:a16="http://schemas.microsoft.com/office/drawing/2014/main" id="{C100E462-6E86-4D70-A32F-69AE167FF80F}"/>
+                <a16:creationId xmlns:a16="http://schemas.microsoft.com/office/drawing/2014/main" id="{8B836F17-CCE5-D710-0B13-5A0C2055F59A}"/>
               </a:ext>
             </a:extLst>
           </p:cNvPr>
@@ -9130,7 +9140,7 @@
         <p:spPr>
           <a:xfrm>
             <a:off x="4533900" y="1993900"/>
-            <a:ext cx="3124200" cy="923714"/>
+            <a:ext cx="3124200" cy="711349"/>
           </a:xfrm>
           <a:prstGeom prst="rect">
             <a:avLst/>
@@ -9155,10 +9165,9 @@
                 </a:solidFill>
                 <a:latin typeface="Segoe UI" panose="020B0502040204020203" pitchFamily="34" charset="0"/>
               </a:rPr>
-              <a:t>• شمال ووسط الجيزة: المهندسين، الدقي، إمبابة، الوراق.
-• معارض الكمبيوتر واللابتوب وتجزئة الموبايل.
-• معدل الزيارات: 8-10 زيارات يومية مخططة.
-• فتح 8 إلى 10 عملاء جدد شهرياً كاش فوري.</a:t>
+              <a:t>• المستهدف: 600,000 ج.م في الكوارتر (16.2%).
+• المعادل الشهري: 200,000 ج.م شهرياً.
+• معارض الدقي والمهندسين وتجزئة إمبابة والوراق.</a:t>
             </a:r>
             <a:endParaRPr lang="en-US" sz="1200">
               <a:solidFill>
@@ -9174,7 +9183,7 @@
           <p:cNvPr id="13" name="Rectangle: Rounded Corners 12">
             <a:extLst>
               <a:ext uri="{FF2B5EF4-FFF2-40B4-BE49-F238E27FC236}">
-                <a16:creationId xmlns:a16="http://schemas.microsoft.com/office/drawing/2014/main" id="{943C5DD8-3C6C-5132-9069-73DBCC75F013}"/>
+                <a16:creationId xmlns:a16="http://schemas.microsoft.com/office/drawing/2014/main" id="{4533723E-FB9D-1826-5C85-CEE8010F0968}"/>
               </a:ext>
             </a:extLst>
           </p:cNvPr>
@@ -9228,7 +9237,7 @@
           <p:cNvPr id="14" name="TextBox 13">
             <a:extLst>
               <a:ext uri="{FF2B5EF4-FFF2-40B4-BE49-F238E27FC236}">
-                <a16:creationId xmlns:a16="http://schemas.microsoft.com/office/drawing/2014/main" id="{0A3928A8-00AB-03C5-9167-0DB1E54A7446}"/>
+                <a16:creationId xmlns:a16="http://schemas.microsoft.com/office/drawing/2014/main" id="{360B6FA5-CF77-C89C-F7E8-2BF069C678A1}"/>
               </a:ext>
             </a:extLst>
           </p:cNvPr>
@@ -9259,7 +9268,7 @@
                 </a:solidFill>
                 <a:latin typeface="Segoe UI" panose="020B0502040204020203" pitchFamily="34" charset="0"/>
               </a:rPr>
-              <a:t>مندوب 2: </a:t>
+              <a:t>مندوب 2 (</a:t>
             </a:r>
             <a:r>
               <a:rPr lang="en-US" sz="1500" b="1">
@@ -9268,7 +9277,7 @@
                 </a:solidFill>
                 <a:latin typeface="Segoe UI" panose="020B0502040204020203" pitchFamily="34" charset="0"/>
               </a:rPr>
-              <a:t>Zone 2 (600,000 </a:t>
+              <a:t>Zone 2 - </a:t>
             </a:r>
             <a:r>
               <a:rPr lang="ar-SA" sz="1500" b="1">
@@ -9277,7 +9286,7 @@
                 </a:solidFill>
                 <a:latin typeface="Segoe UI" panose="020B0502040204020203" pitchFamily="34" charset="0"/>
               </a:rPr>
-              <a:t>ج.م)</a:t>
+              <a:t>جنوب الجيزة)</a:t>
             </a:r>
             <a:endParaRPr lang="en-US" sz="1500" b="1">
               <a:solidFill>
@@ -9293,7 +9302,7 @@
           <p:cNvPr id="15" name="TextBox 14">
             <a:extLst>
               <a:ext uri="{FF2B5EF4-FFF2-40B4-BE49-F238E27FC236}">
-                <a16:creationId xmlns:a16="http://schemas.microsoft.com/office/drawing/2014/main" id="{261134C3-86B7-3548-9256-635D9147E780}"/>
+                <a16:creationId xmlns:a16="http://schemas.microsoft.com/office/drawing/2014/main" id="{AE6930CD-5E69-0AEA-44B4-519B14FD672A}"/>
               </a:ext>
             </a:extLst>
           </p:cNvPr>
@@ -9303,7 +9312,7 @@
         <p:spPr>
           <a:xfrm>
             <a:off x="8280400" y="1993900"/>
-            <a:ext cx="3124200" cy="1136080"/>
+            <a:ext cx="3124200" cy="711349"/>
           </a:xfrm>
           <a:prstGeom prst="rect">
             <a:avLst/>
@@ -9328,10 +9337,9 @@
                 </a:solidFill>
                 <a:latin typeface="Segoe UI" panose="020B0502040204020203" pitchFamily="34" charset="0"/>
               </a:rPr>
-              <a:t>• جنوب وغرب الجيزة: شارع فيصل، الهرم، 6 أكتوبر، زايد.
-• أضخم كثافة تجزئة موبايل لسحب الشواحن والباوربنك.
-• معدل الزيارات: 8-10 زيارات يومية مخططة.
-• فتح 8 إلى 10 عملاء جدد شهرياً كاش فوري.</a:t>
+              <a:t>• المستهدف: 600,000 ج.م في الكوارتر (16.2%).
+• المعادل الشهري: 200,000 ج.م شهرياً.
+• محاور فيصل والهرم ومعارض 6 أكتوبر والشيخ زايد.</a:t>
             </a:r>
             <a:endParaRPr lang="en-US" sz="1200">
               <a:solidFill>
@@ -9345,7 +9353,7 @@
     </p:spTree>
     <p:extLst>
       <p:ext uri="{BB962C8B-B14F-4D97-AF65-F5344CB8AC3E}">
-        <p14:creationId xmlns:p14="http://schemas.microsoft.com/office/powerpoint/2010/main" val="3566509467"/>
+        <p14:creationId xmlns:p14="http://schemas.microsoft.com/office/powerpoint/2010/main" val="3468169891"/>
       </p:ext>
     </p:extLst>
   </p:cSld>
@@ -9377,7 +9385,7 @@
           <p:cNvPr id="2" name="Rectangle 1">
             <a:extLst>
               <a:ext uri="{FF2B5EF4-FFF2-40B4-BE49-F238E27FC236}">
-                <a16:creationId xmlns:a16="http://schemas.microsoft.com/office/drawing/2014/main" id="{AD17BE1C-BD91-DC26-A77F-580AD40C4A51}"/>
+                <a16:creationId xmlns:a16="http://schemas.microsoft.com/office/drawing/2014/main" id="{11539ED1-9FD4-7ADD-CFF4-6A89DD762625}"/>
               </a:ext>
             </a:extLst>
           </p:cNvPr>
@@ -9445,7 +9453,7 @@
           <p:cNvPr id="3" name="Rectangle 2">
             <a:extLst>
               <a:ext uri="{FF2B5EF4-FFF2-40B4-BE49-F238E27FC236}">
-                <a16:creationId xmlns:a16="http://schemas.microsoft.com/office/drawing/2014/main" id="{7A3151D0-5ED1-1EA6-964E-60B297B3D157}"/>
+                <a16:creationId xmlns:a16="http://schemas.microsoft.com/office/drawing/2014/main" id="{6E2B31C7-5A52-90C8-CB83-194FAB3EF9FF}"/>
               </a:ext>
             </a:extLst>
           </p:cNvPr>
@@ -9513,7 +9521,7 @@
           <p:cNvPr id="4" name="TextBox 3">
             <a:extLst>
               <a:ext uri="{FF2B5EF4-FFF2-40B4-BE49-F238E27FC236}">
-                <a16:creationId xmlns:a16="http://schemas.microsoft.com/office/drawing/2014/main" id="{B56C2391-4C40-54AE-5AA7-3B0BA4FC6EED}"/>
+                <a16:creationId xmlns:a16="http://schemas.microsoft.com/office/drawing/2014/main" id="{37FAF110-2E37-E488-A49C-D4AC7FCD7E6D}"/>
               </a:ext>
             </a:extLst>
           </p:cNvPr>
@@ -9571,7 +9579,7 @@
                 </a:solidFill>
                 <a:latin typeface="Segoe UI" panose="020B0502040204020203" pitchFamily="34" charset="0"/>
               </a:rPr>
-              <a:t>Master Commercial Strategy 2027</a:t>
+              <a:t>Master Commercial Strategy 2027 (Quarterly Model)</a:t>
             </a:r>
           </a:p>
         </p:txBody>
@@ -9581,7 +9589,7 @@
           <p:cNvPr id="5" name="TextBox 4">
             <a:extLst>
               <a:ext uri="{FF2B5EF4-FFF2-40B4-BE49-F238E27FC236}">
-                <a16:creationId xmlns:a16="http://schemas.microsoft.com/office/drawing/2014/main" id="{E39C5A10-FF9D-793B-EF2B-9CF2B429A28B}"/>
+                <a16:creationId xmlns:a16="http://schemas.microsoft.com/office/drawing/2014/main" id="{C36E7432-CBB1-3E66-FC2A-F4DA470AD30C}"/>
               </a:ext>
             </a:extLst>
           </p:cNvPr>
@@ -9612,25 +9620,7 @@
                 </a:solidFill>
                 <a:latin typeface="Segoe UI" panose="020B0502040204020203" pitchFamily="34" charset="0"/>
               </a:rPr>
-              <a:t>جسر الإيرادات الواقعي: تفكيك الـ 1.5</a:t>
-            </a:r>
-            <a:r>
-              <a:rPr lang="en-US" sz="2200" b="1">
-                <a:solidFill>
-                  <a:srgbClr val="FFFFFF"/>
-                </a:solidFill>
-                <a:latin typeface="Segoe UI" panose="020B0502040204020203" pitchFamily="34" charset="0"/>
-              </a:rPr>
-              <a:t>M </a:t>
-            </a:r>
-            <a:r>
-              <a:rPr lang="ar-SA" sz="2200" b="1">
-                <a:solidFill>
-                  <a:srgbClr val="FFFFFF"/>
-                </a:solidFill>
-                <a:latin typeface="Segoe UI" panose="020B0502040204020203" pitchFamily="34" charset="0"/>
-              </a:rPr>
-              <a:t>الإضافية شهرياً</a:t>
+              <a:t>جسر الإيرادات: تفكيك الـ 1.5 مليون ج.م التوسعية في الكوارتر</a:t>
             </a:r>
             <a:endParaRPr lang="en-US" sz="2200" b="1">
               <a:solidFill>
@@ -9646,7 +9636,7 @@
           <p:cNvPr id="6" name="TextBox 5">
             <a:extLst>
               <a:ext uri="{FF2B5EF4-FFF2-40B4-BE49-F238E27FC236}">
-                <a16:creationId xmlns:a16="http://schemas.microsoft.com/office/drawing/2014/main" id="{F957D00B-FB1C-5759-1BA0-C152A5A2EB3A}"/>
+                <a16:creationId xmlns:a16="http://schemas.microsoft.com/office/drawing/2014/main" id="{BFA88609-3CBD-9398-630F-B6AE7AB21056}"/>
               </a:ext>
             </a:extLst>
           </p:cNvPr>
@@ -9686,7 +9676,7 @@
           <p:cNvPr id="7" name="Rectangle: Rounded Corners 6">
             <a:extLst>
               <a:ext uri="{FF2B5EF4-FFF2-40B4-BE49-F238E27FC236}">
-                <a16:creationId xmlns:a16="http://schemas.microsoft.com/office/drawing/2014/main" id="{B772E0B7-4C1D-BD45-5130-85DAA483D50A}"/>
+                <a16:creationId xmlns:a16="http://schemas.microsoft.com/office/drawing/2014/main" id="{025D85E7-277B-5E01-40CE-AD31D0AE0707}"/>
               </a:ext>
             </a:extLst>
           </p:cNvPr>
@@ -9740,7 +9730,7 @@
           <p:cNvPr id="8" name="TextBox 7">
             <a:extLst>
               <a:ext uri="{FF2B5EF4-FFF2-40B4-BE49-F238E27FC236}">
-                <a16:creationId xmlns:a16="http://schemas.microsoft.com/office/drawing/2014/main" id="{333708DC-DC59-FD6F-4D27-20C9F2D42A64}"/>
+                <a16:creationId xmlns:a16="http://schemas.microsoft.com/office/drawing/2014/main" id="{4545E20C-2D79-1B2F-F516-77E613513B6F}"/>
               </a:ext>
             </a:extLst>
           </p:cNvPr>
@@ -9771,7 +9761,7 @@
                 </a:solidFill>
                 <a:latin typeface="Segoe UI" panose="020B0502040204020203" pitchFamily="34" charset="0"/>
               </a:rPr>
-              <a:t>+700K: </a:t>
+              <a:t>+600K </a:t>
             </a:r>
             <a:r>
               <a:rPr lang="ar-SA" sz="1500" b="1">
@@ -9780,7 +9770,7 @@
                 </a:solidFill>
                 <a:latin typeface="Segoe UI" panose="020B0502040204020203" pitchFamily="34" charset="0"/>
               </a:rPr>
-              <a:t>كبار الموزعين</a:t>
+              <a:t>ج.م (كبار الموزعين)</a:t>
             </a:r>
             <a:endParaRPr lang="en-US" sz="1500" b="1">
               <a:solidFill>
@@ -9796,7 +9786,7 @@
           <p:cNvPr id="9" name="TextBox 8">
             <a:extLst>
               <a:ext uri="{FF2B5EF4-FFF2-40B4-BE49-F238E27FC236}">
-                <a16:creationId xmlns:a16="http://schemas.microsoft.com/office/drawing/2014/main" id="{A112AE02-E666-258E-763B-8CF9422E4C60}"/>
+                <a16:creationId xmlns:a16="http://schemas.microsoft.com/office/drawing/2014/main" id="{E2B54FA5-68C7-F5D7-6E7D-91F1FB6C1045}"/>
               </a:ext>
             </a:extLst>
           </p:cNvPr>
@@ -9806,7 +9796,7 @@
         <p:spPr>
           <a:xfrm>
             <a:off x="787400" y="1993900"/>
-            <a:ext cx="2235200" cy="1136080"/>
+            <a:ext cx="2235200" cy="1348446"/>
           </a:xfrm>
           <a:prstGeom prst="rect">
             <a:avLst/>
@@ -9831,9 +9821,45 @@
                 </a:solidFill>
                 <a:latin typeface="Segoe UI" panose="020B0502040204020203" pitchFamily="34" charset="0"/>
               </a:rPr>
-              <a:t>• زيادة سحب 4-5 موزعي جملة كبار.
-• متوسط سحب 140-150 ألف ج.م لكل موزع.
-• توريدات منتظمة بكراتين وكميات تجارية.</a:t>
+              <a:t>• عقود توريد مع 5 موزعين كبار في الجيزة وأكتوبر.
+• سحب 120 ألف لكل موزع في الكوارتر (40</a:t>
+            </a:r>
+            <a:r>
+              <a:rPr lang="en-US" sz="1200">
+                <a:solidFill>
+                  <a:srgbClr val="FFFFFF"/>
+                </a:solidFill>
+                <a:latin typeface="Segoe UI" panose="020B0502040204020203" pitchFamily="34" charset="0"/>
+              </a:rPr>
+              <a:t>K/</a:t>
+            </a:r>
+            <a:r>
+              <a:rPr lang="ar-SA" sz="1200">
+                <a:solidFill>
+                  <a:srgbClr val="FFFFFF"/>
+                </a:solidFill>
+                <a:latin typeface="Segoe UI" panose="020B0502040204020203" pitchFamily="34" charset="0"/>
+              </a:rPr>
+              <a:t>شهرياً).
+• حافز ربع سنوي </a:t>
+            </a:r>
+            <a:r>
+              <a:rPr lang="en-US" sz="1200">
+                <a:solidFill>
+                  <a:srgbClr val="FFFFFF"/>
+                </a:solidFill>
+                <a:latin typeface="Segoe UI" panose="020B0502040204020203" pitchFamily="34" charset="0"/>
+              </a:rPr>
+              <a:t>Rebate 2% </a:t>
+            </a:r>
+            <a:r>
+              <a:rPr lang="ar-SA" sz="1200">
+                <a:solidFill>
+                  <a:srgbClr val="FFFFFF"/>
+                </a:solidFill>
+                <a:latin typeface="Segoe UI" panose="020B0502040204020203" pitchFamily="34" charset="0"/>
+              </a:rPr>
+              <a:t>مرتبط بالانضباط.</a:t>
             </a:r>
             <a:endParaRPr lang="en-US" sz="1200">
               <a:solidFill>
@@ -9849,7 +9875,7 @@
           <p:cNvPr id="10" name="Rectangle: Rounded Corners 9">
             <a:extLst>
               <a:ext uri="{FF2B5EF4-FFF2-40B4-BE49-F238E27FC236}">
-                <a16:creationId xmlns:a16="http://schemas.microsoft.com/office/drawing/2014/main" id="{E911313E-B509-9F3C-6647-C6C9EFDC7883}"/>
+                <a16:creationId xmlns:a16="http://schemas.microsoft.com/office/drawing/2014/main" id="{9020710E-FC89-827C-D057-23A56E2ED826}"/>
               </a:ext>
             </a:extLst>
           </p:cNvPr>
@@ -9903,7 +9929,7 @@
           <p:cNvPr id="11" name="TextBox 10">
             <a:extLst>
               <a:ext uri="{FF2B5EF4-FFF2-40B4-BE49-F238E27FC236}">
-                <a16:creationId xmlns:a16="http://schemas.microsoft.com/office/drawing/2014/main" id="{61922F95-0336-65A1-2A69-7882D4F20D8C}"/>
+                <a16:creationId xmlns:a16="http://schemas.microsoft.com/office/drawing/2014/main" id="{AC8ACC44-245F-1629-436B-868AFA8543F1}"/>
               </a:ext>
             </a:extLst>
           </p:cNvPr>
@@ -9934,7 +9960,7 @@
                 </a:solidFill>
                 <a:latin typeface="Segoe UI" panose="020B0502040204020203" pitchFamily="34" charset="0"/>
               </a:rPr>
-              <a:t>+350K: </a:t>
+              <a:t>+400K </a:t>
             </a:r>
             <a:r>
               <a:rPr lang="ar-SA" sz="1500" b="1">
@@ -9943,7 +9969,7 @@
                 </a:solidFill>
                 <a:latin typeface="Segoe UI" panose="020B0502040204020203" pitchFamily="34" charset="0"/>
               </a:rPr>
-              <a:t>تجزئة جديدة</a:t>
+              <a:t>ج.م (باقات اللابتوب)</a:t>
             </a:r>
             <a:endParaRPr lang="en-US" sz="1500" b="1">
               <a:solidFill>
@@ -9959,7 +9985,7 @@
           <p:cNvPr id="12" name="TextBox 11">
             <a:extLst>
               <a:ext uri="{FF2B5EF4-FFF2-40B4-BE49-F238E27FC236}">
-                <a16:creationId xmlns:a16="http://schemas.microsoft.com/office/drawing/2014/main" id="{CC0E78FF-6E13-50D6-E6B9-0E1293863EE5}"/>
+                <a16:creationId xmlns:a16="http://schemas.microsoft.com/office/drawing/2014/main" id="{17F8505A-8E14-CF98-2432-5DCE9E8D1525}"/>
               </a:ext>
             </a:extLst>
           </p:cNvPr>
@@ -9969,7 +9995,7 @@
         <p:spPr>
           <a:xfrm>
             <a:off x="3581400" y="1993900"/>
-            <a:ext cx="2235200" cy="1136080"/>
+            <a:ext cx="2235200" cy="1348446"/>
           </a:xfrm>
           <a:prstGeom prst="rect">
             <a:avLst/>
@@ -9994,9 +10020,45 @@
                 </a:solidFill>
                 <a:latin typeface="Segoe UI" panose="020B0502040204020203" pitchFamily="34" charset="0"/>
               </a:rPr>
-              <a:t>• فتح 16-20 محل تجزئة جديد شهرياً بالمنطقتين.
-• 8 إلى 10 محلات جديدة لكل مندوب.
-• متوسط فاتورة افتتاحية 3-5 آلاف ج.م كاش.</a:t>
+              <a:t>• حزم: حقيبة 2</a:t>
+            </a:r>
+            <a:r>
+              <a:rPr lang="en-US" sz="1200">
+                <a:solidFill>
+                  <a:srgbClr val="FFFFFF"/>
+                </a:solidFill>
+                <a:latin typeface="Segoe UI" panose="020B0502040204020203" pitchFamily="34" charset="0"/>
+              </a:rPr>
+              <a:t>B + </a:t>
+            </a:r>
+            <a:r>
+              <a:rPr lang="ar-SA" sz="1200">
+                <a:solidFill>
+                  <a:srgbClr val="FFFFFF"/>
+                </a:solidFill>
+                <a:latin typeface="Segoe UI" panose="020B0502040204020203" pitchFamily="34" charset="0"/>
+              </a:rPr>
+              <a:t>ماوس لاسلكي + موزع </a:t>
+            </a:r>
+            <a:r>
+              <a:rPr lang="en-US" sz="1200">
+                <a:solidFill>
+                  <a:srgbClr val="FFFFFF"/>
+                </a:solidFill>
+                <a:latin typeface="Segoe UI" panose="020B0502040204020203" pitchFamily="34" charset="0"/>
+              </a:rPr>
+              <a:t>Type-C.
+• </a:t>
+            </a:r>
+            <a:r>
+              <a:rPr lang="ar-SA" sz="1200">
+                <a:solidFill>
+                  <a:srgbClr val="FFFFFF"/>
+                </a:solidFill>
+                <a:latin typeface="Segoe UI" panose="020B0502040204020203" pitchFamily="34" charset="0"/>
+              </a:rPr>
+              <a:t>التعاقد مع محيط جامعة القاهرة و 6 أكتوبر.
+• اقتناص مواسم الامتحانات وبداية الفصول الدراسية.</a:t>
             </a:r>
             <a:endParaRPr lang="en-US" sz="1200">
               <a:solidFill>
@@ -10012,7 +10074,7 @@
           <p:cNvPr id="13" name="Rectangle: Rounded Corners 12">
             <a:extLst>
               <a:ext uri="{FF2B5EF4-FFF2-40B4-BE49-F238E27FC236}">
-                <a16:creationId xmlns:a16="http://schemas.microsoft.com/office/drawing/2014/main" id="{ED34E429-EAB0-E7D4-812C-6CA1237A0270}"/>
+                <a16:creationId xmlns:a16="http://schemas.microsoft.com/office/drawing/2014/main" id="{47DC1794-2812-C4B5-B007-B9EB83AA8FFD}"/>
               </a:ext>
             </a:extLst>
           </p:cNvPr>
@@ -10066,7 +10128,7 @@
           <p:cNvPr id="14" name="TextBox 13">
             <a:extLst>
               <a:ext uri="{FF2B5EF4-FFF2-40B4-BE49-F238E27FC236}">
-                <a16:creationId xmlns:a16="http://schemas.microsoft.com/office/drawing/2014/main" id="{66A6B625-B885-C871-B69B-B576A04E0E27}"/>
+                <a16:creationId xmlns:a16="http://schemas.microsoft.com/office/drawing/2014/main" id="{2E995A93-3F34-B904-2522-413B2D271FDB}"/>
               </a:ext>
             </a:extLst>
           </p:cNvPr>
@@ -10097,7 +10159,7 @@
                 </a:solidFill>
                 <a:latin typeface="Segoe UI" panose="020B0502040204020203" pitchFamily="34" charset="0"/>
               </a:rPr>
-              <a:t>+250K: </a:t>
+              <a:t>+300K </a:t>
             </a:r>
             <a:r>
               <a:rPr lang="ar-SA" sz="1500" b="1">
@@ -10106,7 +10168,7 @@
                 </a:solidFill>
                 <a:latin typeface="Segoe UI" panose="020B0502040204020203" pitchFamily="34" charset="0"/>
               </a:rPr>
-              <a:t>باقات الجامعات</a:t>
+              <a:t>ج.م (فتح منافذ جديدة)</a:t>
             </a:r>
             <a:endParaRPr lang="en-US" sz="1500" b="1">
               <a:solidFill>
@@ -10122,7 +10184,7 @@
           <p:cNvPr id="15" name="TextBox 14">
             <a:extLst>
               <a:ext uri="{FF2B5EF4-FFF2-40B4-BE49-F238E27FC236}">
-                <a16:creationId xmlns:a16="http://schemas.microsoft.com/office/drawing/2014/main" id="{DE073064-C545-B3C7-4AAC-1E0813880529}"/>
+                <a16:creationId xmlns:a16="http://schemas.microsoft.com/office/drawing/2014/main" id="{0086AE43-7A97-AB38-5854-9868DF879CC5}"/>
               </a:ext>
             </a:extLst>
           </p:cNvPr>
@@ -10132,7 +10194,7 @@
         <p:spPr>
           <a:xfrm>
             <a:off x="6375400" y="1993900"/>
-            <a:ext cx="2235200" cy="1136080"/>
+            <a:ext cx="2235200" cy="1348446"/>
           </a:xfrm>
           <a:prstGeom prst="rect">
             <a:avLst/>
@@ -10157,7 +10219,8 @@
                 </a:solidFill>
                 <a:latin typeface="Segoe UI" panose="020B0502040204020203" pitchFamily="34" charset="0"/>
               </a:rPr>
-              <a:t>• باقات اللابتوب (حقيبة + ماوس + محول </a:t>
+              <a:t>• فتح 30-40 محل تجزئة جديد خلال الكوارتر.
+• فاتورة افتتاحية 8-10 آلاف ج.م كاش </a:t>
             </a:r>
             <a:r>
               <a:rPr lang="en-US" sz="1200">
@@ -10166,7 +10229,7 @@
                 </a:solidFill>
                 <a:latin typeface="Segoe UI" panose="020B0502040204020203" pitchFamily="34" charset="0"/>
               </a:rPr>
-              <a:t>Hub).
+              <a:t>COD.
 • </a:t>
             </a:r>
             <a:r>
@@ -10176,15 +10239,17 @@
                 </a:solidFill>
                 <a:latin typeface="Segoe UI" panose="020B0502040204020203" pitchFamily="34" charset="0"/>
               </a:rPr>
-              <a:t>محيط جامعة القاهرة وجامعات 6 أكتوبر والزايد.
-• معارض الكمبيوتر والمكتبات الكبرى.</a:t>
-            </a:r>
-            <a:endParaRPr lang="en-US" sz="1200">
-              <a:solidFill>
-                <a:srgbClr val="FFFFFF"/>
-              </a:solidFill>
-              <a:latin typeface="Segoe UI" panose="020B0502040204020203" pitchFamily="34" charset="0"/>
-            </a:endParaRPr>
+              <a:t>تركيب وحدات عرض كاونتر واستندات 2</a:t>
+            </a:r>
+            <a:r>
+              <a:rPr lang="en-US" sz="1200">
+                <a:solidFill>
+                  <a:srgbClr val="FFFFFF"/>
+                </a:solidFill>
+                <a:latin typeface="Segoe UI" panose="020B0502040204020203" pitchFamily="34" charset="0"/>
+              </a:rPr>
+              <a:t>B.</a:t>
+            </a:r>
           </a:p>
         </p:txBody>
       </p:sp>
@@ -10193,7 +10258,7 @@
           <p:cNvPr id="16" name="Rectangle: Rounded Corners 15">
             <a:extLst>
               <a:ext uri="{FF2B5EF4-FFF2-40B4-BE49-F238E27FC236}">
-                <a16:creationId xmlns:a16="http://schemas.microsoft.com/office/drawing/2014/main" id="{4122410C-BEAF-93C4-DCB6-F8259452A1B9}"/>
+                <a16:creationId xmlns:a16="http://schemas.microsoft.com/office/drawing/2014/main" id="{C46761CC-B70C-704D-CE66-F09B5300FE54}"/>
               </a:ext>
             </a:extLst>
           </p:cNvPr>
@@ -10247,7 +10312,7 @@
           <p:cNvPr id="17" name="TextBox 16">
             <a:extLst>
               <a:ext uri="{FF2B5EF4-FFF2-40B4-BE49-F238E27FC236}">
-                <a16:creationId xmlns:a16="http://schemas.microsoft.com/office/drawing/2014/main" id="{2806C247-CCBD-1B14-A7E4-582B575602D2}"/>
+                <a16:creationId xmlns:a16="http://schemas.microsoft.com/office/drawing/2014/main" id="{67814667-A852-9462-8B30-EAE7894452BF}"/>
               </a:ext>
             </a:extLst>
           </p:cNvPr>
@@ -10278,7 +10343,7 @@
                 </a:solidFill>
                 <a:latin typeface="Segoe UI" panose="020B0502040204020203" pitchFamily="34" charset="0"/>
               </a:rPr>
-              <a:t>+200K: </a:t>
+              <a:t>+200K </a:t>
             </a:r>
             <a:r>
               <a:rPr lang="ar-SA" sz="1500" b="1">
@@ -10287,7 +10352,7 @@
                 </a:solidFill>
                 <a:latin typeface="Segoe UI" panose="020B0502040204020203" pitchFamily="34" charset="0"/>
               </a:rPr>
-              <a:t>رفع متوسط الطلب</a:t>
+              <a:t>ج.م (البيع المتقاطع)</a:t>
             </a:r>
             <a:endParaRPr lang="en-US" sz="1500" b="1">
               <a:solidFill>
@@ -10303,7 +10368,7 @@
           <p:cNvPr id="18" name="TextBox 17">
             <a:extLst>
               <a:ext uri="{FF2B5EF4-FFF2-40B4-BE49-F238E27FC236}">
-                <a16:creationId xmlns:a16="http://schemas.microsoft.com/office/drawing/2014/main" id="{79CD78E7-00BA-1EF8-066F-7B0682C5327B}"/>
+                <a16:creationId xmlns:a16="http://schemas.microsoft.com/office/drawing/2014/main" id="{737EEA75-D4F1-9A06-0ED5-8A28F3177538}"/>
               </a:ext>
             </a:extLst>
           </p:cNvPr>
@@ -10313,7 +10378,7 @@
         <p:spPr>
           <a:xfrm>
             <a:off x="9169400" y="1993900"/>
-            <a:ext cx="2235200" cy="1136080"/>
+            <a:ext cx="2235200" cy="923714"/>
           </a:xfrm>
           <a:prstGeom prst="rect">
             <a:avLst/>
@@ -10338,8 +10403,7 @@
                 </a:solidFill>
                 <a:latin typeface="Segoe UI" panose="020B0502040204020203" pitchFamily="34" charset="0"/>
               </a:rPr>
-              <a:t>• ربط الشواحن السريعة بكابلات الشحن المعتمدة.
-• رفع متوسط فاتورة إعادة الطلب من 4</a:t>
+              <a:t>• ربط شواحن </a:t>
             </a:r>
             <a:r>
               <a:rPr lang="en-US" sz="1200">
@@ -10348,7 +10412,7 @@
                 </a:solidFill>
                 <a:latin typeface="Segoe UI" panose="020B0502040204020203" pitchFamily="34" charset="0"/>
               </a:rPr>
-              <a:t>K </a:t>
+              <a:t>GaN </a:t>
             </a:r>
             <a:r>
               <a:rPr lang="ar-SA" sz="1200">
@@ -10357,26 +10421,9 @@
                 </a:solidFill>
                 <a:latin typeface="Segoe UI" panose="020B0502040204020203" pitchFamily="34" charset="0"/>
               </a:rPr>
-              <a:t>إلى 5.5</a:t>
-            </a:r>
-            <a:r>
-              <a:rPr lang="en-US" sz="1200">
-                <a:solidFill>
-                  <a:srgbClr val="FFFFFF"/>
-                </a:solidFill>
-                <a:latin typeface="Segoe UI" panose="020B0502040204020203" pitchFamily="34" charset="0"/>
-              </a:rPr>
-              <a:t>K.
-• </a:t>
-            </a:r>
-            <a:r>
-              <a:rPr lang="ar-SA" sz="1200">
-                <a:solidFill>
-                  <a:srgbClr val="FFFFFF"/>
-                </a:solidFill>
-                <a:latin typeface="Segoe UI" panose="020B0502040204020203" pitchFamily="34" charset="0"/>
-              </a:rPr>
-              <a:t>زيادة بنود الفاتورة الواحدة للمحل القائم.</a:t>
+              <a:t>السريعة بكابلاتها المعتمدة.
+• رفع متوسط فاتورة الزيارة بنسبة 25%.
+• تنشيط الشراء الاندفاعي عند نقاط البيع.</a:t>
             </a:r>
             <a:endParaRPr lang="en-US" sz="1200">
               <a:solidFill>
@@ -10390,7 +10437,7 @@
     </p:spTree>
     <p:extLst>
       <p:ext uri="{BB962C8B-B14F-4D97-AF65-F5344CB8AC3E}">
-        <p14:creationId xmlns:p14="http://schemas.microsoft.com/office/powerpoint/2010/main" val="4040478343"/>
+        <p14:creationId xmlns:p14="http://schemas.microsoft.com/office/powerpoint/2010/main" val="1157528388"/>
       </p:ext>
     </p:extLst>
   </p:cSld>
@@ -10422,7 +10469,7 @@
           <p:cNvPr id="2" name="Rectangle 1">
             <a:extLst>
               <a:ext uri="{FF2B5EF4-FFF2-40B4-BE49-F238E27FC236}">
-                <a16:creationId xmlns:a16="http://schemas.microsoft.com/office/drawing/2014/main" id="{DB8F4BF9-FF76-5BA4-4DED-3CEB5F074663}"/>
+                <a16:creationId xmlns:a16="http://schemas.microsoft.com/office/drawing/2014/main" id="{84096969-BB15-2FE1-C8D2-3C586397D962}"/>
               </a:ext>
             </a:extLst>
           </p:cNvPr>
@@ -10490,7 +10537,7 @@
           <p:cNvPr id="3" name="Rectangle 2">
             <a:extLst>
               <a:ext uri="{FF2B5EF4-FFF2-40B4-BE49-F238E27FC236}">
-                <a16:creationId xmlns:a16="http://schemas.microsoft.com/office/drawing/2014/main" id="{881C9684-19D8-FE53-AF70-D5B3F6B59AE4}"/>
+                <a16:creationId xmlns:a16="http://schemas.microsoft.com/office/drawing/2014/main" id="{B65D4BB1-8EDA-E61C-221D-FFED069C9A75}"/>
               </a:ext>
             </a:extLst>
           </p:cNvPr>
@@ -10558,7 +10605,7 @@
           <p:cNvPr id="4" name="TextBox 3">
             <a:extLst>
               <a:ext uri="{FF2B5EF4-FFF2-40B4-BE49-F238E27FC236}">
-                <a16:creationId xmlns:a16="http://schemas.microsoft.com/office/drawing/2014/main" id="{B5063BC1-8864-1360-052A-ADC4C84A81CA}"/>
+                <a16:creationId xmlns:a16="http://schemas.microsoft.com/office/drawing/2014/main" id="{88D60A74-0141-BB61-9265-6F39C15DB9DA}"/>
               </a:ext>
             </a:extLst>
           </p:cNvPr>
@@ -10616,7 +10663,7 @@
                 </a:solidFill>
                 <a:latin typeface="Segoe UI" panose="020B0502040204020203" pitchFamily="34" charset="0"/>
               </a:rPr>
-              <a:t>Master Commercial Strategy 2027</a:t>
+              <a:t>Master Commercial Strategy 2027 (Quarterly Model)</a:t>
             </a:r>
           </a:p>
         </p:txBody>
@@ -10626,7 +10673,7 @@
           <p:cNvPr id="5" name="TextBox 4">
             <a:extLst>
               <a:ext uri="{FF2B5EF4-FFF2-40B4-BE49-F238E27FC236}">
-                <a16:creationId xmlns:a16="http://schemas.microsoft.com/office/drawing/2014/main" id="{AF3389DF-429E-7CF5-D559-594B076DA652}"/>
+                <a16:creationId xmlns:a16="http://schemas.microsoft.com/office/drawing/2014/main" id="{5835B970-6C37-6C1C-33BD-E6BBB27D43AC}"/>
               </a:ext>
             </a:extLst>
           </p:cNvPr>
@@ -10657,7 +10704,7 @@
                 </a:solidFill>
                 <a:latin typeface="Segoe UI" panose="020B0502040204020203" pitchFamily="34" charset="0"/>
               </a:rPr>
-              <a:t>خطة الـ 90 يوماً للمندوبين الجدد والأريا (تدرج معقول)</a:t>
+              <a:t>المسار التشغيلي لدورة الـ 90 يوماً (كوارتر التوسع)</a:t>
             </a:r>
             <a:endParaRPr lang="en-US" sz="2200" b="1">
               <a:solidFill>
@@ -10673,7 +10720,7 @@
           <p:cNvPr id="6" name="TextBox 5">
             <a:extLst>
               <a:ext uri="{FF2B5EF4-FFF2-40B4-BE49-F238E27FC236}">
-                <a16:creationId xmlns:a16="http://schemas.microsoft.com/office/drawing/2014/main" id="{F66C7B6B-9CE2-9983-8DD1-9281D46024D2}"/>
+                <a16:creationId xmlns:a16="http://schemas.microsoft.com/office/drawing/2014/main" id="{DD811E31-864D-75C6-5710-CC911424182E}"/>
               </a:ext>
             </a:extLst>
           </p:cNvPr>
@@ -10713,7 +10760,7 @@
           <p:cNvPr id="7" name="Rectangle: Rounded Corners 6">
             <a:extLst>
               <a:ext uri="{FF2B5EF4-FFF2-40B4-BE49-F238E27FC236}">
-                <a16:creationId xmlns:a16="http://schemas.microsoft.com/office/drawing/2014/main" id="{38EB1FCE-B692-E80B-09ED-F9DC6046D04A}"/>
+                <a16:creationId xmlns:a16="http://schemas.microsoft.com/office/drawing/2014/main" id="{6A5B8AFE-08C7-2BE6-9EDA-703D65490C66}"/>
               </a:ext>
             </a:extLst>
           </p:cNvPr>
@@ -10767,7 +10814,7 @@
           <p:cNvPr id="8" name="TextBox 7">
             <a:extLst>
               <a:ext uri="{FF2B5EF4-FFF2-40B4-BE49-F238E27FC236}">
-                <a16:creationId xmlns:a16="http://schemas.microsoft.com/office/drawing/2014/main" id="{2B893CA2-318A-E84F-8DA2-DFC9C1EBAF25}"/>
+                <a16:creationId xmlns:a16="http://schemas.microsoft.com/office/drawing/2014/main" id="{E169308A-9844-559F-6188-75D7EAEF0903}"/>
               </a:ext>
             </a:extLst>
           </p:cNvPr>
@@ -10798,7 +10845,7 @@
                 </a:solidFill>
                 <a:latin typeface="Segoe UI" panose="020B0502040204020203" pitchFamily="34" charset="0"/>
               </a:rPr>
-              <a:t>الشهر 1: التأسيس (2,700,000 ج.م)</a:t>
+              <a:t>الشهر 1 (التأسيس والمسح)</a:t>
             </a:r>
             <a:endParaRPr lang="en-US" sz="1500" b="1">
               <a:solidFill>
@@ -10814,7 +10861,7 @@
           <p:cNvPr id="9" name="TextBox 8">
             <a:extLst>
               <a:ext uri="{FF2B5EF4-FFF2-40B4-BE49-F238E27FC236}">
-                <a16:creationId xmlns:a16="http://schemas.microsoft.com/office/drawing/2014/main" id="{02256E6E-50C4-8E91-EBAD-C11E22B8DA0B}"/>
+                <a16:creationId xmlns:a16="http://schemas.microsoft.com/office/drawing/2014/main" id="{12F081CE-7CF5-6D4F-BB8C-9610272BB3DF}"/>
               </a:ext>
             </a:extLst>
           </p:cNvPr>
@@ -10824,7 +10871,7 @@
         <p:spPr>
           <a:xfrm>
             <a:off x="787400" y="1993900"/>
-            <a:ext cx="3124200" cy="923714"/>
+            <a:ext cx="3124200" cy="711349"/>
           </a:xfrm>
           <a:prstGeom prst="rect">
             <a:avLst/>
@@ -10849,10 +10896,9 @@
                 </a:solidFill>
                 <a:latin typeface="Segoe UI" panose="020B0502040204020203" pitchFamily="34" charset="0"/>
               </a:rPr>
-              <a:t>• +500,000 ج.م نمو فوق الأساس للأريا.
-• الجملة: 2,000,000 ج.م | المندوب: 350,000 ج.م.
-• نزول ميداني مشترك للمدير لتدقيق خطوط السير والعملاء.
-• فتح 8 عملاء تجزئة جدد كاش 100% لكل مندوب.</a:t>
+              <a:t>• المستهدف: 1,000,000 ج.م.
+• مسح 100% من خطوط السير وتأهيل المناديب.
+• فتح عملاء كاش جدد وتوقيع عقود الجملة.</a:t>
             </a:r>
             <a:endParaRPr lang="en-US" sz="1200">
               <a:solidFill>
@@ -10868,7 +10914,7 @@
           <p:cNvPr id="10" name="Rectangle: Rounded Corners 9">
             <a:extLst>
               <a:ext uri="{FF2B5EF4-FFF2-40B4-BE49-F238E27FC236}">
-                <a16:creationId xmlns:a16="http://schemas.microsoft.com/office/drawing/2014/main" id="{353B8CE3-9211-02C1-2D5E-4A977B17C1A7}"/>
+                <a16:creationId xmlns:a16="http://schemas.microsoft.com/office/drawing/2014/main" id="{3CDC43A4-1D0C-E509-C5F8-8DA12427E1BD}"/>
               </a:ext>
             </a:extLst>
           </p:cNvPr>
@@ -10922,7 +10968,7 @@
           <p:cNvPr id="11" name="TextBox 10">
             <a:extLst>
               <a:ext uri="{FF2B5EF4-FFF2-40B4-BE49-F238E27FC236}">
-                <a16:creationId xmlns:a16="http://schemas.microsoft.com/office/drawing/2014/main" id="{4D2325BC-316E-7D91-483D-3A2BB2124129}"/>
+                <a16:creationId xmlns:a16="http://schemas.microsoft.com/office/drawing/2014/main" id="{D2DEBC31-8CE0-F44B-74AD-7BF438AEF8BA}"/>
               </a:ext>
             </a:extLst>
           </p:cNvPr>
@@ -10953,7 +10999,7 @@
                 </a:solidFill>
                 <a:latin typeface="Segoe UI" panose="020B0502040204020203" pitchFamily="34" charset="0"/>
               </a:rPr>
-              <a:t>الشهر 2: التوسع (3,200,000 ج.م)</a:t>
+              <a:t>الشهر 2 (التوسع والربط)</a:t>
             </a:r>
             <a:endParaRPr lang="en-US" sz="1500" b="1">
               <a:solidFill>
@@ -10969,7 +11015,7 @@
           <p:cNvPr id="12" name="TextBox 11">
             <a:extLst>
               <a:ext uri="{FF2B5EF4-FFF2-40B4-BE49-F238E27FC236}">
-                <a16:creationId xmlns:a16="http://schemas.microsoft.com/office/drawing/2014/main" id="{0531F871-01B6-DAF3-18C1-ABAF42762A47}"/>
+                <a16:creationId xmlns:a16="http://schemas.microsoft.com/office/drawing/2014/main" id="{4B455351-7E10-2B76-F77D-90E5F938C33C}"/>
               </a:ext>
             </a:extLst>
           </p:cNvPr>
@@ -10979,7 +11025,7 @@
         <p:spPr>
           <a:xfrm>
             <a:off x="4533900" y="1993900"/>
-            <a:ext cx="3124200" cy="923714"/>
+            <a:ext cx="3124200" cy="711349"/>
           </a:xfrm>
           <a:prstGeom prst="rect">
             <a:avLst/>
@@ -11004,28 +11050,9 @@
                 </a:solidFill>
                 <a:latin typeface="Segoe UI" panose="020B0502040204020203" pitchFamily="34" charset="0"/>
               </a:rPr>
-              <a:t>• +500,000 ج.م نمو إضافي للأريا.
-• الجملة: 2,300,000 ج.م | المندوب: 450,000 ج.م.
-• تكرار سحب المحلات القائمة وتنشيط وحدات الكاونتر.
-• بدء منح سقف آجل منضبط (10</a:t>
-            </a:r>
-            <a:r>
-              <a:rPr lang="en-US" sz="1200">
-                <a:solidFill>
-                  <a:srgbClr val="FFFFFF"/>
-                </a:solidFill>
-                <a:latin typeface="Segoe UI" panose="020B0502040204020203" pitchFamily="34" charset="0"/>
-              </a:rPr>
-              <a:t>K) </a:t>
-            </a:r>
-            <a:r>
-              <a:rPr lang="ar-SA" sz="1200">
-                <a:solidFill>
-                  <a:srgbClr val="FFFFFF"/>
-                </a:solidFill>
-                <a:latin typeface="Segoe UI" panose="020B0502040204020203" pitchFamily="34" charset="0"/>
-              </a:rPr>
-              <a:t>للعملاء الملتزمين.</a:t>
+              <a:t>• المستهدف: 1,300,000 ج.م.
+• إطلاق حزم اللابتوب وتركيب 20 ستاند مضيء.
+• تدوير طلبيات التجزئة وتفعيل حافز الكاش 3%.</a:t>
             </a:r>
             <a:endParaRPr lang="en-US" sz="1200">
               <a:solidFill>
@@ -11041,7 +11068,7 @@
           <p:cNvPr id="13" name="Rectangle: Rounded Corners 12">
             <a:extLst>
               <a:ext uri="{FF2B5EF4-FFF2-40B4-BE49-F238E27FC236}">
-                <a16:creationId xmlns:a16="http://schemas.microsoft.com/office/drawing/2014/main" id="{1E889988-24BE-0870-8D52-5328A542C6F3}"/>
+                <a16:creationId xmlns:a16="http://schemas.microsoft.com/office/drawing/2014/main" id="{9151E5F5-50D8-7913-0CB0-7486164456CC}"/>
               </a:ext>
             </a:extLst>
           </p:cNvPr>
@@ -11095,7 +11122,7 @@
           <p:cNvPr id="14" name="TextBox 13">
             <a:extLst>
               <a:ext uri="{FF2B5EF4-FFF2-40B4-BE49-F238E27FC236}">
-                <a16:creationId xmlns:a16="http://schemas.microsoft.com/office/drawing/2014/main" id="{9877EEA8-51C3-F7FD-D82F-B4D64ED20BD6}"/>
+                <a16:creationId xmlns:a16="http://schemas.microsoft.com/office/drawing/2014/main" id="{0243C32B-A590-49F5-0882-E925BA59E12D}"/>
               </a:ext>
             </a:extLst>
           </p:cNvPr>
@@ -11126,7 +11153,7 @@
                 </a:solidFill>
                 <a:latin typeface="Segoe UI" panose="020B0502040204020203" pitchFamily="34" charset="0"/>
               </a:rPr>
-              <a:t>الشهر 3: الاستقرار (3,700,000 ج.م)</a:t>
+              <a:t>الشهر 3 (الذروة والإغلاق)</a:t>
             </a:r>
             <a:endParaRPr lang="en-US" sz="1500" b="1">
               <a:solidFill>
@@ -11142,7 +11169,7 @@
           <p:cNvPr id="15" name="TextBox 14">
             <a:extLst>
               <a:ext uri="{FF2B5EF4-FFF2-40B4-BE49-F238E27FC236}">
-                <a16:creationId xmlns:a16="http://schemas.microsoft.com/office/drawing/2014/main" id="{1E4A710C-686F-43C7-8F0F-665D008F4218}"/>
+                <a16:creationId xmlns:a16="http://schemas.microsoft.com/office/drawing/2014/main" id="{E49E1D03-7011-8EF5-DE84-B57C83682AC9}"/>
               </a:ext>
             </a:extLst>
           </p:cNvPr>
@@ -11152,7 +11179,7 @@
         <p:spPr>
           <a:xfrm>
             <a:off x="8280400" y="1993900"/>
-            <a:ext cx="3124200" cy="1136080"/>
+            <a:ext cx="3124200" cy="711349"/>
           </a:xfrm>
           <a:prstGeom prst="rect">
             <a:avLst/>
@@ -11177,7 +11204,8 @@
                 </a:solidFill>
                 <a:latin typeface="Segoe UI" panose="020B0502040204020203" pitchFamily="34" charset="0"/>
               </a:rPr>
-              <a:t>• اكتمال المستهدف التوسعي كاملاً (+1.5</a:t>
+              <a:t>• المستهدف: 1,400,000 ج.م.
+• اكتمال تارجت الكوارتر (3.7</a:t>
             </a:r>
             <a:r>
               <a:rPr lang="en-US" sz="1200">
@@ -11186,8 +11214,7 @@
                 </a:solidFill>
                 <a:latin typeface="Segoe UI" panose="020B0502040204020203" pitchFamily="34" charset="0"/>
               </a:rPr>
-              <a:t>M).
-• </a:t>
+              <a:t>M </a:t>
             </a:r>
             <a:r>
               <a:rPr lang="ar-SA" sz="1200">
@@ -11196,27 +11223,8 @@
                 </a:solidFill>
                 <a:latin typeface="Segoe UI" panose="020B0502040204020203" pitchFamily="34" charset="0"/>
               </a:rPr>
-              <a:t>الجملة: 2,500,000 ج.م | المندوب: 600,000 ج.م.
-• استقلالية تامة للمندوبين وانتظام دورات البيع والتحصيل.
-• استقرار نسبة الكاش 50%+ ومتوسط تحصيل </a:t>
-            </a:r>
-            <a:r>
-              <a:rPr lang="en-US" sz="1200">
-                <a:solidFill>
-                  <a:srgbClr val="FFFFFF"/>
-                </a:solidFill>
-                <a:latin typeface="Segoe UI" panose="020B0502040204020203" pitchFamily="34" charset="0"/>
-              </a:rPr>
-              <a:t>DSO &amp;le; 20 </a:t>
-            </a:r>
-            <a:r>
-              <a:rPr lang="ar-SA" sz="1200">
-                <a:solidFill>
-                  <a:srgbClr val="FFFFFF"/>
-                </a:solidFill>
-                <a:latin typeface="Segoe UI" panose="020B0502040204020203" pitchFamily="34" charset="0"/>
-              </a:rPr>
-              <a:t>يوماً.</a:t>
+              <a:t>بالكامل).
+• استقرار نسبة الكاش 50%+ وصفر ديون متأخرة.</a:t>
             </a:r>
             <a:endParaRPr lang="en-US" sz="1200">
               <a:solidFill>
@@ -11230,7 +11238,7 @@
     </p:spTree>
     <p:extLst>
       <p:ext uri="{BB962C8B-B14F-4D97-AF65-F5344CB8AC3E}">
-        <p14:creationId xmlns:p14="http://schemas.microsoft.com/office/powerpoint/2010/main" val="2501673859"/>
+        <p14:creationId xmlns:p14="http://schemas.microsoft.com/office/powerpoint/2010/main" val="3982816294"/>
       </p:ext>
     </p:extLst>
   </p:cSld>
@@ -11262,7 +11270,7 @@
           <p:cNvPr id="2" name="Rectangle 1">
             <a:extLst>
               <a:ext uri="{FF2B5EF4-FFF2-40B4-BE49-F238E27FC236}">
-                <a16:creationId xmlns:a16="http://schemas.microsoft.com/office/drawing/2014/main" id="{ECCCF9B2-9E5B-4C90-C6E0-11243D295089}"/>
+                <a16:creationId xmlns:a16="http://schemas.microsoft.com/office/drawing/2014/main" id="{2D623BFA-D652-B5D1-1A61-608A5C75855B}"/>
               </a:ext>
             </a:extLst>
           </p:cNvPr>
@@ -11330,7 +11338,7 @@
           <p:cNvPr id="3" name="Rectangle 2">
             <a:extLst>
               <a:ext uri="{FF2B5EF4-FFF2-40B4-BE49-F238E27FC236}">
-                <a16:creationId xmlns:a16="http://schemas.microsoft.com/office/drawing/2014/main" id="{4917099C-EA68-5886-4C06-56F18A2CF3B3}"/>
+                <a16:creationId xmlns:a16="http://schemas.microsoft.com/office/drawing/2014/main" id="{64B8B45B-682C-928C-9B1C-26B2906155FF}"/>
               </a:ext>
             </a:extLst>
           </p:cNvPr>
@@ -11398,7 +11406,7 @@
           <p:cNvPr id="4" name="TextBox 3">
             <a:extLst>
               <a:ext uri="{FF2B5EF4-FFF2-40B4-BE49-F238E27FC236}">
-                <a16:creationId xmlns:a16="http://schemas.microsoft.com/office/drawing/2014/main" id="{05F60B43-FC17-447F-3EBF-230B729C03B5}"/>
+                <a16:creationId xmlns:a16="http://schemas.microsoft.com/office/drawing/2014/main" id="{BB84AF2B-2321-7AD6-7042-806187B8B925}"/>
               </a:ext>
             </a:extLst>
           </p:cNvPr>
@@ -11456,7 +11464,7 @@
                 </a:solidFill>
                 <a:latin typeface="Segoe UI" panose="020B0502040204020203" pitchFamily="34" charset="0"/>
               </a:rPr>
-              <a:t>Master Commercial Strategy 2027</a:t>
+              <a:t>Master Commercial Strategy 2027 (Quarterly Model)</a:t>
             </a:r>
           </a:p>
         </p:txBody>
@@ -11466,7 +11474,7 @@
           <p:cNvPr id="5" name="TextBox 4">
             <a:extLst>
               <a:ext uri="{FF2B5EF4-FFF2-40B4-BE49-F238E27FC236}">
-                <a16:creationId xmlns:a16="http://schemas.microsoft.com/office/drawing/2014/main" id="{DB38E216-CFA4-8507-428A-B6F277304B91}"/>
+                <a16:creationId xmlns:a16="http://schemas.microsoft.com/office/drawing/2014/main" id="{D6A887CD-2784-A7CE-2940-FD8ADF219C2F}"/>
               </a:ext>
             </a:extLst>
           </p:cNvPr>
@@ -11497,7 +11505,7 @@
                 </a:solidFill>
                 <a:latin typeface="Segoe UI" panose="020B0502040204020203" pitchFamily="34" charset="0"/>
               </a:rPr>
-              <a:t>استراتيجية عام 2027 السنوية الواقعية (36,800,000 ج.م)</a:t>
+              <a:t>التوزيع الربع سنوي لكوارترات عام 2027 (14,800,000 ج.م)</a:t>
             </a:r>
             <a:endParaRPr lang="en-US" sz="2200" b="1">
               <a:solidFill>
@@ -11513,7 +11521,7 @@
           <p:cNvPr id="6" name="TextBox 5">
             <a:extLst>
               <a:ext uri="{FF2B5EF4-FFF2-40B4-BE49-F238E27FC236}">
-                <a16:creationId xmlns:a16="http://schemas.microsoft.com/office/drawing/2014/main" id="{A7CB8EE2-95E4-0CAC-8218-1C83EBF0439F}"/>
+                <a16:creationId xmlns:a16="http://schemas.microsoft.com/office/drawing/2014/main" id="{5217A2EB-066F-C32E-CF2B-2B9CCCB900C6}"/>
               </a:ext>
             </a:extLst>
           </p:cNvPr>
@@ -11553,7 +11561,7 @@
           <p:cNvPr id="7" name="Rectangle: Rounded Corners 6">
             <a:extLst>
               <a:ext uri="{FF2B5EF4-FFF2-40B4-BE49-F238E27FC236}">
-                <a16:creationId xmlns:a16="http://schemas.microsoft.com/office/drawing/2014/main" id="{7216E8E6-4885-9073-E302-EFDAB38C5557}"/>
+                <a16:creationId xmlns:a16="http://schemas.microsoft.com/office/drawing/2014/main" id="{969E4C88-604B-E54D-CAFC-2FB6C80179CB}"/>
               </a:ext>
             </a:extLst>
           </p:cNvPr>
@@ -11607,7 +11615,7 @@
           <p:cNvPr id="8" name="TextBox 7">
             <a:extLst>
               <a:ext uri="{FF2B5EF4-FFF2-40B4-BE49-F238E27FC236}">
-                <a16:creationId xmlns:a16="http://schemas.microsoft.com/office/drawing/2014/main" id="{12C4DFAD-BF31-8852-9FB5-2B751F3C714B}"/>
+                <a16:creationId xmlns:a16="http://schemas.microsoft.com/office/drawing/2014/main" id="{DBC1DD11-2B69-1D9C-CBE9-08EDCCF7F6D4}"/>
               </a:ext>
             </a:extLst>
           </p:cNvPr>
@@ -11638,7 +11646,7 @@
                 </a:solidFill>
                 <a:latin typeface="Segoe UI" panose="020B0502040204020203" pitchFamily="34" charset="0"/>
               </a:rPr>
-              <a:t>Q1: </a:t>
+              <a:t>Q1: 3,400,000 </a:t>
             </a:r>
             <a:r>
               <a:rPr lang="ar-SA" sz="1500" b="1">
@@ -11647,7 +11655,7 @@
                 </a:solidFill>
                 <a:latin typeface="Segoe UI" panose="020B0502040204020203" pitchFamily="34" charset="0"/>
               </a:rPr>
-              <a:t>هادئ وتأسيس</a:t>
+              <a:t>ج.م</a:t>
             </a:r>
             <a:endParaRPr lang="en-US" sz="1500" b="1">
               <a:solidFill>
@@ -11663,7 +11671,7 @@
           <p:cNvPr id="9" name="TextBox 8">
             <a:extLst>
               <a:ext uri="{FF2B5EF4-FFF2-40B4-BE49-F238E27FC236}">
-                <a16:creationId xmlns:a16="http://schemas.microsoft.com/office/drawing/2014/main" id="{9E4E1015-D4A6-C9EF-7CB9-7CCB8CF112D1}"/>
+                <a16:creationId xmlns:a16="http://schemas.microsoft.com/office/drawing/2014/main" id="{D1FDEC27-2F8B-BF0D-38E3-6D13EE40F4E8}"/>
               </a:ext>
             </a:extLst>
           </p:cNvPr>
@@ -11698,27 +11706,9 @@
                 </a:solidFill>
                 <a:latin typeface="Segoe UI" panose="020B0502040204020203" pitchFamily="34" charset="0"/>
               </a:rPr>
-              <a:t>• 7,500,000 ج.م (متوسط 2.5</a:t>
-            </a:r>
-            <a:r>
-              <a:rPr lang="en-US" sz="1200">
-                <a:solidFill>
-                  <a:srgbClr val="FFFFFF"/>
-                </a:solidFill>
-                <a:latin typeface="Segoe UI" panose="020B0502040204020203" pitchFamily="34" charset="0"/>
-              </a:rPr>
-              <a:t>M / </a:t>
-            </a:r>
-            <a:r>
-              <a:rPr lang="ar-SA" sz="1200">
-                <a:solidFill>
-                  <a:srgbClr val="FFFFFF"/>
-                </a:solidFill>
-                <a:latin typeface="Segoe UI" panose="020B0502040204020203" pitchFamily="34" charset="0"/>
-              </a:rPr>
-              <a:t>شهر).
-• تجديد مخزون التجار بعد الجرد السنوي.
-• تنشيط الشواحن وكابلات الموبايل السريعة.</a:t>
+              <a:t>• الربع الأول (يناير - مارس) | 23%.
+• تأسيس دورة المبيعات بعد إجازات نصف العام.
+• حزم بداية الفصل الدراسي الثاني ومسح المحاور.</a:t>
             </a:r>
             <a:endParaRPr lang="en-US" sz="1200">
               <a:solidFill>
@@ -11734,7 +11724,7 @@
           <p:cNvPr id="10" name="Rectangle: Rounded Corners 9">
             <a:extLst>
               <a:ext uri="{FF2B5EF4-FFF2-40B4-BE49-F238E27FC236}">
-                <a16:creationId xmlns:a16="http://schemas.microsoft.com/office/drawing/2014/main" id="{4BF06D4C-A1E5-86DD-DF94-983C9B4B665B}"/>
+                <a16:creationId xmlns:a16="http://schemas.microsoft.com/office/drawing/2014/main" id="{BF18E79B-716D-C8D5-E43C-CC082CE137C3}"/>
               </a:ext>
             </a:extLst>
           </p:cNvPr>
@@ -11788,7 +11778,7 @@
           <p:cNvPr id="11" name="TextBox 10">
             <a:extLst>
               <a:ext uri="{FF2B5EF4-FFF2-40B4-BE49-F238E27FC236}">
-                <a16:creationId xmlns:a16="http://schemas.microsoft.com/office/drawing/2014/main" id="{7965F68D-1C3D-1114-270F-D31CB2DB876E}"/>
+                <a16:creationId xmlns:a16="http://schemas.microsoft.com/office/drawing/2014/main" id="{50C55D70-A504-FF3D-EA86-7FB887B2A41D}"/>
               </a:ext>
             </a:extLst>
           </p:cNvPr>
@@ -11819,7 +11809,7 @@
                 </a:solidFill>
                 <a:latin typeface="Segoe UI" panose="020B0502040204020203" pitchFamily="34" charset="0"/>
               </a:rPr>
-              <a:t>Q2: </a:t>
+              <a:t>Q2: 3,700,000 </a:t>
             </a:r>
             <a:r>
               <a:rPr lang="ar-SA" sz="1500" b="1">
@@ -11828,7 +11818,7 @@
                 </a:solidFill>
                 <a:latin typeface="Segoe UI" panose="020B0502040204020203" pitchFamily="34" charset="0"/>
               </a:rPr>
-              <a:t>الأعياد والصيف</a:t>
+              <a:t>ج.م</a:t>
             </a:r>
             <a:endParaRPr lang="en-US" sz="1500" b="1">
               <a:solidFill>
@@ -11844,7 +11834,7 @@
           <p:cNvPr id="12" name="TextBox 11">
             <a:extLst>
               <a:ext uri="{FF2B5EF4-FFF2-40B4-BE49-F238E27FC236}">
-                <a16:creationId xmlns:a16="http://schemas.microsoft.com/office/drawing/2014/main" id="{CE13DB87-5B4A-1B9D-747B-97B9CD237051}"/>
+                <a16:creationId xmlns:a16="http://schemas.microsoft.com/office/drawing/2014/main" id="{2B71CA12-1896-796A-A738-D3C73531415C}"/>
               </a:ext>
             </a:extLst>
           </p:cNvPr>
@@ -11879,27 +11869,9 @@
                 </a:solidFill>
                 <a:latin typeface="Segoe UI" panose="020B0502040204020203" pitchFamily="34" charset="0"/>
               </a:rPr>
-              <a:t>• 9,000,000 ج.م (متوسط 3.0</a:t>
-            </a:r>
-            <a:r>
-              <a:rPr lang="en-US" sz="1200">
-                <a:solidFill>
-                  <a:srgbClr val="FFFFFF"/>
-                </a:solidFill>
-                <a:latin typeface="Segoe UI" panose="020B0502040204020203" pitchFamily="34" charset="0"/>
-              </a:rPr>
-              <a:t>M / </a:t>
-            </a:r>
-            <a:r>
-              <a:rPr lang="ar-SA" sz="1200">
-                <a:solidFill>
-                  <a:srgbClr val="FFFFFF"/>
-                </a:solidFill>
-                <a:latin typeface="Segoe UI" panose="020B0502040204020203" pitchFamily="34" charset="0"/>
-              </a:rPr>
-              <a:t>شهر).
-• مواسم عيد الفطر والأضحى والإجازات.
-• بنوك الطاقة السعات الكبيرة وشواحن السيارات والسماعات.</a:t>
+              <a:t>• الربع الثاني (أبريل - يونيو) | 25%.
+• موسم شهر رمضان المبارك وعيدي الفطر والأضحى.
+• شواحن السيارات، الباوربانك، وسماعات الترفيه.</a:t>
             </a:r>
             <a:endParaRPr lang="en-US" sz="1200">
               <a:solidFill>
@@ -11915,7 +11887,7 @@
           <p:cNvPr id="13" name="Rectangle: Rounded Corners 12">
             <a:extLst>
               <a:ext uri="{FF2B5EF4-FFF2-40B4-BE49-F238E27FC236}">
-                <a16:creationId xmlns:a16="http://schemas.microsoft.com/office/drawing/2014/main" id="{849089F4-1DAB-2B1B-18B6-1F471C9B386D}"/>
+                <a16:creationId xmlns:a16="http://schemas.microsoft.com/office/drawing/2014/main" id="{525D45F7-C49A-D194-4DE0-12FC9D64377A}"/>
               </a:ext>
             </a:extLst>
           </p:cNvPr>
@@ -11969,7 +11941,7 @@
           <p:cNvPr id="14" name="TextBox 13">
             <a:extLst>
               <a:ext uri="{FF2B5EF4-FFF2-40B4-BE49-F238E27FC236}">
-                <a16:creationId xmlns:a16="http://schemas.microsoft.com/office/drawing/2014/main" id="{2822FB20-19E6-12EF-504B-385964C1809B}"/>
+                <a16:creationId xmlns:a16="http://schemas.microsoft.com/office/drawing/2014/main" id="{0430376E-3847-7230-0779-F77CC5EA7429}"/>
               </a:ext>
             </a:extLst>
           </p:cNvPr>
@@ -12000,7 +11972,7 @@
                 </a:solidFill>
                 <a:latin typeface="Segoe UI" panose="020B0502040204020203" pitchFamily="34" charset="0"/>
               </a:rPr>
-              <a:t>Q3: </a:t>
+              <a:t>Q3: 4,000,000 </a:t>
             </a:r>
             <a:r>
               <a:rPr lang="ar-SA" sz="1500" b="1">
@@ -12009,7 +11981,7 @@
                 </a:solidFill>
                 <a:latin typeface="Segoe UI" panose="020B0502040204020203" pitchFamily="34" charset="0"/>
               </a:rPr>
-              <a:t>ذروة الجامعات</a:t>
+              <a:t>ج.م</a:t>
             </a:r>
             <a:endParaRPr lang="en-US" sz="1500" b="1">
               <a:solidFill>
@@ -12025,7 +11997,7 @@
           <p:cNvPr id="15" name="TextBox 14">
             <a:extLst>
               <a:ext uri="{FF2B5EF4-FFF2-40B4-BE49-F238E27FC236}">
-                <a16:creationId xmlns:a16="http://schemas.microsoft.com/office/drawing/2014/main" id="{7E04E41A-2A3C-332A-B05E-09107698D9AB}"/>
+                <a16:creationId xmlns:a16="http://schemas.microsoft.com/office/drawing/2014/main" id="{0B94E4DC-10FA-F744-943D-9A33B81D13FF}"/>
               </a:ext>
             </a:extLst>
           </p:cNvPr>
@@ -12035,7 +12007,7 @@
         <p:spPr>
           <a:xfrm>
             <a:off x="6375400" y="1993900"/>
-            <a:ext cx="2235200" cy="1348446"/>
+            <a:ext cx="2235200" cy="1136080"/>
           </a:xfrm>
           <a:prstGeom prst="rect">
             <a:avLst/>
@@ -12060,7 +12032,8 @@
                 </a:solidFill>
                 <a:latin typeface="Segoe UI" panose="020B0502040204020203" pitchFamily="34" charset="0"/>
               </a:rPr>
-              <a:t>• 11,000,000 ج.م (متوسط 3.66</a:t>
+              <a:t>• الربع الثالث (يوليو - سبتمبر) | 27%.
+• ذروة موسم العودة للمدارس والجامعات (</a:t>
             </a:r>
             <a:r>
               <a:rPr lang="en-US" sz="1200">
@@ -12069,7 +12042,8 @@
                 </a:solidFill>
                 <a:latin typeface="Segoe UI" panose="020B0502040204020203" pitchFamily="34" charset="0"/>
               </a:rPr>
-              <a:t>M / </a:t>
+              <a:t>Back to School).
+• </a:t>
             </a:r>
             <a:r>
               <a:rPr lang="ar-SA" sz="1200">
@@ -12078,27 +12052,7 @@
                 </a:solidFill>
                 <a:latin typeface="Segoe UI" panose="020B0502040204020203" pitchFamily="34" charset="0"/>
               </a:rPr>
-              <a:t>شهر).
-• الموسم الذهبي: العودة للمدارس والجامعات بالجيزة.
-• حقائب اللابتوب والماوس ومحولات </a:t>
-            </a:r>
-            <a:r>
-              <a:rPr lang="en-US" sz="1200">
-                <a:solidFill>
-                  <a:srgbClr val="FFFFFF"/>
-                </a:solidFill>
-                <a:latin typeface="Segoe UI" panose="020B0502040204020203" pitchFamily="34" charset="0"/>
-              </a:rPr>
-              <a:t>Hubs </a:t>
-            </a:r>
-            <a:r>
-              <a:rPr lang="ar-SA" sz="1200">
-                <a:solidFill>
-                  <a:srgbClr val="FFFFFF"/>
-                </a:solidFill>
-                <a:latin typeface="Segoe UI" panose="020B0502040204020203" pitchFamily="34" charset="0"/>
-              </a:rPr>
-              <a:t>بمحيط الجامعات.</a:t>
+              <a:t>حزم اللابتوب، الشواحن السريعة، وأكسسوارات الطلبة.</a:t>
             </a:r>
             <a:endParaRPr lang="en-US" sz="1200">
               <a:solidFill>
@@ -12114,7 +12068,7 @@
           <p:cNvPr id="16" name="Rectangle: Rounded Corners 15">
             <a:extLst>
               <a:ext uri="{FF2B5EF4-FFF2-40B4-BE49-F238E27FC236}">
-                <a16:creationId xmlns:a16="http://schemas.microsoft.com/office/drawing/2014/main" id="{ECED7740-6AEF-6C9D-8B63-760BE376AD7D}"/>
+                <a16:creationId xmlns:a16="http://schemas.microsoft.com/office/drawing/2014/main" id="{0B75F1D8-5E31-1FE7-90E4-1990FFDCEC64}"/>
               </a:ext>
             </a:extLst>
           </p:cNvPr>
@@ -12168,7 +12122,7 @@
           <p:cNvPr id="17" name="TextBox 16">
             <a:extLst>
               <a:ext uri="{FF2B5EF4-FFF2-40B4-BE49-F238E27FC236}">
-                <a16:creationId xmlns:a16="http://schemas.microsoft.com/office/drawing/2014/main" id="{B663E22B-20FC-B412-5966-86E15FD2A999}"/>
+                <a16:creationId xmlns:a16="http://schemas.microsoft.com/office/drawing/2014/main" id="{3BC7EF47-C1E4-5DE5-E9D2-F0374B42038E}"/>
               </a:ext>
             </a:extLst>
           </p:cNvPr>
@@ -12199,7 +12153,7 @@
                 </a:solidFill>
                 <a:latin typeface="Segoe UI" panose="020B0502040204020203" pitchFamily="34" charset="0"/>
               </a:rPr>
-              <a:t>Q4: </a:t>
+              <a:t>Q4: 3,700,000 </a:t>
             </a:r>
             <a:r>
               <a:rPr lang="ar-SA" sz="1500" b="1">
@@ -12208,7 +12162,7 @@
                 </a:solidFill>
                 <a:latin typeface="Segoe UI" panose="020B0502040204020203" pitchFamily="34" charset="0"/>
               </a:rPr>
-              <a:t>عروض نهاية العام</a:t>
+              <a:t>ج.م</a:t>
             </a:r>
             <a:endParaRPr lang="en-US" sz="1500" b="1">
               <a:solidFill>
@@ -12224,7 +12178,7 @@
           <p:cNvPr id="18" name="TextBox 17">
             <a:extLst>
               <a:ext uri="{FF2B5EF4-FFF2-40B4-BE49-F238E27FC236}">
-                <a16:creationId xmlns:a16="http://schemas.microsoft.com/office/drawing/2014/main" id="{D19EFC27-08EE-DCA8-EA31-41998C5B34C7}"/>
+                <a16:creationId xmlns:a16="http://schemas.microsoft.com/office/drawing/2014/main" id="{DEC0D670-2441-BB50-A5A7-6EB8C9258A47}"/>
               </a:ext>
             </a:extLst>
           </p:cNvPr>
@@ -12234,7 +12188,7 @@
         <p:spPr>
           <a:xfrm>
             <a:off x="9169400" y="1993900"/>
-            <a:ext cx="2235200" cy="1348446"/>
+            <a:ext cx="2235200" cy="1136080"/>
           </a:xfrm>
           <a:prstGeom prst="rect">
             <a:avLst/>
@@ -12259,27 +12213,9 @@
                 </a:solidFill>
                 <a:latin typeface="Segoe UI" panose="020B0502040204020203" pitchFamily="34" charset="0"/>
               </a:rPr>
-              <a:t>• 9,300,000 ج.م (متوسط 3.1</a:t>
-            </a:r>
-            <a:r>
-              <a:rPr lang="en-US" sz="1200">
-                <a:solidFill>
-                  <a:srgbClr val="FFFFFF"/>
-                </a:solidFill>
-                <a:latin typeface="Segoe UI" panose="020B0502040204020203" pitchFamily="34" charset="0"/>
-              </a:rPr>
-              <a:t>M / </a:t>
-            </a:r>
-            <a:r>
-              <a:rPr lang="ar-SA" sz="1200">
-                <a:solidFill>
-                  <a:srgbClr val="FFFFFF"/>
-                </a:solidFill>
-                <a:latin typeface="Segoe UI" panose="020B0502040204020203" pitchFamily="34" charset="0"/>
-              </a:rPr>
-              <a:t>شهر).
-• تخفيضات البلاك فرايداي وعروض ديسمبر.
-• إغلاق الاتفاقيات السنوية وتصفية الحسابات والتحصيلات.</a:t>
+              <a:t>• الربع الرابع (أكتوبر - ديسمبر) | 25%.
+• عروض الجمعة البيضاء وإغلاق الحصص السنوية.
+• تصفية حسابات كبار الموزعين والتحصيل النهائي.</a:t>
             </a:r>
             <a:endParaRPr lang="en-US" sz="1200">
               <a:solidFill>
@@ -12293,7 +12229,7 @@
     </p:spTree>
     <p:extLst>
       <p:ext uri="{BB962C8B-B14F-4D97-AF65-F5344CB8AC3E}">
-        <p14:creationId xmlns:p14="http://schemas.microsoft.com/office/powerpoint/2010/main" val="1753512280"/>
+        <p14:creationId xmlns:p14="http://schemas.microsoft.com/office/powerpoint/2010/main" val="1243364362"/>
       </p:ext>
     </p:extLst>
   </p:cSld>
@@ -12325,7 +12261,7 @@
           <p:cNvPr id="2" name="Rectangle 1">
             <a:extLst>
               <a:ext uri="{FF2B5EF4-FFF2-40B4-BE49-F238E27FC236}">
-                <a16:creationId xmlns:a16="http://schemas.microsoft.com/office/drawing/2014/main" id="{FAE6A7DD-3A3C-CA26-7727-8A8CE5FA2AFD}"/>
+                <a16:creationId xmlns:a16="http://schemas.microsoft.com/office/drawing/2014/main" id="{701B99D4-9334-1402-21E4-0350C077FF70}"/>
               </a:ext>
             </a:extLst>
           </p:cNvPr>
@@ -12393,7 +12329,7 @@
           <p:cNvPr id="3" name="Rectangle 2">
             <a:extLst>
               <a:ext uri="{FF2B5EF4-FFF2-40B4-BE49-F238E27FC236}">
-                <a16:creationId xmlns:a16="http://schemas.microsoft.com/office/drawing/2014/main" id="{D4F6DEF0-25D1-C775-5B50-7BE0AE12F407}"/>
+                <a16:creationId xmlns:a16="http://schemas.microsoft.com/office/drawing/2014/main" id="{57ABDF40-4B59-EAD3-1B5E-C439CA13E3B7}"/>
               </a:ext>
             </a:extLst>
           </p:cNvPr>
@@ -12461,7 +12397,7 @@
           <p:cNvPr id="4" name="TextBox 3">
             <a:extLst>
               <a:ext uri="{FF2B5EF4-FFF2-40B4-BE49-F238E27FC236}">
-                <a16:creationId xmlns:a16="http://schemas.microsoft.com/office/drawing/2014/main" id="{0A35FE54-3AED-B4E7-CCB7-C9AAAC86E070}"/>
+                <a16:creationId xmlns:a16="http://schemas.microsoft.com/office/drawing/2014/main" id="{A69DEAE0-325B-3554-33A1-1EFAA6B598C6}"/>
               </a:ext>
             </a:extLst>
           </p:cNvPr>
@@ -12519,7 +12455,7 @@
                 </a:solidFill>
                 <a:latin typeface="Segoe UI" panose="020B0502040204020203" pitchFamily="34" charset="0"/>
               </a:rPr>
-              <a:t>Master Commercial Strategy 2027</a:t>
+              <a:t>Master Commercial Strategy 2027 (Quarterly Model)</a:t>
             </a:r>
           </a:p>
         </p:txBody>
@@ -12529,7 +12465,7 @@
           <p:cNvPr id="5" name="TextBox 4">
             <a:extLst>
               <a:ext uri="{FF2B5EF4-FFF2-40B4-BE49-F238E27FC236}">
-                <a16:creationId xmlns:a16="http://schemas.microsoft.com/office/drawing/2014/main" id="{48EA24ED-0A70-1625-3196-A55F0ED2E065}"/>
+                <a16:creationId xmlns:a16="http://schemas.microsoft.com/office/drawing/2014/main" id="{9DF2E116-E49F-6B52-1309-7A81BEFAAD8C}"/>
               </a:ext>
             </a:extLst>
           </p:cNvPr>
@@ -12576,7 +12512,7 @@
           <p:cNvPr id="6" name="TextBox 5">
             <a:extLst>
               <a:ext uri="{FF2B5EF4-FFF2-40B4-BE49-F238E27FC236}">
-                <a16:creationId xmlns:a16="http://schemas.microsoft.com/office/drawing/2014/main" id="{1FB884B7-51B1-2251-46F1-2047EBFBDBD5}"/>
+                <a16:creationId xmlns:a16="http://schemas.microsoft.com/office/drawing/2014/main" id="{E5B6B03D-E42C-A570-DD9D-B297588CC57B}"/>
               </a:ext>
             </a:extLst>
           </p:cNvPr>
@@ -12616,7 +12552,7 @@
           <p:cNvPr id="7" name="Rectangle: Rounded Corners 6">
             <a:extLst>
               <a:ext uri="{FF2B5EF4-FFF2-40B4-BE49-F238E27FC236}">
-                <a16:creationId xmlns:a16="http://schemas.microsoft.com/office/drawing/2014/main" id="{5E5F611A-3755-5063-E266-0DC3C698CA61}"/>
+                <a16:creationId xmlns:a16="http://schemas.microsoft.com/office/drawing/2014/main" id="{A3B5569B-28EE-E489-5796-0094F3744ADB}"/>
               </a:ext>
             </a:extLst>
           </p:cNvPr>
@@ -12670,7 +12606,7 @@
           <p:cNvPr id="8" name="TextBox 7">
             <a:extLst>
               <a:ext uri="{FF2B5EF4-FFF2-40B4-BE49-F238E27FC236}">
-                <a16:creationId xmlns:a16="http://schemas.microsoft.com/office/drawing/2014/main" id="{27A9045A-E69E-FC1F-7A57-AB34FFB5E4B1}"/>
+                <a16:creationId xmlns:a16="http://schemas.microsoft.com/office/drawing/2014/main" id="{602333D2-F905-DDE2-5D14-6F5B9F3DD5C2}"/>
               </a:ext>
             </a:extLst>
           </p:cNvPr>
@@ -12717,7 +12653,7 @@
           <p:cNvPr id="9" name="TextBox 8">
             <a:extLst>
               <a:ext uri="{FF2B5EF4-FFF2-40B4-BE49-F238E27FC236}">
-                <a16:creationId xmlns:a16="http://schemas.microsoft.com/office/drawing/2014/main" id="{30FF2A1C-8AC3-555D-3C81-C0B11A34BEB5}"/>
+                <a16:creationId xmlns:a16="http://schemas.microsoft.com/office/drawing/2014/main" id="{1DEF5695-4767-E02E-A2FB-5BFABAF0294A}"/>
               </a:ext>
             </a:extLst>
           </p:cNvPr>
@@ -12844,7 +12780,7 @@
           <p:cNvPr id="10" name="Rectangle: Rounded Corners 9">
             <a:extLst>
               <a:ext uri="{FF2B5EF4-FFF2-40B4-BE49-F238E27FC236}">
-                <a16:creationId xmlns:a16="http://schemas.microsoft.com/office/drawing/2014/main" id="{38471160-663D-ED1F-AB5B-BAAC343BF586}"/>
+                <a16:creationId xmlns:a16="http://schemas.microsoft.com/office/drawing/2014/main" id="{D28040E0-5E72-F468-D0EE-54B101E5DAE0}"/>
               </a:ext>
             </a:extLst>
           </p:cNvPr>
@@ -12898,7 +12834,7 @@
           <p:cNvPr id="11" name="TextBox 10">
             <a:extLst>
               <a:ext uri="{FF2B5EF4-FFF2-40B4-BE49-F238E27FC236}">
-                <a16:creationId xmlns:a16="http://schemas.microsoft.com/office/drawing/2014/main" id="{0A89FBEA-539B-81E0-AA5A-8C8CE52FC6FB}"/>
+                <a16:creationId xmlns:a16="http://schemas.microsoft.com/office/drawing/2014/main" id="{A74907BB-8B2F-558F-12A5-C37F17C82236}"/>
               </a:ext>
             </a:extLst>
           </p:cNvPr>
@@ -12945,7 +12881,7 @@
           <p:cNvPr id="12" name="TextBox 11">
             <a:extLst>
               <a:ext uri="{FF2B5EF4-FFF2-40B4-BE49-F238E27FC236}">
-                <a16:creationId xmlns:a16="http://schemas.microsoft.com/office/drawing/2014/main" id="{CC281E21-43CC-A491-B7C2-B9168DEAF5B0}"/>
+                <a16:creationId xmlns:a16="http://schemas.microsoft.com/office/drawing/2014/main" id="{03215173-D0DD-B659-3D1F-536F25D8A497}"/>
               </a:ext>
             </a:extLst>
           </p:cNvPr>
@@ -13034,7 +12970,7 @@
     </p:spTree>
     <p:extLst>
       <p:ext uri="{BB962C8B-B14F-4D97-AF65-F5344CB8AC3E}">
-        <p14:creationId xmlns:p14="http://schemas.microsoft.com/office/powerpoint/2010/main" val="1905162716"/>
+        <p14:creationId xmlns:p14="http://schemas.microsoft.com/office/powerpoint/2010/main" val="3213094663"/>
       </p:ext>
     </p:extLst>
   </p:cSld>
@@ -13066,7 +13002,7 @@
           <p:cNvPr id="2" name="Rectangle 1">
             <a:extLst>
               <a:ext uri="{FF2B5EF4-FFF2-40B4-BE49-F238E27FC236}">
-                <a16:creationId xmlns:a16="http://schemas.microsoft.com/office/drawing/2014/main" id="{70731A61-278C-DEFE-6918-DD3CB56453F4}"/>
+                <a16:creationId xmlns:a16="http://schemas.microsoft.com/office/drawing/2014/main" id="{6BCF5073-AB41-C82B-0193-73F2258BB4C1}"/>
               </a:ext>
             </a:extLst>
           </p:cNvPr>
@@ -13134,7 +13070,7 @@
           <p:cNvPr id="3" name="Rectangle 2">
             <a:extLst>
               <a:ext uri="{FF2B5EF4-FFF2-40B4-BE49-F238E27FC236}">
-                <a16:creationId xmlns:a16="http://schemas.microsoft.com/office/drawing/2014/main" id="{0C256333-2AAF-16D4-0FC6-EB91DC1C0CCF}"/>
+                <a16:creationId xmlns:a16="http://schemas.microsoft.com/office/drawing/2014/main" id="{AC371319-1A42-8F75-BC49-30E0498FBB10}"/>
               </a:ext>
             </a:extLst>
           </p:cNvPr>
@@ -13202,7 +13138,7 @@
           <p:cNvPr id="4" name="TextBox 3">
             <a:extLst>
               <a:ext uri="{FF2B5EF4-FFF2-40B4-BE49-F238E27FC236}">
-                <a16:creationId xmlns:a16="http://schemas.microsoft.com/office/drawing/2014/main" id="{82CE01A4-CAC8-F935-C760-30DF9E4BD73F}"/>
+                <a16:creationId xmlns:a16="http://schemas.microsoft.com/office/drawing/2014/main" id="{B865D4E6-B833-D362-2356-282C34CAE77D}"/>
               </a:ext>
             </a:extLst>
           </p:cNvPr>
@@ -13260,7 +13196,7 @@
                 </a:solidFill>
                 <a:latin typeface="Segoe UI" panose="020B0502040204020203" pitchFamily="34" charset="0"/>
               </a:rPr>
-              <a:t>Master Commercial Strategy 2027</a:t>
+              <a:t>Master Commercial Strategy 2027 (Quarterly Model)</a:t>
             </a:r>
           </a:p>
         </p:txBody>
@@ -13270,7 +13206,7 @@
           <p:cNvPr id="5" name="TextBox 4">
             <a:extLst>
               <a:ext uri="{FF2B5EF4-FFF2-40B4-BE49-F238E27FC236}">
-                <a16:creationId xmlns:a16="http://schemas.microsoft.com/office/drawing/2014/main" id="{E4746ED7-4127-039F-26DB-1BA34586BEC4}"/>
+                <a16:creationId xmlns:a16="http://schemas.microsoft.com/office/drawing/2014/main" id="{2158A842-1459-4457-B00A-5C9C346A2872}"/>
               </a:ext>
             </a:extLst>
           </p:cNvPr>
@@ -13320,7 +13256,7 @@
           <p:cNvPr id="6" name="TextBox 5">
             <a:extLst>
               <a:ext uri="{FF2B5EF4-FFF2-40B4-BE49-F238E27FC236}">
-                <a16:creationId xmlns:a16="http://schemas.microsoft.com/office/drawing/2014/main" id="{C75AB2A4-1287-A90E-B318-AFF1D0DD1FDD}"/>
+                <a16:creationId xmlns:a16="http://schemas.microsoft.com/office/drawing/2014/main" id="{4295AFA5-817C-D44D-54F9-8C5075A08186}"/>
               </a:ext>
             </a:extLst>
           </p:cNvPr>
@@ -13360,7 +13296,7 @@
           <p:cNvPr id="7" name="Rectangle: Rounded Corners 6">
             <a:extLst>
               <a:ext uri="{FF2B5EF4-FFF2-40B4-BE49-F238E27FC236}">
-                <a16:creationId xmlns:a16="http://schemas.microsoft.com/office/drawing/2014/main" id="{A876CC31-9D21-7CBC-C677-E388878D2A21}"/>
+                <a16:creationId xmlns:a16="http://schemas.microsoft.com/office/drawing/2014/main" id="{EB909DA2-ACF7-6AC1-E4F1-80A1EDDB3B4E}"/>
               </a:ext>
             </a:extLst>
           </p:cNvPr>
@@ -13414,7 +13350,7 @@
           <p:cNvPr id="8" name="TextBox 7">
             <a:extLst>
               <a:ext uri="{FF2B5EF4-FFF2-40B4-BE49-F238E27FC236}">
-                <a16:creationId xmlns:a16="http://schemas.microsoft.com/office/drawing/2014/main" id="{F35C4C92-FFD4-D4F7-ED44-03A42E180191}"/>
+                <a16:creationId xmlns:a16="http://schemas.microsoft.com/office/drawing/2014/main" id="{C6149C82-6725-CEB0-5964-6482553B79B7}"/>
               </a:ext>
             </a:extLst>
           </p:cNvPr>
@@ -13461,7 +13397,7 @@
           <p:cNvPr id="9" name="TextBox 8">
             <a:extLst>
               <a:ext uri="{FF2B5EF4-FFF2-40B4-BE49-F238E27FC236}">
-                <a16:creationId xmlns:a16="http://schemas.microsoft.com/office/drawing/2014/main" id="{3383A05B-12B4-E9B9-217A-13B24D284630}"/>
+                <a16:creationId xmlns:a16="http://schemas.microsoft.com/office/drawing/2014/main" id="{5CB13050-6BC7-608D-DF59-ABF669D8381B}"/>
               </a:ext>
             </a:extLst>
           </p:cNvPr>
@@ -13514,7 +13450,7 @@
           <p:cNvPr id="10" name="Rectangle: Rounded Corners 9">
             <a:extLst>
               <a:ext uri="{FF2B5EF4-FFF2-40B4-BE49-F238E27FC236}">
-                <a16:creationId xmlns:a16="http://schemas.microsoft.com/office/drawing/2014/main" id="{22319DE5-1E71-237F-BCCA-CA2675C574AA}"/>
+                <a16:creationId xmlns:a16="http://schemas.microsoft.com/office/drawing/2014/main" id="{80DC8494-7C4D-F4D3-B72C-4C05AC1C5F2D}"/>
               </a:ext>
             </a:extLst>
           </p:cNvPr>
@@ -13568,7 +13504,7 @@
           <p:cNvPr id="11" name="TextBox 10">
             <a:extLst>
               <a:ext uri="{FF2B5EF4-FFF2-40B4-BE49-F238E27FC236}">
-                <a16:creationId xmlns:a16="http://schemas.microsoft.com/office/drawing/2014/main" id="{48CE5F8C-17A9-9FC1-C32A-6D601A66AE5B}"/>
+                <a16:creationId xmlns:a16="http://schemas.microsoft.com/office/drawing/2014/main" id="{F8322B73-DCB4-2AFB-9523-61CC73078E30}"/>
               </a:ext>
             </a:extLst>
           </p:cNvPr>
@@ -13615,7 +13551,7 @@
           <p:cNvPr id="12" name="TextBox 11">
             <a:extLst>
               <a:ext uri="{FF2B5EF4-FFF2-40B4-BE49-F238E27FC236}">
-                <a16:creationId xmlns:a16="http://schemas.microsoft.com/office/drawing/2014/main" id="{D64E54A6-9977-DFA7-9686-76AE10FA8BEA}"/>
+                <a16:creationId xmlns:a16="http://schemas.microsoft.com/office/drawing/2014/main" id="{D46DE1DA-12BE-4942-78A3-4FC801F7AA66}"/>
               </a:ext>
             </a:extLst>
           </p:cNvPr>
@@ -13668,7 +13604,7 @@
           <p:cNvPr id="13" name="Rectangle: Rounded Corners 12">
             <a:extLst>
               <a:ext uri="{FF2B5EF4-FFF2-40B4-BE49-F238E27FC236}">
-                <a16:creationId xmlns:a16="http://schemas.microsoft.com/office/drawing/2014/main" id="{CB969BBE-A263-6132-459C-84C21BC4E210}"/>
+                <a16:creationId xmlns:a16="http://schemas.microsoft.com/office/drawing/2014/main" id="{DAEBCF4B-702F-98DC-5402-1F0B063394D9}"/>
               </a:ext>
             </a:extLst>
           </p:cNvPr>
@@ -13722,7 +13658,7 @@
           <p:cNvPr id="14" name="TextBox 13">
             <a:extLst>
               <a:ext uri="{FF2B5EF4-FFF2-40B4-BE49-F238E27FC236}">
-                <a16:creationId xmlns:a16="http://schemas.microsoft.com/office/drawing/2014/main" id="{D30B2BEE-3958-B28A-ABE2-8C7556BF238B}"/>
+                <a16:creationId xmlns:a16="http://schemas.microsoft.com/office/drawing/2014/main" id="{8BAD31C0-8534-F9A9-C2FE-0266125AA2D8}"/>
               </a:ext>
             </a:extLst>
           </p:cNvPr>
@@ -13772,7 +13708,7 @@
           <p:cNvPr id="15" name="TextBox 14">
             <a:extLst>
               <a:ext uri="{FF2B5EF4-FFF2-40B4-BE49-F238E27FC236}">
-                <a16:creationId xmlns:a16="http://schemas.microsoft.com/office/drawing/2014/main" id="{C092F5AF-8382-2AFA-3593-036415B80BAE}"/>
+                <a16:creationId xmlns:a16="http://schemas.microsoft.com/office/drawing/2014/main" id="{7918388D-CA2C-DC14-51A5-F1E5772F0797}"/>
               </a:ext>
             </a:extLst>
           </p:cNvPr>
@@ -13823,7 +13759,7 @@
     </p:spTree>
     <p:extLst>
       <p:ext uri="{BB962C8B-B14F-4D97-AF65-F5344CB8AC3E}">
-        <p14:creationId xmlns:p14="http://schemas.microsoft.com/office/powerpoint/2010/main" val="2363002382"/>
+        <p14:creationId xmlns:p14="http://schemas.microsoft.com/office/powerpoint/2010/main" val="3286326926"/>
       </p:ext>
     </p:extLst>
   </p:cSld>
@@ -13855,7 +13791,7 @@
           <p:cNvPr id="2" name="Rectangle 1">
             <a:extLst>
               <a:ext uri="{FF2B5EF4-FFF2-40B4-BE49-F238E27FC236}">
-                <a16:creationId xmlns:a16="http://schemas.microsoft.com/office/drawing/2014/main" id="{C48DE051-923B-A101-FF62-D66062F20C03}"/>
+                <a16:creationId xmlns:a16="http://schemas.microsoft.com/office/drawing/2014/main" id="{D0AB2087-5B77-115A-2E9D-1B667C3EF0D4}"/>
               </a:ext>
             </a:extLst>
           </p:cNvPr>
@@ -13923,7 +13859,7 @@
           <p:cNvPr id="3" name="Rectangle 2">
             <a:extLst>
               <a:ext uri="{FF2B5EF4-FFF2-40B4-BE49-F238E27FC236}">
-                <a16:creationId xmlns:a16="http://schemas.microsoft.com/office/drawing/2014/main" id="{590F94E2-53D9-0161-1D43-9FB49412DE71}"/>
+                <a16:creationId xmlns:a16="http://schemas.microsoft.com/office/drawing/2014/main" id="{E467B553-2674-FB1F-132C-80AAEF95EAC5}"/>
               </a:ext>
             </a:extLst>
           </p:cNvPr>
@@ -13991,7 +13927,7 @@
           <p:cNvPr id="4" name="TextBox 3">
             <a:extLst>
               <a:ext uri="{FF2B5EF4-FFF2-40B4-BE49-F238E27FC236}">
-                <a16:creationId xmlns:a16="http://schemas.microsoft.com/office/drawing/2014/main" id="{79105F8E-EFE2-B382-AEE2-E992CF49B526}"/>
+                <a16:creationId xmlns:a16="http://schemas.microsoft.com/office/drawing/2014/main" id="{441070D7-4F49-FA51-32FC-70CD6DABFC31}"/>
               </a:ext>
             </a:extLst>
           </p:cNvPr>
@@ -14049,7 +13985,7 @@
                 </a:solidFill>
                 <a:latin typeface="Segoe UI" panose="020B0502040204020203" pitchFamily="34" charset="0"/>
               </a:rPr>
-              <a:t>Master Commercial Strategy 2027</a:t>
+              <a:t>Master Commercial Strategy 2027 (Quarterly Model)</a:t>
             </a:r>
           </a:p>
         </p:txBody>
@@ -14059,7 +13995,7 @@
           <p:cNvPr id="5" name="TextBox 4">
             <a:extLst>
               <a:ext uri="{FF2B5EF4-FFF2-40B4-BE49-F238E27FC236}">
-                <a16:creationId xmlns:a16="http://schemas.microsoft.com/office/drawing/2014/main" id="{61937E48-2A3E-5DB9-CDCB-DFC9588FB877}"/>
+                <a16:creationId xmlns:a16="http://schemas.microsoft.com/office/drawing/2014/main" id="{07785C3F-5779-F90D-DDEC-ED62BE240822}"/>
               </a:ext>
             </a:extLst>
           </p:cNvPr>
@@ -14106,7 +14042,7 @@
           <p:cNvPr id="6" name="TextBox 5">
             <a:extLst>
               <a:ext uri="{FF2B5EF4-FFF2-40B4-BE49-F238E27FC236}">
-                <a16:creationId xmlns:a16="http://schemas.microsoft.com/office/drawing/2014/main" id="{49AB129B-E10B-BB19-AF93-E3F85964E1A8}"/>
+                <a16:creationId xmlns:a16="http://schemas.microsoft.com/office/drawing/2014/main" id="{3B63E759-F812-7FC3-678D-EFA660B9AB30}"/>
               </a:ext>
             </a:extLst>
           </p:cNvPr>
@@ -14146,7 +14082,7 @@
           <p:cNvPr id="7" name="Rectangle: Rounded Corners 6">
             <a:extLst>
               <a:ext uri="{FF2B5EF4-FFF2-40B4-BE49-F238E27FC236}">
-                <a16:creationId xmlns:a16="http://schemas.microsoft.com/office/drawing/2014/main" id="{A918F413-142B-D363-3E87-CD904FA582B6}"/>
+                <a16:creationId xmlns:a16="http://schemas.microsoft.com/office/drawing/2014/main" id="{D5A0101A-D4B5-EC90-C3B5-C52E4E42ED97}"/>
               </a:ext>
             </a:extLst>
           </p:cNvPr>
@@ -14200,7 +14136,7 @@
           <p:cNvPr id="8" name="TextBox 7">
             <a:extLst>
               <a:ext uri="{FF2B5EF4-FFF2-40B4-BE49-F238E27FC236}">
-                <a16:creationId xmlns:a16="http://schemas.microsoft.com/office/drawing/2014/main" id="{F8CC62FA-96AA-5FE5-8B78-681159CDA6B1}"/>
+                <a16:creationId xmlns:a16="http://schemas.microsoft.com/office/drawing/2014/main" id="{AF46075B-8544-4145-C51A-4C30AB3F0F0C}"/>
               </a:ext>
             </a:extLst>
           </p:cNvPr>
@@ -14250,7 +14186,7 @@
           <p:cNvPr id="9" name="TextBox 8">
             <a:extLst>
               <a:ext uri="{FF2B5EF4-FFF2-40B4-BE49-F238E27FC236}">
-                <a16:creationId xmlns:a16="http://schemas.microsoft.com/office/drawing/2014/main" id="{7A1ABA4B-EC8D-A3D1-CB0D-8D3B0F7B9668}"/>
+                <a16:creationId xmlns:a16="http://schemas.microsoft.com/office/drawing/2014/main" id="{E73B6B99-6098-12D2-6353-A96603DE33E4}"/>
               </a:ext>
             </a:extLst>
           </p:cNvPr>
@@ -14339,7 +14275,7 @@
           <p:cNvPr id="10" name="Rectangle: Rounded Corners 9">
             <a:extLst>
               <a:ext uri="{FF2B5EF4-FFF2-40B4-BE49-F238E27FC236}">
-                <a16:creationId xmlns:a16="http://schemas.microsoft.com/office/drawing/2014/main" id="{98DDD303-0118-F688-3B27-7A24A38F740B}"/>
+                <a16:creationId xmlns:a16="http://schemas.microsoft.com/office/drawing/2014/main" id="{5D3CEA8B-4DE7-ADB3-9CE9-3F7D29E47FE2}"/>
               </a:ext>
             </a:extLst>
           </p:cNvPr>
@@ -14393,7 +14329,7 @@
           <p:cNvPr id="11" name="TextBox 10">
             <a:extLst>
               <a:ext uri="{FF2B5EF4-FFF2-40B4-BE49-F238E27FC236}">
-                <a16:creationId xmlns:a16="http://schemas.microsoft.com/office/drawing/2014/main" id="{8F242319-80A5-193E-AF8B-17DD93A17C12}"/>
+                <a16:creationId xmlns:a16="http://schemas.microsoft.com/office/drawing/2014/main" id="{0E7AD3BC-F3EB-599E-9372-324A3DD039BD}"/>
               </a:ext>
             </a:extLst>
           </p:cNvPr>
@@ -14440,7 +14376,7 @@
           <p:cNvPr id="12" name="TextBox 11">
             <a:extLst>
               <a:ext uri="{FF2B5EF4-FFF2-40B4-BE49-F238E27FC236}">
-                <a16:creationId xmlns:a16="http://schemas.microsoft.com/office/drawing/2014/main" id="{0BFF9E34-2909-17BD-C45B-9006131B383E}"/>
+                <a16:creationId xmlns:a16="http://schemas.microsoft.com/office/drawing/2014/main" id="{EA0F7E8E-E777-7AC4-98BD-FD25795D827E}"/>
               </a:ext>
             </a:extLst>
           </p:cNvPr>
@@ -14547,7 +14483,7 @@
           <p:cNvPr id="13" name="Rectangle: Rounded Corners 12">
             <a:extLst>
               <a:ext uri="{FF2B5EF4-FFF2-40B4-BE49-F238E27FC236}">
-                <a16:creationId xmlns:a16="http://schemas.microsoft.com/office/drawing/2014/main" id="{13B75BE3-96C2-0C30-38C3-5B1967E76C66}"/>
+                <a16:creationId xmlns:a16="http://schemas.microsoft.com/office/drawing/2014/main" id="{472173DA-27EB-CC4F-0688-DD64774C7345}"/>
               </a:ext>
             </a:extLst>
           </p:cNvPr>
@@ -14601,7 +14537,7 @@
           <p:cNvPr id="14" name="TextBox 13">
             <a:extLst>
               <a:ext uri="{FF2B5EF4-FFF2-40B4-BE49-F238E27FC236}">
-                <a16:creationId xmlns:a16="http://schemas.microsoft.com/office/drawing/2014/main" id="{EC559001-E026-AB26-313F-6C2A93084609}"/>
+                <a16:creationId xmlns:a16="http://schemas.microsoft.com/office/drawing/2014/main" id="{F69A21A8-3882-A083-B282-96E278832061}"/>
               </a:ext>
             </a:extLst>
           </p:cNvPr>
@@ -14648,7 +14584,7 @@
           <p:cNvPr id="15" name="TextBox 14">
             <a:extLst>
               <a:ext uri="{FF2B5EF4-FFF2-40B4-BE49-F238E27FC236}">
-                <a16:creationId xmlns:a16="http://schemas.microsoft.com/office/drawing/2014/main" id="{1EBF64DE-2549-04FB-FE33-E301FB9D41E9}"/>
+                <a16:creationId xmlns:a16="http://schemas.microsoft.com/office/drawing/2014/main" id="{C29507BA-C389-3A10-B5AB-F481D212AB90}"/>
               </a:ext>
             </a:extLst>
           </p:cNvPr>
@@ -14717,7 +14653,7 @@
     </p:spTree>
     <p:extLst>
       <p:ext uri="{BB962C8B-B14F-4D97-AF65-F5344CB8AC3E}">
-        <p14:creationId xmlns:p14="http://schemas.microsoft.com/office/powerpoint/2010/main" val="1204520773"/>
+        <p14:creationId xmlns:p14="http://schemas.microsoft.com/office/powerpoint/2010/main" val="1234978490"/>
       </p:ext>
     </p:extLst>
   </p:cSld>
